--- a/Tema 1/paper/Tema1.pptx
+++ b/Tema 1/paper/Tema1.pptx
@@ -1890,13 +1890,13 @@
             <a:gsLst>
               <a:gs pos="0">
                 <a:schemeClr val="accent1">
-                  <a:lumMod val="75000"/>
+                  <a:lumMod val="50000"/>
                 </a:schemeClr>
               </a:gs>
               <a:gs pos="88000">
                 <a:schemeClr val="accent1">
-                  <a:lumMod val="40000"/>
-                  <a:lumOff val="60000"/>
+                  <a:lumMod val="60000"/>
+                  <a:lumOff val="40000"/>
                 </a:schemeClr>
               </a:gs>
             </a:gsLst>
@@ -9670,7 +9670,7 @@
                 <a:cs typeface="Arial"/>
                 <a:sym typeface="Arial"/>
               </a:rPr>
-              <a:t>Electrostatic ballooning of spiders</a:t>
+              <a:t>Electrostatic Ballooning of Spiders</a:t>
             </a:r>
           </a:p>
         </p:txBody>
@@ -9986,7 +9986,7 @@
         <p:spPr>
           <a:xfrm>
             <a:off x="1174981" y="1288360"/>
-            <a:ext cx="5046830" cy="2769989"/>
+            <a:ext cx="5046830" cy="4739759"/>
           </a:xfrm>
           <a:prstGeom prst="rect">
             <a:avLst/>
@@ -10013,7 +10013,7 @@
                   </a:schemeClr>
                 </a:solidFill>
               </a:rPr>
-              <a:t>A</a:t>
+              <a:t>A   PHYSICAL MODEL</a:t>
             </a:r>
           </a:p>
           <a:p>
@@ -10064,7 +10064,7 @@
                   </a:schemeClr>
                 </a:solidFill>
               </a:rPr>
-              <a:t>B</a:t>
+              <a:t>B   NEAR SURFACE TURBULENCE</a:t>
             </a:r>
           </a:p>
           <a:p>
@@ -10115,7 +10115,7 @@
                   </a:schemeClr>
                 </a:solidFill>
               </a:rPr>
-              <a:t>C</a:t>
+              <a:t>C   ANALITICAL SOLUTION</a:t>
             </a:r>
           </a:p>
           <a:p>
@@ -10135,6 +10135,113 @@
               </a:rPr>
               <a:t>…</a:t>
             </a:r>
+          </a:p>
+          <a:p>
+            <a:pPr>
+              <a:buClr>
+                <a:srgbClr val="000000"/>
+              </a:buClr>
+              <a:defRPr/>
+            </a:pPr>
+            <a:endParaRPr lang="en-US" sz="2000" kern="0" dirty="0">
+              <a:solidFill>
+                <a:srgbClr val="000000"/>
+              </a:solidFill>
+              <a:latin typeface="Arial"/>
+              <a:cs typeface="Arial"/>
+            </a:endParaRPr>
+          </a:p>
+          <a:p>
+            <a:pPr>
+              <a:buClr>
+                <a:srgbClr val="000000"/>
+              </a:buClr>
+              <a:defRPr/>
+            </a:pPr>
+            <a:r>
+              <a:rPr lang="en-US" sz="2000" b="1" dirty="0">
+                <a:solidFill>
+                  <a:schemeClr val="accent5">
+                    <a:lumMod val="50000"/>
+                  </a:schemeClr>
+                </a:solidFill>
+              </a:rPr>
+              <a:t>D   NUMERICAL METHOD</a:t>
+            </a:r>
+          </a:p>
+          <a:p>
+            <a:pPr>
+              <a:buClr>
+                <a:srgbClr val="000000"/>
+              </a:buClr>
+              <a:defRPr/>
+            </a:pPr>
+            <a:r>
+              <a:rPr lang="en-US" sz="2400" kern="0" dirty="0">
+                <a:solidFill>
+                  <a:srgbClr val="000000"/>
+                </a:solidFill>
+                <a:cs typeface="Arial"/>
+              </a:rPr>
+              <a:t>…</a:t>
+            </a:r>
+          </a:p>
+          <a:p>
+            <a:pPr>
+              <a:buClr>
+                <a:srgbClr val="000000"/>
+              </a:buClr>
+              <a:defRPr/>
+            </a:pPr>
+            <a:endParaRPr lang="en-US" sz="2000" kern="0" dirty="0">
+              <a:solidFill>
+                <a:srgbClr val="000000"/>
+              </a:solidFill>
+              <a:latin typeface="Arial"/>
+              <a:cs typeface="Arial"/>
+            </a:endParaRPr>
+          </a:p>
+          <a:p>
+            <a:pPr>
+              <a:buClr>
+                <a:srgbClr val="000000"/>
+              </a:buClr>
+              <a:defRPr/>
+            </a:pPr>
+            <a:r>
+              <a:rPr lang="en-US" sz="2000" b="1" dirty="0">
+                <a:solidFill>
+                  <a:schemeClr val="accent5">
+                    <a:lumMod val="50000"/>
+                  </a:schemeClr>
+                </a:solidFill>
+              </a:rPr>
+              <a:t>E   RESULTS</a:t>
+            </a:r>
+          </a:p>
+          <a:p>
+            <a:pPr>
+              <a:buClr>
+                <a:srgbClr val="000000"/>
+              </a:buClr>
+              <a:defRPr/>
+            </a:pPr>
+            <a:r>
+              <a:rPr lang="en-US" sz="2400" kern="0" dirty="0">
+                <a:solidFill>
+                  <a:srgbClr val="000000"/>
+                </a:solidFill>
+                <a:cs typeface="Arial"/>
+              </a:rPr>
+              <a:t>…</a:t>
+            </a:r>
+            <a:endParaRPr lang="en-US" sz="2000" kern="0" dirty="0">
+              <a:solidFill>
+                <a:srgbClr val="000000"/>
+              </a:solidFill>
+              <a:latin typeface="Arial"/>
+              <a:cs typeface="Arial"/>
+            </a:endParaRPr>
           </a:p>
           <a:p>
             <a:pPr>
@@ -10242,7 +10349,7 @@
                   <a:schemeClr val="bg1"/>
                 </a:solidFill>
               </a:rPr>
-              <a:t>Graph Neural Networks</a:t>
+              <a:t>Ballooning of Spiders</a:t>
             </a:r>
             <a:endParaRPr lang="ro-RO" dirty="0">
               <a:solidFill>
@@ -10266,8 +10373,8 @@
         </p:nvSpPr>
         <p:spPr>
           <a:xfrm>
-            <a:off x="4295377" y="3200400"/>
-            <a:ext cx="3173689" cy="646331"/>
+            <a:off x="4144651" y="3180303"/>
+            <a:ext cx="3612676" cy="646331"/>
           </a:xfrm>
           <a:prstGeom prst="rect">
             <a:avLst/>
@@ -10282,11 +10389,57 @@
           <a:p>
             <a:r>
               <a:rPr lang="en-US" sz="3600" b="1" dirty="0"/>
-              <a:t>Why Graphs?</a:t>
+              <a:t>Physical Model</a:t>
             </a:r>
           </a:p>
         </p:txBody>
       </p:sp>
+      <p:pic>
+        <p:nvPicPr>
+          <p:cNvPr id="2" name="Picture 1">
+            <a:extLst>
+              <a:ext uri="{FF2B5EF4-FFF2-40B4-BE49-F238E27FC236}">
+                <a16:creationId xmlns:a16="http://schemas.microsoft.com/office/drawing/2014/main" id="{CEE103B0-0EF3-4C4D-553F-486C8D50679E}"/>
+              </a:ext>
+            </a:extLst>
+          </p:cNvPr>
+          <p:cNvPicPr>
+            <a:picLocks noChangeAspect="1"/>
+          </p:cNvPicPr>
+          <p:nvPr/>
+        </p:nvPicPr>
+        <p:blipFill>
+          <a:blip r:embed="rId2">
+            <a:clrChange>
+              <a:clrFrom>
+                <a:srgbClr val="000000"/>
+              </a:clrFrom>
+              <a:clrTo>
+                <a:srgbClr val="000000">
+                  <a:alpha val="0"/>
+                </a:srgbClr>
+              </a:clrTo>
+            </a:clrChange>
+            <a:extLst>
+              <a:ext uri="{28A0092B-C50C-407E-A947-70E740481C1C}">
+                <a14:useLocalDpi xmlns:a14="http://schemas.microsoft.com/office/drawing/2010/main" val="0"/>
+              </a:ext>
+            </a:extLst>
+          </a:blip>
+          <a:stretch>
+            <a:fillRect/>
+          </a:stretch>
+        </p:blipFill>
+        <p:spPr>
+          <a:xfrm>
+            <a:off x="10432471" y="6323329"/>
+            <a:ext cx="1492133" cy="496892"/>
+          </a:xfrm>
+          <a:prstGeom prst="rect">
+            <a:avLst/>
+          </a:prstGeom>
+        </p:spPr>
+      </p:pic>
     </p:spTree>
     <p:extLst>
       <p:ext uri="{BB962C8B-B14F-4D97-AF65-F5344CB8AC3E}">
@@ -10346,7 +10499,7 @@
                   <a:schemeClr val="bg1"/>
                 </a:solidFill>
               </a:rPr>
-              <a:t>Why Graphs?</a:t>
+              <a:t>Physical Model</a:t>
             </a:r>
             <a:endParaRPr lang="ro-RO" dirty="0">
               <a:solidFill>
@@ -10371,7 +10524,7 @@
         <p:spPr>
           <a:xfrm>
             <a:off x="889810" y="1300345"/>
-            <a:ext cx="8388174" cy="707886"/>
+            <a:ext cx="8388174" cy="400110"/>
           </a:xfrm>
           <a:prstGeom prst="rect">
             <a:avLst/>
@@ -10412,7 +10565,7 @@
                 <a:cs typeface="Arial"/>
                 <a:sym typeface="Arial"/>
               </a:rPr>
-              <a:t>Graphs are a general language for describing and analyzing entities </a:t>
+              <a:t>Some text here </a:t>
             </a:r>
             <a:r>
               <a:rPr lang="en-US" sz="2000" kern="0" dirty="0">
@@ -10425,7 +10578,7 @@
                 <a:cs typeface="Arial"/>
                 <a:sym typeface="Arial"/>
               </a:rPr>
-              <a:t>with relations / interactions.</a:t>
+              <a:t>…</a:t>
             </a:r>
             <a:r>
               <a:rPr kumimoji="0" lang="en-US" sz="2000" b="1" i="0" u="none" strike="noStrike" kern="0" cap="none" spc="0" normalizeH="0" baseline="0" noProof="0" dirty="0">
@@ -10461,347 +10614,6 @@
           </a:p>
         </p:txBody>
       </p:sp>
-      <p:pic>
-        <p:nvPicPr>
-          <p:cNvPr id="2" name="Picture 2">
-            <a:extLst>
-              <a:ext uri="{FF2B5EF4-FFF2-40B4-BE49-F238E27FC236}">
-                <a16:creationId xmlns:a16="http://schemas.microsoft.com/office/drawing/2014/main" id="{7FB90733-1E30-2070-4675-66508C611EF1}"/>
-              </a:ext>
-            </a:extLst>
-          </p:cNvPr>
-          <p:cNvPicPr>
-            <a:picLocks noChangeAspect="1" noChangeArrowheads="1"/>
-          </p:cNvPicPr>
-          <p:nvPr/>
-        </p:nvPicPr>
-        <p:blipFill>
-          <a:blip r:embed="rId2">
-            <a:extLst>
-              <a:ext uri="{28A0092B-C50C-407E-A947-70E740481C1C}">
-                <a14:useLocalDpi xmlns:a14="http://schemas.microsoft.com/office/drawing/2010/main" val="0"/>
-              </a:ext>
-            </a:extLst>
-          </a:blip>
-          <a:srcRect/>
-          <a:stretch>
-            <a:fillRect/>
-          </a:stretch>
-        </p:blipFill>
-        <p:spPr bwMode="auto">
-          <a:xfrm>
-            <a:off x="8428037" y="2167238"/>
-            <a:ext cx="3323642" cy="2861896"/>
-          </a:xfrm>
-          <a:prstGeom prst="rect">
-            <a:avLst/>
-          </a:prstGeom>
-          <a:noFill/>
-          <a:extLst>
-            <a:ext uri="{909E8E84-426E-40DD-AFC4-6F175D3DCCD1}">
-              <a14:hiddenFill xmlns:a14="http://schemas.microsoft.com/office/drawing/2010/main">
-                <a:solidFill>
-                  <a:srgbClr val="FFFFFF"/>
-                </a:solidFill>
-              </a14:hiddenFill>
-            </a:ext>
-          </a:extLst>
-        </p:spPr>
-      </p:pic>
-      <p:sp>
-        <p:nvSpPr>
-          <p:cNvPr id="9" name="TextBox 8">
-            <a:extLst>
-              <a:ext uri="{FF2B5EF4-FFF2-40B4-BE49-F238E27FC236}">
-                <a16:creationId xmlns:a16="http://schemas.microsoft.com/office/drawing/2014/main" id="{463892A1-0B3D-B324-49A8-2AED699CE2F9}"/>
-              </a:ext>
-            </a:extLst>
-          </p:cNvPr>
-          <p:cNvSpPr txBox="1"/>
-          <p:nvPr/>
-        </p:nvSpPr>
-        <p:spPr>
-          <a:xfrm>
-            <a:off x="889810" y="2510681"/>
-            <a:ext cx="6373325" cy="369332"/>
-          </a:xfrm>
-          <a:prstGeom prst="rect">
-            <a:avLst/>
-          </a:prstGeom>
-          <a:noFill/>
-        </p:spPr>
-        <p:txBody>
-          <a:bodyPr wrap="square">
-            <a:spAutoFit/>
-          </a:bodyPr>
-          <a:lstStyle/>
-          <a:p>
-            <a:pPr algn="l"/>
-            <a:r>
-              <a:rPr lang="en-US" dirty="0">
-                <a:solidFill>
-                  <a:srgbClr val="000000"/>
-                </a:solidFill>
-                <a:highlight>
-                  <a:srgbClr val="FFFFFF"/>
-                </a:highlight>
-                <a:latin typeface="Lucida Grande"/>
-              </a:rPr>
-              <a:t>G</a:t>
-            </a:r>
-            <a:r>
-              <a:rPr lang="en-US" b="0" i="0" dirty="0">
-                <a:solidFill>
-                  <a:srgbClr val="000000"/>
-                </a:solidFill>
-                <a:effectLst/>
-                <a:highlight>
-                  <a:srgbClr val="FFFFFF"/>
-                </a:highlight>
-                <a:latin typeface="Lucida Grande"/>
-              </a:rPr>
-              <a:t>raphs are the main modality of data we receive from nature.</a:t>
-            </a:r>
-            <a:endParaRPr lang="en-US" b="1" i="0" dirty="0">
-              <a:solidFill>
-                <a:srgbClr val="000000"/>
-              </a:solidFill>
-              <a:effectLst/>
-              <a:highlight>
-                <a:srgbClr val="FFFFFF"/>
-              </a:highlight>
-              <a:latin typeface="Lucida Grande"/>
-            </a:endParaRPr>
-          </a:p>
-        </p:txBody>
-      </p:sp>
-      <p:sp>
-        <p:nvSpPr>
-          <p:cNvPr id="11" name="TextBox 10">
-            <a:extLst>
-              <a:ext uri="{FF2B5EF4-FFF2-40B4-BE49-F238E27FC236}">
-                <a16:creationId xmlns:a16="http://schemas.microsoft.com/office/drawing/2014/main" id="{94FE89DB-5DCE-7391-C0B5-3319C8D10F1C}"/>
-              </a:ext>
-            </a:extLst>
-          </p:cNvPr>
-          <p:cNvSpPr txBox="1"/>
-          <p:nvPr/>
-        </p:nvSpPr>
-        <p:spPr>
-          <a:xfrm>
-            <a:off x="889810" y="3245933"/>
-            <a:ext cx="7148861" cy="1200329"/>
-          </a:xfrm>
-          <a:prstGeom prst="rect">
-            <a:avLst/>
-          </a:prstGeom>
-          <a:noFill/>
-        </p:spPr>
-        <p:txBody>
-          <a:bodyPr wrap="square">
-            <a:spAutoFit/>
-          </a:bodyPr>
-          <a:lstStyle/>
-          <a:p>
-            <a:r>
-              <a:rPr lang="en-US" i="1" u="sng" dirty="0"/>
-              <a:t>Examples</a:t>
-            </a:r>
-            <a:r>
-              <a:rPr lang="en-US" dirty="0"/>
-              <a:t>:</a:t>
-            </a:r>
-          </a:p>
-          <a:p>
-            <a:r>
-              <a:rPr lang="en-US" dirty="0"/>
-              <a:t>	</a:t>
-            </a:r>
-            <a:r>
-              <a:rPr lang="en-US" i="1" dirty="0"/>
-              <a:t>Molecule</a:t>
-            </a:r>
-            <a:r>
-              <a:rPr lang="en-US" dirty="0"/>
-              <a:t> - a graph of atoms connected by chemical bonds.</a:t>
-            </a:r>
-          </a:p>
-          <a:p>
-            <a:r>
-              <a:rPr lang="en-US" dirty="0"/>
-              <a:t>	</a:t>
-            </a:r>
-            <a:r>
-              <a:rPr lang="en-US" i="1" dirty="0"/>
-              <a:t>Brain</a:t>
-            </a:r>
-            <a:r>
-              <a:rPr lang="en-US" dirty="0"/>
-              <a:t> - a graph of neurons connected by synapses.</a:t>
-            </a:r>
-          </a:p>
-          <a:p>
-            <a:r>
-              <a:rPr lang="en-US" dirty="0"/>
-              <a:t>	</a:t>
-            </a:r>
-            <a:r>
-              <a:rPr lang="en-US" i="1" dirty="0"/>
-              <a:t>Food Web </a:t>
-            </a:r>
-            <a:r>
-              <a:rPr lang="en-US" dirty="0"/>
-              <a:t>- feeding relationships within a community.</a:t>
-            </a:r>
-            <a:endParaRPr lang="ro-RO" dirty="0"/>
-          </a:p>
-        </p:txBody>
-      </p:sp>
-      <p:grpSp>
-        <p:nvGrpSpPr>
-          <p:cNvPr id="20" name="Group 19">
-            <a:extLst>
-              <a:ext uri="{FF2B5EF4-FFF2-40B4-BE49-F238E27FC236}">
-                <a16:creationId xmlns:a16="http://schemas.microsoft.com/office/drawing/2014/main" id="{D8B405BC-40CF-6C09-96AC-776E40C9BD46}"/>
-              </a:ext>
-            </a:extLst>
-          </p:cNvPr>
-          <p:cNvGrpSpPr/>
-          <p:nvPr/>
-        </p:nvGrpSpPr>
-        <p:grpSpPr>
-          <a:xfrm>
-            <a:off x="2872494" y="5029134"/>
-            <a:ext cx="3223506" cy="1235409"/>
-            <a:chOff x="540458" y="4535183"/>
-            <a:chExt cx="3223506" cy="1235409"/>
-          </a:xfrm>
-        </p:grpSpPr>
-        <p:sp>
-          <p:nvSpPr>
-            <p:cNvPr id="15" name="Rectangle: Rounded Corners 14">
-              <a:extLst>
-                <a:ext uri="{FF2B5EF4-FFF2-40B4-BE49-F238E27FC236}">
-                  <a16:creationId xmlns:a16="http://schemas.microsoft.com/office/drawing/2014/main" id="{EA962DE9-0FA3-3F8F-A953-8C58FEED8AAD}"/>
-                </a:ext>
-              </a:extLst>
-            </p:cNvPr>
-            <p:cNvSpPr/>
-            <p:nvPr/>
-          </p:nvSpPr>
-          <p:spPr>
-            <a:xfrm>
-              <a:off x="540458" y="4535183"/>
-              <a:ext cx="3223506" cy="1235409"/>
-            </a:xfrm>
-            <a:prstGeom prst="roundRect">
-              <a:avLst/>
-            </a:prstGeom>
-          </p:spPr>
-          <p:style>
-            <a:lnRef idx="2">
-              <a:schemeClr val="accent6"/>
-            </a:lnRef>
-            <a:fillRef idx="1">
-              <a:schemeClr val="lt1"/>
-            </a:fillRef>
-            <a:effectRef idx="0">
-              <a:schemeClr val="accent6"/>
-            </a:effectRef>
-            <a:fontRef idx="minor">
-              <a:schemeClr val="dk1"/>
-            </a:fontRef>
-          </p:style>
-          <p:txBody>
-            <a:bodyPr rtlCol="0" anchor="ctr"/>
-            <a:lstStyle/>
-            <a:p>
-              <a:pPr algn="ctr"/>
-              <a:endParaRPr lang="ro-RO"/>
-            </a:p>
-          </p:txBody>
-        </p:sp>
-        <p:sp>
-          <p:nvSpPr>
-            <p:cNvPr id="16" name="TextBox 15">
-              <a:extLst>
-                <a:ext uri="{FF2B5EF4-FFF2-40B4-BE49-F238E27FC236}">
-                  <a16:creationId xmlns:a16="http://schemas.microsoft.com/office/drawing/2014/main" id="{DC1350AC-F8AA-8E20-7707-D63C719B3D31}"/>
-                </a:ext>
-              </a:extLst>
-            </p:cNvPr>
-            <p:cNvSpPr txBox="1"/>
-            <p:nvPr/>
-          </p:nvSpPr>
-          <p:spPr>
-            <a:xfrm>
-              <a:off x="1757353" y="4807624"/>
-              <a:ext cx="1918628" cy="707886"/>
-            </a:xfrm>
-            <a:prstGeom prst="rect">
-              <a:avLst/>
-            </a:prstGeom>
-            <a:noFill/>
-          </p:spPr>
-          <p:txBody>
-            <a:bodyPr wrap="square" rtlCol="0">
-              <a:spAutoFit/>
-            </a:bodyPr>
-            <a:lstStyle/>
-            <a:p>
-              <a:r>
-                <a:rPr lang="en-US" sz="2000" i="1" dirty="0">
-                  <a:solidFill>
-                    <a:schemeClr val="accent6">
-                      <a:lumMod val="75000"/>
-                    </a:schemeClr>
-                  </a:solidFill>
-                </a:rPr>
-                <a:t>Everything is Connected !</a:t>
-              </a:r>
-            </a:p>
-          </p:txBody>
-        </p:sp>
-        <p:pic>
-          <p:nvPicPr>
-            <p:cNvPr id="19" name="Graphic 18" descr="Radar Chart outline">
-              <a:extLst>
-                <a:ext uri="{FF2B5EF4-FFF2-40B4-BE49-F238E27FC236}">
-                  <a16:creationId xmlns:a16="http://schemas.microsoft.com/office/drawing/2014/main" id="{E1188CB9-883E-E61F-5738-AB907CAA769F}"/>
-                </a:ext>
-              </a:extLst>
-            </p:cNvPr>
-            <p:cNvPicPr>
-              <a:picLocks noChangeAspect="1"/>
-            </p:cNvPicPr>
-            <p:nvPr/>
-          </p:nvPicPr>
-          <p:blipFill>
-            <a:blip>
-              <a:extLst>
-                <a:ext uri="{28A0092B-C50C-407E-A947-70E740481C1C}">
-                  <a14:useLocalDpi xmlns:a14="http://schemas.microsoft.com/office/drawing/2010/main" val="0"/>
-                </a:ext>
-                <a:ext uri="{96DAC541-7B7A-43D3-8B79-37D633B846F1}">
-                  <asvg:svgBlip xmlns:asvg="http://schemas.microsoft.com/office/drawing/2016/SVG/main" r:embed="rId3"/>
-                </a:ext>
-              </a:extLst>
-            </a:blip>
-            <a:stretch>
-              <a:fillRect/>
-            </a:stretch>
-          </p:blipFill>
-          <p:spPr>
-            <a:xfrm>
-              <a:off x="691705" y="4695687"/>
-              <a:ext cx="914400" cy="914400"/>
-            </a:xfrm>
-            <a:prstGeom prst="rect">
-              <a:avLst/>
-            </a:prstGeom>
-          </p:spPr>
-        </p:pic>
-      </p:grpSp>
       <p:pic>
         <p:nvPicPr>
           <p:cNvPr id="5" name="Picture 4">
@@ -10817,7 +10629,7 @@
           <p:nvPr/>
         </p:nvPicPr>
         <p:blipFill>
-          <a:blip r:embed="rId4">
+          <a:blip r:embed="rId2">
             <a:clrChange>
               <a:clrFrom>
                 <a:srgbClr val="000000"/>
@@ -10848,6 +10660,36 @@
           </a:prstGeom>
         </p:spPr>
       </p:pic>
+      <p:pic>
+        <p:nvPicPr>
+          <p:cNvPr id="7" name="Picture 6">
+            <a:extLst>
+              <a:ext uri="{FF2B5EF4-FFF2-40B4-BE49-F238E27FC236}">
+                <a16:creationId xmlns:a16="http://schemas.microsoft.com/office/drawing/2014/main" id="{A85EABDB-53B3-BBA9-DD2E-A404912D054A}"/>
+              </a:ext>
+            </a:extLst>
+          </p:cNvPr>
+          <p:cNvPicPr>
+            <a:picLocks noChangeAspect="1"/>
+          </p:cNvPicPr>
+          <p:nvPr/>
+        </p:nvPicPr>
+        <p:blipFill>
+          <a:blip r:embed="rId3"/>
+          <a:stretch>
+            <a:fillRect/>
+          </a:stretch>
+        </p:blipFill>
+        <p:spPr>
+          <a:xfrm>
+            <a:off x="2128582" y="2473701"/>
+            <a:ext cx="7772400" cy="3083954"/>
+          </a:xfrm>
+          <a:prstGeom prst="rect">
+            <a:avLst/>
+          </a:prstGeom>
+        </p:spPr>
+      </p:pic>
     </p:spTree>
     <p:extLst>
       <p:ext uri="{BB962C8B-B14F-4D97-AF65-F5344CB8AC3E}">
@@ -10858,157 +10700,6 @@
   <p:clrMapOvr>
     <a:masterClrMapping/>
   </p:clrMapOvr>
-  <p:timing>
-    <p:tnLst>
-      <p:par>
-        <p:cTn id="1" dur="indefinite" restart="never" nodeType="tmRoot">
-          <p:childTnLst>
-            <p:seq concurrent="1" nextAc="seek">
-              <p:cTn id="2" dur="indefinite" nodeType="mainSeq">
-                <p:childTnLst>
-                  <p:par>
-                    <p:cTn id="3" fill="hold">
-                      <p:stCondLst>
-                        <p:cond delay="indefinite"/>
-                      </p:stCondLst>
-                      <p:childTnLst>
-                        <p:par>
-                          <p:cTn id="4" fill="hold">
-                            <p:stCondLst>
-                              <p:cond delay="0"/>
-                            </p:stCondLst>
-                            <p:childTnLst>
-                              <p:par>
-                                <p:cTn id="5" presetID="1" presetClass="entr" presetSubtype="0" fill="hold" grpId="0" nodeType="clickEffect">
-                                  <p:stCondLst>
-                                    <p:cond delay="0"/>
-                                  </p:stCondLst>
-                                  <p:childTnLst>
-                                    <p:set>
-                                      <p:cBhvr>
-                                        <p:cTn id="6" dur="1" fill="hold">
-                                          <p:stCondLst>
-                                            <p:cond delay="0"/>
-                                          </p:stCondLst>
-                                        </p:cTn>
-                                        <p:tgtEl>
-                                          <p:spTgt spid="9"/>
-                                        </p:tgtEl>
-                                        <p:attrNameLst>
-                                          <p:attrName>style.visibility</p:attrName>
-                                        </p:attrNameLst>
-                                      </p:cBhvr>
-                                      <p:to>
-                                        <p:strVal val="visible"/>
-                                      </p:to>
-                                    </p:set>
-                                  </p:childTnLst>
-                                </p:cTn>
-                              </p:par>
-                              <p:par>
-                                <p:cTn id="7" presetID="1" presetClass="entr" presetSubtype="0" fill="hold" grpId="0" nodeType="withEffect">
-                                  <p:stCondLst>
-                                    <p:cond delay="0"/>
-                                  </p:stCondLst>
-                                  <p:childTnLst>
-                                    <p:set>
-                                      <p:cBhvr>
-                                        <p:cTn id="8" dur="1" fill="hold">
-                                          <p:stCondLst>
-                                            <p:cond delay="0"/>
-                                          </p:stCondLst>
-                                        </p:cTn>
-                                        <p:tgtEl>
-                                          <p:spTgt spid="11"/>
-                                        </p:tgtEl>
-                                        <p:attrNameLst>
-                                          <p:attrName>style.visibility</p:attrName>
-                                        </p:attrNameLst>
-                                      </p:cBhvr>
-                                      <p:to>
-                                        <p:strVal val="visible"/>
-                                      </p:to>
-                                    </p:set>
-                                  </p:childTnLst>
-                                </p:cTn>
-                              </p:par>
-                            </p:childTnLst>
-                          </p:cTn>
-                        </p:par>
-                      </p:childTnLst>
-                    </p:cTn>
-                  </p:par>
-                  <p:par>
-                    <p:cTn id="9" fill="hold">
-                      <p:stCondLst>
-                        <p:cond delay="indefinite"/>
-                      </p:stCondLst>
-                      <p:childTnLst>
-                        <p:par>
-                          <p:cTn id="10" fill="hold">
-                            <p:stCondLst>
-                              <p:cond delay="0"/>
-                            </p:stCondLst>
-                            <p:childTnLst>
-                              <p:par>
-                                <p:cTn id="11" presetID="1" presetClass="entr" presetSubtype="0" fill="hold" nodeType="clickEffect">
-                                  <p:stCondLst>
-                                    <p:cond delay="0"/>
-                                  </p:stCondLst>
-                                  <p:childTnLst>
-                                    <p:set>
-                                      <p:cBhvr>
-                                        <p:cTn id="12" dur="1" fill="hold">
-                                          <p:stCondLst>
-                                            <p:cond delay="0"/>
-                                          </p:stCondLst>
-                                        </p:cTn>
-                                        <p:tgtEl>
-                                          <p:spTgt spid="20"/>
-                                        </p:tgtEl>
-                                        <p:attrNameLst>
-                                          <p:attrName>style.visibility</p:attrName>
-                                        </p:attrNameLst>
-                                      </p:cBhvr>
-                                      <p:to>
-                                        <p:strVal val="visible"/>
-                                      </p:to>
-                                    </p:set>
-                                  </p:childTnLst>
-                                </p:cTn>
-                              </p:par>
-                            </p:childTnLst>
-                          </p:cTn>
-                        </p:par>
-                      </p:childTnLst>
-                    </p:cTn>
-                  </p:par>
-                </p:childTnLst>
-              </p:cTn>
-              <p:prevCondLst>
-                <p:cond evt="onPrev" delay="0">
-                  <p:tgtEl>
-                    <p:sldTgt/>
-                  </p:tgtEl>
-                </p:cond>
-              </p:prevCondLst>
-              <p:nextCondLst>
-                <p:cond evt="onNext" delay="0">
-                  <p:tgtEl>
-                    <p:sldTgt/>
-                  </p:tgtEl>
-                </p:cond>
-              </p:nextCondLst>
-            </p:seq>
-          </p:childTnLst>
-        </p:cTn>
-      </p:par>
-    </p:tnLst>
-    <p:bldLst>
-      <p:bldP spid="9" grpId="0"/>
-      <p:bldP spid="11" grpId="0"/>
-    </p:bldLst>
-  </p:timing>
 </p:sld>
 </file>
 

--- a/Tema 1/paper/Tema1.pptx
+++ b/Tema 1/paper/Tema1.pptx
@@ -5,16 +5,23 @@
     <p:sldMasterId id="2147483660" r:id="rId1"/>
   </p:sldMasterIdLst>
   <p:notesMasterIdLst>
-    <p:notesMasterId r:id="rId6"/>
+    <p:notesMasterId r:id="rId13"/>
   </p:notesMasterIdLst>
   <p:handoutMasterIdLst>
-    <p:handoutMasterId r:id="rId7"/>
+    <p:handoutMasterId r:id="rId14"/>
   </p:handoutMasterIdLst>
   <p:sldIdLst>
     <p:sldId id="256" r:id="rId2"/>
     <p:sldId id="329" r:id="rId3"/>
-    <p:sldId id="306" r:id="rId4"/>
-    <p:sldId id="331" r:id="rId5"/>
+    <p:sldId id="338" r:id="rId4"/>
+    <p:sldId id="306" r:id="rId5"/>
+    <p:sldId id="339" r:id="rId6"/>
+    <p:sldId id="340" r:id="rId7"/>
+    <p:sldId id="332" r:id="rId8"/>
+    <p:sldId id="341" r:id="rId9"/>
+    <p:sldId id="342" r:id="rId10"/>
+    <p:sldId id="331" r:id="rId11"/>
+    <p:sldId id="343" r:id="rId12"/>
   </p:sldIdLst>
   <p:sldSz cx="12192000" cy="6858000"/>
   <p:notesSz cx="6858000" cy="9144000"/>
@@ -226,7 +233,7 @@
           <a:p>
             <a:fld id="{F734BBC0-246C-4EDF-BC1F-DD96E1F72B7E}" type="datetimeFigureOut">
               <a:rPr lang="ro-RO" smtClean="0"/>
-              <a:t>07.10.2026</a:t>
+              <a:t>12.10.2026</a:t>
             </a:fld>
             <a:endParaRPr lang="ro-RO"/>
           </a:p>
@@ -343,235 +350,10 @@
           <a:chExt cx="0" cy="0"/>
         </a:xfrm>
       </p:grpSpPr>
-      <p:sp>
-        <p:nvSpPr>
-          <p:cNvPr id="2" name="Header Placeholder 1"/>
-          <p:cNvSpPr>
-            <a:spLocks noGrp="1"/>
-          </p:cNvSpPr>
-          <p:nvPr>
-            <p:ph type="hdr" sz="quarter"/>
-          </p:nvPr>
-        </p:nvSpPr>
-        <p:spPr>
-          <a:xfrm>
-            <a:off x="0" y="0"/>
-            <a:ext cx="2971800" cy="458788"/>
-          </a:xfrm>
-          <a:prstGeom prst="rect">
-            <a:avLst/>
-          </a:prstGeom>
-        </p:spPr>
-        <p:txBody>
-          <a:bodyPr vert="horz" lIns="91440" tIns="45720" rIns="91440" bIns="45720" rtlCol="0"/>
-          <a:lstStyle>
-            <a:lvl1pPr algn="l">
-              <a:defRPr sz="1200"/>
-            </a:lvl1pPr>
-          </a:lstStyle>
-          <a:p>
-            <a:endParaRPr lang="ro-RO"/>
-          </a:p>
-        </p:txBody>
-      </p:sp>
-      <p:sp>
-        <p:nvSpPr>
-          <p:cNvPr id="3" name="Date Placeholder 2"/>
-          <p:cNvSpPr>
-            <a:spLocks noGrp="1"/>
-          </p:cNvSpPr>
-          <p:nvPr>
-            <p:ph type="dt" idx="1"/>
-          </p:nvPr>
-        </p:nvSpPr>
-        <p:spPr>
-          <a:xfrm>
-            <a:off x="3884613" y="0"/>
-            <a:ext cx="2971800" cy="458788"/>
-          </a:xfrm>
-          <a:prstGeom prst="rect">
-            <a:avLst/>
-          </a:prstGeom>
-        </p:spPr>
-        <p:txBody>
-          <a:bodyPr vert="horz" lIns="91440" tIns="45720" rIns="91440" bIns="45720" rtlCol="0"/>
-          <a:lstStyle>
-            <a:lvl1pPr algn="r">
-              <a:defRPr sz="1200"/>
-            </a:lvl1pPr>
-          </a:lstStyle>
-          <a:p>
-            <a:fld id="{F41CDB50-B4BA-4D46-B4BE-314329FF06FD}" type="datetimeFigureOut">
-              <a:rPr lang="ro-RO" smtClean="0"/>
-              <a:t>07.10.2026</a:t>
-            </a:fld>
-            <a:endParaRPr lang="ro-RO"/>
-          </a:p>
-        </p:txBody>
-      </p:sp>
-      <p:sp>
-        <p:nvSpPr>
-          <p:cNvPr id="4" name="Slide Image Placeholder 3"/>
-          <p:cNvSpPr>
-            <a:spLocks noGrp="1" noRot="1" noChangeAspect="1"/>
-          </p:cNvSpPr>
-          <p:nvPr>
-            <p:ph type="sldImg" idx="2"/>
-          </p:nvPr>
-        </p:nvSpPr>
-        <p:spPr>
-          <a:xfrm>
-            <a:off x="685800" y="1143000"/>
-            <a:ext cx="5486400" cy="3086100"/>
-          </a:xfrm>
-          <a:prstGeom prst="rect">
-            <a:avLst/>
-          </a:prstGeom>
-          <a:noFill/>
-          <a:ln w="12700">
-            <a:solidFill>
-              <a:prstClr val="black"/>
-            </a:solidFill>
-          </a:ln>
-        </p:spPr>
-        <p:txBody>
-          <a:bodyPr vert="horz" lIns="91440" tIns="45720" rIns="91440" bIns="45720" rtlCol="0" anchor="ctr"/>
-          <a:lstStyle/>
-          <a:p>
-            <a:endParaRPr lang="ro-RO"/>
-          </a:p>
-        </p:txBody>
-      </p:sp>
-      <p:sp>
-        <p:nvSpPr>
-          <p:cNvPr id="5" name="Notes Placeholder 4"/>
-          <p:cNvSpPr>
-            <a:spLocks noGrp="1"/>
-          </p:cNvSpPr>
-          <p:nvPr>
-            <p:ph type="body" sz="quarter" idx="3"/>
-          </p:nvPr>
-        </p:nvSpPr>
-        <p:spPr>
-          <a:xfrm>
-            <a:off x="685800" y="4400550"/>
-            <a:ext cx="5486400" cy="3600450"/>
-          </a:xfrm>
-          <a:prstGeom prst="rect">
-            <a:avLst/>
-          </a:prstGeom>
-        </p:spPr>
-        <p:txBody>
-          <a:bodyPr vert="horz" lIns="91440" tIns="45720" rIns="91440" bIns="45720" rtlCol="0"/>
-          <a:lstStyle/>
-          <a:p>
-            <a:pPr lvl="0"/>
-            <a:r>
-              <a:rPr lang="en-US"/>
-              <a:t>Click to edit Master text styles</a:t>
-            </a:r>
-          </a:p>
-          <a:p>
-            <a:pPr lvl="1"/>
-            <a:r>
-              <a:rPr lang="en-US"/>
-              <a:t>Second level</a:t>
-            </a:r>
-          </a:p>
-          <a:p>
-            <a:pPr lvl="2"/>
-            <a:r>
-              <a:rPr lang="en-US"/>
-              <a:t>Third level</a:t>
-            </a:r>
-          </a:p>
-          <a:p>
-            <a:pPr lvl="3"/>
-            <a:r>
-              <a:rPr lang="en-US"/>
-              <a:t>Fourth level</a:t>
-            </a:r>
-          </a:p>
-          <a:p>
-            <a:pPr lvl="4"/>
-            <a:r>
-              <a:rPr lang="en-US"/>
-              <a:t>Fifth level</a:t>
-            </a:r>
-            <a:endParaRPr lang="ro-RO"/>
-          </a:p>
-        </p:txBody>
-      </p:sp>
-      <p:sp>
-        <p:nvSpPr>
-          <p:cNvPr id="6" name="Footer Placeholder 5"/>
-          <p:cNvSpPr>
-            <a:spLocks noGrp="1"/>
-          </p:cNvSpPr>
-          <p:nvPr>
-            <p:ph type="ftr" sz="quarter" idx="4"/>
-          </p:nvPr>
-        </p:nvSpPr>
-        <p:spPr>
-          <a:xfrm>
-            <a:off x="0" y="8685213"/>
-            <a:ext cx="2971800" cy="458787"/>
-          </a:xfrm>
-          <a:prstGeom prst="rect">
-            <a:avLst/>
-          </a:prstGeom>
-        </p:spPr>
-        <p:txBody>
-          <a:bodyPr vert="horz" lIns="91440" tIns="45720" rIns="91440" bIns="45720" rtlCol="0" anchor="b"/>
-          <a:lstStyle>
-            <a:lvl1pPr algn="l">
-              <a:defRPr sz="1200"/>
-            </a:lvl1pPr>
-          </a:lstStyle>
-          <a:p>
-            <a:endParaRPr lang="ro-RO"/>
-          </a:p>
-        </p:txBody>
-      </p:sp>
-      <p:sp>
-        <p:nvSpPr>
-          <p:cNvPr id="7" name="Slide Number Placeholder 6"/>
-          <p:cNvSpPr>
-            <a:spLocks noGrp="1"/>
-          </p:cNvSpPr>
-          <p:nvPr>
-            <p:ph type="sldNum" sz="quarter" idx="5"/>
-          </p:nvPr>
-        </p:nvSpPr>
-        <p:spPr>
-          <a:xfrm>
-            <a:off x="3884613" y="8685213"/>
-            <a:ext cx="2971800" cy="458787"/>
-          </a:xfrm>
-          <a:prstGeom prst="rect">
-            <a:avLst/>
-          </a:prstGeom>
-        </p:spPr>
-        <p:txBody>
-          <a:bodyPr vert="horz" lIns="91440" tIns="45720" rIns="91440" bIns="45720" rtlCol="0" anchor="b"/>
-          <a:lstStyle>
-            <a:lvl1pPr algn="r">
-              <a:defRPr sz="1200"/>
-            </a:lvl1pPr>
-          </a:lstStyle>
-          <a:p>
-            <a:fld id="{691E2B25-A6D5-422D-9B99-6181579AD4D7}" type="slidenum">
-              <a:rPr lang="ro-RO" smtClean="0"/>
-              <a:t>‹#›</a:t>
-            </a:fld>
-            <a:endParaRPr lang="ro-RO"/>
-          </a:p>
-        </p:txBody>
-      </p:sp>
     </p:spTree>
     <p:extLst>
       <p:ext uri="{BB962C8B-B14F-4D97-AF65-F5344CB8AC3E}">
-        <p14:creationId xmlns:p14="http://schemas.microsoft.com/office/powerpoint/2010/main" val="4255564857"/>
+        <p14:creationId xmlns:p14="http://schemas.microsoft.com/office/powerpoint/2010/main" val="24838625"/>
       </p:ext>
     </p:extLst>
   </p:cSld>
@@ -690,109 +472,12 @@
       </p:grpSpPr>
       <p:sp>
         <p:nvSpPr>
-          <p:cNvPr id="160" name="Google Shape;160;p1:notes"/>
-          <p:cNvSpPr>
-            <a:spLocks noGrp="1" noRot="1" noChangeAspect="1"/>
-          </p:cNvSpPr>
-          <p:nvPr>
-            <p:ph type="sldImg" idx="2"/>
-          </p:nvPr>
-        </p:nvSpPr>
-        <p:spPr>
-          <a:xfrm>
-            <a:off x="685800" y="1143000"/>
-            <a:ext cx="5486400" cy="3086100"/>
-          </a:xfrm>
-          <a:custGeom>
-            <a:avLst/>
-            <a:gdLst/>
-            <a:ahLst/>
-            <a:cxnLst/>
-            <a:rect l="l" t="t" r="r" b="b"/>
-            <a:pathLst>
-              <a:path w="120000" h="120000" extrusionOk="0">
-                <a:moveTo>
-                  <a:pt x="0" y="0"/>
-                </a:moveTo>
-                <a:lnTo>
-                  <a:pt x="120000" y="0"/>
-                </a:lnTo>
-                <a:lnTo>
-                  <a:pt x="120000" y="120000"/>
-                </a:lnTo>
-                <a:lnTo>
-                  <a:pt x="0" y="120000"/>
-                </a:lnTo>
-                <a:close/>
-              </a:path>
-            </a:pathLst>
-          </a:custGeom>
-          <a:noFill/>
-          <a:ln w="12700" cap="flat" cmpd="sng">
-            <a:solidFill>
-              <a:srgbClr val="000000"/>
-            </a:solidFill>
-            <a:prstDash val="solid"/>
-            <a:round/>
-            <a:headEnd type="none" w="sm" len="sm"/>
-            <a:tailEnd type="none" w="sm" len="sm"/>
-          </a:ln>
-        </p:spPr>
-      </p:sp>
-      <p:sp>
-        <p:nvSpPr>
-          <p:cNvPr id="161" name="Google Shape;161;p1:notes"/>
-          <p:cNvSpPr txBox="1">
-            <a:spLocks noGrp="1"/>
-          </p:cNvSpPr>
-          <p:nvPr>
-            <p:ph type="body" idx="1"/>
-          </p:nvPr>
-        </p:nvSpPr>
-        <p:spPr>
-          <a:xfrm>
-            <a:off x="685800" y="4400550"/>
-            <a:ext cx="5486400" cy="3600450"/>
-          </a:xfrm>
-          <a:prstGeom prst="rect">
-            <a:avLst/>
-          </a:prstGeom>
-          <a:noFill/>
-          <a:ln>
-            <a:noFill/>
-          </a:ln>
-        </p:spPr>
-        <p:txBody>
-          <a:bodyPr spcFirstLastPara="1" wrap="square" lIns="91425" tIns="45700" rIns="91425" bIns="45700" anchor="t" anchorCtr="0">
-            <a:noAutofit/>
-          </a:bodyPr>
-          <a:lstStyle/>
-          <a:p>
-            <a:pPr marL="0" lvl="0" indent="0" algn="l" rtl="0">
-              <a:lnSpc>
-                <a:spcPct val="100000"/>
-              </a:lnSpc>
-              <a:spcBef>
-                <a:spcPts val="0"/>
-              </a:spcBef>
-              <a:spcAft>
-                <a:spcPts val="0"/>
-              </a:spcAft>
-              <a:buSzPts val="1400"/>
-              <a:buNone/>
-            </a:pPr>
-            <a:endParaRPr/>
-          </a:p>
-        </p:txBody>
-      </p:sp>
-      <p:sp>
-        <p:nvSpPr>
           <p:cNvPr id="162" name="Google Shape;162;p1:notes"/>
           <p:cNvSpPr txBox="1">
             <a:spLocks noGrp="1"/>
           </p:cNvSpPr>
           <p:nvPr>
-            <p:ph type="sldNum" idx="12"/>
+            <p:ph type="sldNum" idx="4294967295"/>
           </p:nvPr>
         </p:nvSpPr>
         <p:spPr>
@@ -9893,6 +9578,7 @@
         </p:nvPicPr>
         <p:blipFill>
           <a:blip r:embed="rId5"/>
+          <a:srcRect t="11500" b="37643"/>
           <a:stretch>
             <a:fillRect/>
           </a:stretch>
@@ -9908,6 +9594,755 @@
         </p:spPr>
       </p:pic>
     </p:spTree>
+  </p:cSld>
+  <p:clrMapOvr>
+    <a:masterClrMapping/>
+  </p:clrMapOvr>
+</p:sld>
+</file>
+
+<file path=ppt/slides/slide10.xml><?xml version="1.0" encoding="utf-8"?>
+<p:sld xmlns:a="http://schemas.openxmlformats.org/drawingml/2006/main" xmlns:r="http://schemas.openxmlformats.org/officeDocument/2006/relationships" xmlns:p="http://schemas.openxmlformats.org/presentationml/2006/main">
+  <p:cSld>
+    <p:spTree>
+      <p:nvGrpSpPr>
+        <p:cNvPr id="1" name=""/>
+        <p:cNvGrpSpPr/>
+        <p:nvPr/>
+      </p:nvGrpSpPr>
+      <p:grpSpPr>
+        <a:xfrm>
+          <a:off x="0" y="0"/>
+          <a:ext cx="0" cy="0"/>
+          <a:chOff x="0" y="0"/>
+          <a:chExt cx="0" cy="0"/>
+        </a:xfrm>
+      </p:grpSpPr>
+      <p:sp>
+        <p:nvSpPr>
+          <p:cNvPr id="4" name="Title 3">
+            <a:extLst>
+              <a:ext uri="{FF2B5EF4-FFF2-40B4-BE49-F238E27FC236}">
+                <a16:creationId xmlns:a16="http://schemas.microsoft.com/office/drawing/2014/main" id="{02EA4550-F326-0AC7-13DE-7FF4EA0FE04F}"/>
+              </a:ext>
+            </a:extLst>
+          </p:cNvPr>
+          <p:cNvSpPr>
+            <a:spLocks noGrp="1"/>
+          </p:cNvSpPr>
+          <p:nvPr>
+            <p:ph type="title"/>
+          </p:nvPr>
+        </p:nvSpPr>
+        <p:spPr/>
+        <p:txBody>
+          <a:bodyPr>
+            <a:normAutofit fontScale="90000"/>
+          </a:bodyPr>
+          <a:lstStyle/>
+          <a:p>
+            <a:r>
+              <a:rPr lang="en-US" dirty="0">
+                <a:solidFill>
+                  <a:schemeClr val="bg1"/>
+                </a:solidFill>
+              </a:rPr>
+              <a:t>Equilibrium Equations</a:t>
+            </a:r>
+            <a:endParaRPr lang="ro-RO" dirty="0">
+              <a:solidFill>
+                <a:schemeClr val="bg1"/>
+              </a:solidFill>
+            </a:endParaRPr>
+          </a:p>
+        </p:txBody>
+      </p:sp>
+      <p:pic>
+        <p:nvPicPr>
+          <p:cNvPr id="5" name="Picture 4">
+            <a:extLst>
+              <a:ext uri="{FF2B5EF4-FFF2-40B4-BE49-F238E27FC236}">
+                <a16:creationId xmlns:a16="http://schemas.microsoft.com/office/drawing/2014/main" id="{84019BF7-235C-64CA-8107-6BFBA4BCAD06}"/>
+              </a:ext>
+            </a:extLst>
+          </p:cNvPr>
+          <p:cNvPicPr>
+            <a:picLocks noChangeAspect="1"/>
+          </p:cNvPicPr>
+          <p:nvPr/>
+        </p:nvPicPr>
+        <p:blipFill>
+          <a:blip r:embed="rId2">
+            <a:clrChange>
+              <a:clrFrom>
+                <a:srgbClr val="000000"/>
+              </a:clrFrom>
+              <a:clrTo>
+                <a:srgbClr val="000000">
+                  <a:alpha val="0"/>
+                </a:srgbClr>
+              </a:clrTo>
+            </a:clrChange>
+            <a:extLst>
+              <a:ext uri="{28A0092B-C50C-407E-A947-70E740481C1C}">
+                <a14:useLocalDpi xmlns:a14="http://schemas.microsoft.com/office/drawing/2010/main" val="0"/>
+              </a:ext>
+            </a:extLst>
+          </a:blip>
+          <a:stretch>
+            <a:fillRect/>
+          </a:stretch>
+        </p:blipFill>
+        <p:spPr>
+          <a:xfrm>
+            <a:off x="10432471" y="6323329"/>
+            <a:ext cx="1492133" cy="496892"/>
+          </a:xfrm>
+          <a:prstGeom prst="rect">
+            <a:avLst/>
+          </a:prstGeom>
+        </p:spPr>
+      </p:pic>
+      <mc:AlternateContent xmlns:mc="http://schemas.openxmlformats.org/markup-compatibility/2006">
+        <mc:Choice xmlns:a14="http://schemas.microsoft.com/office/drawing/2010/main" Requires="a14">
+          <p:sp>
+            <p:nvSpPr>
+              <p:cNvPr id="2" name="TextBox 1">
+                <a:extLst>
+                  <a:ext uri="{FF2B5EF4-FFF2-40B4-BE49-F238E27FC236}">
+                    <a16:creationId xmlns:a16="http://schemas.microsoft.com/office/drawing/2014/main" id="{760DEB4B-04F7-7DFB-7BCD-130CC13D6389}"/>
+                  </a:ext>
+                </a:extLst>
+              </p:cNvPr>
+              <p:cNvSpPr txBox="1"/>
+              <p:nvPr/>
+            </p:nvSpPr>
+            <p:spPr>
+              <a:xfrm>
+                <a:off x="1318871" y="5202500"/>
+                <a:ext cx="2710422" cy="526683"/>
+              </a:xfrm>
+              <a:prstGeom prst="rect">
+                <a:avLst/>
+              </a:prstGeom>
+              <a:noFill/>
+            </p:spPr>
+            <p:txBody>
+              <a:bodyPr wrap="none" lIns="0" tIns="0" rIns="0" bIns="0" rtlCol="0">
+                <a:spAutoFit/>
+              </a:bodyPr>
+              <a:lstStyle/>
+              <a:p>
+                <a14:m>
+                  <m:oMathPara xmlns:m="http://schemas.openxmlformats.org/officeDocument/2006/math">
+                    <m:oMathParaPr>
+                      <m:jc m:val="centerGroup"/>
+                    </m:oMathParaPr>
+                    <m:oMath xmlns:m="http://schemas.openxmlformats.org/officeDocument/2006/math">
+                      <m:f>
+                        <m:fPr>
+                          <m:ctrlPr>
+                            <a:rPr lang="en-US" i="1" smtClean="0">
+                              <a:latin typeface="Cambria Math" panose="02040503050406030204" pitchFamily="18" charset="0"/>
+                            </a:rPr>
+                          </m:ctrlPr>
+                        </m:fPr>
+                        <m:num>
+                          <m:r>
+                            <a:rPr lang="en-US" i="1" smtClean="0">
+                              <a:latin typeface="Cambria Math" panose="02040503050406030204" pitchFamily="18" charset="0"/>
+                              <a:ea typeface="Cambria Math" panose="02040503050406030204" pitchFamily="18" charset="0"/>
+                            </a:rPr>
+                            <m:t>𝜕</m:t>
+                          </m:r>
+                        </m:num>
+                        <m:den>
+                          <m:r>
+                            <a:rPr lang="en-US" i="1" smtClean="0">
+                              <a:latin typeface="Cambria Math" panose="02040503050406030204" pitchFamily="18" charset="0"/>
+                              <a:ea typeface="Cambria Math" panose="02040503050406030204" pitchFamily="18" charset="0"/>
+                            </a:rPr>
+                            <m:t>𝜕</m:t>
+                          </m:r>
+                          <m:r>
+                            <m:rPr>
+                              <m:sty m:val="p"/>
+                            </m:rPr>
+                            <a:rPr lang="en-US" b="0" i="1" smtClean="0">
+                              <a:latin typeface="Cambria Math" panose="02040503050406030204" pitchFamily="18" charset="0"/>
+                              <a:ea typeface="Cambria Math" panose="02040503050406030204" pitchFamily="18" charset="0"/>
+                            </a:rPr>
+                            <m:t>s</m:t>
+                          </m:r>
+                        </m:den>
+                      </m:f>
+                      <m:r>
+                        <a:rPr lang="en-US" b="0" i="1" smtClean="0">
+                          <a:latin typeface="Cambria Math" panose="02040503050406030204" pitchFamily="18" charset="0"/>
+                        </a:rPr>
+                        <m:t>(</m:t>
+                      </m:r>
+                      <m:r>
+                        <m:rPr>
+                          <m:sty m:val="p"/>
+                        </m:rPr>
+                        <a:rPr lang="en-US" b="0" i="1" smtClean="0">
+                          <a:latin typeface="Cambria Math" panose="02040503050406030204" pitchFamily="18" charset="0"/>
+                        </a:rPr>
+                        <m:t>T</m:t>
+                      </m:r>
+                      <m:acc>
+                        <m:accPr>
+                          <m:chr m:val="⃗"/>
+                          <m:ctrlPr>
+                            <a:rPr lang="en-US" b="0" i="1" smtClean="0">
+                              <a:latin typeface="Cambria Math" panose="02040503050406030204" pitchFamily="18" charset="0"/>
+                            </a:rPr>
+                          </m:ctrlPr>
+                        </m:accPr>
+                        <m:e>
+                          <m:sSub>
+                            <m:sSubPr>
+                              <m:ctrlPr>
+                                <a:rPr lang="en-US" b="0" i="1" smtClean="0">
+                                  <a:latin typeface="Cambria Math" panose="02040503050406030204" pitchFamily="18" charset="0"/>
+                                </a:rPr>
+                              </m:ctrlPr>
+                            </m:sSubPr>
+                            <m:e>
+                              <m:r>
+                                <a:rPr lang="en-US" b="0" i="1" smtClean="0">
+                                  <a:latin typeface="Cambria Math" panose="02040503050406030204" pitchFamily="18" charset="0"/>
+                                </a:rPr>
+                                <m:t>1</m:t>
+                              </m:r>
+                            </m:e>
+                            <m:sub>
+                              <m:r>
+                                <m:rPr>
+                                  <m:sty m:val="p"/>
+                                </m:rPr>
+                                <a:rPr lang="en-US" b="0" i="1" smtClean="0">
+                                  <a:latin typeface="Cambria Math" panose="02040503050406030204" pitchFamily="18" charset="0"/>
+                                </a:rPr>
+                                <m:t>t</m:t>
+                              </m:r>
+                            </m:sub>
+                          </m:sSub>
+                        </m:e>
+                      </m:acc>
+                      <m:r>
+                        <a:rPr lang="en-US" b="0" i="1" smtClean="0">
+                          <a:latin typeface="Cambria Math" panose="02040503050406030204" pitchFamily="18" charset="0"/>
+                        </a:rPr>
+                        <m:t>)+</m:t>
+                      </m:r>
+                      <m:acc>
+                        <m:accPr>
+                          <m:chr m:val="⃗"/>
+                          <m:ctrlPr>
+                            <a:rPr lang="en-US" b="0" i="1" smtClean="0">
+                              <a:latin typeface="Cambria Math" panose="02040503050406030204" pitchFamily="18" charset="0"/>
+                            </a:rPr>
+                          </m:ctrlPr>
+                        </m:accPr>
+                        <m:e>
+                          <m:sSub>
+                            <m:sSubPr>
+                              <m:ctrlPr>
+                                <a:rPr lang="en-US" b="0" i="1" smtClean="0">
+                                  <a:latin typeface="Cambria Math" panose="02040503050406030204" pitchFamily="18" charset="0"/>
+                                </a:rPr>
+                              </m:ctrlPr>
+                            </m:sSubPr>
+                            <m:e>
+                              <m:r>
+                                <m:rPr>
+                                  <m:sty m:val="p"/>
+                                </m:rPr>
+                                <a:rPr lang="en-US" b="0" i="1" smtClean="0">
+                                  <a:latin typeface="Cambria Math" panose="02040503050406030204" pitchFamily="18" charset="0"/>
+                                </a:rPr>
+                                <m:t>f</m:t>
+                              </m:r>
+                            </m:e>
+                            <m:sub>
+                              <m:r>
+                                <m:rPr>
+                                  <m:sty m:val="p"/>
+                                </m:rPr>
+                                <a:rPr lang="en-US" b="0" i="1" smtClean="0">
+                                  <a:latin typeface="Cambria Math" panose="02040503050406030204" pitchFamily="18" charset="0"/>
+                                </a:rPr>
+                                <m:t>v</m:t>
+                              </m:r>
+                            </m:sub>
+                          </m:sSub>
+                        </m:e>
+                      </m:acc>
+                      <m:r>
+                        <a:rPr lang="en-US" b="0" i="1" smtClean="0">
+                          <a:latin typeface="Cambria Math" panose="02040503050406030204" pitchFamily="18" charset="0"/>
+                        </a:rPr>
+                        <m:t>+</m:t>
+                      </m:r>
+                      <m:acc>
+                        <m:accPr>
+                          <m:chr m:val="⃗"/>
+                          <m:ctrlPr>
+                            <a:rPr lang="en-US" i="1">
+                              <a:latin typeface="Cambria Math" panose="02040503050406030204" pitchFamily="18" charset="0"/>
+                            </a:rPr>
+                          </m:ctrlPr>
+                        </m:accPr>
+                        <m:e>
+                          <m:sSub>
+                            <m:sSubPr>
+                              <m:ctrlPr>
+                                <a:rPr lang="en-US" i="1">
+                                  <a:latin typeface="Cambria Math" panose="02040503050406030204" pitchFamily="18" charset="0"/>
+                                </a:rPr>
+                              </m:ctrlPr>
+                            </m:sSubPr>
+                            <m:e>
+                              <m:r>
+                                <m:rPr>
+                                  <m:sty m:val="p"/>
+                                </m:rPr>
+                                <a:rPr lang="en-US" i="1">
+                                  <a:latin typeface="Cambria Math" panose="02040503050406030204" pitchFamily="18" charset="0"/>
+                                </a:rPr>
+                                <m:t>f</m:t>
+                              </m:r>
+                            </m:e>
+                            <m:sub>
+                              <m:r>
+                                <m:rPr>
+                                  <m:sty m:val="p"/>
+                                </m:rPr>
+                                <a:rPr lang="en-US" b="0" i="1" smtClean="0">
+                                  <a:latin typeface="Cambria Math" panose="02040503050406030204" pitchFamily="18" charset="0"/>
+                                </a:rPr>
+                                <m:t>e</m:t>
+                              </m:r>
+                            </m:sub>
+                          </m:sSub>
+                        </m:e>
+                      </m:acc>
+                      <m:r>
+                        <a:rPr lang="en-US" b="0" i="1" smtClean="0">
+                          <a:latin typeface="Cambria Math" panose="02040503050406030204" pitchFamily="18" charset="0"/>
+                        </a:rPr>
+                        <m:t>+</m:t>
+                      </m:r>
+                      <m:acc>
+                        <m:accPr>
+                          <m:chr m:val="⃗"/>
+                          <m:ctrlPr>
+                            <a:rPr lang="en-US" i="1">
+                              <a:latin typeface="Cambria Math" panose="02040503050406030204" pitchFamily="18" charset="0"/>
+                            </a:rPr>
+                          </m:ctrlPr>
+                        </m:accPr>
+                        <m:e>
+                          <m:sSub>
+                            <m:sSubPr>
+                              <m:ctrlPr>
+                                <a:rPr lang="en-US" i="1">
+                                  <a:latin typeface="Cambria Math" panose="02040503050406030204" pitchFamily="18" charset="0"/>
+                                </a:rPr>
+                              </m:ctrlPr>
+                            </m:sSubPr>
+                            <m:e>
+                              <m:r>
+                                <m:rPr>
+                                  <m:sty m:val="p"/>
+                                </m:rPr>
+                                <a:rPr lang="en-US" i="1">
+                                  <a:latin typeface="Cambria Math" panose="02040503050406030204" pitchFamily="18" charset="0"/>
+                                </a:rPr>
+                                <m:t>f</m:t>
+                              </m:r>
+                            </m:e>
+                            <m:sub>
+                              <m:r>
+                                <m:rPr>
+                                  <m:sty m:val="p"/>
+                                </m:rPr>
+                                <a:rPr lang="en-US" b="0" i="1" smtClean="0">
+                                  <a:latin typeface="Cambria Math" panose="02040503050406030204" pitchFamily="18" charset="0"/>
+                                </a:rPr>
+                                <m:t>r</m:t>
+                              </m:r>
+                            </m:sub>
+                          </m:sSub>
+                        </m:e>
+                      </m:acc>
+                      <m:r>
+                        <a:rPr lang="en-US" b="0" i="1" smtClean="0">
+                          <a:latin typeface="Cambria Math" panose="02040503050406030204" pitchFamily="18" charset="0"/>
+                        </a:rPr>
+                        <m:t>=0</m:t>
+                      </m:r>
+                    </m:oMath>
+                  </m:oMathPara>
+                </a14:m>
+                <a:endParaRPr lang="en-US" dirty="0"/>
+              </a:p>
+            </p:txBody>
+          </p:sp>
+        </mc:Choice>
+        <mc:Fallback>
+          <p:sp>
+            <p:nvSpPr>
+              <p:cNvPr id="2" name="TextBox 1">
+                <a:extLst>
+                  <a:ext uri="{FF2B5EF4-FFF2-40B4-BE49-F238E27FC236}">
+                    <a16:creationId xmlns:a16="http://schemas.microsoft.com/office/drawing/2014/main" id="{760DEB4B-04F7-7DFB-7BCD-130CC13D6389}"/>
+                  </a:ext>
+                </a:extLst>
+              </p:cNvPr>
+              <p:cNvSpPr txBox="1">
+                <a:spLocks noRot="1" noChangeAspect="1" noMove="1" noResize="1" noEditPoints="1" noAdjustHandles="1" noChangeArrowheads="1" noChangeShapeType="1" noTextEdit="1"/>
+              </p:cNvSpPr>
+              <p:nvPr/>
+            </p:nvSpPr>
+            <p:spPr>
+              <a:xfrm>
+                <a:off x="1318871" y="5202500"/>
+                <a:ext cx="2710422" cy="526683"/>
+              </a:xfrm>
+              <a:prstGeom prst="rect">
+                <a:avLst/>
+              </a:prstGeom>
+              <a:blipFill>
+                <a:blip r:embed="rId3"/>
+                <a:stretch>
+                  <a:fillRect t="-2326" b="-13953"/>
+                </a:stretch>
+              </a:blipFill>
+            </p:spPr>
+            <p:txBody>
+              <a:bodyPr/>
+              <a:lstStyle/>
+              <a:p>
+                <a:r>
+                  <a:rPr lang="en-US">
+                    <a:noFill/>
+                  </a:rPr>
+                  <a:t> </a:t>
+                </a:r>
+              </a:p>
+            </p:txBody>
+          </p:sp>
+        </mc:Fallback>
+      </mc:AlternateContent>
+      <p:sp>
+        <p:nvSpPr>
+          <p:cNvPr id="3" name="Rounded Rectangle 2">
+            <a:extLst>
+              <a:ext uri="{FF2B5EF4-FFF2-40B4-BE49-F238E27FC236}">
+                <a16:creationId xmlns:a16="http://schemas.microsoft.com/office/drawing/2014/main" id="{C540FBB9-41F2-2B90-D6FF-8DBC75A7FFC5}"/>
+              </a:ext>
+            </a:extLst>
+          </p:cNvPr>
+          <p:cNvSpPr/>
+          <p:nvPr/>
+        </p:nvSpPr>
+        <p:spPr>
+          <a:xfrm>
+            <a:off x="5316279" y="4614530"/>
+            <a:ext cx="4805916" cy="1957245"/>
+          </a:xfrm>
+          <a:prstGeom prst="roundRect">
+            <a:avLst/>
+          </a:prstGeom>
+        </p:spPr>
+        <p:style>
+          <a:lnRef idx="1">
+            <a:schemeClr val="accent2"/>
+          </a:lnRef>
+          <a:fillRef idx="2">
+            <a:schemeClr val="accent2"/>
+          </a:fillRef>
+          <a:effectRef idx="1">
+            <a:schemeClr val="accent2"/>
+          </a:effectRef>
+          <a:fontRef idx="minor">
+            <a:schemeClr val="dk1"/>
+          </a:fontRef>
+        </p:style>
+        <p:txBody>
+          <a:bodyPr rtlCol="0" anchor="ctr"/>
+          <a:lstStyle/>
+          <a:p>
+            <a:pPr algn="ctr"/>
+            <a:endParaRPr lang="en-US"/>
+          </a:p>
+        </p:txBody>
+      </p:sp>
+      <p:sp>
+        <p:nvSpPr>
+          <p:cNvPr id="8" name="TextBox 7">
+            <a:extLst>
+              <a:ext uri="{FF2B5EF4-FFF2-40B4-BE49-F238E27FC236}">
+                <a16:creationId xmlns:a16="http://schemas.microsoft.com/office/drawing/2014/main" id="{E1E9574C-FB27-38E9-7556-B19FEC0B8B5E}"/>
+              </a:ext>
+            </a:extLst>
+          </p:cNvPr>
+          <p:cNvSpPr txBox="1"/>
+          <p:nvPr/>
+        </p:nvSpPr>
+        <p:spPr>
+          <a:xfrm>
+            <a:off x="6416748" y="4734804"/>
+            <a:ext cx="2604977" cy="369332"/>
+          </a:xfrm>
+          <a:prstGeom prst="rect">
+            <a:avLst/>
+          </a:prstGeom>
+          <a:noFill/>
+        </p:spPr>
+        <p:txBody>
+          <a:bodyPr wrap="square" rtlCol="0">
+            <a:spAutoFit/>
+          </a:bodyPr>
+          <a:lstStyle/>
+          <a:p>
+            <a:r>
+              <a:rPr lang="en-US" dirty="0"/>
+              <a:t>Boundary Conditions</a:t>
+            </a:r>
+          </a:p>
+        </p:txBody>
+      </p:sp>
+      <p:sp>
+        <p:nvSpPr>
+          <p:cNvPr id="9" name="TextBox 8">
+            <a:extLst>
+              <a:ext uri="{FF2B5EF4-FFF2-40B4-BE49-F238E27FC236}">
+                <a16:creationId xmlns:a16="http://schemas.microsoft.com/office/drawing/2014/main" id="{619D1D16-753D-7C39-1853-D68ACD163304}"/>
+              </a:ext>
+            </a:extLst>
+          </p:cNvPr>
+          <p:cNvSpPr txBox="1"/>
+          <p:nvPr/>
+        </p:nvSpPr>
+        <p:spPr>
+          <a:xfrm>
+            <a:off x="5452729" y="5202500"/>
+            <a:ext cx="2213345" cy="307777"/>
+          </a:xfrm>
+          <a:prstGeom prst="rect">
+            <a:avLst/>
+          </a:prstGeom>
+          <a:noFill/>
+        </p:spPr>
+        <p:txBody>
+          <a:bodyPr wrap="square" rtlCol="0">
+            <a:spAutoFit/>
+          </a:bodyPr>
+          <a:lstStyle/>
+          <a:p>
+            <a:r>
+              <a:rPr lang="en-US" sz="1400" dirty="0"/>
+              <a:t>At the spider (s=0)</a:t>
+            </a:r>
+          </a:p>
+        </p:txBody>
+      </p:sp>
+      <p:sp>
+        <p:nvSpPr>
+          <p:cNvPr id="10" name="TextBox 9">
+            <a:extLst>
+              <a:ext uri="{FF2B5EF4-FFF2-40B4-BE49-F238E27FC236}">
+                <a16:creationId xmlns:a16="http://schemas.microsoft.com/office/drawing/2014/main" id="{443A7814-F32A-3EC6-2C9C-CC9AF512B644}"/>
+              </a:ext>
+            </a:extLst>
+          </p:cNvPr>
+          <p:cNvSpPr txBox="1"/>
+          <p:nvPr/>
+        </p:nvSpPr>
+        <p:spPr>
+          <a:xfrm>
+            <a:off x="5452729" y="5790470"/>
+            <a:ext cx="2213345" cy="307777"/>
+          </a:xfrm>
+          <a:prstGeom prst="rect">
+            <a:avLst/>
+          </a:prstGeom>
+          <a:noFill/>
+        </p:spPr>
+        <p:txBody>
+          <a:bodyPr wrap="square" rtlCol="0">
+            <a:spAutoFit/>
+          </a:bodyPr>
+          <a:lstStyle/>
+          <a:p>
+            <a:r>
+              <a:rPr lang="en-US" sz="1400" dirty="0"/>
+              <a:t>At the tip (s=L)</a:t>
+            </a:r>
+          </a:p>
+        </p:txBody>
+      </p:sp>
+      <p:pic>
+        <p:nvPicPr>
+          <p:cNvPr id="11" name="Picture 10">
+            <a:extLst>
+              <a:ext uri="{FF2B5EF4-FFF2-40B4-BE49-F238E27FC236}">
+                <a16:creationId xmlns:a16="http://schemas.microsoft.com/office/drawing/2014/main" id="{DB4D0F63-954D-1B59-B352-03D86FDDC872}"/>
+              </a:ext>
+            </a:extLst>
+          </p:cNvPr>
+          <p:cNvPicPr>
+            <a:picLocks noChangeAspect="1"/>
+          </p:cNvPicPr>
+          <p:nvPr/>
+        </p:nvPicPr>
+        <p:blipFill>
+          <a:blip r:embed="rId4"/>
+          <a:stretch>
+            <a:fillRect/>
+          </a:stretch>
+        </p:blipFill>
+        <p:spPr>
+          <a:xfrm>
+            <a:off x="2029047" y="1197224"/>
+            <a:ext cx="7772400" cy="3179149"/>
+          </a:xfrm>
+          <a:prstGeom prst="rect">
+            <a:avLst/>
+          </a:prstGeom>
+        </p:spPr>
+      </p:pic>
+    </p:spTree>
+    <p:extLst>
+      <p:ext uri="{BB962C8B-B14F-4D97-AF65-F5344CB8AC3E}">
+        <p14:creationId xmlns:p14="http://schemas.microsoft.com/office/powerpoint/2010/main" val="1578927454"/>
+      </p:ext>
+    </p:extLst>
+  </p:cSld>
+  <p:clrMapOvr>
+    <a:masterClrMapping/>
+  </p:clrMapOvr>
+</p:sld>
+</file>
+
+<file path=ppt/slides/slide11.xml><?xml version="1.0" encoding="utf-8"?>
+<p:sld xmlns:a="http://schemas.openxmlformats.org/drawingml/2006/main" xmlns:r="http://schemas.openxmlformats.org/officeDocument/2006/relationships" xmlns:p="http://schemas.openxmlformats.org/presentationml/2006/main">
+  <p:cSld>
+    <p:spTree>
+      <p:nvGrpSpPr>
+        <p:cNvPr id="1" name="">
+          <a:extLst>
+            <a:ext uri="{FF2B5EF4-FFF2-40B4-BE49-F238E27FC236}">
+              <a16:creationId xmlns:a16="http://schemas.microsoft.com/office/drawing/2014/main" id="{205438B1-4EB1-BEF9-677C-7FF2BC825EA0}"/>
+            </a:ext>
+          </a:extLst>
+        </p:cNvPr>
+        <p:cNvGrpSpPr/>
+        <p:nvPr/>
+      </p:nvGrpSpPr>
+      <p:grpSpPr>
+        <a:xfrm>
+          <a:off x="0" y="0"/>
+          <a:ext cx="0" cy="0"/>
+          <a:chOff x="0" y="0"/>
+          <a:chExt cx="0" cy="0"/>
+        </a:xfrm>
+      </p:grpSpPr>
+      <p:sp>
+        <p:nvSpPr>
+          <p:cNvPr id="4" name="Title 3">
+            <a:extLst>
+              <a:ext uri="{FF2B5EF4-FFF2-40B4-BE49-F238E27FC236}">
+                <a16:creationId xmlns:a16="http://schemas.microsoft.com/office/drawing/2014/main" id="{11EF71E2-6D85-6C15-C804-BCA939A6FB12}"/>
+              </a:ext>
+            </a:extLst>
+          </p:cNvPr>
+          <p:cNvSpPr>
+            <a:spLocks noGrp="1"/>
+          </p:cNvSpPr>
+          <p:nvPr>
+            <p:ph type="title"/>
+          </p:nvPr>
+        </p:nvSpPr>
+        <p:spPr/>
+        <p:txBody>
+          <a:bodyPr>
+            <a:normAutofit fontScale="90000"/>
+          </a:bodyPr>
+          <a:lstStyle/>
+          <a:p>
+            <a:r>
+              <a:rPr lang="en-US" dirty="0">
+                <a:solidFill>
+                  <a:schemeClr val="bg1"/>
+                </a:solidFill>
+              </a:rPr>
+              <a:t>Air Flow</a:t>
+            </a:r>
+            <a:endParaRPr lang="ro-RO" dirty="0">
+              <a:solidFill>
+                <a:schemeClr val="bg1"/>
+              </a:solidFill>
+            </a:endParaRPr>
+          </a:p>
+        </p:txBody>
+      </p:sp>
+      <p:pic>
+        <p:nvPicPr>
+          <p:cNvPr id="5" name="Picture 4">
+            <a:extLst>
+              <a:ext uri="{FF2B5EF4-FFF2-40B4-BE49-F238E27FC236}">
+                <a16:creationId xmlns:a16="http://schemas.microsoft.com/office/drawing/2014/main" id="{2365BBEA-0844-E60E-21A8-46B44341F5C7}"/>
+              </a:ext>
+            </a:extLst>
+          </p:cNvPr>
+          <p:cNvPicPr>
+            <a:picLocks noChangeAspect="1"/>
+          </p:cNvPicPr>
+          <p:nvPr/>
+        </p:nvPicPr>
+        <p:blipFill>
+          <a:blip r:embed="rId2">
+            <a:clrChange>
+              <a:clrFrom>
+                <a:srgbClr val="000000"/>
+              </a:clrFrom>
+              <a:clrTo>
+                <a:srgbClr val="000000">
+                  <a:alpha val="0"/>
+                </a:srgbClr>
+              </a:clrTo>
+            </a:clrChange>
+            <a:extLst>
+              <a:ext uri="{28A0092B-C50C-407E-A947-70E740481C1C}">
+                <a14:useLocalDpi xmlns:a14="http://schemas.microsoft.com/office/drawing/2010/main" val="0"/>
+              </a:ext>
+            </a:extLst>
+          </a:blip>
+          <a:stretch>
+            <a:fillRect/>
+          </a:stretch>
+        </p:blipFill>
+        <p:spPr>
+          <a:xfrm>
+            <a:off x="10432471" y="6323329"/>
+            <a:ext cx="1492133" cy="496892"/>
+          </a:xfrm>
+          <a:prstGeom prst="rect">
+            <a:avLst/>
+          </a:prstGeom>
+        </p:spPr>
+      </p:pic>
+    </p:spTree>
+    <p:extLst>
+      <p:ext uri="{BB962C8B-B14F-4D97-AF65-F5344CB8AC3E}">
+        <p14:creationId xmlns:p14="http://schemas.microsoft.com/office/powerpoint/2010/main" val="3396241649"/>
+      </p:ext>
+    </p:extLst>
   </p:cSld>
   <p:clrMapOvr>
     <a:masterClrMapping/>
@@ -10308,6 +10743,210 @@
   <p:cSld>
     <p:spTree>
       <p:nvGrpSpPr>
+        <p:cNvPr id="1" name="">
+          <a:extLst>
+            <a:ext uri="{FF2B5EF4-FFF2-40B4-BE49-F238E27FC236}">
+              <a16:creationId xmlns:a16="http://schemas.microsoft.com/office/drawing/2014/main" id="{3FBF4375-0D4B-D933-EB3A-30EC73E60CEE}"/>
+            </a:ext>
+          </a:extLst>
+        </p:cNvPr>
+        <p:cNvGrpSpPr/>
+        <p:nvPr/>
+      </p:nvGrpSpPr>
+      <p:grpSpPr>
+        <a:xfrm>
+          <a:off x="0" y="0"/>
+          <a:ext cx="0" cy="0"/>
+          <a:chOff x="0" y="0"/>
+          <a:chExt cx="0" cy="0"/>
+        </a:xfrm>
+      </p:grpSpPr>
+      <p:pic>
+        <p:nvPicPr>
+          <p:cNvPr id="7" name="Online Media 6" descr="How Spiders Use Electricity to Fly | Decoder">
+            <a:hlinkClick r:id="" action="ppaction://media"/>
+            <a:extLst>
+              <a:ext uri="{FF2B5EF4-FFF2-40B4-BE49-F238E27FC236}">
+                <a16:creationId xmlns:a16="http://schemas.microsoft.com/office/drawing/2014/main" id="{B4AEBBA1-6F2E-F5C8-6530-196242B1CBF5}"/>
+              </a:ext>
+            </a:extLst>
+          </p:cNvPr>
+          <p:cNvPicPr>
+            <a:picLocks noRot="1" noChangeAspect="1"/>
+          </p:cNvPicPr>
+          <p:nvPr>
+            <a:videoFile r:link="rId1"/>
+          </p:nvPr>
+        </p:nvPicPr>
+        <p:blipFill>
+          <a:blip r:embed="rId3"/>
+          <a:stretch>
+            <a:fillRect/>
+          </a:stretch>
+        </p:blipFill>
+        <p:spPr>
+          <a:xfrm>
+            <a:off x="0" y="0"/>
+            <a:ext cx="12192000" cy="6888479"/>
+          </a:xfrm>
+          <a:prstGeom prst="rect">
+            <a:avLst/>
+          </a:prstGeom>
+        </p:spPr>
+      </p:pic>
+    </p:spTree>
+    <p:extLst>
+      <p:ext uri="{BB962C8B-B14F-4D97-AF65-F5344CB8AC3E}">
+        <p14:creationId xmlns:p14="http://schemas.microsoft.com/office/powerpoint/2010/main" val="1955246941"/>
+      </p:ext>
+    </p:extLst>
+  </p:cSld>
+  <p:clrMapOvr>
+    <a:masterClrMapping/>
+  </p:clrMapOvr>
+  <p:timing>
+    <p:tnLst>
+      <p:par>
+        <p:cTn id="1" dur="indefinite" restart="never" nodeType="tmRoot">
+          <p:childTnLst>
+            <p:seq concurrent="1" nextAc="seek">
+              <p:cTn id="2" dur="indefinite" nodeType="mainSeq">
+                <p:childTnLst>
+                  <p:par>
+                    <p:cTn id="3" fill="hold">
+                      <p:stCondLst>
+                        <p:cond delay="indefinite"/>
+                      </p:stCondLst>
+                      <p:childTnLst>
+                        <p:par>
+                          <p:cTn id="4" fill="hold">
+                            <p:stCondLst>
+                              <p:cond delay="0"/>
+                            </p:stCondLst>
+                            <p:childTnLst>
+                              <p:par>
+                                <p:cTn id="5" presetID="1" presetClass="mediacall" presetSubtype="0" fill="hold" nodeType="clickEffect">
+                                  <p:stCondLst>
+                                    <p:cond delay="0"/>
+                                  </p:stCondLst>
+                                  <p:childTnLst>
+                                    <p:cmd type="call" cmd="playFrom(0.0)">
+                                      <p:cBhvr>
+                                        <p:cTn id="6" dur="1" fill="hold"/>
+                                        <p:tgtEl>
+                                          <p:spTgt spid="7"/>
+                                        </p:tgtEl>
+                                      </p:cBhvr>
+                                    </p:cmd>
+                                  </p:childTnLst>
+                                </p:cTn>
+                              </p:par>
+                            </p:childTnLst>
+                          </p:cTn>
+                        </p:par>
+                      </p:childTnLst>
+                    </p:cTn>
+                  </p:par>
+                </p:childTnLst>
+              </p:cTn>
+              <p:prevCondLst>
+                <p:cond evt="onPrev" delay="0">
+                  <p:tgtEl>
+                    <p:sldTgt/>
+                  </p:tgtEl>
+                </p:cond>
+              </p:prevCondLst>
+              <p:nextCondLst>
+                <p:cond evt="onNext" delay="0">
+                  <p:tgtEl>
+                    <p:sldTgt/>
+                  </p:tgtEl>
+                </p:cond>
+              </p:nextCondLst>
+            </p:seq>
+            <p:video>
+              <p:cMediaNode vol="80000">
+                <p:cTn id="7" fill="hold" display="0">
+                  <p:stCondLst>
+                    <p:cond delay="indefinite"/>
+                  </p:stCondLst>
+                </p:cTn>
+                <p:tgtEl>
+                  <p:spTgt spid="7"/>
+                </p:tgtEl>
+              </p:cMediaNode>
+            </p:video>
+            <p:seq concurrent="1" nextAc="seek">
+              <p:cTn id="8" restart="whenNotActive" fill="hold" evtFilter="cancelBubble" nodeType="interactiveSeq">
+                <p:stCondLst>
+                  <p:cond evt="onClick" delay="0">
+                    <p:tgtEl>
+                      <p:spTgt spid="7"/>
+                    </p:tgtEl>
+                  </p:cond>
+                </p:stCondLst>
+                <p:endSync evt="end" delay="0">
+                  <p:rtn val="all"/>
+                </p:endSync>
+                <p:childTnLst>
+                  <p:par>
+                    <p:cTn id="9" fill="hold">
+                      <p:stCondLst>
+                        <p:cond delay="0"/>
+                      </p:stCondLst>
+                      <p:childTnLst>
+                        <p:par>
+                          <p:cTn id="10" fill="hold">
+                            <p:stCondLst>
+                              <p:cond delay="0"/>
+                            </p:stCondLst>
+                            <p:childTnLst>
+                              <p:par>
+                                <p:cTn id="11" presetID="2" presetClass="mediacall" presetSubtype="0" fill="hold" nodeType="clickEffect">
+                                  <p:stCondLst>
+                                    <p:cond delay="0"/>
+                                  </p:stCondLst>
+                                  <p:childTnLst>
+                                    <p:cmd type="call" cmd="togglePause">
+                                      <p:cBhvr>
+                                        <p:cTn id="12" dur="1" fill="hold"/>
+                                        <p:tgtEl>
+                                          <p:spTgt spid="7"/>
+                                        </p:tgtEl>
+                                      </p:cBhvr>
+                                    </p:cmd>
+                                  </p:childTnLst>
+                                </p:cTn>
+                              </p:par>
+                            </p:childTnLst>
+                          </p:cTn>
+                        </p:par>
+                      </p:childTnLst>
+                    </p:cTn>
+                  </p:par>
+                </p:childTnLst>
+              </p:cTn>
+              <p:nextCondLst>
+                <p:cond evt="onClick" delay="0">
+                  <p:tgtEl>
+                    <p:spTgt spid="7"/>
+                  </p:tgtEl>
+                </p:cond>
+              </p:nextCondLst>
+            </p:seq>
+          </p:childTnLst>
+        </p:cTn>
+      </p:par>
+    </p:tnLst>
+  </p:timing>
+</p:sld>
+</file>
+
+<file path=ppt/slides/slide4.xml><?xml version="1.0" encoding="utf-8"?>
+<p:sld xmlns:a="http://schemas.openxmlformats.org/drawingml/2006/main" xmlns:r="http://schemas.openxmlformats.org/officeDocument/2006/relationships" xmlns:p="http://schemas.openxmlformats.org/presentationml/2006/main">
+  <p:cSld>
+    <p:spTree>
+      <p:nvGrpSpPr>
         <p:cNvPr id="1" name=""/>
         <p:cNvGrpSpPr/>
         <p:nvPr/>
@@ -10373,7 +11012,7 @@
         </p:nvSpPr>
         <p:spPr>
           <a:xfrm>
-            <a:off x="4144651" y="3180303"/>
+            <a:off x="4144651" y="2648675"/>
             <a:ext cx="3612676" cy="646331"/>
           </a:xfrm>
           <a:prstGeom prst="rect">
@@ -10440,6 +11079,89 @@
           </a:prstGeom>
         </p:spPr>
       </p:pic>
+      <p:sp>
+        <p:nvSpPr>
+          <p:cNvPr id="5" name="TextBox 4">
+            <a:extLst>
+              <a:ext uri="{FF2B5EF4-FFF2-40B4-BE49-F238E27FC236}">
+                <a16:creationId xmlns:a16="http://schemas.microsoft.com/office/drawing/2014/main" id="{B57F676E-D298-A2B3-CA15-6ECE229EE687}"/>
+              </a:ext>
+            </a:extLst>
+          </p:cNvPr>
+          <p:cNvSpPr txBox="1"/>
+          <p:nvPr/>
+        </p:nvSpPr>
+        <p:spPr>
+          <a:xfrm>
+            <a:off x="3564836" y="3370544"/>
+            <a:ext cx="4904268" cy="338554"/>
+          </a:xfrm>
+          <a:prstGeom prst="rect">
+            <a:avLst/>
+          </a:prstGeom>
+          <a:noFill/>
+        </p:spPr>
+        <p:txBody>
+          <a:bodyPr wrap="square">
+            <a:spAutoFit/>
+          </a:bodyPr>
+          <a:lstStyle/>
+          <a:p>
+            <a:pPr>
+              <a:spcAft>
+                <a:spcPts val="0"/>
+              </a:spcAft>
+              <a:defRPr sz="3600" b="0">
+                <a:solidFill>
+                  <a:srgbClr val="852C86"/>
+                </a:solidFill>
+                <a:latin typeface="Arial"/>
+              </a:defRPr>
+            </a:pPr>
+            <a:r>
+              <a:rPr lang="en-US" sz="1600" dirty="0">
+                <a:solidFill>
+                  <a:schemeClr val="tx1">
+                    <a:lumMod val="95000"/>
+                    <a:lumOff val="5000"/>
+                  </a:schemeClr>
+                </a:solidFill>
+              </a:rPr>
+              <a:t>Resistive Force Theory (RFT) for Slender Filaments</a:t>
+            </a:r>
+          </a:p>
+        </p:txBody>
+      </p:sp>
+      <p:pic>
+        <p:nvPicPr>
+          <p:cNvPr id="7" name="Picture 6" descr="image-a18da2a85f95223479ab0b761025ad51.jpg">
+            <a:extLst>
+              <a:ext uri="{FF2B5EF4-FFF2-40B4-BE49-F238E27FC236}">
+                <a16:creationId xmlns:a16="http://schemas.microsoft.com/office/drawing/2014/main" id="{5FE0F124-1825-422A-E2E7-3511FDC098BC}"/>
+              </a:ext>
+            </a:extLst>
+          </p:cNvPr>
+          <p:cNvPicPr>
+            <a:picLocks noChangeAspect="1"/>
+          </p:cNvPicPr>
+          <p:nvPr/>
+        </p:nvPicPr>
+        <p:blipFill>
+          <a:blip r:embed="rId3"/>
+          <a:stretch>
+            <a:fillRect/>
+          </a:stretch>
+        </p:blipFill>
+        <p:spPr>
+          <a:xfrm>
+            <a:off x="4144651" y="3896557"/>
+            <a:ext cx="3436363" cy="2532692"/>
+          </a:xfrm>
+          <a:prstGeom prst="rect">
+            <a:avLst/>
+          </a:prstGeom>
+        </p:spPr>
+      </p:pic>
     </p:spTree>
     <p:extLst>
       <p:ext uri="{BB962C8B-B14F-4D97-AF65-F5344CB8AC3E}">
@@ -10453,12 +11175,18 @@
 </p:sld>
 </file>
 
-<file path=ppt/slides/slide4.xml><?xml version="1.0" encoding="utf-8"?>
+<file path=ppt/slides/slide5.xml><?xml version="1.0" encoding="utf-8"?>
 <p:sld xmlns:a="http://schemas.openxmlformats.org/drawingml/2006/main" xmlns:r="http://schemas.openxmlformats.org/officeDocument/2006/relationships" xmlns:p="http://schemas.openxmlformats.org/presentationml/2006/main">
   <p:cSld>
     <p:spTree>
       <p:nvGrpSpPr>
-        <p:cNvPr id="1" name=""/>
+        <p:cNvPr id="1" name="">
+          <a:extLst>
+            <a:ext uri="{FF2B5EF4-FFF2-40B4-BE49-F238E27FC236}">
+              <a16:creationId xmlns:a16="http://schemas.microsoft.com/office/drawing/2014/main" id="{268E1502-59C7-308A-F092-F47B8E8FBC86}"/>
+            </a:ext>
+          </a:extLst>
+        </p:cNvPr>
         <p:cNvGrpSpPr/>
         <p:nvPr/>
       </p:nvGrpSpPr>
@@ -10475,7 +11203,7 @@
           <p:cNvPr id="4" name="Title 3">
             <a:extLst>
               <a:ext uri="{FF2B5EF4-FFF2-40B4-BE49-F238E27FC236}">
-                <a16:creationId xmlns:a16="http://schemas.microsoft.com/office/drawing/2014/main" id="{02EA4550-F326-0AC7-13DE-7FF4EA0FE04F}"/>
+                <a16:creationId xmlns:a16="http://schemas.microsoft.com/office/drawing/2014/main" id="{CF52699A-B542-BF37-7E13-53A9CF172AED}"/>
               </a:ext>
             </a:extLst>
           </p:cNvPr>
@@ -10499,7 +11227,7 @@
                   <a:schemeClr val="bg1"/>
                 </a:solidFill>
               </a:rPr>
-              <a:t>Physical Model</a:t>
+              <a:t>Anisotropic Viscous Drag</a:t>
             </a:r>
             <a:endParaRPr lang="ro-RO" dirty="0">
               <a:solidFill>
@@ -10509,117 +11237,12 @@
           </a:p>
         </p:txBody>
       </p:sp>
-      <p:sp>
-        <p:nvSpPr>
-          <p:cNvPr id="6" name="TextBox 5">
-            <a:extLst>
-              <a:ext uri="{FF2B5EF4-FFF2-40B4-BE49-F238E27FC236}">
-                <a16:creationId xmlns:a16="http://schemas.microsoft.com/office/drawing/2014/main" id="{9FC31722-4350-0342-392E-0EB50DECD210}"/>
-              </a:ext>
-            </a:extLst>
-          </p:cNvPr>
-          <p:cNvSpPr txBox="1"/>
-          <p:nvPr/>
-        </p:nvSpPr>
-        <p:spPr>
-          <a:xfrm>
-            <a:off x="889810" y="1300345"/>
-            <a:ext cx="8388174" cy="400110"/>
-          </a:xfrm>
-          <a:prstGeom prst="rect">
-            <a:avLst/>
-          </a:prstGeom>
-          <a:noFill/>
-        </p:spPr>
-        <p:txBody>
-          <a:bodyPr wrap="square" rtlCol="0">
-            <a:spAutoFit/>
-          </a:bodyPr>
-          <a:lstStyle/>
-          <a:p>
-            <a:pPr marL="0" marR="0" lvl="0" indent="0" algn="l" defTabSz="914400" rtl="0" eaLnBrk="1" fontAlgn="auto" latinLnBrk="0" hangingPunct="1">
-              <a:lnSpc>
-                <a:spcPct val="100000"/>
-              </a:lnSpc>
-              <a:spcBef>
-                <a:spcPts val="0"/>
-              </a:spcBef>
-              <a:spcAft>
-                <a:spcPts val="0"/>
-              </a:spcAft>
-              <a:buClr>
-                <a:srgbClr val="000000"/>
-              </a:buClr>
-              <a:buSzTx/>
-              <a:buFont typeface="Arial"/>
-              <a:buNone/>
-              <a:tabLst/>
-              <a:defRPr/>
-            </a:pPr>
-            <a:r>
-              <a:rPr lang="en-US" sz="2000" kern="0" dirty="0">
-                <a:solidFill>
-                  <a:srgbClr val="000000"/>
-                </a:solidFill>
-                <a:latin typeface="Arial"/>
-                <a:cs typeface="Arial"/>
-                <a:sym typeface="Arial"/>
-              </a:rPr>
-              <a:t>Some text here </a:t>
-            </a:r>
-            <a:r>
-              <a:rPr lang="en-US" sz="2000" kern="0" dirty="0">
-                <a:solidFill>
-                  <a:schemeClr val="accent5">
-                    <a:lumMod val="75000"/>
-                  </a:schemeClr>
-                </a:solidFill>
-                <a:latin typeface="Arial"/>
-                <a:cs typeface="Arial"/>
-                <a:sym typeface="Arial"/>
-              </a:rPr>
-              <a:t>…</a:t>
-            </a:r>
-            <a:r>
-              <a:rPr kumimoji="0" lang="en-US" sz="2000" b="1" i="0" u="none" strike="noStrike" kern="0" cap="none" spc="0" normalizeH="0" baseline="0" noProof="0" dirty="0">
-                <a:ln>
-                  <a:noFill/>
-                </a:ln>
-                <a:solidFill>
-                  <a:srgbClr val="000000"/>
-                </a:solidFill>
-                <a:effectLst/>
-                <a:uLnTx/>
-                <a:uFillTx/>
-                <a:latin typeface="Arial"/>
-                <a:cs typeface="Arial"/>
-                <a:sym typeface="Arial"/>
-              </a:rPr>
-              <a:t>	</a:t>
-            </a:r>
-            <a:endParaRPr kumimoji="0" lang="ro-RO" sz="2000" b="1" i="0" u="none" strike="noStrike" kern="0" cap="none" spc="0" normalizeH="0" baseline="0" noProof="0" dirty="0">
-              <a:ln>
-                <a:noFill/>
-              </a:ln>
-              <a:solidFill>
-                <a:srgbClr val="000000"/>
-              </a:solidFill>
-              <a:effectLst/>
-              <a:uLnTx/>
-              <a:uFillTx/>
-              <a:latin typeface="Arial"/>
-              <a:cs typeface="Arial"/>
-              <a:sym typeface="Arial"/>
-            </a:endParaRPr>
-          </a:p>
-        </p:txBody>
-      </p:sp>
       <p:pic>
         <p:nvPicPr>
           <p:cNvPr id="5" name="Picture 4">
             <a:extLst>
               <a:ext uri="{FF2B5EF4-FFF2-40B4-BE49-F238E27FC236}">
-                <a16:creationId xmlns:a16="http://schemas.microsoft.com/office/drawing/2014/main" id="{84019BF7-235C-64CA-8107-6BFBA4BCAD06}"/>
+                <a16:creationId xmlns:a16="http://schemas.microsoft.com/office/drawing/2014/main" id="{8694D250-6DE1-016D-C35D-3C6B2831C549}"/>
               </a:ext>
             </a:extLst>
           </p:cNvPr>
@@ -10660,12 +11283,284 @@
           </a:prstGeom>
         </p:spPr>
       </p:pic>
+      <p:sp>
+        <p:nvSpPr>
+          <p:cNvPr id="2" name="TextBox 1">
+            <a:extLst>
+              <a:ext uri="{FF2B5EF4-FFF2-40B4-BE49-F238E27FC236}">
+                <a16:creationId xmlns:a16="http://schemas.microsoft.com/office/drawing/2014/main" id="{ABFE7CCA-D737-87C4-06A1-D36388FEFEA7}"/>
+              </a:ext>
+            </a:extLst>
+          </p:cNvPr>
+          <p:cNvSpPr txBox="1"/>
+          <p:nvPr/>
+        </p:nvSpPr>
+        <p:spPr>
+          <a:xfrm>
+            <a:off x="919716" y="1330452"/>
+            <a:ext cx="5486400" cy="329184"/>
+          </a:xfrm>
+          <a:prstGeom prst="rect">
+            <a:avLst/>
+          </a:prstGeom>
+          <a:noFill/>
+        </p:spPr>
+        <p:txBody>
+          <a:bodyPr wrap="square" lIns="0" tIns="0" rIns="0" bIns="0">
+            <a:spAutoFit/>
+          </a:bodyPr>
+          <a:lstStyle/>
+          <a:p>
+            <a:pPr>
+              <a:spcAft>
+                <a:spcPts val="0"/>
+              </a:spcAft>
+              <a:defRPr sz="2100" b="1">
+                <a:solidFill>
+                  <a:srgbClr val="852C86"/>
+                </a:solidFill>
+                <a:latin typeface="Arial"/>
+              </a:defRPr>
+            </a:pPr>
+            <a:r>
+              <a:t>Stokes regime  (Re ≪ 1)</a:t>
+            </a:r>
+          </a:p>
+        </p:txBody>
+      </p:sp>
+      <p:sp>
+        <p:nvSpPr>
+          <p:cNvPr id="3" name="TextBox 2">
+            <a:extLst>
+              <a:ext uri="{FF2B5EF4-FFF2-40B4-BE49-F238E27FC236}">
+                <a16:creationId xmlns:a16="http://schemas.microsoft.com/office/drawing/2014/main" id="{DB20F50C-E6ED-84EA-0D56-1B5A4F7979B3}"/>
+              </a:ext>
+            </a:extLst>
+          </p:cNvPr>
+          <p:cNvSpPr txBox="1"/>
+          <p:nvPr/>
+        </p:nvSpPr>
+        <p:spPr>
+          <a:xfrm>
+            <a:off x="919716" y="1741932"/>
+            <a:ext cx="5257800" cy="786384"/>
+          </a:xfrm>
+          <a:prstGeom prst="rect">
+            <a:avLst/>
+          </a:prstGeom>
+          <a:noFill/>
+        </p:spPr>
+        <p:txBody>
+          <a:bodyPr wrap="square" lIns="0" tIns="0" rIns="0" bIns="0">
+            <a:spAutoFit/>
+          </a:bodyPr>
+          <a:lstStyle/>
+          <a:p>
+            <a:pPr>
+              <a:spcAft>
+                <a:spcPts val="0"/>
+              </a:spcAft>
+              <a:defRPr sz="1900" b="0">
+                <a:solidFill>
+                  <a:srgbClr val="26232B"/>
+                </a:solidFill>
+                <a:latin typeface="Arial"/>
+              </a:defRPr>
+            </a:pPr>
+            <a:r>
+              <a:t>Inertia is negligible. The Stokes equations are linear, so drag is proportional to relative velocity.</a:t>
+            </a:r>
+          </a:p>
+        </p:txBody>
+      </p:sp>
+      <p:sp>
+        <p:nvSpPr>
+          <p:cNvPr id="9" name="TextBox 8">
+            <a:extLst>
+              <a:ext uri="{FF2B5EF4-FFF2-40B4-BE49-F238E27FC236}">
+                <a16:creationId xmlns:a16="http://schemas.microsoft.com/office/drawing/2014/main" id="{A6EB658A-5DA1-D368-8AAE-90C5FB7068E3}"/>
+              </a:ext>
+            </a:extLst>
+          </p:cNvPr>
+          <p:cNvSpPr txBox="1"/>
+          <p:nvPr/>
+        </p:nvSpPr>
+        <p:spPr>
+          <a:xfrm>
+            <a:off x="919716" y="3223260"/>
+            <a:ext cx="5257800" cy="320040"/>
+          </a:xfrm>
+          <a:prstGeom prst="rect">
+            <a:avLst/>
+          </a:prstGeom>
+          <a:noFill/>
+        </p:spPr>
+        <p:txBody>
+          <a:bodyPr wrap="square" lIns="0" tIns="0" rIns="0" bIns="0">
+            <a:spAutoFit/>
+          </a:bodyPr>
+          <a:lstStyle/>
+          <a:p>
+            <a:pPr>
+              <a:spcAft>
+                <a:spcPts val="0"/>
+              </a:spcAft>
+              <a:defRPr sz="2100" b="1">
+                <a:solidFill>
+                  <a:srgbClr val="852C86"/>
+                </a:solidFill>
+                <a:latin typeface="Arial"/>
+              </a:defRPr>
+            </a:pPr>
+            <a:r>
+              <a:t>Slender geometry effect</a:t>
+            </a:r>
+          </a:p>
+        </p:txBody>
+      </p:sp>
+      <p:sp>
+        <p:nvSpPr>
+          <p:cNvPr id="10" name="TextBox 9">
+            <a:extLst>
+              <a:ext uri="{FF2B5EF4-FFF2-40B4-BE49-F238E27FC236}">
+                <a16:creationId xmlns:a16="http://schemas.microsoft.com/office/drawing/2014/main" id="{1B4B0625-9243-0F83-D734-C37655F9B673}"/>
+              </a:ext>
+            </a:extLst>
+          </p:cNvPr>
+          <p:cNvSpPr txBox="1"/>
+          <p:nvPr/>
+        </p:nvSpPr>
+        <p:spPr>
+          <a:xfrm>
+            <a:off x="919716" y="3634740"/>
+            <a:ext cx="5257800" cy="822960"/>
+          </a:xfrm>
+          <a:prstGeom prst="rect">
+            <a:avLst/>
+          </a:prstGeom>
+          <a:noFill/>
+        </p:spPr>
+        <p:txBody>
+          <a:bodyPr wrap="square" lIns="0" tIns="0" rIns="0" bIns="0">
+            <a:spAutoFit/>
+          </a:bodyPr>
+          <a:lstStyle/>
+          <a:p>
+            <a:pPr>
+              <a:spcAft>
+                <a:spcPts val="0"/>
+              </a:spcAft>
+              <a:defRPr sz="1900" b="0">
+                <a:solidFill>
+                  <a:srgbClr val="26232B"/>
+                </a:solidFill>
+                <a:latin typeface="Arial"/>
+              </a:defRPr>
+            </a:pPr>
+            <a:r>
+              <a:rPr dirty="0"/>
+              <a:t>Tangential motion entrains fluid along adjacent segments, with less shear and lower resistance.</a:t>
+            </a:r>
+          </a:p>
+        </p:txBody>
+      </p:sp>
+      <p:sp>
+        <p:nvSpPr>
+          <p:cNvPr id="11" name="TextBox 10">
+            <a:extLst>
+              <a:ext uri="{FF2B5EF4-FFF2-40B4-BE49-F238E27FC236}">
+                <a16:creationId xmlns:a16="http://schemas.microsoft.com/office/drawing/2014/main" id="{7154715C-395D-5A02-A7DC-3F3D5AB732C0}"/>
+              </a:ext>
+            </a:extLst>
+          </p:cNvPr>
+          <p:cNvSpPr txBox="1"/>
+          <p:nvPr/>
+        </p:nvSpPr>
+        <p:spPr>
+          <a:xfrm>
+            <a:off x="919716" y="4704588"/>
+            <a:ext cx="5257800" cy="320040"/>
+          </a:xfrm>
+          <a:prstGeom prst="rect">
+            <a:avLst/>
+          </a:prstGeom>
+          <a:noFill/>
+        </p:spPr>
+        <p:txBody>
+          <a:bodyPr wrap="square" lIns="0" tIns="0" rIns="0" bIns="0">
+            <a:spAutoFit/>
+          </a:bodyPr>
+          <a:lstStyle/>
+          <a:p>
+            <a:pPr>
+              <a:spcAft>
+                <a:spcPts val="0"/>
+              </a:spcAft>
+              <a:defRPr sz="2100" b="1">
+                <a:solidFill>
+                  <a:srgbClr val="852C86"/>
+                </a:solidFill>
+                <a:latin typeface="Arial"/>
+              </a:defRPr>
+            </a:pPr>
+            <a:r>
+              <a:rPr dirty="0"/>
+              <a:t>Perpendicular resistance</a:t>
+            </a:r>
+          </a:p>
+        </p:txBody>
+      </p:sp>
+      <p:sp>
+        <p:nvSpPr>
+          <p:cNvPr id="12" name="TextBox 11">
+            <a:extLst>
+              <a:ext uri="{FF2B5EF4-FFF2-40B4-BE49-F238E27FC236}">
+                <a16:creationId xmlns:a16="http://schemas.microsoft.com/office/drawing/2014/main" id="{A19366BD-E33F-E5AA-FB2E-BA9EC3CE0E9B}"/>
+              </a:ext>
+            </a:extLst>
+          </p:cNvPr>
+          <p:cNvSpPr txBox="1"/>
+          <p:nvPr/>
+        </p:nvSpPr>
+        <p:spPr>
+          <a:xfrm>
+            <a:off x="919716" y="5116068"/>
+            <a:ext cx="5257800" cy="822960"/>
+          </a:xfrm>
+          <a:prstGeom prst="rect">
+            <a:avLst/>
+          </a:prstGeom>
+          <a:noFill/>
+        </p:spPr>
+        <p:txBody>
+          <a:bodyPr wrap="square" lIns="0" tIns="0" rIns="0" bIns="0">
+            <a:spAutoFit/>
+          </a:bodyPr>
+          <a:lstStyle/>
+          <a:p>
+            <a:pPr>
+              <a:spcAft>
+                <a:spcPts val="0"/>
+              </a:spcAft>
+              <a:defRPr sz="1900" b="0">
+                <a:solidFill>
+                  <a:srgbClr val="26232B"/>
+                </a:solidFill>
+                <a:latin typeface="Arial"/>
+              </a:defRPr>
+            </a:pPr>
+            <a:r>
+              <a:t>Transverse motion displaces fluid around the cross-section, producing greater viscous dissipation.</a:t>
+            </a:r>
+          </a:p>
+        </p:txBody>
+      </p:sp>
       <p:pic>
         <p:nvPicPr>
-          <p:cNvPr id="7" name="Picture 6">
+          <p:cNvPr id="13" name="Picture 12" descr="image-a2547147ff2f44f5f05779dc354a5aa3.jpg">
             <a:extLst>
               <a:ext uri="{FF2B5EF4-FFF2-40B4-BE49-F238E27FC236}">
-                <a16:creationId xmlns:a16="http://schemas.microsoft.com/office/drawing/2014/main" id="{A85EABDB-53B3-BBA9-DD2E-A404912D054A}"/>
+                <a16:creationId xmlns:a16="http://schemas.microsoft.com/office/drawing/2014/main" id="{3F57B484-4895-F0B2-2AEA-24CB6AAA7089}"/>
               </a:ext>
             </a:extLst>
           </p:cNvPr>
@@ -10682,8 +11577,6081 @@
         </p:blipFill>
         <p:spPr>
           <a:xfrm>
-            <a:off x="2128582" y="2473701"/>
-            <a:ext cx="7772400" cy="3083954"/>
+            <a:off x="6971351" y="1303020"/>
+            <a:ext cx="4355928" cy="4251960"/>
+          </a:xfrm>
+          <a:prstGeom prst="rect">
+            <a:avLst/>
+          </a:prstGeom>
+        </p:spPr>
+      </p:pic>
+      <p:sp>
+        <p:nvSpPr>
+          <p:cNvPr id="14" name="TextBox 13">
+            <a:extLst>
+              <a:ext uri="{FF2B5EF4-FFF2-40B4-BE49-F238E27FC236}">
+                <a16:creationId xmlns:a16="http://schemas.microsoft.com/office/drawing/2014/main" id="{0A2C4733-B88D-0489-13DD-50C80223D96C}"/>
+              </a:ext>
+            </a:extLst>
+          </p:cNvPr>
+          <p:cNvSpPr txBox="1"/>
+          <p:nvPr/>
+        </p:nvSpPr>
+        <p:spPr>
+          <a:xfrm>
+            <a:off x="7046196" y="5527548"/>
+            <a:ext cx="4206240" cy="393192"/>
+          </a:xfrm>
+          <a:prstGeom prst="rect">
+            <a:avLst/>
+          </a:prstGeom>
+          <a:noFill/>
+        </p:spPr>
+        <p:txBody>
+          <a:bodyPr wrap="square" lIns="0" tIns="0" rIns="0" bIns="0">
+            <a:spAutoFit/>
+          </a:bodyPr>
+          <a:lstStyle/>
+          <a:p>
+            <a:pPr>
+              <a:spcAft>
+                <a:spcPts val="0"/>
+              </a:spcAft>
+              <a:defRPr sz="2700" b="0">
+                <a:solidFill>
+                  <a:srgbClr val="852C86"/>
+                </a:solidFill>
+                <a:latin typeface="Cambria Math"/>
+              </a:defRPr>
+            </a:pPr>
+            <a:r>
+              <a:t>η⊥ ≈ 2η∥</a:t>
+            </a:r>
+          </a:p>
+        </p:txBody>
+      </p:sp>
+      <p:sp>
+        <p:nvSpPr>
+          <p:cNvPr id="15" name="TextBox 14">
+            <a:extLst>
+              <a:ext uri="{FF2B5EF4-FFF2-40B4-BE49-F238E27FC236}">
+                <a16:creationId xmlns:a16="http://schemas.microsoft.com/office/drawing/2014/main" id="{00A398B5-BFE4-F51C-8C32-50B0FEDDE576}"/>
+              </a:ext>
+            </a:extLst>
+          </p:cNvPr>
+          <p:cNvSpPr txBox="1"/>
+          <p:nvPr/>
+        </p:nvSpPr>
+        <p:spPr>
+          <a:xfrm>
+            <a:off x="7046196" y="5993892"/>
+            <a:ext cx="4206240" cy="228600"/>
+          </a:xfrm>
+          <a:prstGeom prst="rect">
+            <a:avLst/>
+          </a:prstGeom>
+          <a:noFill/>
+        </p:spPr>
+        <p:txBody>
+          <a:bodyPr wrap="square" lIns="0" tIns="0" rIns="0" bIns="0">
+            <a:spAutoFit/>
+          </a:bodyPr>
+          <a:lstStyle/>
+          <a:p>
+            <a:pPr>
+              <a:spcAft>
+                <a:spcPts val="0"/>
+              </a:spcAft>
+              <a:defRPr sz="1400" b="0">
+                <a:solidFill>
+                  <a:srgbClr val="524B59"/>
+                </a:solidFill>
+                <a:latin typeface="Arial"/>
+              </a:defRPr>
+            </a:pPr>
+            <a:r>
+              <a:t>Slender-filament limit</a:t>
+            </a:r>
+          </a:p>
+        </p:txBody>
+      </p:sp>
+      <mc:AlternateContent xmlns:mc="http://schemas.openxmlformats.org/markup-compatibility/2006">
+        <mc:Choice xmlns:a14="http://schemas.microsoft.com/office/drawing/2010/main" Requires="a14">
+          <p:sp>
+            <p:nvSpPr>
+              <p:cNvPr id="16" name="TextBox 15">
+                <a:extLst>
+                  <a:ext uri="{FF2B5EF4-FFF2-40B4-BE49-F238E27FC236}">
+                    <a16:creationId xmlns:a16="http://schemas.microsoft.com/office/drawing/2014/main" id="{E7F6313B-6138-EEBB-3923-1589B94582FF}"/>
+                  </a:ext>
+                </a:extLst>
+              </p:cNvPr>
+              <p:cNvSpPr txBox="1"/>
+              <p:nvPr/>
+            </p:nvSpPr>
+            <p:spPr>
+              <a:xfrm>
+                <a:off x="2510356" y="2589246"/>
+                <a:ext cx="1152560" cy="276999"/>
+              </a:xfrm>
+              <a:prstGeom prst="rect">
+                <a:avLst/>
+              </a:prstGeom>
+              <a:noFill/>
+            </p:spPr>
+            <p:txBody>
+              <a:bodyPr wrap="none" lIns="0" tIns="0" rIns="0" bIns="0" rtlCol="0">
+                <a:spAutoFit/>
+              </a:bodyPr>
+              <a:lstStyle/>
+              <a:p>
+                <a14:m>
+                  <m:oMathPara xmlns:m="http://schemas.openxmlformats.org/officeDocument/2006/math">
+                    <m:oMathParaPr>
+                      <m:jc m:val="centerGroup"/>
+                    </m:oMathParaPr>
+                    <m:oMath xmlns:m="http://schemas.openxmlformats.org/officeDocument/2006/math">
+                      <m:r>
+                        <m:rPr>
+                          <m:sty m:val="p"/>
+                        </m:rPr>
+                        <a:rPr lang="en-US" b="0" i="1" smtClean="0">
+                          <a:latin typeface="Cambria Math" panose="02040503050406030204" pitchFamily="18" charset="0"/>
+                        </a:rPr>
+                        <m:t>∇p</m:t>
+                      </m:r>
+                      <m:r>
+                        <a:rPr lang="en-US" b="0" i="1" smtClean="0">
+                          <a:latin typeface="Cambria Math" panose="02040503050406030204" pitchFamily="18" charset="0"/>
+                        </a:rPr>
+                        <m:t>=</m:t>
+                      </m:r>
+                      <m:r>
+                        <m:rPr>
+                          <m:sty m:val="p"/>
+                        </m:rPr>
+                        <a:rPr lang="en-US" b="0" i="1" smtClean="0">
+                          <a:latin typeface="Cambria Math" panose="02040503050406030204" pitchFamily="18" charset="0"/>
+                        </a:rPr>
+                        <m:t>μ∇</m:t>
+                      </m:r>
+                      <m:r>
+                        <a:rPr lang="en-US" b="0" i="1" baseline="30000" smtClean="0">
+                          <a:latin typeface="Cambria Math" panose="02040503050406030204" pitchFamily="18" charset="0"/>
+                        </a:rPr>
+                        <m:t>2</m:t>
+                      </m:r>
+                      <m:r>
+                        <m:rPr>
+                          <m:sty m:val="p"/>
+                        </m:rPr>
+                        <a:rPr lang="en-US" b="0" i="1" smtClean="0">
+                          <a:latin typeface="Cambria Math" panose="02040503050406030204" pitchFamily="18" charset="0"/>
+                        </a:rPr>
+                        <m:t>u</m:t>
+                      </m:r>
+                    </m:oMath>
+                  </m:oMathPara>
+                </a14:m>
+                <a:endParaRPr lang="en-US" dirty="0"/>
+              </a:p>
+            </p:txBody>
+          </p:sp>
+        </mc:Choice>
+        <mc:Fallback>
+          <p:sp>
+            <p:nvSpPr>
+              <p:cNvPr id="16" name="TextBox 15">
+                <a:extLst>
+                  <a:ext uri="{FF2B5EF4-FFF2-40B4-BE49-F238E27FC236}">
+                    <a16:creationId xmlns:a16="http://schemas.microsoft.com/office/drawing/2014/main" id="{E7F6313B-6138-EEBB-3923-1589B94582FF}"/>
+                  </a:ext>
+                </a:extLst>
+              </p:cNvPr>
+              <p:cNvSpPr txBox="1">
+                <a:spLocks noRot="1" noChangeAspect="1" noMove="1" noResize="1" noEditPoints="1" noAdjustHandles="1" noChangeArrowheads="1" noChangeShapeType="1" noTextEdit="1"/>
+              </p:cNvSpPr>
+              <p:nvPr/>
+            </p:nvSpPr>
+            <p:spPr>
+              <a:xfrm>
+                <a:off x="2510356" y="2589246"/>
+                <a:ext cx="1152560" cy="276999"/>
+              </a:xfrm>
+              <a:prstGeom prst="rect">
+                <a:avLst/>
+              </a:prstGeom>
+              <a:blipFill>
+                <a:blip r:embed="rId4"/>
+                <a:stretch>
+                  <a:fillRect l="-2174" b="-31818"/>
+                </a:stretch>
+              </a:blipFill>
+            </p:spPr>
+            <p:txBody>
+              <a:bodyPr/>
+              <a:lstStyle/>
+              <a:p>
+                <a:r>
+                  <a:rPr lang="en-US">
+                    <a:noFill/>
+                  </a:rPr>
+                  <a:t> </a:t>
+                </a:r>
+              </a:p>
+            </p:txBody>
+          </p:sp>
+        </mc:Fallback>
+      </mc:AlternateContent>
+    </p:spTree>
+    <p:extLst>
+      <p:ext uri="{BB962C8B-B14F-4D97-AF65-F5344CB8AC3E}">
+        <p14:creationId xmlns:p14="http://schemas.microsoft.com/office/powerpoint/2010/main" val="3320160853"/>
+      </p:ext>
+    </p:extLst>
+  </p:cSld>
+  <p:clrMapOvr>
+    <a:masterClrMapping/>
+  </p:clrMapOvr>
+</p:sld>
+</file>
+
+<file path=ppt/slides/slide6.xml><?xml version="1.0" encoding="utf-8"?>
+<p:sld xmlns:a="http://schemas.openxmlformats.org/drawingml/2006/main" xmlns:r="http://schemas.openxmlformats.org/officeDocument/2006/relationships" xmlns:p="http://schemas.openxmlformats.org/presentationml/2006/main">
+  <p:cSld>
+    <p:spTree>
+      <p:nvGrpSpPr>
+        <p:cNvPr id="1" name="">
+          <a:extLst>
+            <a:ext uri="{FF2B5EF4-FFF2-40B4-BE49-F238E27FC236}">
+              <a16:creationId xmlns:a16="http://schemas.microsoft.com/office/drawing/2014/main" id="{B0F3C618-E773-F542-FB9D-A0E3599B43F8}"/>
+            </a:ext>
+          </a:extLst>
+        </p:cNvPr>
+        <p:cNvGrpSpPr/>
+        <p:nvPr/>
+      </p:nvGrpSpPr>
+      <p:grpSpPr>
+        <a:xfrm>
+          <a:off x="0" y="0"/>
+          <a:ext cx="0" cy="0"/>
+          <a:chOff x="0" y="0"/>
+          <a:chExt cx="0" cy="0"/>
+        </a:xfrm>
+      </p:grpSpPr>
+      <p:sp>
+        <p:nvSpPr>
+          <p:cNvPr id="4" name="Title 3">
+            <a:extLst>
+              <a:ext uri="{FF2B5EF4-FFF2-40B4-BE49-F238E27FC236}">
+                <a16:creationId xmlns:a16="http://schemas.microsoft.com/office/drawing/2014/main" id="{CEE2C8BB-27BD-89C2-1DEA-507755A5BD5B}"/>
+              </a:ext>
+            </a:extLst>
+          </p:cNvPr>
+          <p:cNvSpPr>
+            <a:spLocks noGrp="1"/>
+          </p:cNvSpPr>
+          <p:nvPr>
+            <p:ph type="title"/>
+          </p:nvPr>
+        </p:nvSpPr>
+        <p:spPr/>
+        <p:txBody>
+          <a:bodyPr>
+            <a:normAutofit fontScale="90000"/>
+          </a:bodyPr>
+          <a:lstStyle/>
+          <a:p>
+            <a:r>
+              <a:rPr lang="en-US" dirty="0">
+                <a:solidFill>
+                  <a:schemeClr val="bg1"/>
+                </a:solidFill>
+              </a:rPr>
+              <a:t>Local Kinematic Decomposition</a:t>
+            </a:r>
+            <a:endParaRPr lang="ro-RO" dirty="0">
+              <a:solidFill>
+                <a:schemeClr val="bg1"/>
+              </a:solidFill>
+            </a:endParaRPr>
+          </a:p>
+        </p:txBody>
+      </p:sp>
+      <p:pic>
+        <p:nvPicPr>
+          <p:cNvPr id="5" name="Picture 4">
+            <a:extLst>
+              <a:ext uri="{FF2B5EF4-FFF2-40B4-BE49-F238E27FC236}">
+                <a16:creationId xmlns:a16="http://schemas.microsoft.com/office/drawing/2014/main" id="{DE4BA56F-20CB-0CBC-CF10-DD0F8BD26566}"/>
+              </a:ext>
+            </a:extLst>
+          </p:cNvPr>
+          <p:cNvPicPr>
+            <a:picLocks noChangeAspect="1"/>
+          </p:cNvPicPr>
+          <p:nvPr/>
+        </p:nvPicPr>
+        <p:blipFill>
+          <a:blip r:embed="rId2">
+            <a:clrChange>
+              <a:clrFrom>
+                <a:srgbClr val="000000"/>
+              </a:clrFrom>
+              <a:clrTo>
+                <a:srgbClr val="000000">
+                  <a:alpha val="0"/>
+                </a:srgbClr>
+              </a:clrTo>
+            </a:clrChange>
+            <a:extLst>
+              <a:ext uri="{28A0092B-C50C-407E-A947-70E740481C1C}">
+                <a14:useLocalDpi xmlns:a14="http://schemas.microsoft.com/office/drawing/2010/main" val="0"/>
+              </a:ext>
+            </a:extLst>
+          </a:blip>
+          <a:stretch>
+            <a:fillRect/>
+          </a:stretch>
+        </p:blipFill>
+        <p:spPr>
+          <a:xfrm>
+            <a:off x="10432471" y="6323329"/>
+            <a:ext cx="1492133" cy="496892"/>
+          </a:xfrm>
+          <a:prstGeom prst="rect">
+            <a:avLst/>
+          </a:prstGeom>
+        </p:spPr>
+      </p:pic>
+      <p:grpSp>
+        <p:nvGrpSpPr>
+          <p:cNvPr id="43" name="Group 42">
+            <a:extLst>
+              <a:ext uri="{FF2B5EF4-FFF2-40B4-BE49-F238E27FC236}">
+                <a16:creationId xmlns:a16="http://schemas.microsoft.com/office/drawing/2014/main" id="{C2A6692C-A01E-C3D0-9548-EE6401ECB2FF}"/>
+              </a:ext>
+            </a:extLst>
+          </p:cNvPr>
+          <p:cNvGrpSpPr/>
+          <p:nvPr/>
+        </p:nvGrpSpPr>
+        <p:grpSpPr>
+          <a:xfrm>
+            <a:off x="6622093" y="1037292"/>
+            <a:ext cx="4079424" cy="3668555"/>
+            <a:chOff x="7233733" y="-390755"/>
+            <a:chExt cx="4079424" cy="3668555"/>
+          </a:xfrm>
+        </p:grpSpPr>
+        <p:sp>
+          <p:nvSpPr>
+            <p:cNvPr id="6" name="Arc 5">
+              <a:extLst>
+                <a:ext uri="{FF2B5EF4-FFF2-40B4-BE49-F238E27FC236}">
+                  <a16:creationId xmlns:a16="http://schemas.microsoft.com/office/drawing/2014/main" id="{B935FFF4-1DB6-BB77-CBC5-35EEF6133ED4}"/>
+                </a:ext>
+              </a:extLst>
+            </p:cNvPr>
+            <p:cNvSpPr/>
+            <p:nvPr/>
+          </p:nvSpPr>
+          <p:spPr>
+            <a:xfrm rot="6171526">
+              <a:off x="7118331" y="-275353"/>
+              <a:ext cx="3668555" cy="3437752"/>
+            </a:xfrm>
+            <a:prstGeom prst="arc">
+              <a:avLst/>
+            </a:prstGeom>
+            <a:ln w="15875"/>
+          </p:spPr>
+          <p:style>
+            <a:lnRef idx="2">
+              <a:schemeClr val="dk1"/>
+            </a:lnRef>
+            <a:fillRef idx="0">
+              <a:schemeClr val="dk1"/>
+            </a:fillRef>
+            <a:effectRef idx="1">
+              <a:schemeClr val="dk1"/>
+            </a:effectRef>
+            <a:fontRef idx="minor">
+              <a:schemeClr val="tx1"/>
+            </a:fontRef>
+          </p:style>
+          <p:txBody>
+            <a:bodyPr rtlCol="0" anchor="ctr"/>
+            <a:lstStyle/>
+            <a:p>
+              <a:pPr algn="ctr"/>
+              <a:endParaRPr lang="en-US"/>
+            </a:p>
+          </p:txBody>
+        </p:sp>
+        <p:cxnSp>
+          <p:nvCxnSpPr>
+            <p:cNvPr id="8" name="Straight Arrow Connector 7">
+              <a:extLst>
+                <a:ext uri="{FF2B5EF4-FFF2-40B4-BE49-F238E27FC236}">
+                  <a16:creationId xmlns:a16="http://schemas.microsoft.com/office/drawing/2014/main" id="{8FB1F292-F167-A085-2D41-2F96B49E0404}"/>
+                </a:ext>
+              </a:extLst>
+            </p:cNvPr>
+            <p:cNvCxnSpPr>
+              <a:cxnSpLocks/>
+            </p:cNvCxnSpPr>
+            <p:nvPr/>
+          </p:nvCxnSpPr>
+          <p:spPr>
+            <a:xfrm flipV="1">
+              <a:off x="10069033" y="1956391"/>
+              <a:ext cx="1084518" cy="861237"/>
+            </a:xfrm>
+            <a:prstGeom prst="straightConnector1">
+              <a:avLst/>
+            </a:prstGeom>
+            <a:ln w="19050">
+              <a:tailEnd type="triangle"/>
+            </a:ln>
+          </p:spPr>
+          <p:style>
+            <a:lnRef idx="1">
+              <a:schemeClr val="accent1"/>
+            </a:lnRef>
+            <a:fillRef idx="0">
+              <a:schemeClr val="accent1"/>
+            </a:fillRef>
+            <a:effectRef idx="0">
+              <a:schemeClr val="accent1"/>
+            </a:effectRef>
+            <a:fontRef idx="minor">
+              <a:schemeClr val="tx1"/>
+            </a:fontRef>
+          </p:style>
+        </p:cxnSp>
+        <p:cxnSp>
+          <p:nvCxnSpPr>
+            <p:cNvPr id="18" name="Straight Arrow Connector 17">
+              <a:extLst>
+                <a:ext uri="{FF2B5EF4-FFF2-40B4-BE49-F238E27FC236}">
+                  <a16:creationId xmlns:a16="http://schemas.microsoft.com/office/drawing/2014/main" id="{792BBC98-3417-3122-4C2A-EF4C954F7299}"/>
+                </a:ext>
+              </a:extLst>
+            </p:cNvPr>
+            <p:cNvCxnSpPr>
+              <a:cxnSpLocks/>
+            </p:cNvCxnSpPr>
+            <p:nvPr/>
+          </p:nvCxnSpPr>
+          <p:spPr>
+            <a:xfrm flipH="1" flipV="1">
+              <a:off x="9473609" y="2158409"/>
+              <a:ext cx="595424" cy="659219"/>
+            </a:xfrm>
+            <a:prstGeom prst="straightConnector1">
+              <a:avLst/>
+            </a:prstGeom>
+            <a:ln w="22225">
+              <a:tailEnd type="triangle"/>
+            </a:ln>
+          </p:spPr>
+          <p:style>
+            <a:lnRef idx="1">
+              <a:schemeClr val="accent1"/>
+            </a:lnRef>
+            <a:fillRef idx="0">
+              <a:schemeClr val="accent1"/>
+            </a:fillRef>
+            <a:effectRef idx="0">
+              <a:schemeClr val="accent1"/>
+            </a:effectRef>
+            <a:fontRef idx="minor">
+              <a:schemeClr val="tx1"/>
+            </a:fontRef>
+          </p:style>
+        </p:cxnSp>
+        <mc:AlternateContent xmlns:mc="http://schemas.openxmlformats.org/markup-compatibility/2006">
+          <mc:Choice xmlns:a14="http://schemas.microsoft.com/office/drawing/2010/main" Requires="a14">
+            <p:sp>
+              <p:nvSpPr>
+                <p:cNvPr id="23" name="TextBox 22">
+                  <a:extLst>
+                    <a:ext uri="{FF2B5EF4-FFF2-40B4-BE49-F238E27FC236}">
+                      <a16:creationId xmlns:a16="http://schemas.microsoft.com/office/drawing/2014/main" id="{5881CCE0-202D-4A2D-F6C1-E86138DA0292}"/>
+                    </a:ext>
+                  </a:extLst>
+                </p:cNvPr>
+                <p:cNvSpPr txBox="1"/>
+                <p:nvPr/>
+              </p:nvSpPr>
+              <p:spPr>
+                <a:xfrm>
+                  <a:off x="11043917" y="2104111"/>
+                  <a:ext cx="269240" cy="282898"/>
+                </a:xfrm>
+                <a:prstGeom prst="rect">
+                  <a:avLst/>
+                </a:prstGeom>
+                <a:noFill/>
+              </p:spPr>
+              <p:txBody>
+                <a:bodyPr wrap="none" lIns="0" tIns="0" rIns="0" bIns="0" rtlCol="0">
+                  <a:spAutoFit/>
+                </a:bodyPr>
+                <a:lstStyle/>
+                <a:p>
+                  <a14:m>
+                    <m:oMathPara xmlns:m="http://schemas.openxmlformats.org/officeDocument/2006/math">
+                      <m:oMathParaPr>
+                        <m:jc m:val="centerGroup"/>
+                      </m:oMathParaPr>
+                      <m:oMath xmlns:m="http://schemas.openxmlformats.org/officeDocument/2006/math">
+                        <m:acc>
+                          <m:accPr>
+                            <m:chr m:val="⃗"/>
+                            <m:ctrlPr>
+                              <a:rPr lang="en-US" i="1" smtClean="0">
+                                <a:latin typeface="Cambria Math" panose="02040503050406030204" pitchFamily="18" charset="0"/>
+                              </a:rPr>
+                            </m:ctrlPr>
+                          </m:accPr>
+                          <m:e>
+                            <m:sSub>
+                              <m:sSubPr>
+                                <m:ctrlPr>
+                                  <a:rPr lang="en-US" i="1">
+                                    <a:latin typeface="Cambria Math" panose="02040503050406030204" pitchFamily="18" charset="0"/>
+                                  </a:rPr>
+                                </m:ctrlPr>
+                              </m:sSubPr>
+                              <m:e>
+                                <m:r>
+                                  <m:rPr>
+                                    <m:sty m:val="p"/>
+                                  </m:rPr>
+                                  <a:rPr lang="en-US" i="1">
+                                    <a:latin typeface="Cambria Math" panose="02040503050406030204" pitchFamily="18" charset="0"/>
+                                  </a:rPr>
+                                  <m:t>v</m:t>
+                                </m:r>
+                              </m:e>
+                              <m:sub>
+                                <m:r>
+                                  <a:rPr lang="en-US" i="1">
+                                    <a:latin typeface="Cambria Math" panose="02040503050406030204" pitchFamily="18" charset="0"/>
+                                    <a:ea typeface="Cambria Math" panose="02040503050406030204" pitchFamily="18" charset="0"/>
+                                  </a:rPr>
+                                  <m:t>∥</m:t>
+                                </m:r>
+                              </m:sub>
+                            </m:sSub>
+                          </m:e>
+                        </m:acc>
+                      </m:oMath>
+                    </m:oMathPara>
+                  </a14:m>
+                  <a:endParaRPr lang="en-US" dirty="0"/>
+                </a:p>
+              </p:txBody>
+            </p:sp>
+          </mc:Choice>
+          <mc:Fallback>
+            <p:sp>
+              <p:nvSpPr>
+                <p:cNvPr id="23" name="TextBox 22">
+                  <a:extLst>
+                    <a:ext uri="{FF2B5EF4-FFF2-40B4-BE49-F238E27FC236}">
+                      <a16:creationId xmlns:a16="http://schemas.microsoft.com/office/drawing/2014/main" id="{5881CCE0-202D-4A2D-F6C1-E86138DA0292}"/>
+                    </a:ext>
+                  </a:extLst>
+                </p:cNvPr>
+                <p:cNvSpPr txBox="1">
+                  <a:spLocks noRot="1" noChangeAspect="1" noMove="1" noResize="1" noEditPoints="1" noAdjustHandles="1" noChangeArrowheads="1" noChangeShapeType="1" noTextEdit="1"/>
+                </p:cNvSpPr>
+                <p:nvPr/>
+              </p:nvSpPr>
+              <p:spPr>
+                <a:xfrm>
+                  <a:off x="11043917" y="2104111"/>
+                  <a:ext cx="269240" cy="282898"/>
+                </a:xfrm>
+                <a:prstGeom prst="rect">
+                  <a:avLst/>
+                </a:prstGeom>
+                <a:blipFill>
+                  <a:blip r:embed="rId3"/>
+                  <a:stretch>
+                    <a:fillRect l="-9091" r="-9091" b="-25000"/>
+                  </a:stretch>
+                </a:blipFill>
+              </p:spPr>
+              <p:txBody>
+                <a:bodyPr/>
+                <a:lstStyle/>
+                <a:p>
+                  <a:r>
+                    <a:rPr lang="en-US">
+                      <a:noFill/>
+                    </a:rPr>
+                    <a:t> </a:t>
+                  </a:r>
+                </a:p>
+              </p:txBody>
+            </p:sp>
+          </mc:Fallback>
+        </mc:AlternateContent>
+        <mc:AlternateContent xmlns:mc="http://schemas.openxmlformats.org/markup-compatibility/2006">
+          <mc:Choice xmlns:a14="http://schemas.microsoft.com/office/drawing/2010/main" Requires="a14">
+            <p:sp>
+              <p:nvSpPr>
+                <p:cNvPr id="24" name="TextBox 23">
+                  <a:extLst>
+                    <a:ext uri="{FF2B5EF4-FFF2-40B4-BE49-F238E27FC236}">
+                      <a16:creationId xmlns:a16="http://schemas.microsoft.com/office/drawing/2014/main" id="{CF583CA0-B462-E20D-E9F0-4FA08212E2A9}"/>
+                    </a:ext>
+                  </a:extLst>
+                </p:cNvPr>
+                <p:cNvSpPr txBox="1"/>
+                <p:nvPr/>
+              </p:nvSpPr>
+              <p:spPr>
+                <a:xfrm>
+                  <a:off x="9179383" y="2124739"/>
+                  <a:ext cx="309315" cy="276999"/>
+                </a:xfrm>
+                <a:prstGeom prst="rect">
+                  <a:avLst/>
+                </a:prstGeom>
+                <a:noFill/>
+              </p:spPr>
+              <p:txBody>
+                <a:bodyPr wrap="none" lIns="0" tIns="0" rIns="0" bIns="0" rtlCol="0">
+                  <a:spAutoFit/>
+                </a:bodyPr>
+                <a:lstStyle/>
+                <a:p>
+                  <a14:m>
+                    <m:oMathPara xmlns:m="http://schemas.openxmlformats.org/officeDocument/2006/math">
+                      <m:oMathParaPr>
+                        <m:jc m:val="centerGroup"/>
+                      </m:oMathParaPr>
+                      <m:oMath xmlns:m="http://schemas.openxmlformats.org/officeDocument/2006/math">
+                        <m:acc>
+                          <m:accPr>
+                            <m:chr m:val="⃗"/>
+                            <m:ctrlPr>
+                              <a:rPr lang="en-US" i="1" smtClean="0">
+                                <a:latin typeface="Cambria Math" panose="02040503050406030204" pitchFamily="18" charset="0"/>
+                              </a:rPr>
+                            </m:ctrlPr>
+                          </m:accPr>
+                          <m:e>
+                            <m:sSub>
+                              <m:sSubPr>
+                                <m:ctrlPr>
+                                  <a:rPr lang="en-US" i="1">
+                                    <a:latin typeface="Cambria Math" panose="02040503050406030204" pitchFamily="18" charset="0"/>
+                                  </a:rPr>
+                                </m:ctrlPr>
+                              </m:sSubPr>
+                              <m:e>
+                                <m:r>
+                                  <m:rPr>
+                                    <m:sty m:val="p"/>
+                                  </m:rPr>
+                                  <a:rPr lang="en-US" i="1">
+                                    <a:latin typeface="Cambria Math" panose="02040503050406030204" pitchFamily="18" charset="0"/>
+                                  </a:rPr>
+                                  <m:t>v</m:t>
+                                </m:r>
+                              </m:e>
+                              <m:sub>
+                                <m:r>
+                                  <a:rPr lang="en-US" i="1" smtClean="0">
+                                    <a:latin typeface="Cambria Math" panose="02040503050406030204" pitchFamily="18" charset="0"/>
+                                    <a:ea typeface="Cambria Math" panose="02040503050406030204" pitchFamily="18" charset="0"/>
+                                  </a:rPr>
+                                  <m:t>⊥</m:t>
+                                </m:r>
+                              </m:sub>
+                            </m:sSub>
+                          </m:e>
+                        </m:acc>
+                      </m:oMath>
+                    </m:oMathPara>
+                  </a14:m>
+                  <a:endParaRPr lang="en-US" dirty="0"/>
+                </a:p>
+              </p:txBody>
+            </p:sp>
+          </mc:Choice>
+          <mc:Fallback>
+            <p:sp>
+              <p:nvSpPr>
+                <p:cNvPr id="24" name="TextBox 23">
+                  <a:extLst>
+                    <a:ext uri="{FF2B5EF4-FFF2-40B4-BE49-F238E27FC236}">
+                      <a16:creationId xmlns:a16="http://schemas.microsoft.com/office/drawing/2014/main" id="{CF583CA0-B462-E20D-E9F0-4FA08212E2A9}"/>
+                    </a:ext>
+                  </a:extLst>
+                </p:cNvPr>
+                <p:cNvSpPr txBox="1">
+                  <a:spLocks noRot="1" noChangeAspect="1" noMove="1" noResize="1" noEditPoints="1" noAdjustHandles="1" noChangeArrowheads="1" noChangeShapeType="1" noTextEdit="1"/>
+                </p:cNvSpPr>
+                <p:nvPr/>
+              </p:nvSpPr>
+              <p:spPr>
+                <a:xfrm>
+                  <a:off x="9179383" y="2124739"/>
+                  <a:ext cx="309315" cy="276999"/>
+                </a:xfrm>
+                <a:prstGeom prst="rect">
+                  <a:avLst/>
+                </a:prstGeom>
+                <a:blipFill>
+                  <a:blip r:embed="rId4"/>
+                  <a:stretch>
+                    <a:fillRect l="-8000" r="-4000" b="-17391"/>
+                  </a:stretch>
+                </a:blipFill>
+              </p:spPr>
+              <p:txBody>
+                <a:bodyPr/>
+                <a:lstStyle/>
+                <a:p>
+                  <a:r>
+                    <a:rPr lang="en-US">
+                      <a:noFill/>
+                    </a:rPr>
+                    <a:t> </a:t>
+                  </a:r>
+                </a:p>
+              </p:txBody>
+            </p:sp>
+          </mc:Fallback>
+        </mc:AlternateContent>
+        <p:cxnSp>
+          <p:nvCxnSpPr>
+            <p:cNvPr id="26" name="Straight Connector 25">
+              <a:extLst>
+                <a:ext uri="{FF2B5EF4-FFF2-40B4-BE49-F238E27FC236}">
+                  <a16:creationId xmlns:a16="http://schemas.microsoft.com/office/drawing/2014/main" id="{EC9DDFCF-E79C-722A-7AA7-79B19C1300A9}"/>
+                </a:ext>
+              </a:extLst>
+            </p:cNvPr>
+            <p:cNvCxnSpPr>
+              <a:cxnSpLocks/>
+            </p:cNvCxnSpPr>
+            <p:nvPr/>
+          </p:nvCxnSpPr>
+          <p:spPr>
+            <a:xfrm flipV="1">
+              <a:off x="9488698" y="1361703"/>
+              <a:ext cx="1122594" cy="819716"/>
+            </a:xfrm>
+            <a:prstGeom prst="line">
+              <a:avLst/>
+            </a:prstGeom>
+            <a:ln>
+              <a:prstDash val="dash"/>
+            </a:ln>
+          </p:spPr>
+          <p:style>
+            <a:lnRef idx="1">
+              <a:schemeClr val="accent1"/>
+            </a:lnRef>
+            <a:fillRef idx="0">
+              <a:schemeClr val="accent1"/>
+            </a:fillRef>
+            <a:effectRef idx="0">
+              <a:schemeClr val="accent1"/>
+            </a:effectRef>
+            <a:fontRef idx="minor">
+              <a:schemeClr val="tx1"/>
+            </a:fontRef>
+          </p:style>
+        </p:cxnSp>
+        <p:cxnSp>
+          <p:nvCxnSpPr>
+            <p:cNvPr id="27" name="Straight Connector 26">
+              <a:extLst>
+                <a:ext uri="{FF2B5EF4-FFF2-40B4-BE49-F238E27FC236}">
+                  <a16:creationId xmlns:a16="http://schemas.microsoft.com/office/drawing/2014/main" id="{5D4B9E94-27A9-1F0F-D617-50C132AA54B9}"/>
+                </a:ext>
+              </a:extLst>
+            </p:cNvPr>
+            <p:cNvCxnSpPr>
+              <a:cxnSpLocks/>
+            </p:cNvCxnSpPr>
+            <p:nvPr/>
+          </p:nvCxnSpPr>
+          <p:spPr>
+            <a:xfrm>
+              <a:off x="10626381" y="1361703"/>
+              <a:ext cx="527170" cy="594688"/>
+            </a:xfrm>
+            <a:prstGeom prst="line">
+              <a:avLst/>
+            </a:prstGeom>
+            <a:ln>
+              <a:prstDash val="dash"/>
+            </a:ln>
+          </p:spPr>
+          <p:style>
+            <a:lnRef idx="1">
+              <a:schemeClr val="accent1"/>
+            </a:lnRef>
+            <a:fillRef idx="0">
+              <a:schemeClr val="accent1"/>
+            </a:fillRef>
+            <a:effectRef idx="0">
+              <a:schemeClr val="accent1"/>
+            </a:effectRef>
+            <a:fontRef idx="minor">
+              <a:schemeClr val="tx1"/>
+            </a:fontRef>
+          </p:style>
+        </p:cxnSp>
+        <p:cxnSp>
+          <p:nvCxnSpPr>
+            <p:cNvPr id="31" name="Straight Arrow Connector 30">
+              <a:extLst>
+                <a:ext uri="{FF2B5EF4-FFF2-40B4-BE49-F238E27FC236}">
+                  <a16:creationId xmlns:a16="http://schemas.microsoft.com/office/drawing/2014/main" id="{84A56D43-8160-EBC3-18D1-FC7CBA97A59A}"/>
+                </a:ext>
+              </a:extLst>
+            </p:cNvPr>
+            <p:cNvCxnSpPr/>
+            <p:nvPr/>
+          </p:nvCxnSpPr>
+          <p:spPr>
+            <a:xfrm flipV="1">
+              <a:off x="10069033" y="1361703"/>
+              <a:ext cx="557348" cy="1455925"/>
+            </a:xfrm>
+            <a:prstGeom prst="straightConnector1">
+              <a:avLst/>
+            </a:prstGeom>
+            <a:ln>
+              <a:tailEnd type="triangle"/>
+            </a:ln>
+          </p:spPr>
+          <p:style>
+            <a:lnRef idx="2">
+              <a:schemeClr val="accent3"/>
+            </a:lnRef>
+            <a:fillRef idx="0">
+              <a:schemeClr val="accent3"/>
+            </a:fillRef>
+            <a:effectRef idx="1">
+              <a:schemeClr val="accent3"/>
+            </a:effectRef>
+            <a:fontRef idx="minor">
+              <a:schemeClr val="tx1"/>
+            </a:fontRef>
+          </p:style>
+        </p:cxnSp>
+        <mc:AlternateContent xmlns:mc="http://schemas.openxmlformats.org/markup-compatibility/2006">
+          <mc:Choice xmlns:a14="http://schemas.microsoft.com/office/drawing/2010/main" Requires="a14">
+            <p:sp>
+              <p:nvSpPr>
+                <p:cNvPr id="32" name="TextBox 31">
+                  <a:extLst>
+                    <a:ext uri="{FF2B5EF4-FFF2-40B4-BE49-F238E27FC236}">
+                      <a16:creationId xmlns:a16="http://schemas.microsoft.com/office/drawing/2014/main" id="{52EC8A1D-0A7D-ECDA-6087-6615C34F3BEA}"/>
+                    </a:ext>
+                  </a:extLst>
+                </p:cNvPr>
+                <p:cNvSpPr txBox="1"/>
+                <p:nvPr/>
+              </p:nvSpPr>
+              <p:spPr>
+                <a:xfrm>
+                  <a:off x="10508885" y="1021185"/>
+                  <a:ext cx="416716" cy="276999"/>
+                </a:xfrm>
+                <a:prstGeom prst="rect">
+                  <a:avLst/>
+                </a:prstGeom>
+                <a:noFill/>
+              </p:spPr>
+              <p:txBody>
+                <a:bodyPr wrap="none" lIns="0" tIns="0" rIns="0" bIns="0" rtlCol="0">
+                  <a:spAutoFit/>
+                </a:bodyPr>
+                <a:lstStyle/>
+                <a:p>
+                  <a14:m>
+                    <m:oMathPara xmlns:m="http://schemas.openxmlformats.org/officeDocument/2006/math">
+                      <m:oMathParaPr>
+                        <m:jc m:val="centerGroup"/>
+                      </m:oMathParaPr>
+                      <m:oMath xmlns:m="http://schemas.openxmlformats.org/officeDocument/2006/math">
+                        <m:acc>
+                          <m:accPr>
+                            <m:chr m:val="⃗"/>
+                            <m:ctrlPr>
+                              <a:rPr lang="en-US" i="1" smtClean="0">
+                                <a:latin typeface="Cambria Math" panose="02040503050406030204" pitchFamily="18" charset="0"/>
+                              </a:rPr>
+                            </m:ctrlPr>
+                          </m:accPr>
+                          <m:e>
+                            <m:sSub>
+                              <m:sSubPr>
+                                <m:ctrlPr>
+                                  <a:rPr lang="en-US" i="1">
+                                    <a:latin typeface="Cambria Math" panose="02040503050406030204" pitchFamily="18" charset="0"/>
+                                  </a:rPr>
+                                </m:ctrlPr>
+                              </m:sSubPr>
+                              <m:e>
+                                <m:r>
+                                  <m:rPr>
+                                    <m:sty m:val="p"/>
+                                  </m:rPr>
+                                  <a:rPr lang="en-US" i="1">
+                                    <a:latin typeface="Cambria Math" panose="02040503050406030204" pitchFamily="18" charset="0"/>
+                                  </a:rPr>
+                                  <m:t>v</m:t>
+                                </m:r>
+                              </m:e>
+                              <m:sub>
+                                <m:r>
+                                  <m:rPr>
+                                    <m:sty m:val="p"/>
+                                  </m:rPr>
+                                  <a:rPr lang="en-US" b="0" i="1" smtClean="0">
+                                    <a:latin typeface="Cambria Math" panose="02040503050406030204" pitchFamily="18" charset="0"/>
+                                  </a:rPr>
+                                  <m:t>rel</m:t>
+                                </m:r>
+                              </m:sub>
+                            </m:sSub>
+                          </m:e>
+                        </m:acc>
+                      </m:oMath>
+                    </m:oMathPara>
+                  </a14:m>
+                  <a:endParaRPr lang="en-US" dirty="0"/>
+                </a:p>
+              </p:txBody>
+            </p:sp>
+          </mc:Choice>
+          <mc:Fallback>
+            <p:sp>
+              <p:nvSpPr>
+                <p:cNvPr id="32" name="TextBox 31">
+                  <a:extLst>
+                    <a:ext uri="{FF2B5EF4-FFF2-40B4-BE49-F238E27FC236}">
+                      <a16:creationId xmlns:a16="http://schemas.microsoft.com/office/drawing/2014/main" id="{52EC8A1D-0A7D-ECDA-6087-6615C34F3BEA}"/>
+                    </a:ext>
+                  </a:extLst>
+                </p:cNvPr>
+                <p:cNvSpPr txBox="1">
+                  <a:spLocks noRot="1" noChangeAspect="1" noMove="1" noResize="1" noEditPoints="1" noAdjustHandles="1" noChangeArrowheads="1" noChangeShapeType="1" noTextEdit="1"/>
+                </p:cNvSpPr>
+                <p:nvPr/>
+              </p:nvSpPr>
+              <p:spPr>
+                <a:xfrm>
+                  <a:off x="10508885" y="1021185"/>
+                  <a:ext cx="416716" cy="276999"/>
+                </a:xfrm>
+                <a:prstGeom prst="rect">
+                  <a:avLst/>
+                </a:prstGeom>
+                <a:blipFill>
+                  <a:blip r:embed="rId5"/>
+                  <a:stretch>
+                    <a:fillRect l="-5882" r="-2941" b="-21739"/>
+                  </a:stretch>
+                </a:blipFill>
+              </p:spPr>
+              <p:txBody>
+                <a:bodyPr/>
+                <a:lstStyle/>
+                <a:p>
+                  <a:r>
+                    <a:rPr lang="en-US">
+                      <a:noFill/>
+                    </a:rPr>
+                    <a:t> </a:t>
+                  </a:r>
+                </a:p>
+              </p:txBody>
+            </p:sp>
+          </mc:Fallback>
+        </mc:AlternateContent>
+      </p:grpSp>
+      <p:sp>
+        <p:nvSpPr>
+          <p:cNvPr id="33" name="TextBox 32">
+            <a:extLst>
+              <a:ext uri="{FF2B5EF4-FFF2-40B4-BE49-F238E27FC236}">
+                <a16:creationId xmlns:a16="http://schemas.microsoft.com/office/drawing/2014/main" id="{AC341D96-04A3-7CDC-FF91-14CA6B771618}"/>
+              </a:ext>
+            </a:extLst>
+          </p:cNvPr>
+          <p:cNvSpPr txBox="1"/>
+          <p:nvPr/>
+        </p:nvSpPr>
+        <p:spPr>
+          <a:xfrm>
+            <a:off x="685800" y="1444752"/>
+            <a:ext cx="5486400" cy="320040"/>
+          </a:xfrm>
+          <a:prstGeom prst="rect">
+            <a:avLst/>
+          </a:prstGeom>
+          <a:noFill/>
+        </p:spPr>
+        <p:txBody>
+          <a:bodyPr wrap="square" lIns="0" tIns="0" rIns="0" bIns="0">
+            <a:spAutoFit/>
+          </a:bodyPr>
+          <a:lstStyle/>
+          <a:p>
+            <a:pPr>
+              <a:defRPr sz="2100" b="1">
+                <a:solidFill>
+                  <a:srgbClr val="852C86"/>
+                </a:solidFill>
+                <a:latin typeface="Arial"/>
+              </a:defRPr>
+            </a:pPr>
+            <a:r>
+              <a:t>Frame definition</a:t>
+            </a:r>
+          </a:p>
+        </p:txBody>
+      </p:sp>
+      <mc:AlternateContent xmlns:mc="http://schemas.openxmlformats.org/markup-compatibility/2006">
+        <mc:Choice xmlns:a14="http://schemas.microsoft.com/office/drawing/2010/main" Requires="a14">
+          <p:sp>
+            <p:nvSpPr>
+              <p:cNvPr id="34" name="TextBox 33">
+                <a:extLst>
+                  <a:ext uri="{FF2B5EF4-FFF2-40B4-BE49-F238E27FC236}">
+                    <a16:creationId xmlns:a16="http://schemas.microsoft.com/office/drawing/2014/main" id="{620EA642-20CA-9DE7-7D3C-3F224D3DC7BF}"/>
+                  </a:ext>
+                </a:extLst>
+              </p:cNvPr>
+              <p:cNvSpPr txBox="1"/>
+              <p:nvPr/>
+            </p:nvSpPr>
+            <p:spPr>
+              <a:xfrm>
+                <a:off x="685800" y="1837943"/>
+                <a:ext cx="5486400" cy="334707"/>
+              </a:xfrm>
+              <a:prstGeom prst="rect">
+                <a:avLst/>
+              </a:prstGeom>
+              <a:noFill/>
+            </p:spPr>
+            <p:txBody>
+              <a:bodyPr wrap="square" lIns="0" tIns="0" rIns="0" bIns="0">
+                <a:spAutoFit/>
+              </a:bodyPr>
+              <a:lstStyle/>
+              <a:p>
+                <a:pPr>
+                  <a:defRPr sz="1800" b="0">
+                    <a:solidFill>
+                      <a:srgbClr val="26232B"/>
+                    </a:solidFill>
+                    <a:latin typeface="Arial"/>
+                  </a:defRPr>
+                </a:pPr>
+                <a:r>
+                  <a:rPr dirty="0"/>
+                  <a:t>Unit tangent along the local thread segment</a:t>
+                </a:r>
+                <a:r>
+                  <a:rPr lang="en-US" dirty="0"/>
+                  <a:t>: </a:t>
+                </a:r>
+                <a14:m>
+                  <m:oMath xmlns:m="http://schemas.openxmlformats.org/officeDocument/2006/math">
+                    <m:d>
+                      <m:dPr>
+                        <m:begChr m:val="|"/>
+                        <m:endChr m:val="|"/>
+                        <m:ctrlPr>
+                          <a:rPr lang="en-US" i="1" smtClean="0">
+                            <a:latin typeface="Cambria Math" panose="02040503050406030204" pitchFamily="18" charset="0"/>
+                          </a:rPr>
+                        </m:ctrlPr>
+                      </m:dPr>
+                      <m:e>
+                        <m:acc>
+                          <m:accPr>
+                            <m:chr m:val="⃗"/>
+                            <m:ctrlPr>
+                              <a:rPr lang="en-US" i="1" smtClean="0">
+                                <a:latin typeface="Cambria Math" panose="02040503050406030204" pitchFamily="18" charset="0"/>
+                              </a:rPr>
+                            </m:ctrlPr>
+                          </m:accPr>
+                          <m:e>
+                            <m:sSub>
+                              <m:sSubPr>
+                                <m:ctrlPr>
+                                  <a:rPr lang="en-US" i="1" smtClean="0">
+                                    <a:latin typeface="Cambria Math" panose="02040503050406030204" pitchFamily="18" charset="0"/>
+                                  </a:rPr>
+                                </m:ctrlPr>
+                              </m:sSubPr>
+                              <m:e>
+                                <m:r>
+                                  <a:rPr lang="en-US" b="0" i="1" smtClean="0">
+                                    <a:latin typeface="Cambria Math" panose="02040503050406030204" pitchFamily="18" charset="0"/>
+                                  </a:rPr>
+                                  <m:t>1</m:t>
+                                </m:r>
+                              </m:e>
+                              <m:sub>
+                                <m:r>
+                                  <m:rPr>
+                                    <m:sty m:val="p"/>
+                                  </m:rPr>
+                                  <a:rPr lang="en-US" b="0" i="1" smtClean="0">
+                                    <a:latin typeface="Cambria Math" panose="02040503050406030204" pitchFamily="18" charset="0"/>
+                                  </a:rPr>
+                                  <m:t>t</m:t>
+                                </m:r>
+                              </m:sub>
+                            </m:sSub>
+                          </m:e>
+                        </m:acc>
+                      </m:e>
+                    </m:d>
+                    <m:r>
+                      <a:rPr lang="en-US" b="0" i="1" smtClean="0">
+                        <a:latin typeface="Cambria Math" panose="02040503050406030204" pitchFamily="18" charset="0"/>
+                      </a:rPr>
+                      <m:t>=1</m:t>
+                    </m:r>
+                  </m:oMath>
+                </a14:m>
+                <a:endParaRPr dirty="0"/>
+              </a:p>
+            </p:txBody>
+          </p:sp>
+        </mc:Choice>
+        <mc:Fallback>
+          <p:sp>
+            <p:nvSpPr>
+              <p:cNvPr id="34" name="TextBox 33">
+                <a:extLst>
+                  <a:ext uri="{FF2B5EF4-FFF2-40B4-BE49-F238E27FC236}">
+                    <a16:creationId xmlns:a16="http://schemas.microsoft.com/office/drawing/2014/main" id="{620EA642-20CA-9DE7-7D3C-3F224D3DC7BF}"/>
+                  </a:ext>
+                </a:extLst>
+              </p:cNvPr>
+              <p:cNvSpPr txBox="1">
+                <a:spLocks noRot="1" noChangeAspect="1" noMove="1" noResize="1" noEditPoints="1" noAdjustHandles="1" noChangeArrowheads="1" noChangeShapeType="1" noTextEdit="1"/>
+              </p:cNvSpPr>
+              <p:nvPr/>
+            </p:nvSpPr>
+            <p:spPr>
+              <a:xfrm>
+                <a:off x="685800" y="1837943"/>
+                <a:ext cx="5486400" cy="334707"/>
+              </a:xfrm>
+              <a:prstGeom prst="rect">
+                <a:avLst/>
+              </a:prstGeom>
+              <a:blipFill>
+                <a:blip r:embed="rId6"/>
+                <a:stretch>
+                  <a:fillRect l="-2771" t="-11111" b="-33333"/>
+                </a:stretch>
+              </a:blipFill>
+            </p:spPr>
+            <p:txBody>
+              <a:bodyPr/>
+              <a:lstStyle/>
+              <a:p>
+                <a:r>
+                  <a:rPr lang="en-US">
+                    <a:noFill/>
+                  </a:rPr>
+                  <a:t> </a:t>
+                </a:r>
+              </a:p>
+            </p:txBody>
+          </p:sp>
+        </mc:Fallback>
+      </mc:AlternateContent>
+      <p:sp>
+        <p:nvSpPr>
+          <p:cNvPr id="36" name="TextBox 35">
+            <a:extLst>
+              <a:ext uri="{FF2B5EF4-FFF2-40B4-BE49-F238E27FC236}">
+                <a16:creationId xmlns:a16="http://schemas.microsoft.com/office/drawing/2014/main" id="{2E5F7AAB-4CD8-01D6-4B10-A920B26A9EA0}"/>
+              </a:ext>
+            </a:extLst>
+          </p:cNvPr>
+          <p:cNvSpPr txBox="1"/>
+          <p:nvPr/>
+        </p:nvSpPr>
+        <p:spPr>
+          <a:xfrm>
+            <a:off x="685800" y="2483523"/>
+            <a:ext cx="5486400" cy="320040"/>
+          </a:xfrm>
+          <a:prstGeom prst="rect">
+            <a:avLst/>
+          </a:prstGeom>
+          <a:noFill/>
+        </p:spPr>
+        <p:txBody>
+          <a:bodyPr wrap="square" lIns="0" tIns="0" rIns="0" bIns="0">
+            <a:spAutoFit/>
+          </a:bodyPr>
+          <a:lstStyle/>
+          <a:p>
+            <a:pPr>
+              <a:defRPr sz="2100" b="1">
+                <a:solidFill>
+                  <a:srgbClr val="852C86"/>
+                </a:solidFill>
+                <a:latin typeface="Arial"/>
+              </a:defRPr>
+            </a:pPr>
+            <a:r>
+              <a:rPr dirty="0"/>
+              <a:t>Relative velocity</a:t>
+            </a:r>
+          </a:p>
+        </p:txBody>
+      </p:sp>
+      <mc:AlternateContent xmlns:mc="http://schemas.openxmlformats.org/markup-compatibility/2006">
+        <mc:Choice xmlns:a14="http://schemas.microsoft.com/office/drawing/2010/main" Requires="a14">
+          <p:sp>
+            <p:nvSpPr>
+              <p:cNvPr id="44" name="TextBox 43">
+                <a:extLst>
+                  <a:ext uri="{FF2B5EF4-FFF2-40B4-BE49-F238E27FC236}">
+                    <a16:creationId xmlns:a16="http://schemas.microsoft.com/office/drawing/2014/main" id="{6C9D78B6-68A4-BC46-8334-73AE270BBDF5}"/>
+                  </a:ext>
+                </a:extLst>
+              </p:cNvPr>
+              <p:cNvSpPr txBox="1"/>
+              <p:nvPr/>
+            </p:nvSpPr>
+            <p:spPr>
+              <a:xfrm>
+                <a:off x="3056860" y="2494589"/>
+                <a:ext cx="1194173" cy="276999"/>
+              </a:xfrm>
+              <a:prstGeom prst="rect">
+                <a:avLst/>
+              </a:prstGeom>
+              <a:noFill/>
+            </p:spPr>
+            <p:txBody>
+              <a:bodyPr wrap="none" lIns="0" tIns="0" rIns="0" bIns="0" rtlCol="0">
+                <a:spAutoFit/>
+              </a:bodyPr>
+              <a:lstStyle/>
+              <a:p>
+                <a14:m>
+                  <m:oMath xmlns:m="http://schemas.openxmlformats.org/officeDocument/2006/math">
+                    <m:acc>
+                      <m:accPr>
+                        <m:chr m:val="⃗"/>
+                        <m:ctrlPr>
+                          <a:rPr lang="en-US" i="1" smtClean="0">
+                            <a:latin typeface="Cambria Math" panose="02040503050406030204" pitchFamily="18" charset="0"/>
+                          </a:rPr>
+                        </m:ctrlPr>
+                      </m:accPr>
+                      <m:e>
+                        <m:sSub>
+                          <m:sSubPr>
+                            <m:ctrlPr>
+                              <a:rPr lang="en-US" i="1" smtClean="0">
+                                <a:latin typeface="Cambria Math" panose="02040503050406030204" pitchFamily="18" charset="0"/>
+                              </a:rPr>
+                            </m:ctrlPr>
+                          </m:sSubPr>
+                          <m:e>
+                            <m:r>
+                              <m:rPr>
+                                <m:sty m:val="p"/>
+                              </m:rPr>
+                              <a:rPr lang="en-US" b="0" i="1" smtClean="0">
+                                <a:latin typeface="Cambria Math" panose="02040503050406030204" pitchFamily="18" charset="0"/>
+                              </a:rPr>
+                              <m:t>v</m:t>
+                            </m:r>
+                          </m:e>
+                          <m:sub>
+                            <m:r>
+                              <m:rPr>
+                                <m:sty m:val="p"/>
+                              </m:rPr>
+                              <a:rPr lang="en-US" b="0" i="1" smtClean="0">
+                                <a:latin typeface="Cambria Math" panose="02040503050406030204" pitchFamily="18" charset="0"/>
+                              </a:rPr>
+                              <m:t>rel</m:t>
+                            </m:r>
+                          </m:sub>
+                        </m:sSub>
+                      </m:e>
+                    </m:acc>
+                    <m:r>
+                      <a:rPr lang="en-US" b="0" i="1" smtClean="0">
+                        <a:latin typeface="Cambria Math" panose="02040503050406030204" pitchFamily="18" charset="0"/>
+                      </a:rPr>
+                      <m:t>= </m:t>
+                    </m:r>
+                    <m:acc>
+                      <m:accPr>
+                        <m:chr m:val="⃗"/>
+                        <m:ctrlPr>
+                          <a:rPr lang="en-US" b="0" i="1" smtClean="0">
+                            <a:latin typeface="Cambria Math" panose="02040503050406030204" pitchFamily="18" charset="0"/>
+                          </a:rPr>
+                        </m:ctrlPr>
+                      </m:accPr>
+                      <m:e>
+                        <m:r>
+                          <m:rPr>
+                            <m:sty m:val="p"/>
+                          </m:rPr>
+                          <a:rPr lang="en-US" b="0" i="1" smtClean="0">
+                            <a:latin typeface="Cambria Math" panose="02040503050406030204" pitchFamily="18" charset="0"/>
+                          </a:rPr>
+                          <m:t>v</m:t>
+                        </m:r>
+                      </m:e>
+                    </m:acc>
+                    <m:r>
+                      <a:rPr lang="en-US" b="0" i="1" smtClean="0">
+                        <a:latin typeface="Cambria Math" panose="02040503050406030204" pitchFamily="18" charset="0"/>
+                      </a:rPr>
+                      <m:t> - </m:t>
+                    </m:r>
+                    <m:acc>
+                      <m:accPr>
+                        <m:chr m:val="⃗"/>
+                        <m:ctrlPr>
+                          <a:rPr lang="en-US" b="0" i="1" smtClean="0">
+                            <a:latin typeface="Cambria Math" panose="02040503050406030204" pitchFamily="18" charset="0"/>
+                          </a:rPr>
+                        </m:ctrlPr>
+                      </m:accPr>
+                      <m:e>
+                        <m:r>
+                          <m:rPr>
+                            <m:sty m:val="p"/>
+                          </m:rPr>
+                          <a:rPr lang="en-US" b="0" i="1" smtClean="0">
+                            <a:latin typeface="Cambria Math" panose="02040503050406030204" pitchFamily="18" charset="0"/>
+                          </a:rPr>
+                          <m:t>u</m:t>
+                        </m:r>
+                      </m:e>
+                    </m:acc>
+                  </m:oMath>
+                </a14:m>
+                <a:r>
+                  <a:rPr lang="en-US" dirty="0"/>
+                  <a:t> </a:t>
+                </a:r>
+              </a:p>
+            </p:txBody>
+          </p:sp>
+        </mc:Choice>
+        <mc:Fallback>
+          <p:sp>
+            <p:nvSpPr>
+              <p:cNvPr id="44" name="TextBox 43">
+                <a:extLst>
+                  <a:ext uri="{FF2B5EF4-FFF2-40B4-BE49-F238E27FC236}">
+                    <a16:creationId xmlns:a16="http://schemas.microsoft.com/office/drawing/2014/main" id="{6C9D78B6-68A4-BC46-8334-73AE270BBDF5}"/>
+                  </a:ext>
+                </a:extLst>
+              </p:cNvPr>
+              <p:cNvSpPr txBox="1">
+                <a:spLocks noRot="1" noChangeAspect="1" noMove="1" noResize="1" noEditPoints="1" noAdjustHandles="1" noChangeArrowheads="1" noChangeShapeType="1" noTextEdit="1"/>
+              </p:cNvSpPr>
+              <p:nvPr/>
+            </p:nvSpPr>
+            <p:spPr>
+              <a:xfrm>
+                <a:off x="3056860" y="2494589"/>
+                <a:ext cx="1194173" cy="276999"/>
+              </a:xfrm>
+              <a:prstGeom prst="rect">
+                <a:avLst/>
+              </a:prstGeom>
+              <a:blipFill>
+                <a:blip r:embed="rId7"/>
+                <a:stretch>
+                  <a:fillRect l="-4211" t="-4348" b="-39130"/>
+                </a:stretch>
+              </a:blipFill>
+            </p:spPr>
+            <p:txBody>
+              <a:bodyPr/>
+              <a:lstStyle/>
+              <a:p>
+                <a:r>
+                  <a:rPr lang="en-US">
+                    <a:noFill/>
+                  </a:rPr>
+                  <a:t> </a:t>
+                </a:r>
+              </a:p>
+            </p:txBody>
+          </p:sp>
+        </mc:Fallback>
+      </mc:AlternateContent>
+      <mc:AlternateContent xmlns:mc="http://schemas.openxmlformats.org/markup-compatibility/2006">
+        <mc:Choice xmlns:a14="http://schemas.microsoft.com/office/drawing/2010/main" Requires="a14">
+          <p:sp>
+            <p:nvSpPr>
+              <p:cNvPr id="45" name="TextBox 44">
+                <a:extLst>
+                  <a:ext uri="{FF2B5EF4-FFF2-40B4-BE49-F238E27FC236}">
+                    <a16:creationId xmlns:a16="http://schemas.microsoft.com/office/drawing/2014/main" id="{98A21D7B-936F-326C-B3BD-DA4E4C20B86C}"/>
+                  </a:ext>
+                </a:extLst>
+              </p:cNvPr>
+              <p:cNvSpPr txBox="1"/>
+              <p:nvPr/>
+            </p:nvSpPr>
+            <p:spPr>
+              <a:xfrm>
+                <a:off x="10052817" y="4176103"/>
+                <a:ext cx="1690912" cy="324704"/>
+              </a:xfrm>
+              <a:prstGeom prst="rect">
+                <a:avLst/>
+              </a:prstGeom>
+              <a:noFill/>
+            </p:spPr>
+            <p:txBody>
+              <a:bodyPr wrap="none" lIns="0" tIns="0" rIns="0" bIns="0" rtlCol="0">
+                <a:spAutoFit/>
+              </a:bodyPr>
+              <a:lstStyle/>
+              <a:p>
+                <a14:m>
+                  <m:oMathPara xmlns:m="http://schemas.openxmlformats.org/officeDocument/2006/math">
+                    <m:oMathParaPr>
+                      <m:jc m:val="centerGroup"/>
+                    </m:oMathParaPr>
+                    <m:oMath xmlns:m="http://schemas.openxmlformats.org/officeDocument/2006/math">
+                      <m:acc>
+                        <m:accPr>
+                          <m:chr m:val="⃗"/>
+                          <m:ctrlPr>
+                            <a:rPr lang="en-US" i="1" smtClean="0">
+                              <a:latin typeface="Cambria Math" panose="02040503050406030204" pitchFamily="18" charset="0"/>
+                            </a:rPr>
+                          </m:ctrlPr>
+                        </m:accPr>
+                        <m:e>
+                          <m:sSub>
+                            <m:sSubPr>
+                              <m:ctrlPr>
+                                <a:rPr lang="en-US" i="1" smtClean="0">
+                                  <a:latin typeface="Cambria Math" panose="02040503050406030204" pitchFamily="18" charset="0"/>
+                                </a:rPr>
+                              </m:ctrlPr>
+                            </m:sSubPr>
+                            <m:e>
+                              <m:r>
+                                <m:rPr>
+                                  <m:sty m:val="p"/>
+                                </m:rPr>
+                                <a:rPr lang="en-US" b="0" i="1" smtClean="0">
+                                  <a:latin typeface="Cambria Math" panose="02040503050406030204" pitchFamily="18" charset="0"/>
+                                </a:rPr>
+                                <m:t>v</m:t>
+                              </m:r>
+                            </m:e>
+                            <m:sub>
+                              <m:r>
+                                <a:rPr lang="en-US" i="1" smtClean="0">
+                                  <a:latin typeface="Cambria Math" panose="02040503050406030204" pitchFamily="18" charset="0"/>
+                                  <a:ea typeface="Cambria Math" panose="02040503050406030204" pitchFamily="18" charset="0"/>
+                                </a:rPr>
+                                <m:t>∥</m:t>
+                              </m:r>
+                            </m:sub>
+                          </m:sSub>
+                        </m:e>
+                      </m:acc>
+                      <m:r>
+                        <a:rPr lang="en-US" b="0" i="1" smtClean="0">
+                          <a:latin typeface="Cambria Math" panose="02040503050406030204" pitchFamily="18" charset="0"/>
+                        </a:rPr>
+                        <m:t>=(</m:t>
+                      </m:r>
+                      <m:acc>
+                        <m:accPr>
+                          <m:chr m:val="⃗"/>
+                          <m:ctrlPr>
+                            <a:rPr lang="en-US" b="0" i="1" smtClean="0">
+                              <a:latin typeface="Cambria Math" panose="02040503050406030204" pitchFamily="18" charset="0"/>
+                            </a:rPr>
+                          </m:ctrlPr>
+                        </m:accPr>
+                        <m:e>
+                          <m:sSub>
+                            <m:sSubPr>
+                              <m:ctrlPr>
+                                <a:rPr lang="en-US" i="1">
+                                  <a:latin typeface="Cambria Math" panose="02040503050406030204" pitchFamily="18" charset="0"/>
+                                </a:rPr>
+                              </m:ctrlPr>
+                            </m:sSubPr>
+                            <m:e>
+                              <m:r>
+                                <m:rPr>
+                                  <m:sty m:val="p"/>
+                                </m:rPr>
+                                <a:rPr lang="en-US" i="1">
+                                  <a:latin typeface="Cambria Math" panose="02040503050406030204" pitchFamily="18" charset="0"/>
+                                </a:rPr>
+                                <m:t>v</m:t>
+                              </m:r>
+                            </m:e>
+                            <m:sub>
+                              <m:r>
+                                <m:rPr>
+                                  <m:sty m:val="p"/>
+                                </m:rPr>
+                                <a:rPr lang="en-US" i="1">
+                                  <a:latin typeface="Cambria Math" panose="02040503050406030204" pitchFamily="18" charset="0"/>
+                                </a:rPr>
+                                <m:t>rel</m:t>
+                              </m:r>
+                            </m:sub>
+                          </m:sSub>
+                        </m:e>
+                      </m:acc>
+                      <m:r>
+                        <a:rPr lang="en-US" i="1" smtClean="0">
+                          <a:latin typeface="Cambria Math" panose="02040503050406030204" pitchFamily="18" charset="0"/>
+                          <a:ea typeface="Cambria Math" panose="02040503050406030204" pitchFamily="18" charset="0"/>
+                        </a:rPr>
+                        <m:t>∙</m:t>
+                      </m:r>
+                      <m:acc>
+                        <m:accPr>
+                          <m:chr m:val="⃗"/>
+                          <m:ctrlPr>
+                            <a:rPr lang="en-US" i="1" smtClean="0">
+                              <a:latin typeface="Cambria Math" panose="02040503050406030204" pitchFamily="18" charset="0"/>
+                              <a:ea typeface="Cambria Math" panose="02040503050406030204" pitchFamily="18" charset="0"/>
+                            </a:rPr>
+                          </m:ctrlPr>
+                        </m:accPr>
+                        <m:e>
+                          <m:sSub>
+                            <m:sSubPr>
+                              <m:ctrlPr>
+                                <a:rPr lang="en-US" i="1" smtClean="0">
+                                  <a:latin typeface="Cambria Math" panose="02040503050406030204" pitchFamily="18" charset="0"/>
+                                  <a:ea typeface="Cambria Math" panose="02040503050406030204" pitchFamily="18" charset="0"/>
+                                </a:rPr>
+                              </m:ctrlPr>
+                            </m:sSubPr>
+                            <m:e>
+                              <m:r>
+                                <a:rPr lang="en-US" b="0" i="1" smtClean="0">
+                                  <a:latin typeface="Cambria Math" panose="02040503050406030204" pitchFamily="18" charset="0"/>
+                                  <a:ea typeface="Cambria Math" panose="02040503050406030204" pitchFamily="18" charset="0"/>
+                                </a:rPr>
+                                <m:t>1</m:t>
+                              </m:r>
+                            </m:e>
+                            <m:sub>
+                              <m:r>
+                                <m:rPr>
+                                  <m:sty m:val="p"/>
+                                </m:rPr>
+                                <a:rPr lang="en-US" b="0" i="1" smtClean="0">
+                                  <a:latin typeface="Cambria Math" panose="02040503050406030204" pitchFamily="18" charset="0"/>
+                                  <a:ea typeface="Cambria Math" panose="02040503050406030204" pitchFamily="18" charset="0"/>
+                                </a:rPr>
+                                <m:t>t</m:t>
+                              </m:r>
+                            </m:sub>
+                          </m:sSub>
+                        </m:e>
+                      </m:acc>
+                      <m:r>
+                        <a:rPr lang="en-US" b="0" i="1" smtClean="0">
+                          <a:latin typeface="Cambria Math" panose="02040503050406030204" pitchFamily="18" charset="0"/>
+                        </a:rPr>
+                        <m:t>)</m:t>
+                      </m:r>
+                      <m:acc>
+                        <m:accPr>
+                          <m:chr m:val="⃗"/>
+                          <m:ctrlPr>
+                            <a:rPr lang="en-US" i="1">
+                              <a:latin typeface="Cambria Math" panose="02040503050406030204" pitchFamily="18" charset="0"/>
+                              <a:ea typeface="Cambria Math" panose="02040503050406030204" pitchFamily="18" charset="0"/>
+                            </a:rPr>
+                          </m:ctrlPr>
+                        </m:accPr>
+                        <m:e>
+                          <m:sSub>
+                            <m:sSubPr>
+                              <m:ctrlPr>
+                                <a:rPr lang="en-US" i="1">
+                                  <a:latin typeface="Cambria Math" panose="02040503050406030204" pitchFamily="18" charset="0"/>
+                                  <a:ea typeface="Cambria Math" panose="02040503050406030204" pitchFamily="18" charset="0"/>
+                                </a:rPr>
+                              </m:ctrlPr>
+                            </m:sSubPr>
+                            <m:e>
+                              <m:r>
+                                <a:rPr lang="en-US" i="1">
+                                  <a:latin typeface="Cambria Math" panose="02040503050406030204" pitchFamily="18" charset="0"/>
+                                  <a:ea typeface="Cambria Math" panose="02040503050406030204" pitchFamily="18" charset="0"/>
+                                </a:rPr>
+                                <m:t>1</m:t>
+                              </m:r>
+                            </m:e>
+                            <m:sub>
+                              <m:r>
+                                <m:rPr>
+                                  <m:sty m:val="p"/>
+                                </m:rPr>
+                                <a:rPr lang="en-US" i="1">
+                                  <a:latin typeface="Cambria Math" panose="02040503050406030204" pitchFamily="18" charset="0"/>
+                                  <a:ea typeface="Cambria Math" panose="02040503050406030204" pitchFamily="18" charset="0"/>
+                                </a:rPr>
+                                <m:t>t</m:t>
+                              </m:r>
+                            </m:sub>
+                          </m:sSub>
+                        </m:e>
+                      </m:acc>
+                    </m:oMath>
+                  </m:oMathPara>
+                </a14:m>
+                <a:endParaRPr lang="en-US" dirty="0"/>
+              </a:p>
+            </p:txBody>
+          </p:sp>
+        </mc:Choice>
+        <mc:Fallback>
+          <p:sp>
+            <p:nvSpPr>
+              <p:cNvPr id="45" name="TextBox 44">
+                <a:extLst>
+                  <a:ext uri="{FF2B5EF4-FFF2-40B4-BE49-F238E27FC236}">
+                    <a16:creationId xmlns:a16="http://schemas.microsoft.com/office/drawing/2014/main" id="{98A21D7B-936F-326C-B3BD-DA4E4C20B86C}"/>
+                  </a:ext>
+                </a:extLst>
+              </p:cNvPr>
+              <p:cNvSpPr txBox="1">
+                <a:spLocks noRot="1" noChangeAspect="1" noMove="1" noResize="1" noEditPoints="1" noAdjustHandles="1" noChangeArrowheads="1" noChangeShapeType="1" noTextEdit="1"/>
+              </p:cNvSpPr>
+              <p:nvPr/>
+            </p:nvSpPr>
+            <p:spPr>
+              <a:xfrm>
+                <a:off x="10052817" y="4176103"/>
+                <a:ext cx="1690912" cy="324704"/>
+              </a:xfrm>
+              <a:prstGeom prst="rect">
+                <a:avLst/>
+              </a:prstGeom>
+              <a:blipFill>
+                <a:blip r:embed="rId8"/>
+                <a:stretch>
+                  <a:fillRect l="-746" b="-25926"/>
+                </a:stretch>
+              </a:blipFill>
+            </p:spPr>
+            <p:txBody>
+              <a:bodyPr/>
+              <a:lstStyle/>
+              <a:p>
+                <a:r>
+                  <a:rPr lang="en-US">
+                    <a:noFill/>
+                  </a:rPr>
+                  <a:t> </a:t>
+                </a:r>
+              </a:p>
+            </p:txBody>
+          </p:sp>
+        </mc:Fallback>
+      </mc:AlternateContent>
+      <mc:AlternateContent xmlns:mc="http://schemas.openxmlformats.org/markup-compatibility/2006">
+        <mc:Choice xmlns:a14="http://schemas.microsoft.com/office/drawing/2010/main" Requires="a14">
+          <p:sp>
+            <p:nvSpPr>
+              <p:cNvPr id="46" name="TextBox 45">
+                <a:extLst>
+                  <a:ext uri="{FF2B5EF4-FFF2-40B4-BE49-F238E27FC236}">
+                    <a16:creationId xmlns:a16="http://schemas.microsoft.com/office/drawing/2014/main" id="{DD41AF9C-3507-E9DF-BC6E-B992B06EA534}"/>
+                  </a:ext>
+                </a:extLst>
+              </p:cNvPr>
+              <p:cNvSpPr txBox="1"/>
+              <p:nvPr/>
+            </p:nvSpPr>
+            <p:spPr>
+              <a:xfrm>
+                <a:off x="6896562" y="2867102"/>
+                <a:ext cx="2263119" cy="312458"/>
+              </a:xfrm>
+              <a:prstGeom prst="rect">
+                <a:avLst/>
+              </a:prstGeom>
+              <a:noFill/>
+            </p:spPr>
+            <p:txBody>
+              <a:bodyPr wrap="none" lIns="0" tIns="0" rIns="0" bIns="0" rtlCol="0">
+                <a:spAutoFit/>
+              </a:bodyPr>
+              <a:lstStyle/>
+              <a:p>
+                <a14:m>
+                  <m:oMathPara xmlns:m="http://schemas.openxmlformats.org/officeDocument/2006/math">
+                    <m:oMathParaPr>
+                      <m:jc m:val="centerGroup"/>
+                    </m:oMathParaPr>
+                    <m:oMath xmlns:m="http://schemas.openxmlformats.org/officeDocument/2006/math">
+                      <m:acc>
+                        <m:accPr>
+                          <m:chr m:val="⃗"/>
+                          <m:ctrlPr>
+                            <a:rPr lang="en-US" i="1" smtClean="0">
+                              <a:latin typeface="Cambria Math" panose="02040503050406030204" pitchFamily="18" charset="0"/>
+                            </a:rPr>
+                          </m:ctrlPr>
+                        </m:accPr>
+                        <m:e>
+                          <m:sSub>
+                            <m:sSubPr>
+                              <m:ctrlPr>
+                                <a:rPr lang="en-US" i="1" smtClean="0">
+                                  <a:latin typeface="Cambria Math" panose="02040503050406030204" pitchFamily="18" charset="0"/>
+                                </a:rPr>
+                              </m:ctrlPr>
+                            </m:sSubPr>
+                            <m:e>
+                              <m:r>
+                                <m:rPr>
+                                  <m:sty m:val="p"/>
+                                </m:rPr>
+                                <a:rPr lang="en-US" b="0" i="1" smtClean="0">
+                                  <a:latin typeface="Cambria Math" panose="02040503050406030204" pitchFamily="18" charset="0"/>
+                                </a:rPr>
+                                <m:t>v</m:t>
+                              </m:r>
+                            </m:e>
+                            <m:sub>
+                              <m:r>
+                                <a:rPr lang="en-US" i="1">
+                                  <a:latin typeface="Cambria Math" panose="02040503050406030204" pitchFamily="18" charset="0"/>
+                                  <a:ea typeface="Cambria Math" panose="02040503050406030204" pitchFamily="18" charset="0"/>
+                                </a:rPr>
+                                <m:t>⊥</m:t>
+                              </m:r>
+                            </m:sub>
+                          </m:sSub>
+                        </m:e>
+                      </m:acc>
+                      <m:r>
+                        <a:rPr lang="en-US" b="0" i="1" smtClean="0">
+                          <a:latin typeface="Cambria Math" panose="02040503050406030204" pitchFamily="18" charset="0"/>
+                        </a:rPr>
+                        <m:t>=</m:t>
+                      </m:r>
+                      <m:acc>
+                        <m:accPr>
+                          <m:chr m:val="⃗"/>
+                          <m:ctrlPr>
+                            <a:rPr lang="en-US" i="1">
+                              <a:latin typeface="Cambria Math" panose="02040503050406030204" pitchFamily="18" charset="0"/>
+                            </a:rPr>
+                          </m:ctrlPr>
+                        </m:accPr>
+                        <m:e>
+                          <m:sSub>
+                            <m:sSubPr>
+                              <m:ctrlPr>
+                                <a:rPr lang="en-US" i="1">
+                                  <a:latin typeface="Cambria Math" panose="02040503050406030204" pitchFamily="18" charset="0"/>
+                                </a:rPr>
+                              </m:ctrlPr>
+                            </m:sSubPr>
+                            <m:e>
+                              <m:r>
+                                <m:rPr>
+                                  <m:sty m:val="p"/>
+                                </m:rPr>
+                                <a:rPr lang="en-US" i="1">
+                                  <a:latin typeface="Cambria Math" panose="02040503050406030204" pitchFamily="18" charset="0"/>
+                                </a:rPr>
+                                <m:t>v</m:t>
+                              </m:r>
+                            </m:e>
+                            <m:sub>
+                              <m:r>
+                                <m:rPr>
+                                  <m:sty m:val="p"/>
+                                </m:rPr>
+                                <a:rPr lang="en-US" i="1">
+                                  <a:latin typeface="Cambria Math" panose="02040503050406030204" pitchFamily="18" charset="0"/>
+                                </a:rPr>
+                                <m:t>rel</m:t>
+                              </m:r>
+                            </m:sub>
+                          </m:sSub>
+                        </m:e>
+                      </m:acc>
+                      <m:r>
+                        <a:rPr lang="en-US" b="0" i="1" smtClean="0">
+                          <a:latin typeface="Cambria Math" panose="02040503050406030204" pitchFamily="18" charset="0"/>
+                        </a:rPr>
+                        <m:t> - </m:t>
+                      </m:r>
+                      <m:r>
+                        <a:rPr lang="en-US" b="0" i="1" smtClean="0">
+                          <a:latin typeface="Cambria Math" panose="02040503050406030204" pitchFamily="18" charset="0"/>
+                        </a:rPr>
+                        <m:t>(</m:t>
+                      </m:r>
+                      <m:acc>
+                        <m:accPr>
+                          <m:chr m:val="⃗"/>
+                          <m:ctrlPr>
+                            <a:rPr lang="en-US" b="0" i="1" smtClean="0">
+                              <a:latin typeface="Cambria Math" panose="02040503050406030204" pitchFamily="18" charset="0"/>
+                            </a:rPr>
+                          </m:ctrlPr>
+                        </m:accPr>
+                        <m:e>
+                          <m:sSub>
+                            <m:sSubPr>
+                              <m:ctrlPr>
+                                <a:rPr lang="en-US" i="1">
+                                  <a:latin typeface="Cambria Math" panose="02040503050406030204" pitchFamily="18" charset="0"/>
+                                </a:rPr>
+                              </m:ctrlPr>
+                            </m:sSubPr>
+                            <m:e>
+                              <m:r>
+                                <m:rPr>
+                                  <m:sty m:val="p"/>
+                                </m:rPr>
+                                <a:rPr lang="en-US" i="1">
+                                  <a:latin typeface="Cambria Math" panose="02040503050406030204" pitchFamily="18" charset="0"/>
+                                </a:rPr>
+                                <m:t>v</m:t>
+                              </m:r>
+                            </m:e>
+                            <m:sub>
+                              <m:r>
+                                <m:rPr>
+                                  <m:sty m:val="p"/>
+                                </m:rPr>
+                                <a:rPr lang="en-US" i="1">
+                                  <a:latin typeface="Cambria Math" panose="02040503050406030204" pitchFamily="18" charset="0"/>
+                                </a:rPr>
+                                <m:t>rel</m:t>
+                              </m:r>
+                            </m:sub>
+                          </m:sSub>
+                        </m:e>
+                      </m:acc>
+                      <m:r>
+                        <a:rPr lang="en-US" i="1" smtClean="0">
+                          <a:latin typeface="Cambria Math" panose="02040503050406030204" pitchFamily="18" charset="0"/>
+                          <a:ea typeface="Cambria Math" panose="02040503050406030204" pitchFamily="18" charset="0"/>
+                        </a:rPr>
+                        <m:t>∙</m:t>
+                      </m:r>
+                      <m:acc>
+                        <m:accPr>
+                          <m:chr m:val="⃗"/>
+                          <m:ctrlPr>
+                            <a:rPr lang="en-US" i="1" smtClean="0">
+                              <a:latin typeface="Cambria Math" panose="02040503050406030204" pitchFamily="18" charset="0"/>
+                              <a:ea typeface="Cambria Math" panose="02040503050406030204" pitchFamily="18" charset="0"/>
+                            </a:rPr>
+                          </m:ctrlPr>
+                        </m:accPr>
+                        <m:e>
+                          <m:sSub>
+                            <m:sSubPr>
+                              <m:ctrlPr>
+                                <a:rPr lang="en-US" i="1" smtClean="0">
+                                  <a:latin typeface="Cambria Math" panose="02040503050406030204" pitchFamily="18" charset="0"/>
+                                  <a:ea typeface="Cambria Math" panose="02040503050406030204" pitchFamily="18" charset="0"/>
+                                </a:rPr>
+                              </m:ctrlPr>
+                            </m:sSubPr>
+                            <m:e>
+                              <m:r>
+                                <a:rPr lang="en-US" b="0" i="1" smtClean="0">
+                                  <a:latin typeface="Cambria Math" panose="02040503050406030204" pitchFamily="18" charset="0"/>
+                                  <a:ea typeface="Cambria Math" panose="02040503050406030204" pitchFamily="18" charset="0"/>
+                                </a:rPr>
+                                <m:t>1</m:t>
+                              </m:r>
+                            </m:e>
+                            <m:sub>
+                              <m:r>
+                                <m:rPr>
+                                  <m:sty m:val="p"/>
+                                </m:rPr>
+                                <a:rPr lang="en-US" b="0" i="1" smtClean="0">
+                                  <a:latin typeface="Cambria Math" panose="02040503050406030204" pitchFamily="18" charset="0"/>
+                                  <a:ea typeface="Cambria Math" panose="02040503050406030204" pitchFamily="18" charset="0"/>
+                                </a:rPr>
+                                <m:t>t</m:t>
+                              </m:r>
+                            </m:sub>
+                          </m:sSub>
+                        </m:e>
+                      </m:acc>
+                      <m:r>
+                        <a:rPr lang="en-US" b="0" i="1" smtClean="0">
+                          <a:latin typeface="Cambria Math" panose="02040503050406030204" pitchFamily="18" charset="0"/>
+                        </a:rPr>
+                        <m:t>)</m:t>
+                      </m:r>
+                      <m:acc>
+                        <m:accPr>
+                          <m:chr m:val="⃗"/>
+                          <m:ctrlPr>
+                            <a:rPr lang="en-US" i="1">
+                              <a:latin typeface="Cambria Math" panose="02040503050406030204" pitchFamily="18" charset="0"/>
+                              <a:ea typeface="Cambria Math" panose="02040503050406030204" pitchFamily="18" charset="0"/>
+                            </a:rPr>
+                          </m:ctrlPr>
+                        </m:accPr>
+                        <m:e>
+                          <m:sSub>
+                            <m:sSubPr>
+                              <m:ctrlPr>
+                                <a:rPr lang="en-US" i="1">
+                                  <a:latin typeface="Cambria Math" panose="02040503050406030204" pitchFamily="18" charset="0"/>
+                                  <a:ea typeface="Cambria Math" panose="02040503050406030204" pitchFamily="18" charset="0"/>
+                                </a:rPr>
+                              </m:ctrlPr>
+                            </m:sSubPr>
+                            <m:e>
+                              <m:r>
+                                <a:rPr lang="en-US" i="1">
+                                  <a:latin typeface="Cambria Math" panose="02040503050406030204" pitchFamily="18" charset="0"/>
+                                  <a:ea typeface="Cambria Math" panose="02040503050406030204" pitchFamily="18" charset="0"/>
+                                </a:rPr>
+                                <m:t>1</m:t>
+                              </m:r>
+                            </m:e>
+                            <m:sub>
+                              <m:r>
+                                <m:rPr>
+                                  <m:sty m:val="p"/>
+                                </m:rPr>
+                                <a:rPr lang="en-US" i="1">
+                                  <a:latin typeface="Cambria Math" panose="02040503050406030204" pitchFamily="18" charset="0"/>
+                                  <a:ea typeface="Cambria Math" panose="02040503050406030204" pitchFamily="18" charset="0"/>
+                                </a:rPr>
+                                <m:t>t</m:t>
+                              </m:r>
+                            </m:sub>
+                          </m:sSub>
+                        </m:e>
+                      </m:acc>
+                    </m:oMath>
+                  </m:oMathPara>
+                </a14:m>
+                <a:endParaRPr lang="en-US" dirty="0"/>
+              </a:p>
+            </p:txBody>
+          </p:sp>
+        </mc:Choice>
+        <mc:Fallback>
+          <p:sp>
+            <p:nvSpPr>
+              <p:cNvPr id="46" name="TextBox 45">
+                <a:extLst>
+                  <a:ext uri="{FF2B5EF4-FFF2-40B4-BE49-F238E27FC236}">
+                    <a16:creationId xmlns:a16="http://schemas.microsoft.com/office/drawing/2014/main" id="{DD41AF9C-3507-E9DF-BC6E-B992B06EA534}"/>
+                  </a:ext>
+                </a:extLst>
+              </p:cNvPr>
+              <p:cNvSpPr txBox="1">
+                <a:spLocks noRot="1" noChangeAspect="1" noMove="1" noResize="1" noEditPoints="1" noAdjustHandles="1" noChangeArrowheads="1" noChangeShapeType="1" noTextEdit="1"/>
+              </p:cNvSpPr>
+              <p:nvPr/>
+            </p:nvSpPr>
+            <p:spPr>
+              <a:xfrm>
+                <a:off x="6896562" y="2867102"/>
+                <a:ext cx="2263119" cy="312458"/>
+              </a:xfrm>
+              <a:prstGeom prst="rect">
+                <a:avLst/>
+              </a:prstGeom>
+              <a:blipFill>
+                <a:blip r:embed="rId9"/>
+                <a:stretch>
+                  <a:fillRect l="-556" b="-34615"/>
+                </a:stretch>
+              </a:blipFill>
+            </p:spPr>
+            <p:txBody>
+              <a:bodyPr/>
+              <a:lstStyle/>
+              <a:p>
+                <a:r>
+                  <a:rPr lang="en-US">
+                    <a:noFill/>
+                  </a:rPr>
+                  <a:t> </a:t>
+                </a:r>
+              </a:p>
+            </p:txBody>
+          </p:sp>
+        </mc:Fallback>
+      </mc:AlternateContent>
+      <mc:AlternateContent xmlns:mc="http://schemas.openxmlformats.org/markup-compatibility/2006">
+        <mc:Choice xmlns:a14="http://schemas.microsoft.com/office/drawing/2010/main" Requires="a14">
+          <p:sp>
+            <p:nvSpPr>
+              <p:cNvPr id="47" name="TextBox 46">
+                <a:extLst>
+                  <a:ext uri="{FF2B5EF4-FFF2-40B4-BE49-F238E27FC236}">
+                    <a16:creationId xmlns:a16="http://schemas.microsoft.com/office/drawing/2014/main" id="{8A28E092-49C2-2B7C-1C74-30560C7C2832}"/>
+                  </a:ext>
+                </a:extLst>
+              </p:cNvPr>
+              <p:cNvSpPr txBox="1"/>
+              <p:nvPr/>
+            </p:nvSpPr>
+            <p:spPr>
+              <a:xfrm>
+                <a:off x="594775" y="3263570"/>
+                <a:ext cx="2783967" cy="330860"/>
+              </a:xfrm>
+              <a:prstGeom prst="rect">
+                <a:avLst/>
+              </a:prstGeom>
+              <a:noFill/>
+            </p:spPr>
+            <p:txBody>
+              <a:bodyPr wrap="none" lIns="0" tIns="0" rIns="0" bIns="0" rtlCol="0">
+                <a:spAutoFit/>
+              </a:bodyPr>
+              <a:lstStyle/>
+              <a:p>
+                <a14:m>
+                  <m:oMathPara xmlns:m="http://schemas.openxmlformats.org/officeDocument/2006/math">
+                    <m:oMathParaPr>
+                      <m:jc m:val="centerGroup"/>
+                    </m:oMathParaPr>
+                    <m:oMath xmlns:m="http://schemas.openxmlformats.org/officeDocument/2006/math">
+                      <m:acc>
+                        <m:accPr>
+                          <m:chr m:val="⃗"/>
+                          <m:ctrlPr>
+                            <a:rPr lang="en-US" i="1" smtClean="0">
+                              <a:latin typeface="Cambria Math" panose="02040503050406030204" pitchFamily="18" charset="0"/>
+                            </a:rPr>
+                          </m:ctrlPr>
+                        </m:accPr>
+                        <m:e>
+                          <m:sSub>
+                            <m:sSubPr>
+                              <m:ctrlPr>
+                                <a:rPr lang="en-US" i="1" smtClean="0">
+                                  <a:latin typeface="Cambria Math" panose="02040503050406030204" pitchFamily="18" charset="0"/>
+                                </a:rPr>
+                              </m:ctrlPr>
+                            </m:sSubPr>
+                            <m:e>
+                              <m:r>
+                                <m:rPr>
+                                  <m:sty m:val="p"/>
+                                </m:rPr>
+                                <a:rPr lang="en-US" b="0" i="1" smtClean="0">
+                                  <a:latin typeface="Cambria Math" panose="02040503050406030204" pitchFamily="18" charset="0"/>
+                                </a:rPr>
+                                <m:t>f</m:t>
+                              </m:r>
+                            </m:e>
+                            <m:sub>
+                              <m:r>
+                                <m:rPr>
+                                  <m:sty m:val="p"/>
+                                </m:rPr>
+                                <a:rPr lang="en-US" b="0" i="1" smtClean="0">
+                                  <a:latin typeface="Cambria Math" panose="02040503050406030204" pitchFamily="18" charset="0"/>
+                                </a:rPr>
+                                <m:t>v</m:t>
+                              </m:r>
+                            </m:sub>
+                          </m:sSub>
+                        </m:e>
+                      </m:acc>
+                      <m:r>
+                        <a:rPr lang="en-US" b="0" i="1" smtClean="0">
+                          <a:latin typeface="Cambria Math" panose="02040503050406030204" pitchFamily="18" charset="0"/>
+                        </a:rPr>
+                        <m:t>=</m:t>
+                      </m:r>
+                      <m:acc>
+                        <m:accPr>
+                          <m:chr m:val="⃗"/>
+                          <m:ctrlPr>
+                            <a:rPr lang="en-US" i="1">
+                              <a:latin typeface="Cambria Math" panose="02040503050406030204" pitchFamily="18" charset="0"/>
+                            </a:rPr>
+                          </m:ctrlPr>
+                        </m:accPr>
+                        <m:e>
+                          <m:sSub>
+                            <m:sSubPr>
+                              <m:ctrlPr>
+                                <a:rPr lang="en-US" i="1">
+                                  <a:latin typeface="Cambria Math" panose="02040503050406030204" pitchFamily="18" charset="0"/>
+                                </a:rPr>
+                              </m:ctrlPr>
+                            </m:sSubPr>
+                            <m:e>
+                              <m:r>
+                                <m:rPr>
+                                  <m:sty m:val="p"/>
+                                </m:rPr>
+                                <a:rPr lang="en-US" i="1">
+                                  <a:latin typeface="Cambria Math" panose="02040503050406030204" pitchFamily="18" charset="0"/>
+                                </a:rPr>
+                                <m:t>f</m:t>
+                              </m:r>
+                            </m:e>
+                            <m:sub>
+                              <m:r>
+                                <a:rPr lang="en-US" i="1" smtClean="0">
+                                  <a:latin typeface="Cambria Math" panose="02040503050406030204" pitchFamily="18" charset="0"/>
+                                  <a:ea typeface="Cambria Math" panose="02040503050406030204" pitchFamily="18" charset="0"/>
+                                </a:rPr>
+                                <m:t>∥</m:t>
+                              </m:r>
+                            </m:sub>
+                          </m:sSub>
+                        </m:e>
+                      </m:acc>
+                      <m:r>
+                        <a:rPr lang="en-US" b="0" i="1" smtClean="0">
+                          <a:latin typeface="Cambria Math" panose="02040503050406030204" pitchFamily="18" charset="0"/>
+                        </a:rPr>
+                        <m:t> +</m:t>
+                      </m:r>
+                      <m:acc>
+                        <m:accPr>
+                          <m:chr m:val="⃗"/>
+                          <m:ctrlPr>
+                            <a:rPr lang="en-US" i="1">
+                              <a:latin typeface="Cambria Math" panose="02040503050406030204" pitchFamily="18" charset="0"/>
+                            </a:rPr>
+                          </m:ctrlPr>
+                        </m:accPr>
+                        <m:e>
+                          <m:sSub>
+                            <m:sSubPr>
+                              <m:ctrlPr>
+                                <a:rPr lang="en-US" i="1">
+                                  <a:latin typeface="Cambria Math" panose="02040503050406030204" pitchFamily="18" charset="0"/>
+                                </a:rPr>
+                              </m:ctrlPr>
+                            </m:sSubPr>
+                            <m:e>
+                              <m:r>
+                                <m:rPr>
+                                  <m:sty m:val="p"/>
+                                </m:rPr>
+                                <a:rPr lang="en-US" i="1">
+                                  <a:latin typeface="Cambria Math" panose="02040503050406030204" pitchFamily="18" charset="0"/>
+                                </a:rPr>
+                                <m:t>f</m:t>
+                              </m:r>
+                            </m:e>
+                            <m:sub>
+                              <m:r>
+                                <a:rPr lang="en-US" i="1" smtClean="0">
+                                  <a:latin typeface="Cambria Math" panose="02040503050406030204" pitchFamily="18" charset="0"/>
+                                  <a:ea typeface="Cambria Math" panose="02040503050406030204" pitchFamily="18" charset="0"/>
+                                </a:rPr>
+                                <m:t>⊥</m:t>
+                              </m:r>
+                            </m:sub>
+                          </m:sSub>
+                        </m:e>
+                      </m:acc>
+                      <m:r>
+                        <a:rPr lang="en-US" b="0" i="1" smtClean="0">
+                          <a:latin typeface="Cambria Math" panose="02040503050406030204" pitchFamily="18" charset="0"/>
+                        </a:rPr>
+                        <m:t> = -</m:t>
+                      </m:r>
+                      <m:sSub>
+                        <m:sSubPr>
+                          <m:ctrlPr>
+                            <a:rPr lang="en-US" b="0" i="1" smtClean="0">
+                              <a:latin typeface="Cambria Math" panose="02040503050406030204" pitchFamily="18" charset="0"/>
+                            </a:rPr>
+                          </m:ctrlPr>
+                        </m:sSubPr>
+                        <m:e>
+                          <m:r>
+                            <a:rPr lang="en-US" b="0" i="1" smtClean="0">
+                              <a:latin typeface="Cambria Math" panose="02040503050406030204" pitchFamily="18" charset="0"/>
+                              <a:ea typeface="Cambria Math" panose="02040503050406030204" pitchFamily="18" charset="0"/>
+                            </a:rPr>
+                            <m:t>𝜂</m:t>
+                          </m:r>
+                        </m:e>
+                        <m:sub>
+                          <m:r>
+                            <a:rPr lang="en-US" b="0" i="1" smtClean="0">
+                              <a:latin typeface="Cambria Math" panose="02040503050406030204" pitchFamily="18" charset="0"/>
+                              <a:ea typeface="Cambria Math" panose="02040503050406030204" pitchFamily="18" charset="0"/>
+                            </a:rPr>
+                            <m:t>∥</m:t>
+                          </m:r>
+                        </m:sub>
+                      </m:sSub>
+                      <m:acc>
+                        <m:accPr>
+                          <m:chr m:val="⃗"/>
+                          <m:ctrlPr>
+                            <a:rPr lang="en-US" i="1">
+                              <a:latin typeface="Cambria Math" panose="02040503050406030204" pitchFamily="18" charset="0"/>
+                            </a:rPr>
+                          </m:ctrlPr>
+                        </m:accPr>
+                        <m:e>
+                          <m:sSub>
+                            <m:sSubPr>
+                              <m:ctrlPr>
+                                <a:rPr lang="en-US" i="1">
+                                  <a:latin typeface="Cambria Math" panose="02040503050406030204" pitchFamily="18" charset="0"/>
+                                </a:rPr>
+                              </m:ctrlPr>
+                            </m:sSubPr>
+                            <m:e>
+                              <m:r>
+                                <m:rPr>
+                                  <m:sty m:val="p"/>
+                                </m:rPr>
+                                <a:rPr lang="en-US" i="1">
+                                  <a:latin typeface="Cambria Math" panose="02040503050406030204" pitchFamily="18" charset="0"/>
+                                </a:rPr>
+                                <m:t>v</m:t>
+                              </m:r>
+                            </m:e>
+                            <m:sub>
+                              <m:r>
+                                <a:rPr lang="en-US" i="1">
+                                  <a:latin typeface="Cambria Math" panose="02040503050406030204" pitchFamily="18" charset="0"/>
+                                  <a:ea typeface="Cambria Math" panose="02040503050406030204" pitchFamily="18" charset="0"/>
+                                </a:rPr>
+                                <m:t>∥</m:t>
+                              </m:r>
+                            </m:sub>
+                          </m:sSub>
+                        </m:e>
+                      </m:acc>
+                      <m:r>
+                        <a:rPr lang="en-US" b="0" i="1" smtClean="0">
+                          <a:latin typeface="Cambria Math" panose="02040503050406030204" pitchFamily="18" charset="0"/>
+                          <a:ea typeface="Cambria Math" panose="02040503050406030204" pitchFamily="18" charset="0"/>
+                        </a:rPr>
+                        <m:t> -</m:t>
+                      </m:r>
+                      <m:sSub>
+                        <m:sSubPr>
+                          <m:ctrlPr>
+                            <a:rPr lang="en-US" i="1">
+                              <a:latin typeface="Cambria Math" panose="02040503050406030204" pitchFamily="18" charset="0"/>
+                            </a:rPr>
+                          </m:ctrlPr>
+                        </m:sSubPr>
+                        <m:e>
+                          <m:r>
+                            <a:rPr lang="en-US" i="1">
+                              <a:latin typeface="Cambria Math" panose="02040503050406030204" pitchFamily="18" charset="0"/>
+                              <a:ea typeface="Cambria Math" panose="02040503050406030204" pitchFamily="18" charset="0"/>
+                            </a:rPr>
+                            <m:t>𝜂</m:t>
+                          </m:r>
+                        </m:e>
+                        <m:sub>
+                          <m:r>
+                            <a:rPr lang="en-US" i="1" smtClean="0">
+                              <a:latin typeface="Cambria Math" panose="02040503050406030204" pitchFamily="18" charset="0"/>
+                              <a:ea typeface="Cambria Math" panose="02040503050406030204" pitchFamily="18" charset="0"/>
+                            </a:rPr>
+                            <m:t>⊥</m:t>
+                          </m:r>
+                        </m:sub>
+                      </m:sSub>
+                      <m:acc>
+                        <m:accPr>
+                          <m:chr m:val="⃗"/>
+                          <m:ctrlPr>
+                            <a:rPr lang="en-US" i="1">
+                              <a:latin typeface="Cambria Math" panose="02040503050406030204" pitchFamily="18" charset="0"/>
+                            </a:rPr>
+                          </m:ctrlPr>
+                        </m:accPr>
+                        <m:e>
+                          <m:sSub>
+                            <m:sSubPr>
+                              <m:ctrlPr>
+                                <a:rPr lang="en-US" i="1">
+                                  <a:latin typeface="Cambria Math" panose="02040503050406030204" pitchFamily="18" charset="0"/>
+                                </a:rPr>
+                              </m:ctrlPr>
+                            </m:sSubPr>
+                            <m:e>
+                              <m:r>
+                                <m:rPr>
+                                  <m:sty m:val="p"/>
+                                </m:rPr>
+                                <a:rPr lang="en-US" i="1">
+                                  <a:latin typeface="Cambria Math" panose="02040503050406030204" pitchFamily="18" charset="0"/>
+                                </a:rPr>
+                                <m:t>v</m:t>
+                              </m:r>
+                            </m:e>
+                            <m:sub>
+                              <m:r>
+                                <a:rPr lang="en-US" i="1">
+                                  <a:latin typeface="Cambria Math" panose="02040503050406030204" pitchFamily="18" charset="0"/>
+                                  <a:ea typeface="Cambria Math" panose="02040503050406030204" pitchFamily="18" charset="0"/>
+                                </a:rPr>
+                                <m:t>⊥</m:t>
+                              </m:r>
+                            </m:sub>
+                          </m:sSub>
+                        </m:e>
+                      </m:acc>
+                    </m:oMath>
+                  </m:oMathPara>
+                </a14:m>
+                <a:endParaRPr lang="en-US" dirty="0"/>
+              </a:p>
+            </p:txBody>
+          </p:sp>
+        </mc:Choice>
+        <mc:Fallback>
+          <p:sp>
+            <p:nvSpPr>
+              <p:cNvPr id="47" name="TextBox 46">
+                <a:extLst>
+                  <a:ext uri="{FF2B5EF4-FFF2-40B4-BE49-F238E27FC236}">
+                    <a16:creationId xmlns:a16="http://schemas.microsoft.com/office/drawing/2014/main" id="{8A28E092-49C2-2B7C-1C74-30560C7C2832}"/>
+                  </a:ext>
+                </a:extLst>
+              </p:cNvPr>
+              <p:cNvSpPr txBox="1">
+                <a:spLocks noRot="1" noChangeAspect="1" noMove="1" noResize="1" noEditPoints="1" noAdjustHandles="1" noChangeArrowheads="1" noChangeShapeType="1" noTextEdit="1"/>
+              </p:cNvSpPr>
+              <p:nvPr/>
+            </p:nvSpPr>
+            <p:spPr>
+              <a:xfrm>
+                <a:off x="594775" y="3263570"/>
+                <a:ext cx="2783967" cy="330860"/>
+              </a:xfrm>
+              <a:prstGeom prst="rect">
+                <a:avLst/>
+              </a:prstGeom>
+              <a:blipFill>
+                <a:blip r:embed="rId10"/>
+                <a:stretch>
+                  <a:fillRect l="-913" b="-28571"/>
+                </a:stretch>
+              </a:blipFill>
+            </p:spPr>
+            <p:txBody>
+              <a:bodyPr/>
+              <a:lstStyle/>
+              <a:p>
+                <a:r>
+                  <a:rPr lang="en-US">
+                    <a:noFill/>
+                  </a:rPr>
+                  <a:t> </a:t>
+                </a:r>
+              </a:p>
+            </p:txBody>
+          </p:sp>
+        </mc:Fallback>
+      </mc:AlternateContent>
+      <mc:AlternateContent xmlns:mc="http://schemas.openxmlformats.org/markup-compatibility/2006">
+        <mc:Choice xmlns:a14="http://schemas.microsoft.com/office/drawing/2010/main" Requires="a14">
+          <p:sp>
+            <p:nvSpPr>
+              <p:cNvPr id="48" name="TextBox 47">
+                <a:extLst>
+                  <a:ext uri="{FF2B5EF4-FFF2-40B4-BE49-F238E27FC236}">
+                    <a16:creationId xmlns:a16="http://schemas.microsoft.com/office/drawing/2014/main" id="{87A79F8D-E420-BC4C-64B6-C9478F31D3F9}"/>
+                  </a:ext>
+                </a:extLst>
+              </p:cNvPr>
+              <p:cNvSpPr txBox="1"/>
+              <p:nvPr/>
+            </p:nvSpPr>
+            <p:spPr>
+              <a:xfrm>
+                <a:off x="2512004" y="5065203"/>
+                <a:ext cx="4474943" cy="330860"/>
+              </a:xfrm>
+              <a:prstGeom prst="rect">
+                <a:avLst/>
+              </a:prstGeom>
+              <a:noFill/>
+            </p:spPr>
+            <p:txBody>
+              <a:bodyPr wrap="none" lIns="0" tIns="0" rIns="0" bIns="0" rtlCol="0">
+                <a:spAutoFit/>
+              </a:bodyPr>
+              <a:lstStyle/>
+              <a:p>
+                <a14:m>
+                  <m:oMathPara xmlns:m="http://schemas.openxmlformats.org/officeDocument/2006/math">
+                    <m:oMathParaPr>
+                      <m:jc m:val="centerGroup"/>
+                    </m:oMathParaPr>
+                    <m:oMath xmlns:m="http://schemas.openxmlformats.org/officeDocument/2006/math">
+                      <m:acc>
+                        <m:accPr>
+                          <m:chr m:val="⃗"/>
+                          <m:ctrlPr>
+                            <a:rPr lang="en-US" i="1" smtClean="0">
+                              <a:latin typeface="Cambria Math" panose="02040503050406030204" pitchFamily="18" charset="0"/>
+                            </a:rPr>
+                          </m:ctrlPr>
+                        </m:accPr>
+                        <m:e>
+                          <m:sSub>
+                            <m:sSubPr>
+                              <m:ctrlPr>
+                                <a:rPr lang="en-US" i="1" smtClean="0">
+                                  <a:latin typeface="Cambria Math" panose="02040503050406030204" pitchFamily="18" charset="0"/>
+                                </a:rPr>
+                              </m:ctrlPr>
+                            </m:sSubPr>
+                            <m:e>
+                              <m:r>
+                                <m:rPr>
+                                  <m:sty m:val="p"/>
+                                </m:rPr>
+                                <a:rPr lang="en-US" b="0" i="1" smtClean="0">
+                                  <a:latin typeface="Cambria Math" panose="02040503050406030204" pitchFamily="18" charset="0"/>
+                                </a:rPr>
+                                <m:t>f</m:t>
+                              </m:r>
+                            </m:e>
+                            <m:sub>
+                              <m:r>
+                                <m:rPr>
+                                  <m:sty m:val="p"/>
+                                </m:rPr>
+                                <a:rPr lang="en-US" b="0" i="1" smtClean="0">
+                                  <a:latin typeface="Cambria Math" panose="02040503050406030204" pitchFamily="18" charset="0"/>
+                                </a:rPr>
+                                <m:t>v</m:t>
+                              </m:r>
+                            </m:sub>
+                          </m:sSub>
+                        </m:e>
+                      </m:acc>
+                      <m:r>
+                        <a:rPr lang="en-US" b="0" i="1" smtClean="0">
+                          <a:latin typeface="Cambria Math" panose="02040503050406030204" pitchFamily="18" charset="0"/>
+                        </a:rPr>
+                        <m:t>= -</m:t>
+                      </m:r>
+                      <m:sSub>
+                        <m:sSubPr>
+                          <m:ctrlPr>
+                            <a:rPr lang="en-US" b="0" i="1" smtClean="0">
+                              <a:latin typeface="Cambria Math" panose="02040503050406030204" pitchFamily="18" charset="0"/>
+                            </a:rPr>
+                          </m:ctrlPr>
+                        </m:sSubPr>
+                        <m:e>
+                          <m:r>
+                            <a:rPr lang="en-US" b="0" i="1" smtClean="0">
+                              <a:latin typeface="Cambria Math" panose="02040503050406030204" pitchFamily="18" charset="0"/>
+                              <a:ea typeface="Cambria Math" panose="02040503050406030204" pitchFamily="18" charset="0"/>
+                            </a:rPr>
+                            <m:t>𝜂</m:t>
+                          </m:r>
+                        </m:e>
+                        <m:sub>
+                          <m:r>
+                            <a:rPr lang="en-US" b="0" i="1" smtClean="0">
+                              <a:latin typeface="Cambria Math" panose="02040503050406030204" pitchFamily="18" charset="0"/>
+                              <a:ea typeface="Cambria Math" panose="02040503050406030204" pitchFamily="18" charset="0"/>
+                            </a:rPr>
+                            <m:t>∥</m:t>
+                          </m:r>
+                        </m:sub>
+                      </m:sSub>
+                      <m:r>
+                        <a:rPr lang="en-US" i="1">
+                          <a:latin typeface="Cambria Math" panose="02040503050406030204" pitchFamily="18" charset="0"/>
+                        </a:rPr>
+                        <m:t>(</m:t>
+                      </m:r>
+                      <m:acc>
+                        <m:accPr>
+                          <m:chr m:val="⃗"/>
+                          <m:ctrlPr>
+                            <a:rPr lang="en-US" i="1">
+                              <a:latin typeface="Cambria Math" panose="02040503050406030204" pitchFamily="18" charset="0"/>
+                            </a:rPr>
+                          </m:ctrlPr>
+                        </m:accPr>
+                        <m:e>
+                          <m:sSub>
+                            <m:sSubPr>
+                              <m:ctrlPr>
+                                <a:rPr lang="en-US" i="1">
+                                  <a:latin typeface="Cambria Math" panose="02040503050406030204" pitchFamily="18" charset="0"/>
+                                </a:rPr>
+                              </m:ctrlPr>
+                            </m:sSubPr>
+                            <m:e>
+                              <m:r>
+                                <m:rPr>
+                                  <m:sty m:val="p"/>
+                                </m:rPr>
+                                <a:rPr lang="en-US" i="1">
+                                  <a:latin typeface="Cambria Math" panose="02040503050406030204" pitchFamily="18" charset="0"/>
+                                </a:rPr>
+                                <m:t>v</m:t>
+                              </m:r>
+                            </m:e>
+                            <m:sub>
+                              <m:r>
+                                <m:rPr>
+                                  <m:sty m:val="p"/>
+                                </m:rPr>
+                                <a:rPr lang="en-US" i="1">
+                                  <a:latin typeface="Cambria Math" panose="02040503050406030204" pitchFamily="18" charset="0"/>
+                                </a:rPr>
+                                <m:t>rel</m:t>
+                              </m:r>
+                            </m:sub>
+                          </m:sSub>
+                        </m:e>
+                      </m:acc>
+                      <m:r>
+                        <a:rPr lang="en-US" i="1">
+                          <a:latin typeface="Cambria Math" panose="02040503050406030204" pitchFamily="18" charset="0"/>
+                          <a:ea typeface="Cambria Math" panose="02040503050406030204" pitchFamily="18" charset="0"/>
+                        </a:rPr>
+                        <m:t>∙</m:t>
+                      </m:r>
+                      <m:acc>
+                        <m:accPr>
+                          <m:chr m:val="⃗"/>
+                          <m:ctrlPr>
+                            <a:rPr lang="en-US" i="1">
+                              <a:latin typeface="Cambria Math" panose="02040503050406030204" pitchFamily="18" charset="0"/>
+                              <a:ea typeface="Cambria Math" panose="02040503050406030204" pitchFamily="18" charset="0"/>
+                            </a:rPr>
+                          </m:ctrlPr>
+                        </m:accPr>
+                        <m:e>
+                          <m:sSub>
+                            <m:sSubPr>
+                              <m:ctrlPr>
+                                <a:rPr lang="en-US" i="1">
+                                  <a:latin typeface="Cambria Math" panose="02040503050406030204" pitchFamily="18" charset="0"/>
+                                  <a:ea typeface="Cambria Math" panose="02040503050406030204" pitchFamily="18" charset="0"/>
+                                </a:rPr>
+                              </m:ctrlPr>
+                            </m:sSubPr>
+                            <m:e>
+                              <m:r>
+                                <a:rPr lang="en-US" i="1">
+                                  <a:latin typeface="Cambria Math" panose="02040503050406030204" pitchFamily="18" charset="0"/>
+                                  <a:ea typeface="Cambria Math" panose="02040503050406030204" pitchFamily="18" charset="0"/>
+                                </a:rPr>
+                                <m:t>1</m:t>
+                              </m:r>
+                            </m:e>
+                            <m:sub>
+                              <m:r>
+                                <m:rPr>
+                                  <m:sty m:val="p"/>
+                                </m:rPr>
+                                <a:rPr lang="en-US" i="1">
+                                  <a:latin typeface="Cambria Math" panose="02040503050406030204" pitchFamily="18" charset="0"/>
+                                  <a:ea typeface="Cambria Math" panose="02040503050406030204" pitchFamily="18" charset="0"/>
+                                </a:rPr>
+                                <m:t>t</m:t>
+                              </m:r>
+                            </m:sub>
+                          </m:sSub>
+                        </m:e>
+                      </m:acc>
+                      <m:r>
+                        <a:rPr lang="en-US" i="1">
+                          <a:latin typeface="Cambria Math" panose="02040503050406030204" pitchFamily="18" charset="0"/>
+                        </a:rPr>
+                        <m:t>)</m:t>
+                      </m:r>
+                      <m:acc>
+                        <m:accPr>
+                          <m:chr m:val="⃗"/>
+                          <m:ctrlPr>
+                            <a:rPr lang="en-US" i="1">
+                              <a:latin typeface="Cambria Math" panose="02040503050406030204" pitchFamily="18" charset="0"/>
+                              <a:ea typeface="Cambria Math" panose="02040503050406030204" pitchFamily="18" charset="0"/>
+                            </a:rPr>
+                          </m:ctrlPr>
+                        </m:accPr>
+                        <m:e>
+                          <m:sSub>
+                            <m:sSubPr>
+                              <m:ctrlPr>
+                                <a:rPr lang="en-US" i="1">
+                                  <a:latin typeface="Cambria Math" panose="02040503050406030204" pitchFamily="18" charset="0"/>
+                                  <a:ea typeface="Cambria Math" panose="02040503050406030204" pitchFamily="18" charset="0"/>
+                                </a:rPr>
+                              </m:ctrlPr>
+                            </m:sSubPr>
+                            <m:e>
+                              <m:r>
+                                <a:rPr lang="en-US" i="1">
+                                  <a:latin typeface="Cambria Math" panose="02040503050406030204" pitchFamily="18" charset="0"/>
+                                  <a:ea typeface="Cambria Math" panose="02040503050406030204" pitchFamily="18" charset="0"/>
+                                </a:rPr>
+                                <m:t>1</m:t>
+                              </m:r>
+                            </m:e>
+                            <m:sub>
+                              <m:r>
+                                <m:rPr>
+                                  <m:sty m:val="p"/>
+                                </m:rPr>
+                                <a:rPr lang="en-US" i="1">
+                                  <a:latin typeface="Cambria Math" panose="02040503050406030204" pitchFamily="18" charset="0"/>
+                                  <a:ea typeface="Cambria Math" panose="02040503050406030204" pitchFamily="18" charset="0"/>
+                                </a:rPr>
+                                <m:t>t</m:t>
+                              </m:r>
+                            </m:sub>
+                          </m:sSub>
+                          <m:r>
+                            <a:rPr lang="en-US" b="0" i="1" smtClean="0">
+                              <a:latin typeface="Cambria Math" panose="02040503050406030204" pitchFamily="18" charset="0"/>
+                              <a:ea typeface="Cambria Math" panose="02040503050406030204" pitchFamily="18" charset="0"/>
+                            </a:rPr>
+                            <m:t> </m:t>
+                          </m:r>
+                        </m:e>
+                      </m:acc>
+                      <m:r>
+                        <a:rPr lang="en-US" b="0" i="1" smtClean="0">
+                          <a:latin typeface="Cambria Math" panose="02040503050406030204" pitchFamily="18" charset="0"/>
+                          <a:ea typeface="Cambria Math" panose="02040503050406030204" pitchFamily="18" charset="0"/>
+                        </a:rPr>
+                        <m:t>- </m:t>
+                      </m:r>
+                      <m:sSub>
+                        <m:sSubPr>
+                          <m:ctrlPr>
+                            <a:rPr lang="en-US" i="1">
+                              <a:latin typeface="Cambria Math" panose="02040503050406030204" pitchFamily="18" charset="0"/>
+                            </a:rPr>
+                          </m:ctrlPr>
+                        </m:sSubPr>
+                        <m:e>
+                          <m:r>
+                            <a:rPr lang="en-US" i="1">
+                              <a:latin typeface="Cambria Math" panose="02040503050406030204" pitchFamily="18" charset="0"/>
+                              <a:ea typeface="Cambria Math" panose="02040503050406030204" pitchFamily="18" charset="0"/>
+                            </a:rPr>
+                            <m:t>𝜂</m:t>
+                          </m:r>
+                        </m:e>
+                        <m:sub>
+                          <m:r>
+                            <a:rPr lang="en-US" i="1" smtClean="0">
+                              <a:latin typeface="Cambria Math" panose="02040503050406030204" pitchFamily="18" charset="0"/>
+                              <a:ea typeface="Cambria Math" panose="02040503050406030204" pitchFamily="18" charset="0"/>
+                            </a:rPr>
+                            <m:t>⊥</m:t>
+                          </m:r>
+                        </m:sub>
+                      </m:sSub>
+                      <m:r>
+                        <a:rPr lang="en-US" b="0" i="1" smtClean="0">
+                          <a:latin typeface="Cambria Math" panose="02040503050406030204" pitchFamily="18" charset="0"/>
+                          <a:ea typeface="Cambria Math" panose="02040503050406030204" pitchFamily="18" charset="0"/>
+                        </a:rPr>
+                        <m:t>(</m:t>
+                      </m:r>
+                      <m:acc>
+                        <m:accPr>
+                          <m:chr m:val="⃗"/>
+                          <m:ctrlPr>
+                            <a:rPr lang="en-US" i="1">
+                              <a:latin typeface="Cambria Math" panose="02040503050406030204" pitchFamily="18" charset="0"/>
+                            </a:rPr>
+                          </m:ctrlPr>
+                        </m:accPr>
+                        <m:e>
+                          <m:sSub>
+                            <m:sSubPr>
+                              <m:ctrlPr>
+                                <a:rPr lang="en-US" i="1">
+                                  <a:latin typeface="Cambria Math" panose="02040503050406030204" pitchFamily="18" charset="0"/>
+                                </a:rPr>
+                              </m:ctrlPr>
+                            </m:sSubPr>
+                            <m:e>
+                              <m:r>
+                                <m:rPr>
+                                  <m:sty m:val="p"/>
+                                </m:rPr>
+                                <a:rPr lang="en-US" i="1">
+                                  <a:latin typeface="Cambria Math" panose="02040503050406030204" pitchFamily="18" charset="0"/>
+                                </a:rPr>
+                                <m:t>v</m:t>
+                              </m:r>
+                            </m:e>
+                            <m:sub>
+                              <m:r>
+                                <m:rPr>
+                                  <m:sty m:val="p"/>
+                                </m:rPr>
+                                <a:rPr lang="en-US" i="1">
+                                  <a:latin typeface="Cambria Math" panose="02040503050406030204" pitchFamily="18" charset="0"/>
+                                </a:rPr>
+                                <m:t>rel</m:t>
+                              </m:r>
+                            </m:sub>
+                          </m:sSub>
+                        </m:e>
+                      </m:acc>
+                      <m:r>
+                        <a:rPr lang="en-US" i="1">
+                          <a:latin typeface="Cambria Math" panose="02040503050406030204" pitchFamily="18" charset="0"/>
+                        </a:rPr>
+                        <m:t> − (</m:t>
+                      </m:r>
+                      <m:acc>
+                        <m:accPr>
+                          <m:chr m:val="⃗"/>
+                          <m:ctrlPr>
+                            <a:rPr lang="en-US" i="1">
+                              <a:latin typeface="Cambria Math" panose="02040503050406030204" pitchFamily="18" charset="0"/>
+                            </a:rPr>
+                          </m:ctrlPr>
+                        </m:accPr>
+                        <m:e>
+                          <m:sSub>
+                            <m:sSubPr>
+                              <m:ctrlPr>
+                                <a:rPr lang="en-US" i="1">
+                                  <a:latin typeface="Cambria Math" panose="02040503050406030204" pitchFamily="18" charset="0"/>
+                                </a:rPr>
+                              </m:ctrlPr>
+                            </m:sSubPr>
+                            <m:e>
+                              <m:r>
+                                <m:rPr>
+                                  <m:sty m:val="p"/>
+                                </m:rPr>
+                                <a:rPr lang="en-US" i="1">
+                                  <a:latin typeface="Cambria Math" panose="02040503050406030204" pitchFamily="18" charset="0"/>
+                                </a:rPr>
+                                <m:t>v</m:t>
+                              </m:r>
+                            </m:e>
+                            <m:sub>
+                              <m:r>
+                                <m:rPr>
+                                  <m:sty m:val="p"/>
+                                </m:rPr>
+                                <a:rPr lang="en-US" i="1">
+                                  <a:latin typeface="Cambria Math" panose="02040503050406030204" pitchFamily="18" charset="0"/>
+                                </a:rPr>
+                                <m:t>rel</m:t>
+                              </m:r>
+                            </m:sub>
+                          </m:sSub>
+                        </m:e>
+                      </m:acc>
+                      <m:r>
+                        <a:rPr lang="en-US" i="1">
+                          <a:latin typeface="Cambria Math" panose="02040503050406030204" pitchFamily="18" charset="0"/>
+                          <a:ea typeface="Cambria Math" panose="02040503050406030204" pitchFamily="18" charset="0"/>
+                        </a:rPr>
+                        <m:t>∙</m:t>
+                      </m:r>
+                      <m:acc>
+                        <m:accPr>
+                          <m:chr m:val="⃗"/>
+                          <m:ctrlPr>
+                            <a:rPr lang="en-US" i="1">
+                              <a:latin typeface="Cambria Math" panose="02040503050406030204" pitchFamily="18" charset="0"/>
+                              <a:ea typeface="Cambria Math" panose="02040503050406030204" pitchFamily="18" charset="0"/>
+                            </a:rPr>
+                          </m:ctrlPr>
+                        </m:accPr>
+                        <m:e>
+                          <m:sSub>
+                            <m:sSubPr>
+                              <m:ctrlPr>
+                                <a:rPr lang="en-US" i="1">
+                                  <a:latin typeface="Cambria Math" panose="02040503050406030204" pitchFamily="18" charset="0"/>
+                                  <a:ea typeface="Cambria Math" panose="02040503050406030204" pitchFamily="18" charset="0"/>
+                                </a:rPr>
+                              </m:ctrlPr>
+                            </m:sSubPr>
+                            <m:e>
+                              <m:r>
+                                <a:rPr lang="en-US" i="1">
+                                  <a:latin typeface="Cambria Math" panose="02040503050406030204" pitchFamily="18" charset="0"/>
+                                  <a:ea typeface="Cambria Math" panose="02040503050406030204" pitchFamily="18" charset="0"/>
+                                </a:rPr>
+                                <m:t>1</m:t>
+                              </m:r>
+                            </m:e>
+                            <m:sub>
+                              <m:r>
+                                <m:rPr>
+                                  <m:sty m:val="p"/>
+                                </m:rPr>
+                                <a:rPr lang="en-US" i="1">
+                                  <a:latin typeface="Cambria Math" panose="02040503050406030204" pitchFamily="18" charset="0"/>
+                                  <a:ea typeface="Cambria Math" panose="02040503050406030204" pitchFamily="18" charset="0"/>
+                                </a:rPr>
+                                <m:t>t</m:t>
+                              </m:r>
+                            </m:sub>
+                          </m:sSub>
+                        </m:e>
+                      </m:acc>
+                      <m:r>
+                        <a:rPr lang="en-US" i="1">
+                          <a:latin typeface="Cambria Math" panose="02040503050406030204" pitchFamily="18" charset="0"/>
+                        </a:rPr>
+                        <m:t>)</m:t>
+                      </m:r>
+                      <m:acc>
+                        <m:accPr>
+                          <m:chr m:val="⃗"/>
+                          <m:ctrlPr>
+                            <a:rPr lang="en-US" i="1">
+                              <a:latin typeface="Cambria Math" panose="02040503050406030204" pitchFamily="18" charset="0"/>
+                              <a:ea typeface="Cambria Math" panose="02040503050406030204" pitchFamily="18" charset="0"/>
+                            </a:rPr>
+                          </m:ctrlPr>
+                        </m:accPr>
+                        <m:e>
+                          <m:sSub>
+                            <m:sSubPr>
+                              <m:ctrlPr>
+                                <a:rPr lang="en-US" i="1">
+                                  <a:latin typeface="Cambria Math" panose="02040503050406030204" pitchFamily="18" charset="0"/>
+                                  <a:ea typeface="Cambria Math" panose="02040503050406030204" pitchFamily="18" charset="0"/>
+                                </a:rPr>
+                              </m:ctrlPr>
+                            </m:sSubPr>
+                            <m:e>
+                              <m:r>
+                                <a:rPr lang="en-US" i="1">
+                                  <a:latin typeface="Cambria Math" panose="02040503050406030204" pitchFamily="18" charset="0"/>
+                                  <a:ea typeface="Cambria Math" panose="02040503050406030204" pitchFamily="18" charset="0"/>
+                                </a:rPr>
+                                <m:t>1</m:t>
+                              </m:r>
+                            </m:e>
+                            <m:sub>
+                              <m:r>
+                                <m:rPr>
+                                  <m:sty m:val="p"/>
+                                </m:rPr>
+                                <a:rPr lang="en-US" i="1">
+                                  <a:latin typeface="Cambria Math" panose="02040503050406030204" pitchFamily="18" charset="0"/>
+                                  <a:ea typeface="Cambria Math" panose="02040503050406030204" pitchFamily="18" charset="0"/>
+                                </a:rPr>
+                                <m:t>t</m:t>
+                              </m:r>
+                            </m:sub>
+                          </m:sSub>
+                        </m:e>
+                      </m:acc>
+                      <m:r>
+                        <a:rPr lang="en-US" b="0" i="1" smtClean="0">
+                          <a:latin typeface="Cambria Math" panose="02040503050406030204" pitchFamily="18" charset="0"/>
+                          <a:ea typeface="Cambria Math" panose="02040503050406030204" pitchFamily="18" charset="0"/>
+                        </a:rPr>
+                        <m:t>)</m:t>
+                      </m:r>
+                    </m:oMath>
+                  </m:oMathPara>
+                </a14:m>
+                <a:endParaRPr lang="en-US" dirty="0"/>
+              </a:p>
+            </p:txBody>
+          </p:sp>
+        </mc:Choice>
+        <mc:Fallback>
+          <p:sp>
+            <p:nvSpPr>
+              <p:cNvPr id="48" name="TextBox 47">
+                <a:extLst>
+                  <a:ext uri="{FF2B5EF4-FFF2-40B4-BE49-F238E27FC236}">
+                    <a16:creationId xmlns:a16="http://schemas.microsoft.com/office/drawing/2014/main" id="{87A79F8D-E420-BC4C-64B6-C9478F31D3F9}"/>
+                  </a:ext>
+                </a:extLst>
+              </p:cNvPr>
+              <p:cNvSpPr txBox="1">
+                <a:spLocks noRot="1" noChangeAspect="1" noMove="1" noResize="1" noEditPoints="1" noAdjustHandles="1" noChangeArrowheads="1" noChangeShapeType="1" noTextEdit="1"/>
+              </p:cNvSpPr>
+              <p:nvPr/>
+            </p:nvSpPr>
+            <p:spPr>
+              <a:xfrm>
+                <a:off x="2512004" y="5065203"/>
+                <a:ext cx="4474943" cy="330860"/>
+              </a:xfrm>
+              <a:prstGeom prst="rect">
+                <a:avLst/>
+              </a:prstGeom>
+              <a:blipFill>
+                <a:blip r:embed="rId11"/>
+                <a:stretch>
+                  <a:fillRect l="-565" r="-1130" b="-29630"/>
+                </a:stretch>
+              </a:blipFill>
+            </p:spPr>
+            <p:txBody>
+              <a:bodyPr/>
+              <a:lstStyle/>
+              <a:p>
+                <a:r>
+                  <a:rPr lang="en-US">
+                    <a:noFill/>
+                  </a:rPr>
+                  <a:t> </a:t>
+                </a:r>
+              </a:p>
+            </p:txBody>
+          </p:sp>
+        </mc:Fallback>
+      </mc:AlternateContent>
+      <p:grpSp>
+        <p:nvGrpSpPr>
+          <p:cNvPr id="59" name="Group 58">
+            <a:extLst>
+              <a:ext uri="{FF2B5EF4-FFF2-40B4-BE49-F238E27FC236}">
+                <a16:creationId xmlns:a16="http://schemas.microsoft.com/office/drawing/2014/main" id="{460F8384-ECC1-22B5-5BEF-BAF2F1391C6F}"/>
+              </a:ext>
+            </a:extLst>
+          </p:cNvPr>
+          <p:cNvGrpSpPr/>
+          <p:nvPr/>
+        </p:nvGrpSpPr>
+        <p:grpSpPr>
+          <a:xfrm>
+            <a:off x="1013880" y="5477292"/>
+            <a:ext cx="1945758" cy="1172476"/>
+            <a:chOff x="520995" y="5002715"/>
+            <a:chExt cx="1945758" cy="1172476"/>
+          </a:xfrm>
+        </p:grpSpPr>
+        <p:sp>
+          <p:nvSpPr>
+            <p:cNvPr id="55" name="Rounded Rectangle 54">
+              <a:extLst>
+                <a:ext uri="{FF2B5EF4-FFF2-40B4-BE49-F238E27FC236}">
+                  <a16:creationId xmlns:a16="http://schemas.microsoft.com/office/drawing/2014/main" id="{CAD66184-915A-0FFC-5E1C-5EE5250285CE}"/>
+                </a:ext>
+              </a:extLst>
+            </p:cNvPr>
+            <p:cNvSpPr/>
+            <p:nvPr/>
+          </p:nvSpPr>
+          <p:spPr>
+            <a:xfrm>
+              <a:off x="520995" y="5484611"/>
+              <a:ext cx="1945758" cy="690580"/>
+            </a:xfrm>
+            <a:prstGeom prst="roundRect">
+              <a:avLst/>
+            </a:prstGeom>
+          </p:spPr>
+          <p:style>
+            <a:lnRef idx="2">
+              <a:schemeClr val="accent4"/>
+            </a:lnRef>
+            <a:fillRef idx="1">
+              <a:schemeClr val="lt1"/>
+            </a:fillRef>
+            <a:effectRef idx="0">
+              <a:schemeClr val="accent4"/>
+            </a:effectRef>
+            <a:fontRef idx="minor">
+              <a:schemeClr val="dk1"/>
+            </a:fontRef>
+          </p:style>
+          <p:txBody>
+            <a:bodyPr rtlCol="0" anchor="ctr"/>
+            <a:lstStyle/>
+            <a:p>
+              <a:pPr algn="ctr"/>
+              <a:endParaRPr lang="en-US"/>
+            </a:p>
+          </p:txBody>
+        </p:sp>
+        <p:sp>
+          <p:nvSpPr>
+            <p:cNvPr id="49" name="TextBox 48">
+              <a:extLst>
+                <a:ext uri="{FF2B5EF4-FFF2-40B4-BE49-F238E27FC236}">
+                  <a16:creationId xmlns:a16="http://schemas.microsoft.com/office/drawing/2014/main" id="{201AE9B8-39E5-2CDA-F939-D1AFE1FEDA20}"/>
+                </a:ext>
+              </a:extLst>
+            </p:cNvPr>
+            <p:cNvSpPr txBox="1"/>
+            <p:nvPr/>
+          </p:nvSpPr>
+          <p:spPr>
+            <a:xfrm>
+              <a:off x="685800" y="5553399"/>
+              <a:ext cx="1653363" cy="523220"/>
+            </a:xfrm>
+            <a:prstGeom prst="rect">
+              <a:avLst/>
+            </a:prstGeom>
+            <a:noFill/>
+          </p:spPr>
+          <p:txBody>
+            <a:bodyPr wrap="square" lIns="0" tIns="0" rIns="0" bIns="0">
+              <a:spAutoFit/>
+            </a:bodyPr>
+            <a:lstStyle/>
+            <a:p>
+              <a:pPr>
+                <a:defRPr sz="1700" b="0">
+                  <a:solidFill>
+                    <a:srgbClr val="26232B"/>
+                  </a:solidFill>
+                  <a:latin typeface="Arial"/>
+                </a:defRPr>
+              </a:pPr>
+              <a:r>
+                <a:rPr dirty="0"/>
+                <a:t>Local drag force</a:t>
+              </a:r>
+              <a:br>
+                <a:rPr dirty="0"/>
+              </a:br>
+              <a:r>
+                <a:rPr dirty="0"/>
+                <a:t>per unit length</a:t>
+              </a:r>
+            </a:p>
+          </p:txBody>
+        </p:sp>
+        <p:cxnSp>
+          <p:nvCxnSpPr>
+            <p:cNvPr id="57" name="Straight Arrow Connector 56">
+              <a:extLst>
+                <a:ext uri="{FF2B5EF4-FFF2-40B4-BE49-F238E27FC236}">
+                  <a16:creationId xmlns:a16="http://schemas.microsoft.com/office/drawing/2014/main" id="{FB8464BB-D706-0C64-E344-96D9763CA8AB}"/>
+                </a:ext>
+              </a:extLst>
+            </p:cNvPr>
+            <p:cNvCxnSpPr>
+              <a:cxnSpLocks/>
+              <a:endCxn id="55" idx="0"/>
+            </p:cNvCxnSpPr>
+            <p:nvPr/>
+          </p:nvCxnSpPr>
+          <p:spPr>
+            <a:xfrm flipH="1">
+              <a:off x="1493874" y="5002715"/>
+              <a:ext cx="527533" cy="481896"/>
+            </a:xfrm>
+            <a:prstGeom prst="straightConnector1">
+              <a:avLst/>
+            </a:prstGeom>
+            <a:ln>
+              <a:tailEnd type="triangle"/>
+            </a:ln>
+          </p:spPr>
+          <p:style>
+            <a:lnRef idx="2">
+              <a:schemeClr val="accent5"/>
+            </a:lnRef>
+            <a:fillRef idx="0">
+              <a:schemeClr val="accent5"/>
+            </a:fillRef>
+            <a:effectRef idx="1">
+              <a:schemeClr val="accent5"/>
+            </a:effectRef>
+            <a:fontRef idx="minor">
+              <a:schemeClr val="tx1"/>
+            </a:fontRef>
+          </p:style>
+        </p:cxnSp>
+      </p:grpSp>
+      <p:grpSp>
+        <p:nvGrpSpPr>
+          <p:cNvPr id="68" name="Group 67">
+            <a:extLst>
+              <a:ext uri="{FF2B5EF4-FFF2-40B4-BE49-F238E27FC236}">
+                <a16:creationId xmlns:a16="http://schemas.microsoft.com/office/drawing/2014/main" id="{31EE0D1A-27DB-0A14-7A11-9F781A8A9212}"/>
+              </a:ext>
+            </a:extLst>
+          </p:cNvPr>
+          <p:cNvGrpSpPr/>
+          <p:nvPr/>
+        </p:nvGrpSpPr>
+        <p:grpSpPr>
+          <a:xfrm>
+            <a:off x="4623392" y="5396063"/>
+            <a:ext cx="1945758" cy="1266727"/>
+            <a:chOff x="4623392" y="5396063"/>
+            <a:chExt cx="1945758" cy="1266727"/>
+          </a:xfrm>
+        </p:grpSpPr>
+        <p:sp>
+          <p:nvSpPr>
+            <p:cNvPr id="61" name="Rounded Rectangle 60">
+              <a:extLst>
+                <a:ext uri="{FF2B5EF4-FFF2-40B4-BE49-F238E27FC236}">
+                  <a16:creationId xmlns:a16="http://schemas.microsoft.com/office/drawing/2014/main" id="{86DCE368-7ABB-02F9-927D-9F837F280A21}"/>
+                </a:ext>
+              </a:extLst>
+            </p:cNvPr>
+            <p:cNvSpPr/>
+            <p:nvPr/>
+          </p:nvSpPr>
+          <p:spPr>
+            <a:xfrm>
+              <a:off x="4623392" y="5972210"/>
+              <a:ext cx="1945758" cy="690580"/>
+            </a:xfrm>
+            <a:prstGeom prst="roundRect">
+              <a:avLst/>
+            </a:prstGeom>
+          </p:spPr>
+          <p:style>
+            <a:lnRef idx="2">
+              <a:schemeClr val="accent4"/>
+            </a:lnRef>
+            <a:fillRef idx="1">
+              <a:schemeClr val="lt1"/>
+            </a:fillRef>
+            <a:effectRef idx="0">
+              <a:schemeClr val="accent4"/>
+            </a:effectRef>
+            <a:fontRef idx="minor">
+              <a:schemeClr val="dk1"/>
+            </a:fontRef>
+          </p:style>
+          <p:txBody>
+            <a:bodyPr rtlCol="0" anchor="ctr"/>
+            <a:lstStyle/>
+            <a:p>
+              <a:pPr algn="ctr"/>
+              <a:endParaRPr lang="en-US"/>
+            </a:p>
+          </p:txBody>
+        </p:sp>
+        <p:sp>
+          <p:nvSpPr>
+            <p:cNvPr id="51" name="TextBox 50">
+              <a:extLst>
+                <a:ext uri="{FF2B5EF4-FFF2-40B4-BE49-F238E27FC236}">
+                  <a16:creationId xmlns:a16="http://schemas.microsoft.com/office/drawing/2014/main" id="{DE4D7EC8-6248-731E-9E99-0E57915CAD9F}"/>
+                </a:ext>
+              </a:extLst>
+            </p:cNvPr>
+            <p:cNvSpPr txBox="1"/>
+            <p:nvPr/>
+          </p:nvSpPr>
+          <p:spPr>
+            <a:xfrm>
+              <a:off x="4932403" y="6055890"/>
+              <a:ext cx="1367976" cy="523220"/>
+            </a:xfrm>
+            <a:prstGeom prst="rect">
+              <a:avLst/>
+            </a:prstGeom>
+            <a:noFill/>
+          </p:spPr>
+          <p:txBody>
+            <a:bodyPr wrap="square" lIns="0" tIns="0" rIns="0" bIns="0">
+              <a:spAutoFit/>
+            </a:bodyPr>
+            <a:lstStyle/>
+            <a:p>
+              <a:pPr algn="ctr">
+                <a:defRPr sz="1700" b="0">
+                  <a:solidFill>
+                    <a:srgbClr val="26232B"/>
+                  </a:solidFill>
+                  <a:latin typeface="Arial"/>
+                </a:defRPr>
+              </a:pPr>
+              <a:r>
+                <a:rPr dirty="0"/>
+                <a:t>Normal drag</a:t>
+              </a:r>
+              <a:br>
+                <a:rPr dirty="0"/>
+              </a:br>
+              <a:r>
+                <a:rPr dirty="0"/>
+                <a:t>coefficient</a:t>
+              </a:r>
+            </a:p>
+          </p:txBody>
+        </p:sp>
+        <p:cxnSp>
+          <p:nvCxnSpPr>
+            <p:cNvPr id="62" name="Straight Arrow Connector 61">
+              <a:extLst>
+                <a:ext uri="{FF2B5EF4-FFF2-40B4-BE49-F238E27FC236}">
+                  <a16:creationId xmlns:a16="http://schemas.microsoft.com/office/drawing/2014/main" id="{5EC30DB1-03BC-5538-44F4-F2E7A816BA07}"/>
+                </a:ext>
+              </a:extLst>
+            </p:cNvPr>
+            <p:cNvCxnSpPr>
+              <a:cxnSpLocks/>
+              <a:stCxn id="48" idx="2"/>
+            </p:cNvCxnSpPr>
+            <p:nvPr/>
+          </p:nvCxnSpPr>
+          <p:spPr>
+            <a:xfrm>
+              <a:off x="4749476" y="5396063"/>
+              <a:ext cx="375417" cy="576147"/>
+            </a:xfrm>
+            <a:prstGeom prst="straightConnector1">
+              <a:avLst/>
+            </a:prstGeom>
+            <a:ln>
+              <a:tailEnd type="triangle"/>
+            </a:ln>
+          </p:spPr>
+          <p:style>
+            <a:lnRef idx="2">
+              <a:schemeClr val="accent5"/>
+            </a:lnRef>
+            <a:fillRef idx="0">
+              <a:schemeClr val="accent5"/>
+            </a:fillRef>
+            <a:effectRef idx="1">
+              <a:schemeClr val="accent5"/>
+            </a:effectRef>
+            <a:fontRef idx="minor">
+              <a:schemeClr val="tx1"/>
+            </a:fontRef>
+          </p:style>
+        </p:cxnSp>
+      </p:grpSp>
+      <p:grpSp>
+        <p:nvGrpSpPr>
+          <p:cNvPr id="72" name="Group 71">
+            <a:extLst>
+              <a:ext uri="{FF2B5EF4-FFF2-40B4-BE49-F238E27FC236}">
+                <a16:creationId xmlns:a16="http://schemas.microsoft.com/office/drawing/2014/main" id="{129DB802-CFDF-3A95-20EC-8FCFEAD700B6}"/>
+              </a:ext>
+            </a:extLst>
+          </p:cNvPr>
+          <p:cNvGrpSpPr/>
+          <p:nvPr/>
+        </p:nvGrpSpPr>
+        <p:grpSpPr>
+          <a:xfrm>
+            <a:off x="3330032" y="4155517"/>
+            <a:ext cx="3078406" cy="963160"/>
+            <a:chOff x="3330032" y="4155517"/>
+            <a:chExt cx="3078406" cy="963160"/>
+          </a:xfrm>
+        </p:grpSpPr>
+        <p:sp>
+          <p:nvSpPr>
+            <p:cNvPr id="60" name="Rounded Rectangle 59">
+              <a:extLst>
+                <a:ext uri="{FF2B5EF4-FFF2-40B4-BE49-F238E27FC236}">
+                  <a16:creationId xmlns:a16="http://schemas.microsoft.com/office/drawing/2014/main" id="{13E52E52-4A5C-71B2-D1B6-6070064C1E6E}"/>
+                </a:ext>
+              </a:extLst>
+            </p:cNvPr>
+            <p:cNvSpPr/>
+            <p:nvPr/>
+          </p:nvSpPr>
+          <p:spPr>
+            <a:xfrm>
+              <a:off x="4462680" y="4155517"/>
+              <a:ext cx="1945758" cy="690580"/>
+            </a:xfrm>
+            <a:prstGeom prst="roundRect">
+              <a:avLst/>
+            </a:prstGeom>
+          </p:spPr>
+          <p:style>
+            <a:lnRef idx="2">
+              <a:schemeClr val="accent4"/>
+            </a:lnRef>
+            <a:fillRef idx="1">
+              <a:schemeClr val="lt1"/>
+            </a:fillRef>
+            <a:effectRef idx="0">
+              <a:schemeClr val="accent4"/>
+            </a:effectRef>
+            <a:fontRef idx="minor">
+              <a:schemeClr val="dk1"/>
+            </a:fontRef>
+          </p:style>
+          <p:txBody>
+            <a:bodyPr rtlCol="0" anchor="ctr"/>
+            <a:lstStyle/>
+            <a:p>
+              <a:pPr algn="ctr"/>
+              <a:endParaRPr lang="en-US"/>
+            </a:p>
+          </p:txBody>
+        </p:sp>
+        <p:sp>
+          <p:nvSpPr>
+            <p:cNvPr id="50" name="TextBox 49">
+              <a:extLst>
+                <a:ext uri="{FF2B5EF4-FFF2-40B4-BE49-F238E27FC236}">
+                  <a16:creationId xmlns:a16="http://schemas.microsoft.com/office/drawing/2014/main" id="{7EA260A8-7C9B-EA63-3DCF-0DAC85261FC6}"/>
+                </a:ext>
+              </a:extLst>
+            </p:cNvPr>
+            <p:cNvSpPr txBox="1"/>
+            <p:nvPr/>
+          </p:nvSpPr>
+          <p:spPr>
+            <a:xfrm>
+              <a:off x="4652254" y="4224305"/>
+              <a:ext cx="1557670" cy="523220"/>
+            </a:xfrm>
+            <a:prstGeom prst="rect">
+              <a:avLst/>
+            </a:prstGeom>
+            <a:noFill/>
+          </p:spPr>
+          <p:txBody>
+            <a:bodyPr wrap="square" lIns="0" tIns="0" rIns="0" bIns="0">
+              <a:spAutoFit/>
+            </a:bodyPr>
+            <a:lstStyle/>
+            <a:p>
+              <a:pPr algn="ctr">
+                <a:defRPr sz="1700" b="0">
+                  <a:solidFill>
+                    <a:srgbClr val="26232B"/>
+                  </a:solidFill>
+                  <a:latin typeface="Arial"/>
+                </a:defRPr>
+              </a:pPr>
+              <a:r>
+                <a:rPr dirty="0"/>
+                <a:t>Tangential drag</a:t>
+              </a:r>
+              <a:br>
+                <a:rPr dirty="0"/>
+              </a:br>
+              <a:r>
+                <a:rPr dirty="0"/>
+                <a:t>coefficient</a:t>
+              </a:r>
+            </a:p>
+          </p:txBody>
+        </p:sp>
+        <p:cxnSp>
+          <p:nvCxnSpPr>
+            <p:cNvPr id="63" name="Straight Arrow Connector 62">
+              <a:extLst>
+                <a:ext uri="{FF2B5EF4-FFF2-40B4-BE49-F238E27FC236}">
+                  <a16:creationId xmlns:a16="http://schemas.microsoft.com/office/drawing/2014/main" id="{84CFB9BC-178A-25C5-282C-25694575DF3E}"/>
+                </a:ext>
+              </a:extLst>
+            </p:cNvPr>
+            <p:cNvCxnSpPr>
+              <a:cxnSpLocks/>
+              <a:endCxn id="60" idx="1"/>
+            </p:cNvCxnSpPr>
+            <p:nvPr/>
+          </p:nvCxnSpPr>
+          <p:spPr>
+            <a:xfrm flipV="1">
+              <a:off x="3330032" y="4500807"/>
+              <a:ext cx="1132648" cy="617870"/>
+            </a:xfrm>
+            <a:prstGeom prst="straightConnector1">
+              <a:avLst/>
+            </a:prstGeom>
+            <a:ln>
+              <a:tailEnd type="triangle"/>
+            </a:ln>
+          </p:spPr>
+          <p:style>
+            <a:lnRef idx="2">
+              <a:schemeClr val="accent5"/>
+            </a:lnRef>
+            <a:fillRef idx="0">
+              <a:schemeClr val="accent5"/>
+            </a:fillRef>
+            <a:effectRef idx="1">
+              <a:schemeClr val="accent5"/>
+            </a:effectRef>
+            <a:fontRef idx="minor">
+              <a:schemeClr val="tx1"/>
+            </a:fontRef>
+          </p:style>
+        </p:cxnSp>
+      </p:grpSp>
+    </p:spTree>
+    <p:extLst>
+      <p:ext uri="{BB962C8B-B14F-4D97-AF65-F5344CB8AC3E}">
+        <p14:creationId xmlns:p14="http://schemas.microsoft.com/office/powerpoint/2010/main" val="1615516749"/>
+      </p:ext>
+    </p:extLst>
+  </p:cSld>
+  <p:clrMapOvr>
+    <a:masterClrMapping/>
+  </p:clrMapOvr>
+  <p:timing>
+    <p:tnLst>
+      <p:par>
+        <p:cTn id="1" dur="indefinite" restart="never" nodeType="tmRoot">
+          <p:childTnLst>
+            <p:seq concurrent="1" nextAc="seek">
+              <p:cTn id="2" dur="indefinite" nodeType="mainSeq">
+                <p:childTnLst>
+                  <p:par>
+                    <p:cTn id="3" fill="hold">
+                      <p:stCondLst>
+                        <p:cond delay="indefinite"/>
+                      </p:stCondLst>
+                      <p:childTnLst>
+                        <p:par>
+                          <p:cTn id="4" fill="hold">
+                            <p:stCondLst>
+                              <p:cond delay="0"/>
+                            </p:stCondLst>
+                            <p:childTnLst>
+                              <p:par>
+                                <p:cTn id="5" presetID="1" presetClass="entr" presetSubtype="0" fill="hold" grpId="0" nodeType="clickEffect">
+                                  <p:stCondLst>
+                                    <p:cond delay="0"/>
+                                  </p:stCondLst>
+                                  <p:childTnLst>
+                                    <p:set>
+                                      <p:cBhvr>
+                                        <p:cTn id="6" dur="1" fill="hold">
+                                          <p:stCondLst>
+                                            <p:cond delay="0"/>
+                                          </p:stCondLst>
+                                        </p:cTn>
+                                        <p:tgtEl>
+                                          <p:spTgt spid="45"/>
+                                        </p:tgtEl>
+                                        <p:attrNameLst>
+                                          <p:attrName>style.visibility</p:attrName>
+                                        </p:attrNameLst>
+                                      </p:cBhvr>
+                                      <p:to>
+                                        <p:strVal val="visible"/>
+                                      </p:to>
+                                    </p:set>
+                                  </p:childTnLst>
+                                </p:cTn>
+                              </p:par>
+                            </p:childTnLst>
+                          </p:cTn>
+                        </p:par>
+                      </p:childTnLst>
+                    </p:cTn>
+                  </p:par>
+                  <p:par>
+                    <p:cTn id="7" fill="hold">
+                      <p:stCondLst>
+                        <p:cond delay="indefinite"/>
+                      </p:stCondLst>
+                      <p:childTnLst>
+                        <p:par>
+                          <p:cTn id="8" fill="hold">
+                            <p:stCondLst>
+                              <p:cond delay="0"/>
+                            </p:stCondLst>
+                            <p:childTnLst>
+                              <p:par>
+                                <p:cTn id="9" presetID="1" presetClass="entr" presetSubtype="0" fill="hold" grpId="0" nodeType="clickEffect">
+                                  <p:stCondLst>
+                                    <p:cond delay="0"/>
+                                  </p:stCondLst>
+                                  <p:childTnLst>
+                                    <p:set>
+                                      <p:cBhvr>
+                                        <p:cTn id="10" dur="1" fill="hold">
+                                          <p:stCondLst>
+                                            <p:cond delay="0"/>
+                                          </p:stCondLst>
+                                        </p:cTn>
+                                        <p:tgtEl>
+                                          <p:spTgt spid="46"/>
+                                        </p:tgtEl>
+                                        <p:attrNameLst>
+                                          <p:attrName>style.visibility</p:attrName>
+                                        </p:attrNameLst>
+                                      </p:cBhvr>
+                                      <p:to>
+                                        <p:strVal val="visible"/>
+                                      </p:to>
+                                    </p:set>
+                                  </p:childTnLst>
+                                </p:cTn>
+                              </p:par>
+                            </p:childTnLst>
+                          </p:cTn>
+                        </p:par>
+                      </p:childTnLst>
+                    </p:cTn>
+                  </p:par>
+                  <p:par>
+                    <p:cTn id="11" fill="hold">
+                      <p:stCondLst>
+                        <p:cond delay="indefinite"/>
+                      </p:stCondLst>
+                      <p:childTnLst>
+                        <p:par>
+                          <p:cTn id="12" fill="hold">
+                            <p:stCondLst>
+                              <p:cond delay="0"/>
+                            </p:stCondLst>
+                            <p:childTnLst>
+                              <p:par>
+                                <p:cTn id="13" presetID="1" presetClass="entr" presetSubtype="0" fill="hold" grpId="0" nodeType="clickEffect">
+                                  <p:stCondLst>
+                                    <p:cond delay="0"/>
+                                  </p:stCondLst>
+                                  <p:childTnLst>
+                                    <p:set>
+                                      <p:cBhvr>
+                                        <p:cTn id="14" dur="1" fill="hold">
+                                          <p:stCondLst>
+                                            <p:cond delay="0"/>
+                                          </p:stCondLst>
+                                        </p:cTn>
+                                        <p:tgtEl>
+                                          <p:spTgt spid="47"/>
+                                        </p:tgtEl>
+                                        <p:attrNameLst>
+                                          <p:attrName>style.visibility</p:attrName>
+                                        </p:attrNameLst>
+                                      </p:cBhvr>
+                                      <p:to>
+                                        <p:strVal val="visible"/>
+                                      </p:to>
+                                    </p:set>
+                                  </p:childTnLst>
+                                </p:cTn>
+                              </p:par>
+                            </p:childTnLst>
+                          </p:cTn>
+                        </p:par>
+                      </p:childTnLst>
+                    </p:cTn>
+                  </p:par>
+                  <p:par>
+                    <p:cTn id="15" fill="hold">
+                      <p:stCondLst>
+                        <p:cond delay="indefinite"/>
+                      </p:stCondLst>
+                      <p:childTnLst>
+                        <p:par>
+                          <p:cTn id="16" fill="hold">
+                            <p:stCondLst>
+                              <p:cond delay="0"/>
+                            </p:stCondLst>
+                            <p:childTnLst>
+                              <p:par>
+                                <p:cTn id="17" presetID="1" presetClass="entr" presetSubtype="0" fill="hold" grpId="0" nodeType="clickEffect">
+                                  <p:stCondLst>
+                                    <p:cond delay="0"/>
+                                  </p:stCondLst>
+                                  <p:childTnLst>
+                                    <p:set>
+                                      <p:cBhvr>
+                                        <p:cTn id="18" dur="1" fill="hold">
+                                          <p:stCondLst>
+                                            <p:cond delay="0"/>
+                                          </p:stCondLst>
+                                        </p:cTn>
+                                        <p:tgtEl>
+                                          <p:spTgt spid="48"/>
+                                        </p:tgtEl>
+                                        <p:attrNameLst>
+                                          <p:attrName>style.visibility</p:attrName>
+                                        </p:attrNameLst>
+                                      </p:cBhvr>
+                                      <p:to>
+                                        <p:strVal val="visible"/>
+                                      </p:to>
+                                    </p:set>
+                                  </p:childTnLst>
+                                </p:cTn>
+                              </p:par>
+                            </p:childTnLst>
+                          </p:cTn>
+                        </p:par>
+                      </p:childTnLst>
+                    </p:cTn>
+                  </p:par>
+                  <p:par>
+                    <p:cTn id="19" fill="hold">
+                      <p:stCondLst>
+                        <p:cond delay="indefinite"/>
+                      </p:stCondLst>
+                      <p:childTnLst>
+                        <p:par>
+                          <p:cTn id="20" fill="hold">
+                            <p:stCondLst>
+                              <p:cond delay="0"/>
+                            </p:stCondLst>
+                            <p:childTnLst>
+                              <p:par>
+                                <p:cTn id="21" presetID="1" presetClass="entr" presetSubtype="0" fill="hold" nodeType="clickEffect">
+                                  <p:stCondLst>
+                                    <p:cond delay="0"/>
+                                  </p:stCondLst>
+                                  <p:childTnLst>
+                                    <p:set>
+                                      <p:cBhvr>
+                                        <p:cTn id="22" dur="1" fill="hold">
+                                          <p:stCondLst>
+                                            <p:cond delay="0"/>
+                                          </p:stCondLst>
+                                        </p:cTn>
+                                        <p:tgtEl>
+                                          <p:spTgt spid="59"/>
+                                        </p:tgtEl>
+                                        <p:attrNameLst>
+                                          <p:attrName>style.visibility</p:attrName>
+                                        </p:attrNameLst>
+                                      </p:cBhvr>
+                                      <p:to>
+                                        <p:strVal val="visible"/>
+                                      </p:to>
+                                    </p:set>
+                                  </p:childTnLst>
+                                </p:cTn>
+                              </p:par>
+                            </p:childTnLst>
+                          </p:cTn>
+                        </p:par>
+                      </p:childTnLst>
+                    </p:cTn>
+                  </p:par>
+                  <p:par>
+                    <p:cTn id="23" fill="hold">
+                      <p:stCondLst>
+                        <p:cond delay="indefinite"/>
+                      </p:stCondLst>
+                      <p:childTnLst>
+                        <p:par>
+                          <p:cTn id="24" fill="hold">
+                            <p:stCondLst>
+                              <p:cond delay="0"/>
+                            </p:stCondLst>
+                            <p:childTnLst>
+                              <p:par>
+                                <p:cTn id="25" presetID="1" presetClass="entr" presetSubtype="0" fill="hold" nodeType="clickEffect">
+                                  <p:stCondLst>
+                                    <p:cond delay="0"/>
+                                  </p:stCondLst>
+                                  <p:childTnLst>
+                                    <p:set>
+                                      <p:cBhvr>
+                                        <p:cTn id="26" dur="1" fill="hold">
+                                          <p:stCondLst>
+                                            <p:cond delay="0"/>
+                                          </p:stCondLst>
+                                        </p:cTn>
+                                        <p:tgtEl>
+                                          <p:spTgt spid="72"/>
+                                        </p:tgtEl>
+                                        <p:attrNameLst>
+                                          <p:attrName>style.visibility</p:attrName>
+                                        </p:attrNameLst>
+                                      </p:cBhvr>
+                                      <p:to>
+                                        <p:strVal val="visible"/>
+                                      </p:to>
+                                    </p:set>
+                                  </p:childTnLst>
+                                </p:cTn>
+                              </p:par>
+                            </p:childTnLst>
+                          </p:cTn>
+                        </p:par>
+                      </p:childTnLst>
+                    </p:cTn>
+                  </p:par>
+                  <p:par>
+                    <p:cTn id="27" fill="hold">
+                      <p:stCondLst>
+                        <p:cond delay="indefinite"/>
+                      </p:stCondLst>
+                      <p:childTnLst>
+                        <p:par>
+                          <p:cTn id="28" fill="hold">
+                            <p:stCondLst>
+                              <p:cond delay="0"/>
+                            </p:stCondLst>
+                            <p:childTnLst>
+                              <p:par>
+                                <p:cTn id="29" presetID="1" presetClass="entr" presetSubtype="0" fill="hold" nodeType="clickEffect">
+                                  <p:stCondLst>
+                                    <p:cond delay="0"/>
+                                  </p:stCondLst>
+                                  <p:childTnLst>
+                                    <p:set>
+                                      <p:cBhvr>
+                                        <p:cTn id="30" dur="1" fill="hold">
+                                          <p:stCondLst>
+                                            <p:cond delay="0"/>
+                                          </p:stCondLst>
+                                        </p:cTn>
+                                        <p:tgtEl>
+                                          <p:spTgt spid="68"/>
+                                        </p:tgtEl>
+                                        <p:attrNameLst>
+                                          <p:attrName>style.visibility</p:attrName>
+                                        </p:attrNameLst>
+                                      </p:cBhvr>
+                                      <p:to>
+                                        <p:strVal val="visible"/>
+                                      </p:to>
+                                    </p:set>
+                                  </p:childTnLst>
+                                </p:cTn>
+                              </p:par>
+                            </p:childTnLst>
+                          </p:cTn>
+                        </p:par>
+                      </p:childTnLst>
+                    </p:cTn>
+                  </p:par>
+                </p:childTnLst>
+              </p:cTn>
+              <p:prevCondLst>
+                <p:cond evt="onPrev" delay="0">
+                  <p:tgtEl>
+                    <p:sldTgt/>
+                  </p:tgtEl>
+                </p:cond>
+              </p:prevCondLst>
+              <p:nextCondLst>
+                <p:cond evt="onNext" delay="0">
+                  <p:tgtEl>
+                    <p:sldTgt/>
+                  </p:tgtEl>
+                </p:cond>
+              </p:nextCondLst>
+            </p:seq>
+          </p:childTnLst>
+        </p:cTn>
+      </p:par>
+    </p:tnLst>
+    <p:bldLst>
+      <p:bldP spid="45" grpId="0"/>
+      <p:bldP spid="46" grpId="0"/>
+      <p:bldP spid="47" grpId="0"/>
+      <p:bldP spid="48" grpId="0"/>
+    </p:bldLst>
+  </p:timing>
+</p:sld>
+</file>
+
+<file path=ppt/slides/slide7.xml><?xml version="1.0" encoding="utf-8"?>
+<p:sld xmlns:a="http://schemas.openxmlformats.org/drawingml/2006/main" xmlns:r="http://schemas.openxmlformats.org/officeDocument/2006/relationships" xmlns:p="http://schemas.openxmlformats.org/presentationml/2006/main">
+  <p:cSld>
+    <p:spTree>
+      <p:nvGrpSpPr>
+        <p:cNvPr id="1" name="">
+          <a:extLst>
+            <a:ext uri="{FF2B5EF4-FFF2-40B4-BE49-F238E27FC236}">
+              <a16:creationId xmlns:a16="http://schemas.microsoft.com/office/drawing/2014/main" id="{851C904E-EAFC-C0D0-5AC8-0FAF2A42FD8A}"/>
+            </a:ext>
+          </a:extLst>
+        </p:cNvPr>
+        <p:cNvGrpSpPr/>
+        <p:nvPr/>
+      </p:nvGrpSpPr>
+      <p:grpSpPr>
+        <a:xfrm>
+          <a:off x="0" y="0"/>
+          <a:ext cx="0" cy="0"/>
+          <a:chOff x="0" y="0"/>
+          <a:chExt cx="0" cy="0"/>
+        </a:xfrm>
+      </p:grpSpPr>
+      <p:sp>
+        <p:nvSpPr>
+          <p:cNvPr id="4" name="Title 3">
+            <a:extLst>
+              <a:ext uri="{FF2B5EF4-FFF2-40B4-BE49-F238E27FC236}">
+                <a16:creationId xmlns:a16="http://schemas.microsoft.com/office/drawing/2014/main" id="{7FF07254-25C3-A048-D910-9F4D939407B9}"/>
+              </a:ext>
+            </a:extLst>
+          </p:cNvPr>
+          <p:cNvSpPr>
+            <a:spLocks noGrp="1"/>
+          </p:cNvSpPr>
+          <p:nvPr>
+            <p:ph type="title"/>
+          </p:nvPr>
+        </p:nvSpPr>
+        <p:spPr/>
+        <p:txBody>
+          <a:bodyPr>
+            <a:normAutofit fontScale="90000"/>
+          </a:bodyPr>
+          <a:lstStyle/>
+          <a:p>
+            <a:r>
+              <a:rPr lang="en-US" dirty="0">
+                <a:solidFill>
+                  <a:schemeClr val="bg1"/>
+                </a:solidFill>
+              </a:rPr>
+              <a:t>Drag Coefficients</a:t>
+            </a:r>
+            <a:endParaRPr lang="ro-RO" dirty="0">
+              <a:solidFill>
+                <a:schemeClr val="bg1"/>
+              </a:solidFill>
+            </a:endParaRPr>
+          </a:p>
+        </p:txBody>
+      </p:sp>
+      <p:pic>
+        <p:nvPicPr>
+          <p:cNvPr id="5" name="Picture 4">
+            <a:extLst>
+              <a:ext uri="{FF2B5EF4-FFF2-40B4-BE49-F238E27FC236}">
+                <a16:creationId xmlns:a16="http://schemas.microsoft.com/office/drawing/2014/main" id="{BDD0409C-BD2B-E41F-423B-3A4E24882ADD}"/>
+              </a:ext>
+            </a:extLst>
+          </p:cNvPr>
+          <p:cNvPicPr>
+            <a:picLocks noChangeAspect="1"/>
+          </p:cNvPicPr>
+          <p:nvPr/>
+        </p:nvPicPr>
+        <p:blipFill>
+          <a:blip r:embed="rId2">
+            <a:clrChange>
+              <a:clrFrom>
+                <a:srgbClr val="000000"/>
+              </a:clrFrom>
+              <a:clrTo>
+                <a:srgbClr val="000000">
+                  <a:alpha val="0"/>
+                </a:srgbClr>
+              </a:clrTo>
+            </a:clrChange>
+            <a:extLst>
+              <a:ext uri="{28A0092B-C50C-407E-A947-70E740481C1C}">
+                <a14:useLocalDpi xmlns:a14="http://schemas.microsoft.com/office/drawing/2010/main" val="0"/>
+              </a:ext>
+            </a:extLst>
+          </a:blip>
+          <a:stretch>
+            <a:fillRect/>
+          </a:stretch>
+        </p:blipFill>
+        <p:spPr>
+          <a:xfrm>
+            <a:off x="10432471" y="6323329"/>
+            <a:ext cx="1492133" cy="496892"/>
+          </a:xfrm>
+          <a:prstGeom prst="rect">
+            <a:avLst/>
+          </a:prstGeom>
+        </p:spPr>
+      </p:pic>
+      <mc:AlternateContent xmlns:mc="http://schemas.openxmlformats.org/markup-compatibility/2006">
+        <mc:Choice xmlns:a14="http://schemas.microsoft.com/office/drawing/2010/main" Requires="a14">
+          <p:sp>
+            <p:nvSpPr>
+              <p:cNvPr id="2" name="TextBox 1">
+                <a:extLst>
+                  <a:ext uri="{FF2B5EF4-FFF2-40B4-BE49-F238E27FC236}">
+                    <a16:creationId xmlns:a16="http://schemas.microsoft.com/office/drawing/2014/main" id="{A34E4462-B4F9-6F89-2F97-D6DE3A9AC57E}"/>
+                  </a:ext>
+                </a:extLst>
+              </p:cNvPr>
+              <p:cNvSpPr txBox="1"/>
+              <p:nvPr/>
+            </p:nvSpPr>
+            <p:spPr>
+              <a:xfrm>
+                <a:off x="3128349" y="1433291"/>
+                <a:ext cx="1436547" cy="750462"/>
+              </a:xfrm>
+              <a:prstGeom prst="rect">
+                <a:avLst/>
+              </a:prstGeom>
+              <a:noFill/>
+            </p:spPr>
+            <p:txBody>
+              <a:bodyPr wrap="none" lIns="0" tIns="0" rIns="0" bIns="0" rtlCol="0">
+                <a:spAutoFit/>
+              </a:bodyPr>
+              <a:lstStyle/>
+              <a:p>
+                <a14:m>
+                  <m:oMathPara xmlns:m="http://schemas.openxmlformats.org/officeDocument/2006/math">
+                    <m:oMathParaPr>
+                      <m:jc m:val="centerGroup"/>
+                    </m:oMathParaPr>
+                    <m:oMath xmlns:m="http://schemas.openxmlformats.org/officeDocument/2006/math">
+                      <m:sSub>
+                        <m:sSubPr>
+                          <m:ctrlPr>
+                            <a:rPr lang="en-US" i="1" smtClean="0">
+                              <a:latin typeface="Cambria Math" panose="02040503050406030204" pitchFamily="18" charset="0"/>
+                            </a:rPr>
+                          </m:ctrlPr>
+                        </m:sSubPr>
+                        <m:e>
+                          <m:r>
+                            <a:rPr lang="en-US" i="1" smtClean="0">
+                              <a:latin typeface="Cambria Math" panose="02040503050406030204" pitchFamily="18" charset="0"/>
+                              <a:ea typeface="Cambria Math" panose="02040503050406030204" pitchFamily="18" charset="0"/>
+                            </a:rPr>
+                            <m:t>𝜂</m:t>
+                          </m:r>
+                        </m:e>
+                        <m:sub>
+                          <m:r>
+                            <a:rPr lang="en-US" i="1" smtClean="0">
+                              <a:latin typeface="Cambria Math" panose="02040503050406030204" pitchFamily="18" charset="0"/>
+                              <a:ea typeface="Cambria Math" panose="02040503050406030204" pitchFamily="18" charset="0"/>
+                            </a:rPr>
+                            <m:t>∥</m:t>
+                          </m:r>
+                        </m:sub>
+                      </m:sSub>
+                      <m:r>
+                        <a:rPr lang="en-US" b="0" i="1" smtClean="0">
+                          <a:latin typeface="Cambria Math" panose="02040503050406030204" pitchFamily="18" charset="0"/>
+                        </a:rPr>
+                        <m:t>=</m:t>
+                      </m:r>
+                      <m:f>
+                        <m:fPr>
+                          <m:ctrlPr>
+                            <a:rPr lang="en-US" b="0" i="1" smtClean="0">
+                              <a:latin typeface="Cambria Math" panose="02040503050406030204" pitchFamily="18" charset="0"/>
+                            </a:rPr>
+                          </m:ctrlPr>
+                        </m:fPr>
+                        <m:num>
+                          <m:r>
+                            <a:rPr lang="en-US" b="0" i="1" smtClean="0">
+                              <a:latin typeface="Cambria Math" panose="02040503050406030204" pitchFamily="18" charset="0"/>
+                            </a:rPr>
+                            <m:t>2</m:t>
+                          </m:r>
+                          <m:r>
+                            <a:rPr lang="en-US" b="0" i="1" smtClean="0">
+                              <a:latin typeface="Cambria Math" panose="02040503050406030204" pitchFamily="18" charset="0"/>
+                              <a:ea typeface="Cambria Math" panose="02040503050406030204" pitchFamily="18" charset="0"/>
+                            </a:rPr>
+                            <m:t>𝜋𝜇</m:t>
+                          </m:r>
+                        </m:num>
+                        <m:den>
+                          <m:r>
+                            <m:rPr>
+                              <m:sty m:val="p"/>
+                            </m:rPr>
+                            <a:rPr lang="en-US" b="0" i="1" smtClean="0">
+                              <a:latin typeface="Cambria Math" panose="02040503050406030204" pitchFamily="18" charset="0"/>
+                            </a:rPr>
+                            <m:t>ln</m:t>
+                          </m:r>
+                          <m:d>
+                            <m:dPr>
+                              <m:ctrlPr>
+                                <a:rPr lang="en-US" b="0" i="1" smtClean="0">
+                                  <a:latin typeface="Cambria Math" panose="02040503050406030204" pitchFamily="18" charset="0"/>
+                                </a:rPr>
+                              </m:ctrlPr>
+                            </m:dPr>
+                            <m:e>
+                              <m:f>
+                                <m:fPr>
+                                  <m:ctrlPr>
+                                    <a:rPr lang="en-US" i="1">
+                                      <a:latin typeface="Cambria Math" panose="02040503050406030204" pitchFamily="18" charset="0"/>
+                                    </a:rPr>
+                                  </m:ctrlPr>
+                                </m:fPr>
+                                <m:num>
+                                  <m:r>
+                                    <m:rPr>
+                                      <m:sty m:val="p"/>
+                                    </m:rPr>
+                                    <a:rPr lang="en-US" i="1">
+                                      <a:latin typeface="Cambria Math" panose="02040503050406030204" pitchFamily="18" charset="0"/>
+                                    </a:rPr>
+                                    <m:t>L</m:t>
+                                  </m:r>
+                                </m:num>
+                                <m:den>
+                                  <m:r>
+                                    <m:rPr>
+                                      <m:sty m:val="p"/>
+                                    </m:rPr>
+                                    <a:rPr lang="en-US" i="1">
+                                      <a:latin typeface="Cambria Math" panose="02040503050406030204" pitchFamily="18" charset="0"/>
+                                    </a:rPr>
+                                    <m:t>r</m:t>
+                                  </m:r>
+                                </m:den>
+                              </m:f>
+                            </m:e>
+                          </m:d>
+                          <m:r>
+                            <a:rPr lang="en-US" b="0" i="1" smtClean="0">
+                              <a:latin typeface="Cambria Math" panose="02040503050406030204" pitchFamily="18" charset="0"/>
+                            </a:rPr>
+                            <m:t>-</m:t>
+                          </m:r>
+                          <m:f>
+                            <m:fPr>
+                              <m:ctrlPr>
+                                <a:rPr lang="en-US" b="0" i="1" smtClean="0">
+                                  <a:latin typeface="Cambria Math" panose="02040503050406030204" pitchFamily="18" charset="0"/>
+                                </a:rPr>
+                              </m:ctrlPr>
+                            </m:fPr>
+                            <m:num>
+                              <m:r>
+                                <a:rPr lang="en-US" b="0" i="1" smtClean="0">
+                                  <a:latin typeface="Cambria Math" panose="02040503050406030204" pitchFamily="18" charset="0"/>
+                                </a:rPr>
+                                <m:t>1</m:t>
+                              </m:r>
+                            </m:num>
+                            <m:den>
+                              <m:r>
+                                <a:rPr lang="en-US" b="0" i="1" smtClean="0">
+                                  <a:latin typeface="Cambria Math" panose="02040503050406030204" pitchFamily="18" charset="0"/>
+                                </a:rPr>
+                                <m:t>2</m:t>
+                              </m:r>
+                            </m:den>
+                          </m:f>
+                        </m:den>
+                      </m:f>
+                    </m:oMath>
+                  </m:oMathPara>
+                </a14:m>
+                <a:endParaRPr lang="en-US" dirty="0"/>
+              </a:p>
+            </p:txBody>
+          </p:sp>
+        </mc:Choice>
+        <mc:Fallback>
+          <p:sp>
+            <p:nvSpPr>
+              <p:cNvPr id="2" name="TextBox 1">
+                <a:extLst>
+                  <a:ext uri="{FF2B5EF4-FFF2-40B4-BE49-F238E27FC236}">
+                    <a16:creationId xmlns:a16="http://schemas.microsoft.com/office/drawing/2014/main" id="{A34E4462-B4F9-6F89-2F97-D6DE3A9AC57E}"/>
+                  </a:ext>
+                </a:extLst>
+              </p:cNvPr>
+              <p:cNvSpPr txBox="1">
+                <a:spLocks noRot="1" noChangeAspect="1" noMove="1" noResize="1" noEditPoints="1" noAdjustHandles="1" noChangeArrowheads="1" noChangeShapeType="1" noTextEdit="1"/>
+              </p:cNvSpPr>
+              <p:nvPr/>
+            </p:nvSpPr>
+            <p:spPr>
+              <a:xfrm>
+                <a:off x="3128349" y="1433291"/>
+                <a:ext cx="1436547" cy="750462"/>
+              </a:xfrm>
+              <a:prstGeom prst="rect">
+                <a:avLst/>
+              </a:prstGeom>
+              <a:blipFill>
+                <a:blip r:embed="rId3"/>
+                <a:stretch>
+                  <a:fillRect l="-3509" t="-3333" r="-2632" b="-10000"/>
+                </a:stretch>
+              </a:blipFill>
+            </p:spPr>
+            <p:txBody>
+              <a:bodyPr/>
+              <a:lstStyle/>
+              <a:p>
+                <a:r>
+                  <a:rPr lang="en-US">
+                    <a:noFill/>
+                  </a:rPr>
+                  <a:t> </a:t>
+                </a:r>
+              </a:p>
+            </p:txBody>
+          </p:sp>
+        </mc:Fallback>
+      </mc:AlternateContent>
+      <mc:AlternateContent xmlns:mc="http://schemas.openxmlformats.org/markup-compatibility/2006">
+        <mc:Choice xmlns:a14="http://schemas.microsoft.com/office/drawing/2010/main" Requires="a14">
+          <p:sp>
+            <p:nvSpPr>
+              <p:cNvPr id="3" name="TextBox 2">
+                <a:extLst>
+                  <a:ext uri="{FF2B5EF4-FFF2-40B4-BE49-F238E27FC236}">
+                    <a16:creationId xmlns:a16="http://schemas.microsoft.com/office/drawing/2014/main" id="{B2F28742-9FC5-3071-616E-0D41C61CCB2C}"/>
+                  </a:ext>
+                </a:extLst>
+              </p:cNvPr>
+              <p:cNvSpPr txBox="1"/>
+              <p:nvPr/>
+            </p:nvSpPr>
+            <p:spPr>
+              <a:xfrm>
+                <a:off x="5865969" y="1433291"/>
+                <a:ext cx="1598451" cy="749436"/>
+              </a:xfrm>
+              <a:prstGeom prst="rect">
+                <a:avLst/>
+              </a:prstGeom>
+              <a:noFill/>
+            </p:spPr>
+            <p:txBody>
+              <a:bodyPr wrap="none" lIns="0" tIns="0" rIns="0" bIns="0" rtlCol="0">
+                <a:spAutoFit/>
+              </a:bodyPr>
+              <a:lstStyle/>
+              <a:p>
+                <a14:m>
+                  <m:oMathPara xmlns:m="http://schemas.openxmlformats.org/officeDocument/2006/math">
+                    <m:oMathParaPr>
+                      <m:jc m:val="centerGroup"/>
+                    </m:oMathParaPr>
+                    <m:oMath xmlns:m="http://schemas.openxmlformats.org/officeDocument/2006/math">
+                      <m:sSub>
+                        <m:sSubPr>
+                          <m:ctrlPr>
+                            <a:rPr lang="en-US" i="1" smtClean="0">
+                              <a:latin typeface="Cambria Math" panose="02040503050406030204" pitchFamily="18" charset="0"/>
+                            </a:rPr>
+                          </m:ctrlPr>
+                        </m:sSubPr>
+                        <m:e>
+                          <m:r>
+                            <a:rPr lang="en-US" i="1" smtClean="0">
+                              <a:latin typeface="Cambria Math" panose="02040503050406030204" pitchFamily="18" charset="0"/>
+                              <a:ea typeface="Cambria Math" panose="02040503050406030204" pitchFamily="18" charset="0"/>
+                            </a:rPr>
+                            <m:t>𝜂</m:t>
+                          </m:r>
+                        </m:e>
+                        <m:sub>
+                          <m:r>
+                            <a:rPr lang="en-US" i="1">
+                              <a:latin typeface="Cambria Math" panose="02040503050406030204" pitchFamily="18" charset="0"/>
+                              <a:ea typeface="Cambria Math" panose="02040503050406030204" pitchFamily="18" charset="0"/>
+                            </a:rPr>
+                            <m:t>⊥</m:t>
+                          </m:r>
+                        </m:sub>
+                      </m:sSub>
+                      <m:r>
+                        <a:rPr lang="en-US" b="0" i="1" smtClean="0">
+                          <a:latin typeface="Cambria Math" panose="02040503050406030204" pitchFamily="18" charset="0"/>
+                        </a:rPr>
+                        <m:t>=</m:t>
+                      </m:r>
+                      <m:f>
+                        <m:fPr>
+                          <m:ctrlPr>
+                            <a:rPr lang="en-US" b="0" i="1" smtClean="0">
+                              <a:latin typeface="Cambria Math" panose="02040503050406030204" pitchFamily="18" charset="0"/>
+                            </a:rPr>
+                          </m:ctrlPr>
+                        </m:fPr>
+                        <m:num>
+                          <m:r>
+                            <a:rPr lang="en-US" b="0" i="1" smtClean="0">
+                              <a:latin typeface="Cambria Math" panose="02040503050406030204" pitchFamily="18" charset="0"/>
+                            </a:rPr>
+                            <m:t>4</m:t>
+                          </m:r>
+                          <m:r>
+                            <a:rPr lang="en-US" b="0" i="1" smtClean="0">
+                              <a:latin typeface="Cambria Math" panose="02040503050406030204" pitchFamily="18" charset="0"/>
+                              <a:ea typeface="Cambria Math" panose="02040503050406030204" pitchFamily="18" charset="0"/>
+                            </a:rPr>
+                            <m:t>𝜋𝜇</m:t>
+                          </m:r>
+                        </m:num>
+                        <m:den>
+                          <m:r>
+                            <m:rPr>
+                              <m:sty m:val="p"/>
+                            </m:rPr>
+                            <a:rPr lang="en-US" b="0" i="1" smtClean="0">
+                              <a:latin typeface="Cambria Math" panose="02040503050406030204" pitchFamily="18" charset="0"/>
+                            </a:rPr>
+                            <m:t>ln</m:t>
+                          </m:r>
+                          <m:d>
+                            <m:dPr>
+                              <m:ctrlPr>
+                                <a:rPr lang="en-US" b="0" i="1" smtClean="0">
+                                  <a:latin typeface="Cambria Math" panose="02040503050406030204" pitchFamily="18" charset="0"/>
+                                </a:rPr>
+                              </m:ctrlPr>
+                            </m:dPr>
+                            <m:e>
+                              <m:f>
+                                <m:fPr>
+                                  <m:ctrlPr>
+                                    <a:rPr lang="en-US" i="1">
+                                      <a:latin typeface="Cambria Math" panose="02040503050406030204" pitchFamily="18" charset="0"/>
+                                    </a:rPr>
+                                  </m:ctrlPr>
+                                </m:fPr>
+                                <m:num>
+                                  <m:r>
+                                    <m:rPr>
+                                      <m:sty m:val="p"/>
+                                    </m:rPr>
+                                    <a:rPr lang="en-US" i="1">
+                                      <a:latin typeface="Cambria Math" panose="02040503050406030204" pitchFamily="18" charset="0"/>
+                                    </a:rPr>
+                                    <m:t>L</m:t>
+                                  </m:r>
+                                </m:num>
+                                <m:den>
+                                  <m:r>
+                                    <m:rPr>
+                                      <m:sty m:val="p"/>
+                                    </m:rPr>
+                                    <a:rPr lang="en-US" i="1">
+                                      <a:latin typeface="Cambria Math" panose="02040503050406030204" pitchFamily="18" charset="0"/>
+                                    </a:rPr>
+                                    <m:t>r</m:t>
+                                  </m:r>
+                                </m:den>
+                              </m:f>
+                            </m:e>
+                          </m:d>
+                          <m:r>
+                            <a:rPr lang="en-US" b="0" i="1" smtClean="0">
+                              <a:latin typeface="Cambria Math" panose="02040503050406030204" pitchFamily="18" charset="0"/>
+                            </a:rPr>
+                            <m:t>+</m:t>
+                          </m:r>
+                          <m:f>
+                            <m:fPr>
+                              <m:ctrlPr>
+                                <a:rPr lang="en-US" b="0" i="1" smtClean="0">
+                                  <a:latin typeface="Cambria Math" panose="02040503050406030204" pitchFamily="18" charset="0"/>
+                                </a:rPr>
+                              </m:ctrlPr>
+                            </m:fPr>
+                            <m:num>
+                              <m:r>
+                                <a:rPr lang="en-US" b="0" i="1" smtClean="0">
+                                  <a:latin typeface="Cambria Math" panose="02040503050406030204" pitchFamily="18" charset="0"/>
+                                </a:rPr>
+                                <m:t>1</m:t>
+                              </m:r>
+                            </m:num>
+                            <m:den>
+                              <m:r>
+                                <a:rPr lang="en-US" b="0" i="1" smtClean="0">
+                                  <a:latin typeface="Cambria Math" panose="02040503050406030204" pitchFamily="18" charset="0"/>
+                                </a:rPr>
+                                <m:t>2</m:t>
+                              </m:r>
+                            </m:den>
+                          </m:f>
+                        </m:den>
+                      </m:f>
+                    </m:oMath>
+                  </m:oMathPara>
+                </a14:m>
+                <a:endParaRPr lang="en-US" dirty="0"/>
+              </a:p>
+            </p:txBody>
+          </p:sp>
+        </mc:Choice>
+        <mc:Fallback>
+          <p:sp>
+            <p:nvSpPr>
+              <p:cNvPr id="3" name="TextBox 2">
+                <a:extLst>
+                  <a:ext uri="{FF2B5EF4-FFF2-40B4-BE49-F238E27FC236}">
+                    <a16:creationId xmlns:a16="http://schemas.microsoft.com/office/drawing/2014/main" id="{B2F28742-9FC5-3071-616E-0D41C61CCB2C}"/>
+                  </a:ext>
+                </a:extLst>
+              </p:cNvPr>
+              <p:cNvSpPr txBox="1">
+                <a:spLocks noRot="1" noChangeAspect="1" noMove="1" noResize="1" noEditPoints="1" noAdjustHandles="1" noChangeArrowheads="1" noChangeShapeType="1" noTextEdit="1"/>
+              </p:cNvSpPr>
+              <p:nvPr/>
+            </p:nvSpPr>
+            <p:spPr>
+              <a:xfrm>
+                <a:off x="5865969" y="1433291"/>
+                <a:ext cx="1598451" cy="749436"/>
+              </a:xfrm>
+              <a:prstGeom prst="rect">
+                <a:avLst/>
+              </a:prstGeom>
+              <a:blipFill>
+                <a:blip r:embed="rId4"/>
+                <a:stretch>
+                  <a:fillRect l="-2362" t="-1667" r="-3150" b="-10000"/>
+                </a:stretch>
+              </a:blipFill>
+            </p:spPr>
+            <p:txBody>
+              <a:bodyPr/>
+              <a:lstStyle/>
+              <a:p>
+                <a:r>
+                  <a:rPr lang="en-US">
+                    <a:noFill/>
+                  </a:rPr>
+                  <a:t> </a:t>
+                </a:r>
+              </a:p>
+            </p:txBody>
+          </p:sp>
+        </mc:Fallback>
+      </mc:AlternateContent>
+      <mc:AlternateContent xmlns:mc="http://schemas.openxmlformats.org/markup-compatibility/2006">
+        <mc:Choice xmlns:a14="http://schemas.microsoft.com/office/drawing/2010/main" Requires="a14">
+          <p:sp>
+            <p:nvSpPr>
+              <p:cNvPr id="8" name="TextBox 7">
+                <a:extLst>
+                  <a:ext uri="{FF2B5EF4-FFF2-40B4-BE49-F238E27FC236}">
+                    <a16:creationId xmlns:a16="http://schemas.microsoft.com/office/drawing/2014/main" id="{BBD6ECF7-6F4B-DE7D-24F7-F5F916DC0516}"/>
+                  </a:ext>
+                </a:extLst>
+              </p:cNvPr>
+              <p:cNvSpPr txBox="1"/>
+              <p:nvPr/>
+            </p:nvSpPr>
+            <p:spPr>
+              <a:xfrm>
+                <a:off x="4510854" y="5697811"/>
+                <a:ext cx="3170291" cy="938142"/>
+              </a:xfrm>
+              <a:prstGeom prst="rect">
+                <a:avLst/>
+              </a:prstGeom>
+              <a:noFill/>
+            </p:spPr>
+            <p:txBody>
+              <a:bodyPr wrap="none" lIns="0" tIns="0" rIns="0" bIns="0" rtlCol="0">
+                <a:spAutoFit/>
+              </a:bodyPr>
+              <a:lstStyle/>
+              <a:p>
+                <a14:m>
+                  <m:oMathPara xmlns:m="http://schemas.openxmlformats.org/officeDocument/2006/math">
+                    <m:oMathParaPr>
+                      <m:jc m:val="centerGroup"/>
+                    </m:oMathParaPr>
+                    <m:oMath xmlns:m="http://schemas.openxmlformats.org/officeDocument/2006/math">
+                      <m:r>
+                        <a:rPr lang="en-US" i="1" smtClean="0">
+                          <a:latin typeface="Cambria Math" panose="02040503050406030204" pitchFamily="18" charset="0"/>
+                          <a:ea typeface="Cambria Math" panose="02040503050406030204" pitchFamily="18" charset="0"/>
+                        </a:rPr>
+                        <m:t>𝛽</m:t>
+                      </m:r>
+                      <m:r>
+                        <a:rPr lang="en-US" b="0" i="1" smtClean="0">
+                          <a:latin typeface="Cambria Math" panose="02040503050406030204" pitchFamily="18" charset="0"/>
+                          <a:ea typeface="Cambria Math" panose="02040503050406030204" pitchFamily="18" charset="0"/>
+                        </a:rPr>
+                        <m:t>=</m:t>
+                      </m:r>
+                      <m:f>
+                        <m:fPr>
+                          <m:ctrlPr>
+                            <a:rPr lang="en-US" b="0" i="1" smtClean="0">
+                              <a:latin typeface="Cambria Math" panose="02040503050406030204" pitchFamily="18" charset="0"/>
+                              <a:ea typeface="Cambria Math" panose="02040503050406030204" pitchFamily="18" charset="0"/>
+                            </a:rPr>
+                          </m:ctrlPr>
+                        </m:fPr>
+                        <m:num>
+                          <m:sSub>
+                            <m:sSubPr>
+                              <m:ctrlPr>
+                                <a:rPr lang="en-US" i="1">
+                                  <a:latin typeface="Cambria Math" panose="02040503050406030204" pitchFamily="18" charset="0"/>
+                                </a:rPr>
+                              </m:ctrlPr>
+                            </m:sSubPr>
+                            <m:e>
+                              <m:r>
+                                <a:rPr lang="en-US" i="1">
+                                  <a:latin typeface="Cambria Math" panose="02040503050406030204" pitchFamily="18" charset="0"/>
+                                  <a:ea typeface="Cambria Math" panose="02040503050406030204" pitchFamily="18" charset="0"/>
+                                </a:rPr>
+                                <m:t>𝜂</m:t>
+                              </m:r>
+                            </m:e>
+                            <m:sub>
+                              <m:r>
+                                <a:rPr lang="en-US" i="1">
+                                  <a:latin typeface="Cambria Math" panose="02040503050406030204" pitchFamily="18" charset="0"/>
+                                  <a:ea typeface="Cambria Math" panose="02040503050406030204" pitchFamily="18" charset="0"/>
+                                </a:rPr>
+                                <m:t>∥</m:t>
+                              </m:r>
+                            </m:sub>
+                          </m:sSub>
+                        </m:num>
+                        <m:den>
+                          <m:sSub>
+                            <m:sSubPr>
+                              <m:ctrlPr>
+                                <a:rPr lang="en-US" i="1">
+                                  <a:latin typeface="Cambria Math" panose="02040503050406030204" pitchFamily="18" charset="0"/>
+                                </a:rPr>
+                              </m:ctrlPr>
+                            </m:sSubPr>
+                            <m:e>
+                              <m:r>
+                                <a:rPr lang="en-US" i="1">
+                                  <a:latin typeface="Cambria Math" panose="02040503050406030204" pitchFamily="18" charset="0"/>
+                                  <a:ea typeface="Cambria Math" panose="02040503050406030204" pitchFamily="18" charset="0"/>
+                                </a:rPr>
+                                <m:t>𝜂</m:t>
+                              </m:r>
+                            </m:e>
+                            <m:sub>
+                              <m:r>
+                                <a:rPr lang="en-US" i="1">
+                                  <a:latin typeface="Cambria Math" panose="02040503050406030204" pitchFamily="18" charset="0"/>
+                                  <a:ea typeface="Cambria Math" panose="02040503050406030204" pitchFamily="18" charset="0"/>
+                                </a:rPr>
+                                <m:t>⊥</m:t>
+                              </m:r>
+                            </m:sub>
+                          </m:sSub>
+                        </m:den>
+                      </m:f>
+                      <m:r>
+                        <a:rPr lang="en-US" b="0" i="1" smtClean="0">
+                          <a:latin typeface="Cambria Math" panose="02040503050406030204" pitchFamily="18" charset="0"/>
+                          <a:ea typeface="Cambria Math" panose="02040503050406030204" pitchFamily="18" charset="0"/>
+                        </a:rPr>
+                        <m:t>=</m:t>
+                      </m:r>
+                      <m:f>
+                        <m:fPr>
+                          <m:ctrlPr>
+                            <a:rPr lang="en-US" b="0" i="1" smtClean="0">
+                              <a:latin typeface="Cambria Math" panose="02040503050406030204" pitchFamily="18" charset="0"/>
+                              <a:ea typeface="Cambria Math" panose="02040503050406030204" pitchFamily="18" charset="0"/>
+                            </a:rPr>
+                          </m:ctrlPr>
+                        </m:fPr>
+                        <m:num>
+                          <m:r>
+                            <a:rPr lang="en-US" b="0" i="1" smtClean="0">
+                              <a:latin typeface="Cambria Math" panose="02040503050406030204" pitchFamily="18" charset="0"/>
+                              <a:ea typeface="Cambria Math" panose="02040503050406030204" pitchFamily="18" charset="0"/>
+                            </a:rPr>
+                            <m:t>2</m:t>
+                          </m:r>
+                          <m:d>
+                            <m:dPr>
+                              <m:ctrlPr>
+                                <a:rPr lang="en-US" b="0" i="1" smtClean="0">
+                                  <a:latin typeface="Cambria Math" panose="02040503050406030204" pitchFamily="18" charset="0"/>
+                                  <a:ea typeface="Cambria Math" panose="02040503050406030204" pitchFamily="18" charset="0"/>
+                                </a:rPr>
+                              </m:ctrlPr>
+                            </m:dPr>
+                            <m:e>
+                              <m:r>
+                                <m:rPr>
+                                  <m:sty m:val="p"/>
+                                </m:rPr>
+                                <a:rPr lang="en-US" i="1">
+                                  <a:latin typeface="Cambria Math" panose="02040503050406030204" pitchFamily="18" charset="0"/>
+                                </a:rPr>
+                                <m:t>ln</m:t>
+                              </m:r>
+                              <m:d>
+                                <m:dPr>
+                                  <m:ctrlPr>
+                                    <a:rPr lang="en-US" i="1">
+                                      <a:latin typeface="Cambria Math" panose="02040503050406030204" pitchFamily="18" charset="0"/>
+                                    </a:rPr>
+                                  </m:ctrlPr>
+                                </m:dPr>
+                                <m:e>
+                                  <m:f>
+                                    <m:fPr>
+                                      <m:ctrlPr>
+                                        <a:rPr lang="en-US" i="1">
+                                          <a:latin typeface="Cambria Math" panose="02040503050406030204" pitchFamily="18" charset="0"/>
+                                        </a:rPr>
+                                      </m:ctrlPr>
+                                    </m:fPr>
+                                    <m:num>
+                                      <m:r>
+                                        <m:rPr>
+                                          <m:sty m:val="p"/>
+                                        </m:rPr>
+                                        <a:rPr lang="en-US" i="1">
+                                          <a:latin typeface="Cambria Math" panose="02040503050406030204" pitchFamily="18" charset="0"/>
+                                        </a:rPr>
+                                        <m:t>L</m:t>
+                                      </m:r>
+                                    </m:num>
+                                    <m:den>
+                                      <m:r>
+                                        <m:rPr>
+                                          <m:sty m:val="p"/>
+                                        </m:rPr>
+                                        <a:rPr lang="en-US" i="1">
+                                          <a:latin typeface="Cambria Math" panose="02040503050406030204" pitchFamily="18" charset="0"/>
+                                        </a:rPr>
+                                        <m:t>r</m:t>
+                                      </m:r>
+                                    </m:den>
+                                  </m:f>
+                                </m:e>
+                              </m:d>
+                              <m:r>
+                                <a:rPr lang="en-US" i="1">
+                                  <a:latin typeface="Cambria Math" panose="02040503050406030204" pitchFamily="18" charset="0"/>
+                                </a:rPr>
+                                <m:t>−</m:t>
+                              </m:r>
+                              <m:f>
+                                <m:fPr>
+                                  <m:ctrlPr>
+                                    <a:rPr lang="en-US" i="1">
+                                      <a:latin typeface="Cambria Math" panose="02040503050406030204" pitchFamily="18" charset="0"/>
+                                    </a:rPr>
+                                  </m:ctrlPr>
+                                </m:fPr>
+                                <m:num>
+                                  <m:r>
+                                    <a:rPr lang="en-US" i="1">
+                                      <a:latin typeface="Cambria Math" panose="02040503050406030204" pitchFamily="18" charset="0"/>
+                                    </a:rPr>
+                                    <m:t>1</m:t>
+                                  </m:r>
+                                </m:num>
+                                <m:den>
+                                  <m:r>
+                                    <a:rPr lang="en-US" i="1">
+                                      <a:latin typeface="Cambria Math" panose="02040503050406030204" pitchFamily="18" charset="0"/>
+                                    </a:rPr>
+                                    <m:t>2</m:t>
+                                  </m:r>
+                                </m:den>
+                              </m:f>
+                            </m:e>
+                          </m:d>
+                        </m:num>
+                        <m:den>
+                          <m:r>
+                            <m:rPr>
+                              <m:sty m:val="p"/>
+                            </m:rPr>
+                            <a:rPr lang="en-US" i="1">
+                              <a:latin typeface="Cambria Math" panose="02040503050406030204" pitchFamily="18" charset="0"/>
+                            </a:rPr>
+                            <m:t>ln</m:t>
+                          </m:r>
+                          <m:d>
+                            <m:dPr>
+                              <m:ctrlPr>
+                                <a:rPr lang="en-US" i="1">
+                                  <a:latin typeface="Cambria Math" panose="02040503050406030204" pitchFamily="18" charset="0"/>
+                                </a:rPr>
+                              </m:ctrlPr>
+                            </m:dPr>
+                            <m:e>
+                              <m:f>
+                                <m:fPr>
+                                  <m:ctrlPr>
+                                    <a:rPr lang="en-US" i="1">
+                                      <a:latin typeface="Cambria Math" panose="02040503050406030204" pitchFamily="18" charset="0"/>
+                                    </a:rPr>
+                                  </m:ctrlPr>
+                                </m:fPr>
+                                <m:num>
+                                  <m:r>
+                                    <m:rPr>
+                                      <m:sty m:val="p"/>
+                                    </m:rPr>
+                                    <a:rPr lang="en-US" i="1">
+                                      <a:latin typeface="Cambria Math" panose="02040503050406030204" pitchFamily="18" charset="0"/>
+                                    </a:rPr>
+                                    <m:t>L</m:t>
+                                  </m:r>
+                                </m:num>
+                                <m:den>
+                                  <m:r>
+                                    <m:rPr>
+                                      <m:sty m:val="p"/>
+                                    </m:rPr>
+                                    <a:rPr lang="en-US" i="1">
+                                      <a:latin typeface="Cambria Math" panose="02040503050406030204" pitchFamily="18" charset="0"/>
+                                    </a:rPr>
+                                    <m:t>r</m:t>
+                                  </m:r>
+                                </m:den>
+                              </m:f>
+                            </m:e>
+                          </m:d>
+                          <m:r>
+                            <a:rPr lang="en-US" i="1">
+                              <a:latin typeface="Cambria Math" panose="02040503050406030204" pitchFamily="18" charset="0"/>
+                            </a:rPr>
+                            <m:t>+</m:t>
+                          </m:r>
+                          <m:f>
+                            <m:fPr>
+                              <m:ctrlPr>
+                                <a:rPr lang="en-US" i="1">
+                                  <a:latin typeface="Cambria Math" panose="02040503050406030204" pitchFamily="18" charset="0"/>
+                                </a:rPr>
+                              </m:ctrlPr>
+                            </m:fPr>
+                            <m:num>
+                              <m:r>
+                                <a:rPr lang="en-US" i="1">
+                                  <a:latin typeface="Cambria Math" panose="02040503050406030204" pitchFamily="18" charset="0"/>
+                                </a:rPr>
+                                <m:t>1</m:t>
+                              </m:r>
+                            </m:num>
+                            <m:den>
+                              <m:r>
+                                <a:rPr lang="en-US" i="1">
+                                  <a:latin typeface="Cambria Math" panose="02040503050406030204" pitchFamily="18" charset="0"/>
+                                </a:rPr>
+                                <m:t>2</m:t>
+                              </m:r>
+                            </m:den>
+                          </m:f>
+                        </m:den>
+                      </m:f>
+                      <m:r>
+                        <a:rPr lang="en-US" b="0" i="1" smtClean="0">
+                          <a:latin typeface="Cambria Math" panose="02040503050406030204" pitchFamily="18" charset="0"/>
+                          <a:ea typeface="Cambria Math" panose="02040503050406030204" pitchFamily="18" charset="0"/>
+                        </a:rPr>
+                        <m:t>≈1.87</m:t>
+                      </m:r>
+                    </m:oMath>
+                  </m:oMathPara>
+                </a14:m>
+                <a:endParaRPr lang="en-US" dirty="0"/>
+              </a:p>
+            </p:txBody>
+          </p:sp>
+        </mc:Choice>
+        <mc:Fallback>
+          <p:sp>
+            <p:nvSpPr>
+              <p:cNvPr id="8" name="TextBox 7">
+                <a:extLst>
+                  <a:ext uri="{FF2B5EF4-FFF2-40B4-BE49-F238E27FC236}">
+                    <a16:creationId xmlns:a16="http://schemas.microsoft.com/office/drawing/2014/main" id="{BBD6ECF7-6F4B-DE7D-24F7-F5F916DC0516}"/>
+                  </a:ext>
+                </a:extLst>
+              </p:cNvPr>
+              <p:cNvSpPr txBox="1">
+                <a:spLocks noRot="1" noChangeAspect="1" noMove="1" noResize="1" noEditPoints="1" noAdjustHandles="1" noChangeArrowheads="1" noChangeShapeType="1" noTextEdit="1"/>
+              </p:cNvSpPr>
+              <p:nvPr/>
+            </p:nvSpPr>
+            <p:spPr>
+              <a:xfrm>
+                <a:off x="4510854" y="5697811"/>
+                <a:ext cx="3170291" cy="938142"/>
+              </a:xfrm>
+              <a:prstGeom prst="rect">
+                <a:avLst/>
+              </a:prstGeom>
+              <a:blipFill>
+                <a:blip r:embed="rId5"/>
+                <a:stretch>
+                  <a:fillRect l="-2400" r="-1200" b="-6667"/>
+                </a:stretch>
+              </a:blipFill>
+            </p:spPr>
+            <p:txBody>
+              <a:bodyPr/>
+              <a:lstStyle/>
+              <a:p>
+                <a:r>
+                  <a:rPr lang="en-US">
+                    <a:noFill/>
+                  </a:rPr>
+                  <a:t> </a:t>
+                </a:r>
+              </a:p>
+            </p:txBody>
+          </p:sp>
+        </mc:Fallback>
+      </mc:AlternateContent>
+      <p:grpSp>
+        <p:nvGrpSpPr>
+          <p:cNvPr id="17" name="Group 16">
+            <a:extLst>
+              <a:ext uri="{FF2B5EF4-FFF2-40B4-BE49-F238E27FC236}">
+                <a16:creationId xmlns:a16="http://schemas.microsoft.com/office/drawing/2014/main" id="{312F3075-4DFD-D9C0-5811-81FC0AB7038A}"/>
+              </a:ext>
+            </a:extLst>
+          </p:cNvPr>
+          <p:cNvGrpSpPr/>
+          <p:nvPr/>
+        </p:nvGrpSpPr>
+        <p:grpSpPr>
+          <a:xfrm>
+            <a:off x="293935" y="2966484"/>
+            <a:ext cx="5043609" cy="2424223"/>
+            <a:chOff x="293935" y="2966484"/>
+            <a:chExt cx="5043609" cy="2424223"/>
+          </a:xfrm>
+        </p:grpSpPr>
+        <p:sp>
+          <p:nvSpPr>
+            <p:cNvPr id="15" name="Rounded Rectangle 14">
+              <a:extLst>
+                <a:ext uri="{FF2B5EF4-FFF2-40B4-BE49-F238E27FC236}">
+                  <a16:creationId xmlns:a16="http://schemas.microsoft.com/office/drawing/2014/main" id="{7A18CB6D-2507-1055-86B8-668EC0F2692D}"/>
+                </a:ext>
+              </a:extLst>
+            </p:cNvPr>
+            <p:cNvSpPr/>
+            <p:nvPr/>
+          </p:nvSpPr>
+          <p:spPr>
+            <a:xfrm>
+              <a:off x="293935" y="2966484"/>
+              <a:ext cx="5043609" cy="2424223"/>
+            </a:xfrm>
+            <a:prstGeom prst="roundRect">
+              <a:avLst/>
+            </a:prstGeom>
+          </p:spPr>
+          <p:style>
+            <a:lnRef idx="2">
+              <a:schemeClr val="accent5"/>
+            </a:lnRef>
+            <a:fillRef idx="1">
+              <a:schemeClr val="lt1"/>
+            </a:fillRef>
+            <a:effectRef idx="0">
+              <a:schemeClr val="accent5"/>
+            </a:effectRef>
+            <a:fontRef idx="minor">
+              <a:schemeClr val="dk1"/>
+            </a:fontRef>
+          </p:style>
+          <p:txBody>
+            <a:bodyPr rtlCol="0" anchor="ctr"/>
+            <a:lstStyle/>
+            <a:p>
+              <a:pPr algn="ctr"/>
+              <a:endParaRPr lang="en-US"/>
+            </a:p>
+          </p:txBody>
+        </p:sp>
+        <mc:AlternateContent xmlns:mc="http://schemas.openxmlformats.org/markup-compatibility/2006">
+          <mc:Choice xmlns:a14="http://schemas.microsoft.com/office/drawing/2010/main" Requires="a14">
+            <p:sp>
+              <p:nvSpPr>
+                <p:cNvPr id="10" name="TextBox 9">
+                  <a:extLst>
+                    <a:ext uri="{FF2B5EF4-FFF2-40B4-BE49-F238E27FC236}">
+                      <a16:creationId xmlns:a16="http://schemas.microsoft.com/office/drawing/2014/main" id="{2DD921D4-8C87-8121-CE70-42E2EB3ECF65}"/>
+                    </a:ext>
+                  </a:extLst>
+                </p:cNvPr>
+                <p:cNvSpPr txBox="1"/>
+                <p:nvPr/>
+              </p:nvSpPr>
+              <p:spPr>
+                <a:xfrm>
+                  <a:off x="464055" y="3522184"/>
+                  <a:ext cx="4703368" cy="1820498"/>
+                </a:xfrm>
+                <a:prstGeom prst="rect">
+                  <a:avLst/>
+                </a:prstGeom>
+                <a:noFill/>
+              </p:spPr>
+              <p:txBody>
+                <a:bodyPr wrap="square">
+                  <a:spAutoFit/>
+                </a:bodyPr>
+                <a:lstStyle/>
+                <a:p>
+                  <a:pPr algn="just">
+                    <a:buNone/>
+                  </a:pPr>
+                  <a:r>
+                    <a:rPr lang="en-US" sz="1400" b="1" dirty="0">
+                      <a:effectLst/>
+                      <a:latin typeface="Google Sans Text"/>
+                    </a:rPr>
+                    <a:t>Parallel (</a:t>
+                  </a:r>
+                  <a14:m>
+                    <m:oMath xmlns:m="http://schemas.openxmlformats.org/officeDocument/2006/math">
+                      <m:sSub>
+                        <m:sSubPr>
+                          <m:ctrlPr>
+                            <a:rPr lang="en-US" sz="1400" i="1">
+                              <a:latin typeface="Cambria Math" panose="02040503050406030204" pitchFamily="18" charset="0"/>
+                            </a:rPr>
+                          </m:ctrlPr>
+                        </m:sSubPr>
+                        <m:e>
+                          <m:r>
+                            <a:rPr lang="en-US" sz="1400" i="1">
+                              <a:latin typeface="Cambria Math" panose="02040503050406030204" pitchFamily="18" charset="0"/>
+                              <a:ea typeface="Cambria Math" panose="02040503050406030204" pitchFamily="18" charset="0"/>
+                            </a:rPr>
+                            <m:t>𝜂</m:t>
+                          </m:r>
+                        </m:e>
+                        <m:sub>
+                          <m:r>
+                            <a:rPr lang="en-US" sz="1400" i="1">
+                              <a:latin typeface="Cambria Math" panose="02040503050406030204" pitchFamily="18" charset="0"/>
+                              <a:ea typeface="Cambria Math" panose="02040503050406030204" pitchFamily="18" charset="0"/>
+                            </a:rPr>
+                            <m:t>∥</m:t>
+                          </m:r>
+                        </m:sub>
+                      </m:sSub>
+                      <m:r>
+                        <a:rPr lang="en-US" sz="1400" i="1" smtClean="0">
+                          <a:latin typeface="Cambria Math" panose="02040503050406030204" pitchFamily="18" charset="0"/>
+                          <a:ea typeface="Cambria Math" panose="02040503050406030204" pitchFamily="18" charset="0"/>
+                        </a:rPr>
+                        <m:t>~</m:t>
+                      </m:r>
+                      <m:r>
+                        <a:rPr lang="en-US" sz="1400" i="1">
+                          <a:latin typeface="Cambria Math" panose="02040503050406030204" pitchFamily="18" charset="0"/>
+                        </a:rPr>
+                        <m:t>2</m:t>
+                      </m:r>
+                      <m:r>
+                        <a:rPr lang="en-US" sz="1400" i="1">
+                          <a:latin typeface="Cambria Math" panose="02040503050406030204" pitchFamily="18" charset="0"/>
+                          <a:ea typeface="Cambria Math" panose="02040503050406030204" pitchFamily="18" charset="0"/>
+                        </a:rPr>
+                        <m:t>𝜋𝜇</m:t>
+                      </m:r>
+                    </m:oMath>
+                  </a14:m>
+                  <a:r>
+                    <a:rPr lang="en-US" sz="1400" b="1" dirty="0">
+                      <a:effectLst/>
+                      <a:latin typeface="Google Sans Text"/>
+                    </a:rPr>
+                    <a:t>):</a:t>
+                  </a:r>
+                  <a:r>
+                    <a:rPr lang="en-US" sz="1400" dirty="0">
+                      <a:effectLst/>
+                      <a:latin typeface="Google Sans Text"/>
+                    </a:rPr>
+                    <a:t> Sliding the thread along its axis generates pure viscous shear stress integrated around the cylinder's perimeter.</a:t>
+                  </a:r>
+                </a:p>
+                <a:p>
+                  <a:pPr algn="just">
+                    <a:buNone/>
+                  </a:pPr>
+                  <a:endParaRPr lang="en-US" sz="1400" dirty="0">
+                    <a:effectLst/>
+                    <a:latin typeface="Google Sans Text"/>
+                  </a:endParaRPr>
+                </a:p>
+                <a:p>
+                  <a:pPr algn="just">
+                    <a:buNone/>
+                  </a:pPr>
+                  <a:r>
+                    <a:rPr lang="en-US" sz="1400" b="1" dirty="0">
+                      <a:effectLst/>
+                      <a:latin typeface="Google Sans Text"/>
+                    </a:rPr>
+                    <a:t>Perpendicular (</a:t>
+                  </a:r>
+                  <a14:m>
+                    <m:oMath xmlns:m="http://schemas.openxmlformats.org/officeDocument/2006/math">
+                      <m:sSub>
+                        <m:sSubPr>
+                          <m:ctrlPr>
+                            <a:rPr lang="en-US" sz="1400" i="1">
+                              <a:latin typeface="Cambria Math" panose="02040503050406030204" pitchFamily="18" charset="0"/>
+                            </a:rPr>
+                          </m:ctrlPr>
+                        </m:sSubPr>
+                        <m:e>
+                          <m:r>
+                            <a:rPr lang="en-US" sz="1400" i="1">
+                              <a:latin typeface="Cambria Math" panose="02040503050406030204" pitchFamily="18" charset="0"/>
+                              <a:ea typeface="Cambria Math" panose="02040503050406030204" pitchFamily="18" charset="0"/>
+                            </a:rPr>
+                            <m:t>𝜂</m:t>
+                          </m:r>
+                        </m:e>
+                        <m:sub>
+                          <m:r>
+                            <a:rPr lang="en-US" sz="1400" i="1">
+                              <a:latin typeface="Cambria Math" panose="02040503050406030204" pitchFamily="18" charset="0"/>
+                              <a:ea typeface="Cambria Math" panose="02040503050406030204" pitchFamily="18" charset="0"/>
+                            </a:rPr>
+                            <m:t>⊥</m:t>
+                          </m:r>
+                        </m:sub>
+                      </m:sSub>
+                      <m:r>
+                        <a:rPr lang="en-US" sz="1400" i="1">
+                          <a:latin typeface="Cambria Math" panose="02040503050406030204" pitchFamily="18" charset="0"/>
+                          <a:ea typeface="Cambria Math" panose="02040503050406030204" pitchFamily="18" charset="0"/>
+                        </a:rPr>
+                        <m:t>~</m:t>
+                      </m:r>
+                      <m:r>
+                        <a:rPr lang="en-US" sz="1400" b="0" i="1" smtClean="0">
+                          <a:latin typeface="Cambria Math" panose="02040503050406030204" pitchFamily="18" charset="0"/>
+                          <a:ea typeface="Cambria Math" panose="02040503050406030204" pitchFamily="18" charset="0"/>
+                        </a:rPr>
+                        <m:t>4</m:t>
+                      </m:r>
+                      <m:r>
+                        <a:rPr lang="en-US" sz="1400" i="1">
+                          <a:latin typeface="Cambria Math" panose="02040503050406030204" pitchFamily="18" charset="0"/>
+                          <a:ea typeface="Cambria Math" panose="02040503050406030204" pitchFamily="18" charset="0"/>
+                        </a:rPr>
+                        <m:t>𝜋𝜇</m:t>
+                      </m:r>
+                    </m:oMath>
+                  </a14:m>
+                  <a:r>
+                    <a:rPr lang="en-US" sz="1400" b="1" dirty="0">
+                      <a:effectLst/>
+                      <a:latin typeface="Google Sans Text"/>
+                    </a:rPr>
+                    <a:t>):</a:t>
+                  </a:r>
+                  <a:r>
+                    <a:rPr lang="en-US" sz="1400" dirty="0">
+                      <a:effectLst/>
+                      <a:latin typeface="Google Sans Text"/>
+                    </a:rPr>
+                    <a:t> Moving sideways forces fluid around a broad cross-section, adding a frontal pressure difference to the shear stress. This strictly doubles the asymptotic resistance.</a:t>
+                  </a:r>
+                  <a:endParaRPr lang="en-US" dirty="0">
+                    <a:effectLst/>
+                    <a:latin typeface="Google Sans Text"/>
+                  </a:endParaRPr>
+                </a:p>
+              </p:txBody>
+            </p:sp>
+          </mc:Choice>
+          <mc:Fallback>
+            <p:sp>
+              <p:nvSpPr>
+                <p:cNvPr id="10" name="TextBox 9">
+                  <a:extLst>
+                    <a:ext uri="{FF2B5EF4-FFF2-40B4-BE49-F238E27FC236}">
+                      <a16:creationId xmlns:a16="http://schemas.microsoft.com/office/drawing/2014/main" id="{2DD921D4-8C87-8121-CE70-42E2EB3ECF65}"/>
+                    </a:ext>
+                  </a:extLst>
+                </p:cNvPr>
+                <p:cNvSpPr txBox="1">
+                  <a:spLocks noRot="1" noChangeAspect="1" noMove="1" noResize="1" noEditPoints="1" noAdjustHandles="1" noChangeArrowheads="1" noChangeShapeType="1" noTextEdit="1"/>
+                </p:cNvSpPr>
+                <p:nvPr/>
+              </p:nvSpPr>
+              <p:spPr>
+                <a:xfrm>
+                  <a:off x="464055" y="3522184"/>
+                  <a:ext cx="4703368" cy="1820498"/>
+                </a:xfrm>
+                <a:prstGeom prst="rect">
+                  <a:avLst/>
+                </a:prstGeom>
+                <a:blipFill>
+                  <a:blip r:embed="rId6"/>
+                  <a:stretch>
+                    <a:fillRect l="-269" t="-694" r="-269" b="-2778"/>
+                  </a:stretch>
+                </a:blipFill>
+              </p:spPr>
+              <p:txBody>
+                <a:bodyPr/>
+                <a:lstStyle/>
+                <a:p>
+                  <a:r>
+                    <a:rPr lang="en-US">
+                      <a:noFill/>
+                    </a:rPr>
+                    <a:t> </a:t>
+                  </a:r>
+                </a:p>
+              </p:txBody>
+            </p:sp>
+          </mc:Fallback>
+        </mc:AlternateContent>
+        <p:sp>
+          <p:nvSpPr>
+            <p:cNvPr id="13" name="TextBox 12">
+              <a:extLst>
+                <a:ext uri="{FF2B5EF4-FFF2-40B4-BE49-F238E27FC236}">
+                  <a16:creationId xmlns:a16="http://schemas.microsoft.com/office/drawing/2014/main" id="{668525DC-0E49-7164-9063-6DF276B43668}"/>
+                </a:ext>
+              </a:extLst>
+            </p:cNvPr>
+            <p:cNvSpPr txBox="1"/>
+            <p:nvPr/>
+          </p:nvSpPr>
+          <p:spPr>
+            <a:xfrm>
+              <a:off x="1959818" y="3059668"/>
+              <a:ext cx="1293745" cy="369332"/>
+            </a:xfrm>
+            <a:prstGeom prst="rect">
+              <a:avLst/>
+            </a:prstGeom>
+            <a:noFill/>
+          </p:spPr>
+          <p:txBody>
+            <a:bodyPr wrap="square" rtlCol="0">
+              <a:spAutoFit/>
+            </a:bodyPr>
+            <a:lstStyle/>
+            <a:p>
+              <a:r>
+                <a:rPr lang="en-US" dirty="0"/>
+                <a:t>Anisotropy</a:t>
+              </a:r>
+            </a:p>
+          </p:txBody>
+        </p:sp>
+      </p:grpSp>
+      <p:grpSp>
+        <p:nvGrpSpPr>
+          <p:cNvPr id="21" name="Group 20">
+            <a:extLst>
+              <a:ext uri="{FF2B5EF4-FFF2-40B4-BE49-F238E27FC236}">
+                <a16:creationId xmlns:a16="http://schemas.microsoft.com/office/drawing/2014/main" id="{FD624D3C-6097-5C5D-76C8-3140DCC55442}"/>
+              </a:ext>
+            </a:extLst>
+          </p:cNvPr>
+          <p:cNvGrpSpPr/>
+          <p:nvPr/>
+        </p:nvGrpSpPr>
+        <p:grpSpPr>
+          <a:xfrm>
+            <a:off x="5865969" y="2190307"/>
+            <a:ext cx="6152364" cy="3200399"/>
+            <a:chOff x="5865969" y="2190307"/>
+            <a:chExt cx="6152364" cy="3200399"/>
+          </a:xfrm>
+        </p:grpSpPr>
+        <p:grpSp>
+          <p:nvGrpSpPr>
+            <p:cNvPr id="18" name="Group 17">
+              <a:extLst>
+                <a:ext uri="{FF2B5EF4-FFF2-40B4-BE49-F238E27FC236}">
+                  <a16:creationId xmlns:a16="http://schemas.microsoft.com/office/drawing/2014/main" id="{64862FCB-243C-D5F2-2DD2-A425A3318AFF}"/>
+                </a:ext>
+              </a:extLst>
+            </p:cNvPr>
+            <p:cNvGrpSpPr/>
+            <p:nvPr/>
+          </p:nvGrpSpPr>
+          <p:grpSpPr>
+            <a:xfrm>
+              <a:off x="5865969" y="2966483"/>
+              <a:ext cx="6152364" cy="2424223"/>
+              <a:chOff x="5865969" y="2966483"/>
+              <a:chExt cx="6152364" cy="2424223"/>
+            </a:xfrm>
+          </p:grpSpPr>
+          <p:sp>
+            <p:nvSpPr>
+              <p:cNvPr id="16" name="Rounded Rectangle 15">
+                <a:extLst>
+                  <a:ext uri="{FF2B5EF4-FFF2-40B4-BE49-F238E27FC236}">
+                    <a16:creationId xmlns:a16="http://schemas.microsoft.com/office/drawing/2014/main" id="{A5243488-D4DE-9670-67B4-4721AA22F7DF}"/>
+                  </a:ext>
+                </a:extLst>
+              </p:cNvPr>
+              <p:cNvSpPr/>
+              <p:nvPr/>
+            </p:nvSpPr>
+            <p:spPr>
+              <a:xfrm>
+                <a:off x="5865969" y="2966483"/>
+                <a:ext cx="6152364" cy="2424223"/>
+              </a:xfrm>
+              <a:prstGeom prst="roundRect">
+                <a:avLst/>
+              </a:prstGeom>
+            </p:spPr>
+            <p:style>
+              <a:lnRef idx="2">
+                <a:schemeClr val="accent5"/>
+              </a:lnRef>
+              <a:fillRef idx="1">
+                <a:schemeClr val="lt1"/>
+              </a:fillRef>
+              <a:effectRef idx="0">
+                <a:schemeClr val="accent5"/>
+              </a:effectRef>
+              <a:fontRef idx="minor">
+                <a:schemeClr val="dk1"/>
+              </a:fontRef>
+            </p:style>
+            <p:txBody>
+              <a:bodyPr rtlCol="0" anchor="ctr"/>
+              <a:lstStyle/>
+              <a:p>
+                <a:pPr algn="ctr"/>
+                <a:endParaRPr lang="en-US"/>
+              </a:p>
+            </p:txBody>
+          </p:sp>
+          <mc:AlternateContent xmlns:mc="http://schemas.openxmlformats.org/markup-compatibility/2006">
+            <mc:Choice xmlns:a14="http://schemas.microsoft.com/office/drawing/2010/main" Requires="a14">
+              <p:sp>
+                <p:nvSpPr>
+                  <p:cNvPr id="12" name="TextBox 11">
+                    <a:extLst>
+                      <a:ext uri="{FF2B5EF4-FFF2-40B4-BE49-F238E27FC236}">
+                        <a16:creationId xmlns:a16="http://schemas.microsoft.com/office/drawing/2014/main" id="{F7D9E9E3-FCD1-BF1D-E65E-B083C1EA09CB}"/>
+                      </a:ext>
+                    </a:extLst>
+                  </p:cNvPr>
+                  <p:cNvSpPr txBox="1"/>
+                  <p:nvPr/>
+                </p:nvSpPr>
+                <p:spPr>
+                  <a:xfrm>
+                    <a:off x="6284074" y="3165996"/>
+                    <a:ext cx="5613991" cy="2176686"/>
+                  </a:xfrm>
+                  <a:prstGeom prst="rect">
+                    <a:avLst/>
+                  </a:prstGeom>
+                  <a:noFill/>
+                </p:spPr>
+                <p:txBody>
+                  <a:bodyPr wrap="square">
+                    <a:spAutoFit/>
+                  </a:bodyPr>
+                  <a:lstStyle/>
+                  <a:p>
+                    <a:pPr>
+                      <a:buNone/>
+                    </a:pPr>
+                    <a:r>
+                      <a:rPr lang="en-US" sz="1400" b="1" dirty="0">
+                        <a:effectLst/>
+                        <a:latin typeface="Google Sans Text"/>
+                      </a:rPr>
+                      <a:t>Point-Force Decay:</a:t>
+                    </a:r>
+                    <a:r>
+                      <a:rPr lang="en-US" sz="1400" dirty="0">
+                        <a:effectLst/>
+                        <a:latin typeface="Google Sans Text"/>
+                      </a:rPr>
+                      <a:t> A point force in Stokes flow decays as </a:t>
+                    </a:r>
+                    <a14:m>
+                      <m:oMath xmlns:m="http://schemas.openxmlformats.org/officeDocument/2006/math">
+                        <m:r>
+                          <a:rPr lang="en-US" sz="1400" i="1" smtClean="0">
+                            <a:effectLst/>
+                            <a:latin typeface="Cambria Math" panose="02040503050406030204" pitchFamily="18" charset="0"/>
+                            <a:ea typeface="Cambria Math" panose="02040503050406030204" pitchFamily="18" charset="0"/>
+                          </a:rPr>
+                          <m:t>~</m:t>
+                        </m:r>
+                        <m:f>
+                          <m:fPr>
+                            <m:ctrlPr>
+                              <a:rPr lang="en-US" sz="1400" i="1" smtClean="0">
+                                <a:effectLst/>
+                                <a:latin typeface="Cambria Math" panose="02040503050406030204" pitchFamily="18" charset="0"/>
+                                <a:ea typeface="Cambria Math" panose="02040503050406030204" pitchFamily="18" charset="0"/>
+                              </a:rPr>
+                            </m:ctrlPr>
+                          </m:fPr>
+                          <m:num>
+                            <m:r>
+                              <a:rPr lang="en-US" sz="1400" b="0" i="1" smtClean="0">
+                                <a:effectLst/>
+                                <a:latin typeface="Cambria Math" panose="02040503050406030204" pitchFamily="18" charset="0"/>
+                                <a:ea typeface="Cambria Math" panose="02040503050406030204" pitchFamily="18" charset="0"/>
+                              </a:rPr>
+                              <m:t>1</m:t>
+                            </m:r>
+                          </m:num>
+                          <m:den>
+                            <m:r>
+                              <m:rPr>
+                                <m:sty m:val="p"/>
+                              </m:rPr>
+                              <a:rPr lang="en-US" sz="1400" b="0" i="1" smtClean="0">
+                                <a:effectLst/>
+                                <a:latin typeface="Cambria Math" panose="02040503050406030204" pitchFamily="18" charset="0"/>
+                                <a:ea typeface="Cambria Math" panose="02040503050406030204" pitchFamily="18" charset="0"/>
+                              </a:rPr>
+                              <m:t>R</m:t>
+                            </m:r>
+                          </m:den>
+                        </m:f>
+                      </m:oMath>
+                    </a14:m>
+                    <a:endParaRPr lang="en-US" sz="1400" dirty="0">
+                      <a:effectLst/>
+                      <a:latin typeface="Google Sans Text"/>
+                    </a:endParaRPr>
+                  </a:p>
+                  <a:p>
+                    <a:pPr>
+                      <a:buNone/>
+                    </a:pPr>
+                    <a:endParaRPr lang="en-US" sz="1400" b="1" dirty="0">
+                      <a:effectLst/>
+                      <a:latin typeface="Google Sans Text"/>
+                    </a:endParaRPr>
+                  </a:p>
+                  <a:p>
+                    <a:pPr>
+                      <a:buNone/>
+                    </a:pPr>
+                    <a:r>
+                      <a:rPr lang="en-US" sz="1400" b="1" dirty="0">
+                        <a:effectLst/>
+                        <a:latin typeface="Google Sans Text"/>
+                      </a:rPr>
+                      <a:t>Line Integration:</a:t>
+                    </a:r>
+                    <a:r>
+                      <a:rPr lang="en-US" sz="1400" dirty="0">
+                        <a:effectLst/>
+                        <a:latin typeface="Google Sans Text"/>
+                      </a:rPr>
+                      <a:t> Summing these disturbances over a line of length </a:t>
+                    </a:r>
+                    <a:r>
+                      <a:rPr lang="en-US" sz="1400" i="1" dirty="0">
+                        <a:effectLst/>
+                        <a:latin typeface="Google Sans Text"/>
+                      </a:rPr>
+                      <a:t>L</a:t>
+                    </a:r>
+                    <a:r>
+                      <a:rPr lang="en-US" sz="1400" dirty="0">
+                        <a:effectLst/>
+                        <a:latin typeface="Google Sans Text"/>
+                      </a:rPr>
+                      <a:t> evaluated at boundary radius </a:t>
+                    </a:r>
+                    <a:r>
+                      <a:rPr lang="en-US" sz="1400" i="1" dirty="0">
+                        <a:effectLst/>
+                        <a:latin typeface="Google Sans Text"/>
+                      </a:rPr>
+                      <a:t>r</a:t>
+                    </a:r>
+                    <a:r>
+                      <a:rPr lang="en-US" sz="1400" dirty="0">
+                        <a:effectLst/>
+                        <a:latin typeface="Google Sans Text"/>
+                      </a:rPr>
+                      <a:t> requires evaluating:</a:t>
+                    </a:r>
+                  </a:p>
+                  <a:p>
+                    <a:pPr>
+                      <a:buNone/>
+                    </a:pPr>
+                    <a14:m>
+                      <m:oMathPara xmlns:m="http://schemas.openxmlformats.org/officeDocument/2006/math">
+                        <m:oMathParaPr>
+                          <m:jc m:val="centerGroup"/>
+                        </m:oMathParaPr>
+                        <m:oMath xmlns:m="http://schemas.openxmlformats.org/officeDocument/2006/math">
+                          <m:nary>
+                            <m:naryPr>
+                              <m:ctrlPr>
+                                <a:rPr lang="en-US" sz="1400" i="1" smtClean="0">
+                                  <a:effectLst/>
+                                  <a:latin typeface="Cambria Math" panose="02040503050406030204" pitchFamily="18" charset="0"/>
+                                </a:rPr>
+                              </m:ctrlPr>
+                            </m:naryPr>
+                            <m:sub>
+                              <m:r>
+                                <m:rPr>
+                                  <m:sty m:val="p"/>
+                                  <m:brk m:alnAt="23"/>
+                                </m:rPr>
+                                <a:rPr lang="en-US" sz="1400" b="0" i="1" smtClean="0">
+                                  <a:effectLst/>
+                                  <a:latin typeface="Cambria Math" panose="02040503050406030204" pitchFamily="18" charset="0"/>
+                                </a:rPr>
+                                <m:t>r</m:t>
+                              </m:r>
+                            </m:sub>
+                            <m:sup>
+                              <m:r>
+                                <m:rPr>
+                                  <m:sty m:val="p"/>
+                                </m:rPr>
+                                <a:rPr lang="en-US" sz="1400" b="0" i="1" smtClean="0">
+                                  <a:effectLst/>
+                                  <a:latin typeface="Cambria Math" panose="02040503050406030204" pitchFamily="18" charset="0"/>
+                                </a:rPr>
+                                <m:t>L</m:t>
+                              </m:r>
+                            </m:sup>
+                            <m:e>
+                              <m:f>
+                                <m:fPr>
+                                  <m:ctrlPr>
+                                    <a:rPr lang="en-US" sz="1400" i="1" smtClean="0">
+                                      <a:effectLst/>
+                                      <a:latin typeface="Cambria Math" panose="02040503050406030204" pitchFamily="18" charset="0"/>
+                                    </a:rPr>
+                                  </m:ctrlPr>
+                                </m:fPr>
+                                <m:num>
+                                  <m:r>
+                                    <a:rPr lang="en-US" sz="1400" b="0" i="1" smtClean="0">
+                                      <a:effectLst/>
+                                      <a:latin typeface="Cambria Math" panose="02040503050406030204" pitchFamily="18" charset="0"/>
+                                    </a:rPr>
+                                    <m:t>1</m:t>
+                                  </m:r>
+                                </m:num>
+                                <m:den>
+                                  <m:r>
+                                    <m:rPr>
+                                      <m:sty m:val="p"/>
+                                    </m:rPr>
+                                    <a:rPr lang="en-US" sz="1400" b="0" i="1" smtClean="0">
+                                      <a:effectLst/>
+                                      <a:latin typeface="Cambria Math" panose="02040503050406030204" pitchFamily="18" charset="0"/>
+                                    </a:rPr>
+                                    <m:t>R</m:t>
+                                  </m:r>
+                                </m:den>
+                              </m:f>
+                              <m:r>
+                                <m:rPr>
+                                  <m:sty m:val="p"/>
+                                </m:rPr>
+                                <a:rPr lang="en-US" sz="1400" b="0" i="1" smtClean="0">
+                                  <a:effectLst/>
+                                  <a:latin typeface="Cambria Math" panose="02040503050406030204" pitchFamily="18" charset="0"/>
+                                </a:rPr>
+                                <m:t>dR</m:t>
+                              </m:r>
+                              <m:r>
+                                <a:rPr lang="en-US" sz="1400" b="0" i="1" smtClean="0">
+                                  <a:effectLst/>
+                                  <a:latin typeface="Cambria Math" panose="02040503050406030204" pitchFamily="18" charset="0"/>
+                                </a:rPr>
+                                <m:t>=</m:t>
+                              </m:r>
+                              <m:r>
+                                <m:rPr>
+                                  <m:sty m:val="p"/>
+                                </m:rPr>
+                                <a:rPr lang="en-US" sz="1400" i="1">
+                                  <a:latin typeface="Cambria Math" panose="02040503050406030204" pitchFamily="18" charset="0"/>
+                                </a:rPr>
+                                <m:t>ln</m:t>
+                              </m:r>
+                              <m:d>
+                                <m:dPr>
+                                  <m:ctrlPr>
+                                    <a:rPr lang="en-US" sz="1400" i="1">
+                                      <a:latin typeface="Cambria Math" panose="02040503050406030204" pitchFamily="18" charset="0"/>
+                                    </a:rPr>
+                                  </m:ctrlPr>
+                                </m:dPr>
+                                <m:e>
+                                  <m:f>
+                                    <m:fPr>
+                                      <m:ctrlPr>
+                                        <a:rPr lang="en-US" sz="1400" i="1">
+                                          <a:latin typeface="Cambria Math" panose="02040503050406030204" pitchFamily="18" charset="0"/>
+                                        </a:rPr>
+                                      </m:ctrlPr>
+                                    </m:fPr>
+                                    <m:num>
+                                      <m:r>
+                                        <m:rPr>
+                                          <m:sty m:val="p"/>
+                                        </m:rPr>
+                                        <a:rPr lang="en-US" sz="1400" i="1">
+                                          <a:latin typeface="Cambria Math" panose="02040503050406030204" pitchFamily="18" charset="0"/>
+                                        </a:rPr>
+                                        <m:t>L</m:t>
+                                      </m:r>
+                                    </m:num>
+                                    <m:den>
+                                      <m:r>
+                                        <m:rPr>
+                                          <m:sty m:val="p"/>
+                                        </m:rPr>
+                                        <a:rPr lang="en-US" sz="1400" i="1">
+                                          <a:latin typeface="Cambria Math" panose="02040503050406030204" pitchFamily="18" charset="0"/>
+                                        </a:rPr>
+                                        <m:t>r</m:t>
+                                      </m:r>
+                                    </m:den>
+                                  </m:f>
+                                </m:e>
+                              </m:d>
+                            </m:e>
+                          </m:nary>
+                        </m:oMath>
+                      </m:oMathPara>
+                    </a14:m>
+                    <a:endParaRPr lang="en-US" sz="1400" dirty="0">
+                      <a:effectLst/>
+                      <a:latin typeface="Google Sans Text"/>
+                    </a:endParaRPr>
+                  </a:p>
+                  <a:p>
+                    <a:pPr>
+                      <a:buNone/>
+                    </a:pPr>
+                    <a:endParaRPr lang="en-US" sz="1400" dirty="0">
+                      <a:effectLst/>
+                      <a:latin typeface="Google Sans Text"/>
+                    </a:endParaRPr>
+                  </a:p>
+                  <a:p>
+                    <a:pPr>
+                      <a:buNone/>
+                    </a:pPr>
+                    <a:r>
+                      <a:rPr lang="en-US" sz="1400" dirty="0">
+                        <a:effectLst/>
+                        <a:latin typeface="Google Sans Text"/>
+                      </a:rPr>
+                      <a:t>Physical meaning: The hydrodynamics of a slender filament are dominated by long-range viscous interactions along its length.</a:t>
+                    </a:r>
+                  </a:p>
+                </p:txBody>
+              </p:sp>
+            </mc:Choice>
+            <mc:Fallback>
+              <p:sp>
+                <p:nvSpPr>
+                  <p:cNvPr id="12" name="TextBox 11">
+                    <a:extLst>
+                      <a:ext uri="{FF2B5EF4-FFF2-40B4-BE49-F238E27FC236}">
+                        <a16:creationId xmlns:a16="http://schemas.microsoft.com/office/drawing/2014/main" id="{F7D9E9E3-FCD1-BF1D-E65E-B083C1EA09CB}"/>
+                      </a:ext>
+                    </a:extLst>
+                  </p:cNvPr>
+                  <p:cNvSpPr txBox="1">
+                    <a:spLocks noRot="1" noChangeAspect="1" noMove="1" noResize="1" noEditPoints="1" noAdjustHandles="1" noChangeArrowheads="1" noChangeShapeType="1" noTextEdit="1"/>
+                  </p:cNvSpPr>
+                  <p:nvPr/>
+                </p:nvSpPr>
+                <p:spPr>
+                  <a:xfrm>
+                    <a:off x="6284074" y="3165996"/>
+                    <a:ext cx="5613991" cy="2176686"/>
+                  </a:xfrm>
+                  <a:prstGeom prst="rect">
+                    <a:avLst/>
+                  </a:prstGeom>
+                  <a:blipFill>
+                    <a:blip r:embed="rId7"/>
+                    <a:stretch>
+                      <a:fillRect l="-226" b="-27907"/>
+                    </a:stretch>
+                  </a:blipFill>
+                </p:spPr>
+                <p:txBody>
+                  <a:bodyPr/>
+                  <a:lstStyle/>
+                  <a:p>
+                    <a:r>
+                      <a:rPr lang="en-US">
+                        <a:noFill/>
+                      </a:rPr>
+                      <a:t> </a:t>
+                    </a:r>
+                  </a:p>
+                </p:txBody>
+              </p:sp>
+            </mc:Fallback>
+          </mc:AlternateContent>
+        </p:grpSp>
+        <mc:AlternateContent xmlns:mc="http://schemas.openxmlformats.org/markup-compatibility/2006">
+          <mc:Choice xmlns:a14="http://schemas.microsoft.com/office/drawing/2010/main" Requires="a14">
+            <p:sp>
+              <p:nvSpPr>
+                <p:cNvPr id="14" name="TextBox 13">
+                  <a:extLst>
+                    <a:ext uri="{FF2B5EF4-FFF2-40B4-BE49-F238E27FC236}">
+                      <a16:creationId xmlns:a16="http://schemas.microsoft.com/office/drawing/2014/main" id="{B17978B6-1D3D-F0AF-DBB7-43ED778A013A}"/>
+                    </a:ext>
+                  </a:extLst>
+                </p:cNvPr>
+                <p:cNvSpPr txBox="1"/>
+                <p:nvPr/>
+              </p:nvSpPr>
+              <p:spPr>
+                <a:xfrm>
+                  <a:off x="7850285" y="2193360"/>
+                  <a:ext cx="1481644" cy="506870"/>
+                </a:xfrm>
+                <a:prstGeom prst="rect">
+                  <a:avLst/>
+                </a:prstGeom>
+                <a:noFill/>
+              </p:spPr>
+              <p:txBody>
+                <a:bodyPr wrap="square" rtlCol="0">
+                  <a:spAutoFit/>
+                </a:bodyPr>
+                <a:lstStyle/>
+                <a:p>
+                  <a:r>
+                    <a:rPr lang="en-US" dirty="0">
+                      <a:solidFill>
+                        <a:schemeClr val="accent4"/>
+                      </a:solidFill>
+                    </a:rPr>
+                    <a:t>Why </a:t>
+                  </a:r>
+                  <a14:m>
+                    <m:oMath xmlns:m="http://schemas.openxmlformats.org/officeDocument/2006/math">
+                      <m:r>
+                        <m:rPr>
+                          <m:sty m:val="p"/>
+                        </m:rPr>
+                        <a:rPr lang="en-US" i="1">
+                          <a:solidFill>
+                            <a:schemeClr val="accent4"/>
+                          </a:solidFill>
+                          <a:latin typeface="Cambria Math" panose="02040503050406030204" pitchFamily="18" charset="0"/>
+                        </a:rPr>
+                        <m:t>ln</m:t>
+                      </m:r>
+                      <m:d>
+                        <m:dPr>
+                          <m:ctrlPr>
+                            <a:rPr lang="en-US" i="1">
+                              <a:solidFill>
+                                <a:schemeClr val="accent4"/>
+                              </a:solidFill>
+                              <a:latin typeface="Cambria Math" panose="02040503050406030204" pitchFamily="18" charset="0"/>
+                            </a:rPr>
+                          </m:ctrlPr>
+                        </m:dPr>
+                        <m:e>
+                          <m:f>
+                            <m:fPr>
+                              <m:ctrlPr>
+                                <a:rPr lang="en-US" i="1">
+                                  <a:solidFill>
+                                    <a:schemeClr val="accent4"/>
+                                  </a:solidFill>
+                                  <a:latin typeface="Cambria Math" panose="02040503050406030204" pitchFamily="18" charset="0"/>
+                                </a:rPr>
+                              </m:ctrlPr>
+                            </m:fPr>
+                            <m:num>
+                              <m:r>
+                                <m:rPr>
+                                  <m:sty m:val="p"/>
+                                </m:rPr>
+                                <a:rPr lang="en-US" i="1">
+                                  <a:solidFill>
+                                    <a:schemeClr val="accent4"/>
+                                  </a:solidFill>
+                                  <a:latin typeface="Cambria Math" panose="02040503050406030204" pitchFamily="18" charset="0"/>
+                                </a:rPr>
+                                <m:t>L</m:t>
+                              </m:r>
+                            </m:num>
+                            <m:den>
+                              <m:r>
+                                <m:rPr>
+                                  <m:sty m:val="p"/>
+                                </m:rPr>
+                                <a:rPr lang="en-US" i="1">
+                                  <a:solidFill>
+                                    <a:schemeClr val="accent4"/>
+                                  </a:solidFill>
+                                  <a:latin typeface="Cambria Math" panose="02040503050406030204" pitchFamily="18" charset="0"/>
+                                </a:rPr>
+                                <m:t>r</m:t>
+                              </m:r>
+                            </m:den>
+                          </m:f>
+                        </m:e>
+                      </m:d>
+                      <m:r>
+                        <a:rPr lang="en-US" b="0" i="1" smtClean="0">
+                          <a:solidFill>
+                            <a:schemeClr val="accent4"/>
+                          </a:solidFill>
+                          <a:latin typeface="Cambria Math" panose="02040503050406030204" pitchFamily="18" charset="0"/>
+                        </a:rPr>
+                        <m:t> ?</m:t>
+                      </m:r>
+                    </m:oMath>
+                  </a14:m>
+                  <a:endParaRPr lang="en-US" dirty="0">
+                    <a:solidFill>
+                      <a:schemeClr val="accent4"/>
+                    </a:solidFill>
+                  </a:endParaRPr>
+                </a:p>
+              </p:txBody>
+            </p:sp>
+          </mc:Choice>
+          <mc:Fallback>
+            <p:sp>
+              <p:nvSpPr>
+                <p:cNvPr id="14" name="TextBox 13">
+                  <a:extLst>
+                    <a:ext uri="{FF2B5EF4-FFF2-40B4-BE49-F238E27FC236}">
+                      <a16:creationId xmlns:a16="http://schemas.microsoft.com/office/drawing/2014/main" id="{B17978B6-1D3D-F0AF-DBB7-43ED778A013A}"/>
+                    </a:ext>
+                  </a:extLst>
+                </p:cNvPr>
+                <p:cNvSpPr txBox="1">
+                  <a:spLocks noRot="1" noChangeAspect="1" noMove="1" noResize="1" noEditPoints="1" noAdjustHandles="1" noChangeArrowheads="1" noChangeShapeType="1" noTextEdit="1"/>
+                </p:cNvSpPr>
+                <p:nvPr/>
+              </p:nvSpPr>
+              <p:spPr>
+                <a:xfrm>
+                  <a:off x="7850285" y="2193360"/>
+                  <a:ext cx="1481644" cy="506870"/>
+                </a:xfrm>
+                <a:prstGeom prst="rect">
+                  <a:avLst/>
+                </a:prstGeom>
+                <a:blipFill>
+                  <a:blip r:embed="rId8"/>
+                  <a:stretch>
+                    <a:fillRect l="-4274" b="-4878"/>
+                  </a:stretch>
+                </a:blipFill>
+              </p:spPr>
+              <p:txBody>
+                <a:bodyPr/>
+                <a:lstStyle/>
+                <a:p>
+                  <a:r>
+                    <a:rPr lang="en-US">
+                      <a:noFill/>
+                    </a:rPr>
+                    <a:t> </a:t>
+                  </a:r>
+                </a:p>
+              </p:txBody>
+            </p:sp>
+          </mc:Fallback>
+        </mc:AlternateContent>
+        <p:cxnSp>
+          <p:nvCxnSpPr>
+            <p:cNvPr id="20" name="Straight Arrow Connector 19">
+              <a:extLst>
+                <a:ext uri="{FF2B5EF4-FFF2-40B4-BE49-F238E27FC236}">
+                  <a16:creationId xmlns:a16="http://schemas.microsoft.com/office/drawing/2014/main" id="{3DA8D3A4-C407-D286-A50D-EC7BD25095E5}"/>
+                </a:ext>
+              </a:extLst>
+            </p:cNvPr>
+            <p:cNvCxnSpPr/>
+            <p:nvPr/>
+          </p:nvCxnSpPr>
+          <p:spPr>
+            <a:xfrm>
+              <a:off x="6858000" y="2190307"/>
+              <a:ext cx="1733107" cy="776176"/>
+            </a:xfrm>
+            <a:prstGeom prst="straightConnector1">
+              <a:avLst/>
+            </a:prstGeom>
+            <a:ln>
+              <a:tailEnd type="triangle"/>
+            </a:ln>
+          </p:spPr>
+          <p:style>
+            <a:lnRef idx="2">
+              <a:schemeClr val="accent5"/>
+            </a:lnRef>
+            <a:fillRef idx="0">
+              <a:schemeClr val="accent5"/>
+            </a:fillRef>
+            <a:effectRef idx="1">
+              <a:schemeClr val="accent5"/>
+            </a:effectRef>
+            <a:fontRef idx="minor">
+              <a:schemeClr val="tx1"/>
+            </a:fontRef>
+          </p:style>
+        </p:cxnSp>
+      </p:grpSp>
+    </p:spTree>
+    <p:extLst>
+      <p:ext uri="{BB962C8B-B14F-4D97-AF65-F5344CB8AC3E}">
+        <p14:creationId xmlns:p14="http://schemas.microsoft.com/office/powerpoint/2010/main" val="796473381"/>
+      </p:ext>
+    </p:extLst>
+  </p:cSld>
+  <p:clrMapOvr>
+    <a:masterClrMapping/>
+  </p:clrMapOvr>
+  <p:timing>
+    <p:tnLst>
+      <p:par>
+        <p:cTn id="1" dur="indefinite" restart="never" nodeType="tmRoot">
+          <p:childTnLst>
+            <p:seq concurrent="1" nextAc="seek">
+              <p:cTn id="2" dur="indefinite" nodeType="mainSeq">
+                <p:childTnLst>
+                  <p:par>
+                    <p:cTn id="3" fill="hold">
+                      <p:stCondLst>
+                        <p:cond delay="indefinite"/>
+                      </p:stCondLst>
+                      <p:childTnLst>
+                        <p:par>
+                          <p:cTn id="4" fill="hold">
+                            <p:stCondLst>
+                              <p:cond delay="0"/>
+                            </p:stCondLst>
+                            <p:childTnLst>
+                              <p:par>
+                                <p:cTn id="5" presetID="1" presetClass="entr" presetSubtype="0" fill="hold" nodeType="clickEffect">
+                                  <p:stCondLst>
+                                    <p:cond delay="0"/>
+                                  </p:stCondLst>
+                                  <p:childTnLst>
+                                    <p:set>
+                                      <p:cBhvr>
+                                        <p:cTn id="6" dur="1" fill="hold">
+                                          <p:stCondLst>
+                                            <p:cond delay="0"/>
+                                          </p:stCondLst>
+                                        </p:cTn>
+                                        <p:tgtEl>
+                                          <p:spTgt spid="17"/>
+                                        </p:tgtEl>
+                                        <p:attrNameLst>
+                                          <p:attrName>style.visibility</p:attrName>
+                                        </p:attrNameLst>
+                                      </p:cBhvr>
+                                      <p:to>
+                                        <p:strVal val="visible"/>
+                                      </p:to>
+                                    </p:set>
+                                  </p:childTnLst>
+                                </p:cTn>
+                              </p:par>
+                            </p:childTnLst>
+                          </p:cTn>
+                        </p:par>
+                      </p:childTnLst>
+                    </p:cTn>
+                  </p:par>
+                  <p:par>
+                    <p:cTn id="7" fill="hold">
+                      <p:stCondLst>
+                        <p:cond delay="indefinite"/>
+                      </p:stCondLst>
+                      <p:childTnLst>
+                        <p:par>
+                          <p:cTn id="8" fill="hold">
+                            <p:stCondLst>
+                              <p:cond delay="0"/>
+                            </p:stCondLst>
+                            <p:childTnLst>
+                              <p:par>
+                                <p:cTn id="9" presetID="1" presetClass="entr" presetSubtype="0" fill="hold" nodeType="clickEffect">
+                                  <p:stCondLst>
+                                    <p:cond delay="0"/>
+                                  </p:stCondLst>
+                                  <p:childTnLst>
+                                    <p:set>
+                                      <p:cBhvr>
+                                        <p:cTn id="10" dur="1" fill="hold">
+                                          <p:stCondLst>
+                                            <p:cond delay="0"/>
+                                          </p:stCondLst>
+                                        </p:cTn>
+                                        <p:tgtEl>
+                                          <p:spTgt spid="21"/>
+                                        </p:tgtEl>
+                                        <p:attrNameLst>
+                                          <p:attrName>style.visibility</p:attrName>
+                                        </p:attrNameLst>
+                                      </p:cBhvr>
+                                      <p:to>
+                                        <p:strVal val="visible"/>
+                                      </p:to>
+                                    </p:set>
+                                  </p:childTnLst>
+                                </p:cTn>
+                              </p:par>
+                            </p:childTnLst>
+                          </p:cTn>
+                        </p:par>
+                      </p:childTnLst>
+                    </p:cTn>
+                  </p:par>
+                  <p:par>
+                    <p:cTn id="11" fill="hold">
+                      <p:stCondLst>
+                        <p:cond delay="indefinite"/>
+                      </p:stCondLst>
+                      <p:childTnLst>
+                        <p:par>
+                          <p:cTn id="12" fill="hold">
+                            <p:stCondLst>
+                              <p:cond delay="0"/>
+                            </p:stCondLst>
+                            <p:childTnLst>
+                              <p:par>
+                                <p:cTn id="13" presetID="1" presetClass="entr" presetSubtype="0" fill="hold" grpId="0" nodeType="clickEffect">
+                                  <p:stCondLst>
+                                    <p:cond delay="0"/>
+                                  </p:stCondLst>
+                                  <p:childTnLst>
+                                    <p:set>
+                                      <p:cBhvr>
+                                        <p:cTn id="14" dur="1" fill="hold">
+                                          <p:stCondLst>
+                                            <p:cond delay="0"/>
+                                          </p:stCondLst>
+                                        </p:cTn>
+                                        <p:tgtEl>
+                                          <p:spTgt spid="8"/>
+                                        </p:tgtEl>
+                                        <p:attrNameLst>
+                                          <p:attrName>style.visibility</p:attrName>
+                                        </p:attrNameLst>
+                                      </p:cBhvr>
+                                      <p:to>
+                                        <p:strVal val="visible"/>
+                                      </p:to>
+                                    </p:set>
+                                  </p:childTnLst>
+                                </p:cTn>
+                              </p:par>
+                            </p:childTnLst>
+                          </p:cTn>
+                        </p:par>
+                      </p:childTnLst>
+                    </p:cTn>
+                  </p:par>
+                </p:childTnLst>
+              </p:cTn>
+              <p:prevCondLst>
+                <p:cond evt="onPrev" delay="0">
+                  <p:tgtEl>
+                    <p:sldTgt/>
+                  </p:tgtEl>
+                </p:cond>
+              </p:prevCondLst>
+              <p:nextCondLst>
+                <p:cond evt="onNext" delay="0">
+                  <p:tgtEl>
+                    <p:sldTgt/>
+                  </p:tgtEl>
+                </p:cond>
+              </p:nextCondLst>
+            </p:seq>
+          </p:childTnLst>
+        </p:cTn>
+      </p:par>
+    </p:tnLst>
+    <p:bldLst>
+      <p:bldP spid="8" grpId="0"/>
+    </p:bldLst>
+  </p:timing>
+</p:sld>
+</file>
+
+<file path=ppt/slides/slide8.xml><?xml version="1.0" encoding="utf-8"?>
+<p:sld xmlns:a="http://schemas.openxmlformats.org/drawingml/2006/main" xmlns:r="http://schemas.openxmlformats.org/officeDocument/2006/relationships" xmlns:p="http://schemas.openxmlformats.org/presentationml/2006/main">
+  <p:cSld>
+    <p:spTree>
+      <p:nvGrpSpPr>
+        <p:cNvPr id="1" name="">
+          <a:extLst>
+            <a:ext uri="{FF2B5EF4-FFF2-40B4-BE49-F238E27FC236}">
+              <a16:creationId xmlns:a16="http://schemas.microsoft.com/office/drawing/2014/main" id="{B68898F4-587D-0E8B-6E92-640E9CBA8942}"/>
+            </a:ext>
+          </a:extLst>
+        </p:cNvPr>
+        <p:cNvGrpSpPr/>
+        <p:nvPr/>
+      </p:nvGrpSpPr>
+      <p:grpSpPr>
+        <a:xfrm>
+          <a:off x="0" y="0"/>
+          <a:ext cx="0" cy="0"/>
+          <a:chOff x="0" y="0"/>
+          <a:chExt cx="0" cy="0"/>
+        </a:xfrm>
+      </p:grpSpPr>
+      <p:sp>
+        <p:nvSpPr>
+          <p:cNvPr id="4" name="Title 3">
+            <a:extLst>
+              <a:ext uri="{FF2B5EF4-FFF2-40B4-BE49-F238E27FC236}">
+                <a16:creationId xmlns:a16="http://schemas.microsoft.com/office/drawing/2014/main" id="{04E65641-BB1A-1F7F-B312-EB5D23308E53}"/>
+              </a:ext>
+            </a:extLst>
+          </p:cNvPr>
+          <p:cNvSpPr>
+            <a:spLocks noGrp="1"/>
+          </p:cNvSpPr>
+          <p:nvPr>
+            <p:ph type="title"/>
+          </p:nvPr>
+        </p:nvSpPr>
+        <p:spPr/>
+        <p:txBody>
+          <a:bodyPr>
+            <a:normAutofit fontScale="90000"/>
+          </a:bodyPr>
+          <a:lstStyle/>
+          <a:p>
+            <a:r>
+              <a:rPr lang="en-US" dirty="0">
+                <a:solidFill>
+                  <a:schemeClr val="bg1"/>
+                </a:solidFill>
+              </a:rPr>
+              <a:t>Electrostatic Force</a:t>
+            </a:r>
+            <a:endParaRPr lang="ro-RO" dirty="0">
+              <a:solidFill>
+                <a:schemeClr val="bg1"/>
+              </a:solidFill>
+            </a:endParaRPr>
+          </a:p>
+        </p:txBody>
+      </p:sp>
+      <p:pic>
+        <p:nvPicPr>
+          <p:cNvPr id="5" name="Picture 4">
+            <a:extLst>
+              <a:ext uri="{FF2B5EF4-FFF2-40B4-BE49-F238E27FC236}">
+                <a16:creationId xmlns:a16="http://schemas.microsoft.com/office/drawing/2014/main" id="{EB3DB38D-E599-6C7D-FDC8-6666584E765C}"/>
+              </a:ext>
+            </a:extLst>
+          </p:cNvPr>
+          <p:cNvPicPr>
+            <a:picLocks noChangeAspect="1"/>
+          </p:cNvPicPr>
+          <p:nvPr/>
+        </p:nvPicPr>
+        <p:blipFill>
+          <a:blip r:embed="rId2">
+            <a:clrChange>
+              <a:clrFrom>
+                <a:srgbClr val="000000"/>
+              </a:clrFrom>
+              <a:clrTo>
+                <a:srgbClr val="000000">
+                  <a:alpha val="0"/>
+                </a:srgbClr>
+              </a:clrTo>
+            </a:clrChange>
+            <a:extLst>
+              <a:ext uri="{28A0092B-C50C-407E-A947-70E740481C1C}">
+                <a14:useLocalDpi xmlns:a14="http://schemas.microsoft.com/office/drawing/2010/main" val="0"/>
+              </a:ext>
+            </a:extLst>
+          </a:blip>
+          <a:stretch>
+            <a:fillRect/>
+          </a:stretch>
+        </p:blipFill>
+        <p:spPr>
+          <a:xfrm>
+            <a:off x="10432471" y="6323329"/>
+            <a:ext cx="1492133" cy="496892"/>
           </a:xfrm>
           <a:prstGeom prst="rect">
             <a:avLst/>
@@ -10693,7 +17661,128 @@
     </p:spTree>
     <p:extLst>
       <p:ext uri="{BB962C8B-B14F-4D97-AF65-F5344CB8AC3E}">
-        <p14:creationId xmlns:p14="http://schemas.microsoft.com/office/powerpoint/2010/main" val="1578927454"/>
+        <p14:creationId xmlns:p14="http://schemas.microsoft.com/office/powerpoint/2010/main" val="2059483948"/>
+      </p:ext>
+    </p:extLst>
+  </p:cSld>
+  <p:clrMapOvr>
+    <a:masterClrMapping/>
+  </p:clrMapOvr>
+</p:sld>
+</file>
+
+<file path=ppt/slides/slide9.xml><?xml version="1.0" encoding="utf-8"?>
+<p:sld xmlns:a="http://schemas.openxmlformats.org/drawingml/2006/main" xmlns:r="http://schemas.openxmlformats.org/officeDocument/2006/relationships" xmlns:p="http://schemas.openxmlformats.org/presentationml/2006/main">
+  <p:cSld>
+    <p:spTree>
+      <p:nvGrpSpPr>
+        <p:cNvPr id="1" name="">
+          <a:extLst>
+            <a:ext uri="{FF2B5EF4-FFF2-40B4-BE49-F238E27FC236}">
+              <a16:creationId xmlns:a16="http://schemas.microsoft.com/office/drawing/2014/main" id="{FF278C06-0274-8E99-4E67-A149ADCA1047}"/>
+            </a:ext>
+          </a:extLst>
+        </p:cNvPr>
+        <p:cNvGrpSpPr/>
+        <p:nvPr/>
+      </p:nvGrpSpPr>
+      <p:grpSpPr>
+        <a:xfrm>
+          <a:off x="0" y="0"/>
+          <a:ext cx="0" cy="0"/>
+          <a:chOff x="0" y="0"/>
+          <a:chExt cx="0" cy="0"/>
+        </a:xfrm>
+      </p:grpSpPr>
+      <p:sp>
+        <p:nvSpPr>
+          <p:cNvPr id="4" name="Title 3">
+            <a:extLst>
+              <a:ext uri="{FF2B5EF4-FFF2-40B4-BE49-F238E27FC236}">
+                <a16:creationId xmlns:a16="http://schemas.microsoft.com/office/drawing/2014/main" id="{87C01121-74DA-2023-C9AC-3D2963BE6FD6}"/>
+              </a:ext>
+            </a:extLst>
+          </p:cNvPr>
+          <p:cNvSpPr>
+            <a:spLocks noGrp="1"/>
+          </p:cNvSpPr>
+          <p:nvPr>
+            <p:ph type="title"/>
+          </p:nvPr>
+        </p:nvSpPr>
+        <p:spPr/>
+        <p:txBody>
+          <a:bodyPr>
+            <a:normAutofit fontScale="90000"/>
+          </a:bodyPr>
+          <a:lstStyle/>
+          <a:p>
+            <a:r>
+              <a:rPr lang="en-US" dirty="0">
+                <a:solidFill>
+                  <a:schemeClr val="bg1"/>
+                </a:solidFill>
+              </a:rPr>
+              <a:t>Columb Repulsion</a:t>
+            </a:r>
+            <a:endParaRPr lang="ro-RO" dirty="0">
+              <a:solidFill>
+                <a:schemeClr val="bg1"/>
+              </a:solidFill>
+            </a:endParaRPr>
+          </a:p>
+        </p:txBody>
+      </p:sp>
+      <p:pic>
+        <p:nvPicPr>
+          <p:cNvPr id="5" name="Picture 4">
+            <a:extLst>
+              <a:ext uri="{FF2B5EF4-FFF2-40B4-BE49-F238E27FC236}">
+                <a16:creationId xmlns:a16="http://schemas.microsoft.com/office/drawing/2014/main" id="{48742487-A373-B1A3-1774-58E1B3A5C585}"/>
+              </a:ext>
+            </a:extLst>
+          </p:cNvPr>
+          <p:cNvPicPr>
+            <a:picLocks noChangeAspect="1"/>
+          </p:cNvPicPr>
+          <p:nvPr/>
+        </p:nvPicPr>
+        <p:blipFill>
+          <a:blip r:embed="rId2">
+            <a:clrChange>
+              <a:clrFrom>
+                <a:srgbClr val="000000"/>
+              </a:clrFrom>
+              <a:clrTo>
+                <a:srgbClr val="000000">
+                  <a:alpha val="0"/>
+                </a:srgbClr>
+              </a:clrTo>
+            </a:clrChange>
+            <a:extLst>
+              <a:ext uri="{28A0092B-C50C-407E-A947-70E740481C1C}">
+                <a14:useLocalDpi xmlns:a14="http://schemas.microsoft.com/office/drawing/2010/main" val="0"/>
+              </a:ext>
+            </a:extLst>
+          </a:blip>
+          <a:stretch>
+            <a:fillRect/>
+          </a:stretch>
+        </p:blipFill>
+        <p:spPr>
+          <a:xfrm>
+            <a:off x="10432471" y="6323329"/>
+            <a:ext cx="1492133" cy="496892"/>
+          </a:xfrm>
+          <a:prstGeom prst="rect">
+            <a:avLst/>
+          </a:prstGeom>
+        </p:spPr>
+      </p:pic>
+    </p:spTree>
+    <p:extLst>
+      <p:ext uri="{BB962C8B-B14F-4D97-AF65-F5344CB8AC3E}">
+        <p14:creationId xmlns:p14="http://schemas.microsoft.com/office/powerpoint/2010/main" val="1236063310"/>
       </p:ext>
     </p:extLst>
   </p:cSld>
@@ -10995,39 +18084,39 @@
         <a:sysClr val="window" lastClr="FFFFFF"/>
       </a:lt1>
       <a:dk2>
-        <a:srgbClr val="44546A"/>
+        <a:srgbClr val="0E2841"/>
       </a:dk2>
       <a:lt2>
-        <a:srgbClr val="E7E6E6"/>
+        <a:srgbClr val="E8E8E8"/>
       </a:lt2>
       <a:accent1>
-        <a:srgbClr val="4472C4"/>
+        <a:srgbClr val="156082"/>
       </a:accent1>
       <a:accent2>
-        <a:srgbClr val="ED7D31"/>
+        <a:srgbClr val="E97132"/>
       </a:accent2>
       <a:accent3>
-        <a:srgbClr val="A5A5A5"/>
+        <a:srgbClr val="196B24"/>
       </a:accent3>
       <a:accent4>
-        <a:srgbClr val="FFC000"/>
+        <a:srgbClr val="0F9ED5"/>
       </a:accent4>
       <a:accent5>
-        <a:srgbClr val="5B9BD5"/>
+        <a:srgbClr val="A02B93"/>
       </a:accent5>
       <a:accent6>
-        <a:srgbClr val="70AD47"/>
+        <a:srgbClr val="4EA72E"/>
       </a:accent6>
       <a:hlink>
-        <a:srgbClr val="0563C1"/>
+        <a:srgbClr val="467886"/>
       </a:hlink>
       <a:folHlink>
-        <a:srgbClr val="954F72"/>
+        <a:srgbClr val="96607D"/>
       </a:folHlink>
     </a:clrScheme>
     <a:fontScheme name="Office">
       <a:majorFont>
-        <a:latin typeface="Calibri Light" panose="020F0302020204030204"/>
+        <a:latin typeface="Aptos Display" panose="02110004020202020204"/>
         <a:ea typeface=""/>
         <a:cs typeface=""/>
         <a:font script="Jpan" typeface="游ゴシック Light"/>
@@ -11079,7 +18168,7 @@
         <a:font script="Tfng" typeface="Ebrima"/>
       </a:majorFont>
       <a:minorFont>
-        <a:latin typeface="Calibri" panose="020F0502020204030204"/>
+        <a:latin typeface="Aptos" panose="02110004020202020204"/>
         <a:ea typeface=""/>
         <a:cs typeface=""/>
         <a:font script="Jpan" typeface="游ゴシック"/>
@@ -11190,13 +18279,6 @@
         </a:gradFill>
       </a:fillStyleLst>
       <a:lnStyleLst>
-        <a:ln w="6350" cap="flat" cmpd="sng" algn="ctr">
-          <a:solidFill>
-            <a:schemeClr val="phClr"/>
-          </a:solidFill>
-          <a:prstDash val="solid"/>
-          <a:miter lim="800000"/>
-        </a:ln>
         <a:ln w="12700" cap="flat" cmpd="sng" algn="ctr">
           <a:solidFill>
             <a:schemeClr val="phClr"/>
@@ -11205,6 +18287,13 @@
           <a:miter lim="800000"/>
         </a:ln>
         <a:ln w="19050" cap="flat" cmpd="sng" algn="ctr">
+          <a:solidFill>
+            <a:schemeClr val="phClr"/>
+          </a:solidFill>
+          <a:prstDash val="solid"/>
+          <a:miter lim="800000"/>
+        </a:ln>
+        <a:ln w="25400" cap="flat" cmpd="sng" algn="ctr">
           <a:solidFill>
             <a:schemeClr val="phClr"/>
           </a:solidFill>
@@ -11269,11 +18358,31 @@
       </a:bgFillStyleLst>
     </a:fmtScheme>
   </a:themeElements>
-  <a:objectDefaults/>
+  <a:objectDefaults>
+    <a:lnDef>
+      <a:spPr/>
+      <a:bodyPr/>
+      <a:lstStyle/>
+      <a:style>
+        <a:lnRef idx="2">
+          <a:schemeClr val="accent1"/>
+        </a:lnRef>
+        <a:fillRef idx="0">
+          <a:schemeClr val="accent1"/>
+        </a:fillRef>
+        <a:effectRef idx="1">
+          <a:schemeClr val="accent1"/>
+        </a:effectRef>
+        <a:fontRef idx="minor">
+          <a:schemeClr val="tx1"/>
+        </a:fontRef>
+      </a:style>
+    </a:lnDef>
+  </a:objectDefaults>
   <a:extraClrSchemeLst/>
   <a:extLst>
     <a:ext uri="{05A4C25C-085E-4340-85A3-A5531E510DB2}">
-      <thm15:themeFamily xmlns:thm15="http://schemas.microsoft.com/office/thememl/2012/main" name="Office Theme" id="{62F939B6-93AF-4DB8-9C6B-D6C7DFDC589F}" vid="{4A3C46E8-61CC-4603-A589-7422A47A8E4A}"/>
+      <thm15:themeFamily xmlns:thm15="http://schemas.microsoft.com/office/thememl/2012/main" name="Office Theme" id="{2E142A2C-CD16-42D6-873A-C26D2A0506FA}" vid="{1BDDFF52-6CD6-40A5-AB3C-68EB2F1E4D0A}"/>
     </a:ext>
   </a:extLst>
 </a:theme>

--- a/Tema 1/paper/Tema1.pptx
+++ b/Tema 1/paper/Tema1.pptx
@@ -353,7 +353,7 @@
     </p:spTree>
     <p:extLst>
       <p:ext uri="{BB962C8B-B14F-4D97-AF65-F5344CB8AC3E}">
-        <p14:creationId xmlns:p14="http://schemas.microsoft.com/office/powerpoint/2010/main" val="24838625"/>
+        <p14:creationId xmlns:p14="http://schemas.microsoft.com/office/powerpoint/2010/main" val="4096425265"/>
       </p:ext>
     </p:extLst>
   </p:cSld>
@@ -9695,7 +9695,7 @@
         </p:blipFill>
         <p:spPr>
           <a:xfrm>
-            <a:off x="10432471" y="6323329"/>
+            <a:off x="10536865" y="6354373"/>
             <a:ext cx="1492133" cy="496892"/>
           </a:xfrm>
           <a:prstGeom prst="rect">
@@ -9720,7 +9720,7 @@
             <p:spPr>
               <a:xfrm>
                 <a:off x="1318871" y="5202500"/>
-                <a:ext cx="2710422" cy="526683"/>
+                <a:ext cx="2922018" cy="526683"/>
               </a:xfrm>
               <a:prstGeom prst="rect">
                 <a:avLst/>
@@ -9790,6 +9790,27 @@
                           <a:latin typeface="Cambria Math" panose="02040503050406030204" pitchFamily="18" charset="0"/>
                         </a:rPr>
                         <m:t>T</m:t>
+                      </m:r>
+                      <m:r>
+                        <a:rPr lang="en-US" b="0" i="1" smtClean="0">
+                          <a:latin typeface="Cambria Math" panose="02040503050406030204" pitchFamily="18" charset="0"/>
+                        </a:rPr>
+                        <m:t>(</m:t>
+                      </m:r>
+                      <m:r>
+                        <m:rPr>
+                          <m:sty m:val="p"/>
+                        </m:rPr>
+                        <a:rPr lang="en-US" b="0" i="1" smtClean="0">
+                          <a:latin typeface="Cambria Math" panose="02040503050406030204" pitchFamily="18" charset="0"/>
+                        </a:rPr>
+                        <m:t>s</m:t>
+                      </m:r>
+                      <m:r>
+                        <a:rPr lang="en-US" b="0" i="1" smtClean="0">
+                          <a:latin typeface="Cambria Math" panose="02040503050406030204" pitchFamily="18" charset="0"/>
+                        </a:rPr>
+                        <m:t>)</m:t>
                       </m:r>
                       <m:acc>
                         <m:accPr>
@@ -10010,7 +10031,7 @@
             <p:spPr>
               <a:xfrm>
                 <a:off x="1318871" y="5202500"/>
-                <a:ext cx="2710422" cy="526683"/>
+                <a:ext cx="2922018" cy="526683"/>
               </a:xfrm>
               <a:prstGeom prst="rect">
                 <a:avLst/>
@@ -10018,7 +10039,7 @@
               <a:blipFill>
                 <a:blip r:embed="rId3"/>
                 <a:stretch>
-                  <a:fillRect t="-2326" b="-13953"/>
+                  <a:fillRect l="-1293" t="-2326" r="-862" b="-13953"/>
                 </a:stretch>
               </a:blipFill>
             </p:spPr>
@@ -10052,7 +10073,7 @@
         <p:spPr>
           <a:xfrm>
             <a:off x="5316279" y="4614530"/>
-            <a:ext cx="4805916" cy="1957245"/>
+            <a:ext cx="5220586" cy="1988289"/>
           </a:xfrm>
           <a:prstGeom prst="roundRect">
             <a:avLst/>
@@ -10130,8 +10151,8 @@
         </p:nvSpPr>
         <p:spPr>
           <a:xfrm>
-            <a:off x="5452729" y="5202500"/>
-            <a:ext cx="2213345" cy="307777"/>
+            <a:off x="5452729" y="5363614"/>
+            <a:ext cx="1671400" cy="307777"/>
           </a:xfrm>
           <a:prstGeom prst="rect">
             <a:avLst/>
@@ -10165,8 +10186,8 @@
         </p:nvSpPr>
         <p:spPr>
           <a:xfrm>
-            <a:off x="5452729" y="5790470"/>
-            <a:ext cx="2213345" cy="307777"/>
+            <a:off x="5452729" y="6015552"/>
+            <a:ext cx="1394638" cy="307777"/>
           </a:xfrm>
           <a:prstGeom prst="rect">
             <a:avLst/>
@@ -10216,6 +10237,1218 @@
           </a:prstGeom>
         </p:spPr>
       </p:pic>
+      <mc:AlternateContent xmlns:mc="http://schemas.openxmlformats.org/markup-compatibility/2006">
+        <mc:Choice xmlns:a14="http://schemas.microsoft.com/office/drawing/2010/main" Requires="a14">
+          <p:sp>
+            <p:nvSpPr>
+              <p:cNvPr id="12" name="TextBox 11">
+                <a:extLst>
+                  <a:ext uri="{FF2B5EF4-FFF2-40B4-BE49-F238E27FC236}">
+                    <a16:creationId xmlns:a16="http://schemas.microsoft.com/office/drawing/2014/main" id="{C6BAD141-779B-579E-06CE-1D769AEB18DD}"/>
+                  </a:ext>
+                </a:extLst>
+              </p:cNvPr>
+              <p:cNvSpPr txBox="1"/>
+              <p:nvPr/>
+            </p:nvSpPr>
+            <p:spPr>
+              <a:xfrm>
+                <a:off x="7124129" y="5202500"/>
+                <a:ext cx="3308342" cy="637162"/>
+              </a:xfrm>
+              <a:prstGeom prst="rect">
+                <a:avLst/>
+              </a:prstGeom>
+              <a:noFill/>
+            </p:spPr>
+            <p:txBody>
+              <a:bodyPr wrap="none" lIns="0" tIns="0" rIns="0" bIns="0" rtlCol="0">
+                <a:spAutoFit/>
+              </a:bodyPr>
+              <a:lstStyle/>
+              <a:p>
+                <a14:m>
+                  <m:oMathPara xmlns:m="http://schemas.openxmlformats.org/officeDocument/2006/math">
+                    <m:oMathParaPr>
+                      <m:jc m:val="centerGroup"/>
+                    </m:oMathParaPr>
+                    <m:oMath xmlns:m="http://schemas.openxmlformats.org/officeDocument/2006/math">
+                      <m:nary>
+                        <m:naryPr>
+                          <m:chr m:val="∑"/>
+                          <m:ctrlPr>
+                            <a:rPr lang="en-US" sz="1400" i="1" smtClean="0">
+                              <a:latin typeface="Cambria Math" panose="02040503050406030204" pitchFamily="18" charset="0"/>
+                            </a:rPr>
+                          </m:ctrlPr>
+                        </m:naryPr>
+                        <m:sub>
+                          <m:r>
+                            <m:rPr>
+                              <m:sty m:val="p"/>
+                              <m:brk m:alnAt="23"/>
+                            </m:rPr>
+                            <a:rPr lang="en-US" sz="1400" b="0" i="1" smtClean="0">
+                              <a:latin typeface="Cambria Math" panose="02040503050406030204" pitchFamily="18" charset="0"/>
+                            </a:rPr>
+                            <m:t>j</m:t>
+                          </m:r>
+                          <m:r>
+                            <a:rPr lang="en-US" sz="1400" b="0" i="1" smtClean="0">
+                              <a:latin typeface="Cambria Math" panose="02040503050406030204" pitchFamily="18" charset="0"/>
+                            </a:rPr>
+                            <m:t>=1</m:t>
+                          </m:r>
+                        </m:sub>
+                        <m:sup>
+                          <m:r>
+                            <m:rPr>
+                              <m:sty m:val="p"/>
+                            </m:rPr>
+                            <a:rPr lang="en-US" sz="1400" b="0" i="1" smtClean="0">
+                              <a:latin typeface="Cambria Math" panose="02040503050406030204" pitchFamily="18" charset="0"/>
+                            </a:rPr>
+                            <m:t>N</m:t>
+                          </m:r>
+                        </m:sup>
+                        <m:e>
+                          <m:sSub>
+                            <m:sSubPr>
+                              <m:ctrlPr>
+                                <a:rPr lang="en-US" sz="1400" i="1" smtClean="0">
+                                  <a:latin typeface="Cambria Math" panose="02040503050406030204" pitchFamily="18" charset="0"/>
+                                </a:rPr>
+                              </m:ctrlPr>
+                            </m:sSubPr>
+                            <m:e>
+                              <m:r>
+                                <m:rPr>
+                                  <m:sty m:val="p"/>
+                                </m:rPr>
+                                <a:rPr lang="en-US" sz="1400" b="0" i="1" smtClean="0">
+                                  <a:latin typeface="Cambria Math" panose="02040503050406030204" pitchFamily="18" charset="0"/>
+                                </a:rPr>
+                                <m:t>T</m:t>
+                              </m:r>
+                            </m:e>
+                            <m:sub>
+                              <m:r>
+                                <m:rPr>
+                                  <m:sty m:val="p"/>
+                                </m:rPr>
+                                <a:rPr lang="en-US" sz="1400" b="0" i="1" smtClean="0">
+                                  <a:latin typeface="Cambria Math" panose="02040503050406030204" pitchFamily="18" charset="0"/>
+                                </a:rPr>
+                                <m:t>j</m:t>
+                              </m:r>
+                            </m:sub>
+                          </m:sSub>
+                          <m:r>
+                            <a:rPr lang="en-US" sz="1400" b="0" i="1" smtClean="0">
+                              <a:latin typeface="Cambria Math" panose="02040503050406030204" pitchFamily="18" charset="0"/>
+                            </a:rPr>
+                            <m:t>(0)</m:t>
+                          </m:r>
+                          <m:acc>
+                            <m:accPr>
+                              <m:chr m:val="⃗"/>
+                              <m:ctrlPr>
+                                <a:rPr lang="en-US" sz="1400" b="0" i="1" smtClean="0">
+                                  <a:latin typeface="Cambria Math" panose="02040503050406030204" pitchFamily="18" charset="0"/>
+                                </a:rPr>
+                              </m:ctrlPr>
+                            </m:accPr>
+                            <m:e>
+                              <m:sSub>
+                                <m:sSubPr>
+                                  <m:ctrlPr>
+                                    <a:rPr lang="en-US" sz="1400" b="0" i="1" smtClean="0">
+                                      <a:latin typeface="Cambria Math" panose="02040503050406030204" pitchFamily="18" charset="0"/>
+                                    </a:rPr>
+                                  </m:ctrlPr>
+                                </m:sSubPr>
+                                <m:e>
+                                  <m:r>
+                                    <a:rPr lang="en-US" sz="1400" b="0" i="1" smtClean="0">
+                                      <a:latin typeface="Cambria Math" panose="02040503050406030204" pitchFamily="18" charset="0"/>
+                                    </a:rPr>
+                                    <m:t>1</m:t>
+                                  </m:r>
+                                </m:e>
+                                <m:sub>
+                                  <m:r>
+                                    <m:rPr>
+                                      <m:sty m:val="p"/>
+                                    </m:rPr>
+                                    <a:rPr lang="en-US" sz="1400" b="0" i="1" smtClean="0">
+                                      <a:latin typeface="Cambria Math" panose="02040503050406030204" pitchFamily="18" charset="0"/>
+                                    </a:rPr>
+                                    <m:t>tj</m:t>
+                                  </m:r>
+                                </m:sub>
+                              </m:sSub>
+                            </m:e>
+                          </m:acc>
+                          <m:r>
+                            <m:rPr>
+                              <m:brk m:alnAt="23"/>
+                            </m:rPr>
+                            <a:rPr lang="en-US" sz="1400" b="0" i="1" smtClean="0">
+                              <a:latin typeface="Cambria Math" panose="02040503050406030204" pitchFamily="18" charset="0"/>
+                            </a:rPr>
+                            <m:t>(0)+(</m:t>
+                          </m:r>
+                          <m:sSub>
+                            <m:sSubPr>
+                              <m:ctrlPr>
+                                <a:rPr lang="en-US" sz="1400" b="0" i="1" smtClean="0">
+                                  <a:latin typeface="Cambria Math" panose="02040503050406030204" pitchFamily="18" charset="0"/>
+                                </a:rPr>
+                              </m:ctrlPr>
+                            </m:sSubPr>
+                            <m:e>
+                              <m:r>
+                                <m:rPr>
+                                  <m:sty m:val="p"/>
+                                </m:rPr>
+                                <a:rPr lang="en-US" sz="1400" b="0" i="1" smtClean="0">
+                                  <a:latin typeface="Cambria Math" panose="02040503050406030204" pitchFamily="18" charset="0"/>
+                                </a:rPr>
+                                <m:t>Q</m:t>
+                              </m:r>
+                            </m:e>
+                            <m:sub>
+                              <m:r>
+                                <m:rPr>
+                                  <m:sty m:val="p"/>
+                                </m:rPr>
+                                <a:rPr lang="en-US" sz="1400" b="0" i="1" smtClean="0">
+                                  <a:latin typeface="Cambria Math" panose="02040503050406030204" pitchFamily="18" charset="0"/>
+                                </a:rPr>
+                                <m:t>s</m:t>
+                              </m:r>
+                            </m:sub>
+                          </m:sSub>
+                          <m:r>
+                            <m:rPr>
+                              <m:sty m:val="p"/>
+                              <m:brk m:alnAt="23"/>
+                            </m:rPr>
+                            <a:rPr lang="en-US" sz="1400" b="0" i="1" smtClean="0">
+                              <a:latin typeface="Cambria Math" panose="02040503050406030204" pitchFamily="18" charset="0"/>
+                            </a:rPr>
+                            <m:t>E</m:t>
+                          </m:r>
+                          <m:r>
+                            <a:rPr lang="en-US" sz="1400" b="0" i="1" smtClean="0">
+                              <a:latin typeface="Cambria Math" panose="02040503050406030204" pitchFamily="18" charset="0"/>
+                            </a:rPr>
+                            <m:t>-</m:t>
+                          </m:r>
+                          <m:r>
+                            <m:rPr>
+                              <m:sty m:val="p"/>
+                            </m:rPr>
+                            <a:rPr lang="en-US" sz="1400" b="0" i="1" smtClean="0">
+                              <a:latin typeface="Cambria Math" panose="02040503050406030204" pitchFamily="18" charset="0"/>
+                            </a:rPr>
+                            <m:t>mg</m:t>
+                          </m:r>
+                          <m:r>
+                            <a:rPr lang="en-US" sz="1400" b="0" i="1" smtClean="0">
+                              <a:latin typeface="Cambria Math" panose="02040503050406030204" pitchFamily="18" charset="0"/>
+                            </a:rPr>
+                            <m:t>)</m:t>
+                          </m:r>
+                          <m:acc>
+                            <m:accPr>
+                              <m:chr m:val="⃗"/>
+                              <m:ctrlPr>
+                                <a:rPr lang="en-US" sz="1400" b="0" i="1" smtClean="0">
+                                  <a:latin typeface="Cambria Math" panose="02040503050406030204" pitchFamily="18" charset="0"/>
+                                </a:rPr>
+                              </m:ctrlPr>
+                            </m:accPr>
+                            <m:e>
+                              <m:sSub>
+                                <m:sSubPr>
+                                  <m:ctrlPr>
+                                    <a:rPr lang="en-US" sz="1400" b="0" i="1" smtClean="0">
+                                      <a:latin typeface="Cambria Math" panose="02040503050406030204" pitchFamily="18" charset="0"/>
+                                    </a:rPr>
+                                  </m:ctrlPr>
+                                </m:sSubPr>
+                                <m:e>
+                                  <m:r>
+                                    <a:rPr lang="en-US" sz="1400" b="0" i="1" smtClean="0">
+                                      <a:latin typeface="Cambria Math" panose="02040503050406030204" pitchFamily="18" charset="0"/>
+                                    </a:rPr>
+                                    <m:t>1</m:t>
+                                  </m:r>
+                                </m:e>
+                                <m:sub>
+                                  <m:r>
+                                    <m:rPr>
+                                      <m:sty m:val="p"/>
+                                    </m:rPr>
+                                    <a:rPr lang="en-US" sz="1400" b="0" i="1" smtClean="0">
+                                      <a:latin typeface="Cambria Math" panose="02040503050406030204" pitchFamily="18" charset="0"/>
+                                    </a:rPr>
+                                    <m:t>z</m:t>
+                                  </m:r>
+                                </m:sub>
+                              </m:sSub>
+                            </m:e>
+                          </m:acc>
+                          <m:r>
+                            <m:rPr>
+                              <m:brk m:alnAt="23"/>
+                            </m:rPr>
+                            <a:rPr lang="en-US" sz="1400" b="0" i="1" smtClean="0">
+                              <a:latin typeface="Cambria Math" panose="02040503050406030204" pitchFamily="18" charset="0"/>
+                            </a:rPr>
+                            <m:t>+</m:t>
+                          </m:r>
+                          <m:acc>
+                            <m:accPr>
+                              <m:chr m:val="⃗"/>
+                              <m:ctrlPr>
+                                <a:rPr lang="en-US" sz="1400" b="0" i="1" smtClean="0">
+                                  <a:latin typeface="Cambria Math" panose="02040503050406030204" pitchFamily="18" charset="0"/>
+                                </a:rPr>
+                              </m:ctrlPr>
+                            </m:accPr>
+                            <m:e>
+                              <m:sSub>
+                                <m:sSubPr>
+                                  <m:ctrlPr>
+                                    <a:rPr lang="en-US" sz="1400" b="0" i="1" smtClean="0">
+                                      <a:latin typeface="Cambria Math" panose="02040503050406030204" pitchFamily="18" charset="0"/>
+                                    </a:rPr>
+                                  </m:ctrlPr>
+                                </m:sSubPr>
+                                <m:e>
+                                  <m:r>
+                                    <m:rPr>
+                                      <m:sty m:val="p"/>
+                                    </m:rPr>
+                                    <a:rPr lang="en-US" sz="1400" b="0" i="1" smtClean="0">
+                                      <a:latin typeface="Cambria Math" panose="02040503050406030204" pitchFamily="18" charset="0"/>
+                                    </a:rPr>
+                                    <m:t>F</m:t>
+                                  </m:r>
+                                </m:e>
+                                <m:sub>
+                                  <m:r>
+                                    <m:rPr>
+                                      <m:sty m:val="p"/>
+                                    </m:rPr>
+                                    <a:rPr lang="en-US" sz="1400" b="0" i="1" smtClean="0">
+                                      <a:latin typeface="Cambria Math" panose="02040503050406030204" pitchFamily="18" charset="0"/>
+                                    </a:rPr>
+                                    <m:t>v</m:t>
+                                  </m:r>
+                                  <m:r>
+                                    <a:rPr lang="en-US" sz="1400" b="0" i="1" smtClean="0">
+                                      <a:latin typeface="Cambria Math" panose="02040503050406030204" pitchFamily="18" charset="0"/>
+                                    </a:rPr>
+                                    <m:t>,</m:t>
+                                  </m:r>
+                                  <m:r>
+                                    <m:rPr>
+                                      <m:sty m:val="p"/>
+                                    </m:rPr>
+                                    <a:rPr lang="en-US" sz="1400" b="0" i="1" smtClean="0">
+                                      <a:latin typeface="Cambria Math" panose="02040503050406030204" pitchFamily="18" charset="0"/>
+                                    </a:rPr>
+                                    <m:t>s</m:t>
+                                  </m:r>
+                                </m:sub>
+                              </m:sSub>
+                            </m:e>
+                          </m:acc>
+                          <m:r>
+                            <m:rPr>
+                              <m:brk m:alnAt="23"/>
+                            </m:rPr>
+                            <a:rPr lang="en-US" sz="1400" b="0" i="1" smtClean="0">
+                              <a:latin typeface="Cambria Math" panose="02040503050406030204" pitchFamily="18" charset="0"/>
+                            </a:rPr>
+                            <m:t>=</m:t>
+                          </m:r>
+                          <m:r>
+                            <m:rPr>
+                              <m:sty m:val="p"/>
+                            </m:rPr>
+                            <a:rPr lang="en-US" sz="1400" b="0" i="1" smtClean="0">
+                              <a:latin typeface="Cambria Math" panose="02040503050406030204" pitchFamily="18" charset="0"/>
+                            </a:rPr>
+                            <m:t>m</m:t>
+                          </m:r>
+                          <m:acc>
+                            <m:accPr>
+                              <m:chr m:val="̇"/>
+                              <m:ctrlPr>
+                                <a:rPr lang="en-US" sz="1400" b="0" i="1" smtClean="0">
+                                  <a:latin typeface="Cambria Math" panose="02040503050406030204" pitchFamily="18" charset="0"/>
+                                </a:rPr>
+                              </m:ctrlPr>
+                            </m:accPr>
+                            <m:e>
+                              <m:acc>
+                                <m:accPr>
+                                  <m:chr m:val="⃗"/>
+                                  <m:ctrlPr>
+                                    <a:rPr lang="en-US" sz="1400" b="0" i="1" smtClean="0">
+                                      <a:latin typeface="Cambria Math" panose="02040503050406030204" pitchFamily="18" charset="0"/>
+                                    </a:rPr>
+                                  </m:ctrlPr>
+                                </m:accPr>
+                                <m:e>
+                                  <m:sSub>
+                                    <m:sSubPr>
+                                      <m:ctrlPr>
+                                        <a:rPr lang="en-US" sz="1400" b="0" i="1" smtClean="0">
+                                          <a:latin typeface="Cambria Math" panose="02040503050406030204" pitchFamily="18" charset="0"/>
+                                        </a:rPr>
+                                      </m:ctrlPr>
+                                    </m:sSubPr>
+                                    <m:e>
+                                      <m:r>
+                                        <m:rPr>
+                                          <m:sty m:val="p"/>
+                                        </m:rPr>
+                                        <a:rPr lang="en-US" sz="1400" b="0" i="1" smtClean="0">
+                                          <a:latin typeface="Cambria Math" panose="02040503050406030204" pitchFamily="18" charset="0"/>
+                                        </a:rPr>
+                                        <m:t>v</m:t>
+                                      </m:r>
+                                    </m:e>
+                                    <m:sub>
+                                      <m:r>
+                                        <m:rPr>
+                                          <m:sty m:val="p"/>
+                                        </m:rPr>
+                                        <a:rPr lang="en-US" sz="1400" b="0" i="1" smtClean="0">
+                                          <a:latin typeface="Cambria Math" panose="02040503050406030204" pitchFamily="18" charset="0"/>
+                                        </a:rPr>
+                                        <m:t>s</m:t>
+                                      </m:r>
+                                    </m:sub>
+                                  </m:sSub>
+                                </m:e>
+                              </m:acc>
+                            </m:e>
+                          </m:acc>
+                        </m:e>
+                      </m:nary>
+                    </m:oMath>
+                  </m:oMathPara>
+                </a14:m>
+                <a:endParaRPr lang="en-US" sz="1400" dirty="0"/>
+              </a:p>
+            </p:txBody>
+          </p:sp>
+        </mc:Choice>
+        <mc:Fallback>
+          <p:sp>
+            <p:nvSpPr>
+              <p:cNvPr id="12" name="TextBox 11">
+                <a:extLst>
+                  <a:ext uri="{FF2B5EF4-FFF2-40B4-BE49-F238E27FC236}">
+                    <a16:creationId xmlns:a16="http://schemas.microsoft.com/office/drawing/2014/main" id="{C6BAD141-779B-579E-06CE-1D769AEB18DD}"/>
+                  </a:ext>
+                </a:extLst>
+              </p:cNvPr>
+              <p:cNvSpPr txBox="1">
+                <a:spLocks noRot="1" noChangeAspect="1" noMove="1" noResize="1" noEditPoints="1" noAdjustHandles="1" noChangeArrowheads="1" noChangeShapeType="1" noTextEdit="1"/>
+              </p:cNvSpPr>
+              <p:nvPr/>
+            </p:nvSpPr>
+            <p:spPr>
+              <a:xfrm>
+                <a:off x="7124129" y="5202500"/>
+                <a:ext cx="3308342" cy="637162"/>
+              </a:xfrm>
+              <a:prstGeom prst="rect">
+                <a:avLst/>
+              </a:prstGeom>
+              <a:blipFill>
+                <a:blip r:embed="rId5"/>
+                <a:stretch>
+                  <a:fillRect l="-19923" t="-105882" b="-166667"/>
+                </a:stretch>
+              </a:blipFill>
+            </p:spPr>
+            <p:txBody>
+              <a:bodyPr/>
+              <a:lstStyle/>
+              <a:p>
+                <a:r>
+                  <a:rPr lang="en-US">
+                    <a:noFill/>
+                  </a:rPr>
+                  <a:t> </a:t>
+                </a:r>
+              </a:p>
+            </p:txBody>
+          </p:sp>
+        </mc:Fallback>
+      </mc:AlternateContent>
+      <mc:AlternateContent xmlns:mc="http://schemas.openxmlformats.org/markup-compatibility/2006">
+        <mc:Choice xmlns:a14="http://schemas.microsoft.com/office/drawing/2010/main" Requires="a14">
+          <p:sp>
+            <p:nvSpPr>
+              <p:cNvPr id="13" name="TextBox 12">
+                <a:extLst>
+                  <a:ext uri="{FF2B5EF4-FFF2-40B4-BE49-F238E27FC236}">
+                    <a16:creationId xmlns:a16="http://schemas.microsoft.com/office/drawing/2014/main" id="{279E26C5-8FA7-EBE0-9054-B607523ADE5C}"/>
+                  </a:ext>
+                </a:extLst>
+              </p:cNvPr>
+              <p:cNvSpPr txBox="1"/>
+              <p:nvPr/>
+            </p:nvSpPr>
+            <p:spPr>
+              <a:xfrm>
+                <a:off x="7124129" y="6013861"/>
+                <a:ext cx="2097113" cy="215444"/>
+              </a:xfrm>
+              <a:prstGeom prst="rect">
+                <a:avLst/>
+              </a:prstGeom>
+              <a:noFill/>
+            </p:spPr>
+            <p:txBody>
+              <a:bodyPr wrap="none" lIns="0" tIns="0" rIns="0" bIns="0" rtlCol="0">
+                <a:spAutoFit/>
+              </a:bodyPr>
+              <a:lstStyle/>
+              <a:p>
+                <a14:m>
+                  <m:oMathPara xmlns:m="http://schemas.openxmlformats.org/officeDocument/2006/math">
+                    <m:oMathParaPr>
+                      <m:jc m:val="centerGroup"/>
+                    </m:oMathParaPr>
+                    <m:oMath xmlns:m="http://schemas.openxmlformats.org/officeDocument/2006/math">
+                      <m:r>
+                        <m:rPr>
+                          <m:sty m:val="p"/>
+                        </m:rPr>
+                        <a:rPr lang="en-US" sz="1400" b="0" i="1" smtClean="0">
+                          <a:latin typeface="Cambria Math" panose="02040503050406030204" pitchFamily="18" charset="0"/>
+                        </a:rPr>
+                        <m:t>T</m:t>
+                      </m:r>
+                      <m:r>
+                        <a:rPr lang="en-US" sz="1400" b="0" i="1" smtClean="0">
+                          <a:latin typeface="Cambria Math" panose="02040503050406030204" pitchFamily="18" charset="0"/>
+                        </a:rPr>
+                        <m:t>(</m:t>
+                      </m:r>
+                      <m:r>
+                        <m:rPr>
+                          <m:sty m:val="p"/>
+                        </m:rPr>
+                        <a:rPr lang="en-US" sz="1400" b="0" i="1" smtClean="0">
+                          <a:latin typeface="Cambria Math" panose="02040503050406030204" pitchFamily="18" charset="0"/>
+                        </a:rPr>
+                        <m:t>L</m:t>
+                      </m:r>
+                      <m:r>
+                        <a:rPr lang="en-US" sz="1400" b="0" i="1" smtClean="0">
+                          <a:latin typeface="Cambria Math" panose="02040503050406030204" pitchFamily="18" charset="0"/>
+                        </a:rPr>
+                        <m:t>)=0 (</m:t>
+                      </m:r>
+                      <m:r>
+                        <m:rPr>
+                          <m:sty m:val="p"/>
+                        </m:rPr>
+                        <a:rPr lang="en-US" sz="1400" b="0" i="1" smtClean="0">
+                          <a:latin typeface="Cambria Math" panose="02040503050406030204" pitchFamily="18" charset="0"/>
+                        </a:rPr>
+                        <m:t>uniform</m:t>
+                      </m:r>
+                      <m:r>
+                        <a:rPr lang="en-US" sz="1400" b="0" i="1" smtClean="0">
+                          <a:latin typeface="Cambria Math" panose="02040503050406030204" pitchFamily="18" charset="0"/>
+                        </a:rPr>
+                        <m:t> </m:t>
+                      </m:r>
+                      <m:r>
+                        <m:rPr>
+                          <m:sty m:val="p"/>
+                        </m:rPr>
+                        <a:rPr lang="en-US" sz="1400" b="0" i="1" smtClean="0">
+                          <a:latin typeface="Cambria Math" panose="02040503050406030204" pitchFamily="18" charset="0"/>
+                        </a:rPr>
+                        <m:t>charge</m:t>
+                      </m:r>
+                      <m:r>
+                        <a:rPr lang="en-US" sz="1400" b="0" i="1" smtClean="0">
+                          <a:latin typeface="Cambria Math" panose="02040503050406030204" pitchFamily="18" charset="0"/>
+                        </a:rPr>
+                        <m:t>)</m:t>
+                      </m:r>
+                    </m:oMath>
+                  </m:oMathPara>
+                </a14:m>
+                <a:endParaRPr lang="en-US" sz="1400" dirty="0"/>
+              </a:p>
+            </p:txBody>
+          </p:sp>
+        </mc:Choice>
+        <mc:Fallback>
+          <p:sp>
+            <p:nvSpPr>
+              <p:cNvPr id="13" name="TextBox 12">
+                <a:extLst>
+                  <a:ext uri="{FF2B5EF4-FFF2-40B4-BE49-F238E27FC236}">
+                    <a16:creationId xmlns:a16="http://schemas.microsoft.com/office/drawing/2014/main" id="{279E26C5-8FA7-EBE0-9054-B607523ADE5C}"/>
+                  </a:ext>
+                </a:extLst>
+              </p:cNvPr>
+              <p:cNvSpPr txBox="1">
+                <a:spLocks noRot="1" noChangeAspect="1" noMove="1" noResize="1" noEditPoints="1" noAdjustHandles="1" noChangeArrowheads="1" noChangeShapeType="1" noTextEdit="1"/>
+              </p:cNvSpPr>
+              <p:nvPr/>
+            </p:nvSpPr>
+            <p:spPr>
+              <a:xfrm>
+                <a:off x="7124129" y="6013861"/>
+                <a:ext cx="2097113" cy="215444"/>
+              </a:xfrm>
+              <a:prstGeom prst="rect">
+                <a:avLst/>
+              </a:prstGeom>
+              <a:blipFill>
+                <a:blip r:embed="rId6"/>
+                <a:stretch>
+                  <a:fillRect l="-1807" t="-5556" r="-2410" b="-38889"/>
+                </a:stretch>
+              </a:blipFill>
+            </p:spPr>
+            <p:txBody>
+              <a:bodyPr/>
+              <a:lstStyle/>
+              <a:p>
+                <a:r>
+                  <a:rPr lang="en-US">
+                    <a:noFill/>
+                  </a:rPr>
+                  <a:t> </a:t>
+                </a:r>
+              </a:p>
+            </p:txBody>
+          </p:sp>
+        </mc:Fallback>
+      </mc:AlternateContent>
+      <mc:AlternateContent xmlns:mc="http://schemas.openxmlformats.org/markup-compatibility/2006">
+        <mc:Choice xmlns:a14="http://schemas.microsoft.com/office/drawing/2010/main" Requires="a14">
+          <p:sp>
+            <p:nvSpPr>
+              <p:cNvPr id="14" name="TextBox 13">
+                <a:extLst>
+                  <a:ext uri="{FF2B5EF4-FFF2-40B4-BE49-F238E27FC236}">
+                    <a16:creationId xmlns:a16="http://schemas.microsoft.com/office/drawing/2014/main" id="{10470150-A12B-3C63-07B3-EC07EF172445}"/>
+                  </a:ext>
+                </a:extLst>
+              </p:cNvPr>
+              <p:cNvSpPr txBox="1"/>
+              <p:nvPr/>
+            </p:nvSpPr>
+            <p:spPr>
+              <a:xfrm>
+                <a:off x="7124129" y="6279032"/>
+                <a:ext cx="2744213" cy="243015"/>
+              </a:xfrm>
+              <a:prstGeom prst="rect">
+                <a:avLst/>
+              </a:prstGeom>
+              <a:noFill/>
+            </p:spPr>
+            <p:txBody>
+              <a:bodyPr wrap="none" lIns="0" tIns="0" rIns="0" bIns="0" rtlCol="0">
+                <a:spAutoFit/>
+              </a:bodyPr>
+              <a:lstStyle/>
+              <a:p>
+                <a14:m>
+                  <m:oMathPara xmlns:m="http://schemas.openxmlformats.org/officeDocument/2006/math">
+                    <m:oMathParaPr>
+                      <m:jc m:val="centerGroup"/>
+                    </m:oMathParaPr>
+                    <m:oMath xmlns:m="http://schemas.openxmlformats.org/officeDocument/2006/math">
+                      <m:r>
+                        <m:rPr>
+                          <m:sty m:val="p"/>
+                        </m:rPr>
+                        <a:rPr lang="en-US" sz="1400" b="0" i="1" smtClean="0">
+                          <a:latin typeface="Cambria Math" panose="02040503050406030204" pitchFamily="18" charset="0"/>
+                        </a:rPr>
+                        <m:t>T</m:t>
+                      </m:r>
+                      <m:r>
+                        <a:rPr lang="en-US" sz="1400" b="0" i="1" smtClean="0">
+                          <a:latin typeface="Cambria Math" panose="02040503050406030204" pitchFamily="18" charset="0"/>
+                        </a:rPr>
+                        <m:t>(</m:t>
+                      </m:r>
+                      <m:r>
+                        <m:rPr>
+                          <m:sty m:val="p"/>
+                        </m:rPr>
+                        <a:rPr lang="en-US" sz="1400" b="0" i="1" smtClean="0">
+                          <a:latin typeface="Cambria Math" panose="02040503050406030204" pitchFamily="18" charset="0"/>
+                        </a:rPr>
+                        <m:t>L</m:t>
+                      </m:r>
+                      <m:r>
+                        <a:rPr lang="en-US" sz="1400" b="0" i="1" smtClean="0">
+                          <a:latin typeface="Cambria Math" panose="02040503050406030204" pitchFamily="18" charset="0"/>
+                        </a:rPr>
+                        <m:t>)</m:t>
+                      </m:r>
+                      <m:acc>
+                        <m:accPr>
+                          <m:chr m:val="⃗"/>
+                          <m:ctrlPr>
+                            <a:rPr lang="en-US" sz="1400" b="0" i="1" smtClean="0">
+                              <a:latin typeface="Cambria Math" panose="02040503050406030204" pitchFamily="18" charset="0"/>
+                            </a:rPr>
+                          </m:ctrlPr>
+                        </m:accPr>
+                        <m:e>
+                          <m:sSub>
+                            <m:sSubPr>
+                              <m:ctrlPr>
+                                <a:rPr lang="en-US" sz="1400" b="0" i="1" smtClean="0">
+                                  <a:latin typeface="Cambria Math" panose="02040503050406030204" pitchFamily="18" charset="0"/>
+                                </a:rPr>
+                              </m:ctrlPr>
+                            </m:sSubPr>
+                            <m:e>
+                              <m:r>
+                                <a:rPr lang="en-US" sz="1400" b="0" i="1" smtClean="0">
+                                  <a:latin typeface="Cambria Math" panose="02040503050406030204" pitchFamily="18" charset="0"/>
+                                </a:rPr>
+                                <m:t>1</m:t>
+                              </m:r>
+                            </m:e>
+                            <m:sub>
+                              <m:r>
+                                <m:rPr>
+                                  <m:sty m:val="p"/>
+                                </m:rPr>
+                                <a:rPr lang="en-US" sz="1400" b="0" i="1" smtClean="0">
+                                  <a:latin typeface="Cambria Math" panose="02040503050406030204" pitchFamily="18" charset="0"/>
+                                </a:rPr>
+                                <m:t>t</m:t>
+                              </m:r>
+                            </m:sub>
+                          </m:sSub>
+                        </m:e>
+                      </m:acc>
+                      <m:r>
+                        <a:rPr lang="en-US" sz="1400" b="0" i="1" smtClean="0">
+                          <a:latin typeface="Cambria Math" panose="02040503050406030204" pitchFamily="18" charset="0"/>
+                        </a:rPr>
+                        <m:t>(</m:t>
+                      </m:r>
+                      <m:r>
+                        <m:rPr>
+                          <m:sty m:val="p"/>
+                        </m:rPr>
+                        <a:rPr lang="en-US" sz="1400" b="0" i="1" smtClean="0">
+                          <a:latin typeface="Cambria Math" panose="02040503050406030204" pitchFamily="18" charset="0"/>
+                        </a:rPr>
+                        <m:t>L</m:t>
+                      </m:r>
+                      <m:r>
+                        <a:rPr lang="en-US" sz="1400" b="0" i="1" smtClean="0">
+                          <a:latin typeface="Cambria Math" panose="02040503050406030204" pitchFamily="18" charset="0"/>
+                        </a:rPr>
+                        <m:t>)=</m:t>
+                      </m:r>
+                      <m:r>
+                        <m:rPr>
+                          <m:sty m:val="p"/>
+                        </m:rPr>
+                        <a:rPr lang="en-US" sz="1400" b="0" i="1" smtClean="0">
+                          <a:latin typeface="Cambria Math" panose="02040503050406030204" pitchFamily="18" charset="0"/>
+                        </a:rPr>
+                        <m:t>qE</m:t>
+                      </m:r>
+                      <m:acc>
+                        <m:accPr>
+                          <m:chr m:val="⃗"/>
+                          <m:ctrlPr>
+                            <a:rPr lang="en-US" sz="1400" b="0" i="1" smtClean="0">
+                              <a:latin typeface="Cambria Math" panose="02040503050406030204" pitchFamily="18" charset="0"/>
+                            </a:rPr>
+                          </m:ctrlPr>
+                        </m:accPr>
+                        <m:e>
+                          <m:sSub>
+                            <m:sSubPr>
+                              <m:ctrlPr>
+                                <a:rPr lang="en-US" sz="1400" b="0" i="1" smtClean="0">
+                                  <a:latin typeface="Cambria Math" panose="02040503050406030204" pitchFamily="18" charset="0"/>
+                                </a:rPr>
+                              </m:ctrlPr>
+                            </m:sSubPr>
+                            <m:e>
+                              <m:r>
+                                <a:rPr lang="en-US" sz="1400" b="0" i="1" smtClean="0">
+                                  <a:latin typeface="Cambria Math" panose="02040503050406030204" pitchFamily="18" charset="0"/>
+                                </a:rPr>
+                                <m:t>1</m:t>
+                              </m:r>
+                            </m:e>
+                            <m:sub>
+                              <m:r>
+                                <m:rPr>
+                                  <m:sty m:val="p"/>
+                                </m:rPr>
+                                <a:rPr lang="en-US" sz="1400" b="0" i="1" smtClean="0">
+                                  <a:latin typeface="Cambria Math" panose="02040503050406030204" pitchFamily="18" charset="0"/>
+                                </a:rPr>
+                                <m:t>z</m:t>
+                              </m:r>
+                            </m:sub>
+                          </m:sSub>
+                        </m:e>
+                      </m:acc>
+                      <m:r>
+                        <a:rPr lang="en-US" sz="1400" b="0" i="1" smtClean="0">
+                          <a:latin typeface="Cambria Math" panose="02040503050406030204" pitchFamily="18" charset="0"/>
+                        </a:rPr>
+                        <m:t>+</m:t>
+                      </m:r>
+                      <m:acc>
+                        <m:accPr>
+                          <m:chr m:val="⃗"/>
+                          <m:ctrlPr>
+                            <a:rPr lang="en-US" sz="1400" b="0" i="1" smtClean="0">
+                              <a:latin typeface="Cambria Math" panose="02040503050406030204" pitchFamily="18" charset="0"/>
+                            </a:rPr>
+                          </m:ctrlPr>
+                        </m:accPr>
+                        <m:e>
+                          <m:sSub>
+                            <m:sSubPr>
+                              <m:ctrlPr>
+                                <a:rPr lang="en-US" sz="1400" b="0" i="1" smtClean="0">
+                                  <a:latin typeface="Cambria Math" panose="02040503050406030204" pitchFamily="18" charset="0"/>
+                                </a:rPr>
+                              </m:ctrlPr>
+                            </m:sSubPr>
+                            <m:e>
+                              <m:r>
+                                <m:rPr>
+                                  <m:sty m:val="p"/>
+                                </m:rPr>
+                                <a:rPr lang="en-US" sz="1400" b="0" i="1" smtClean="0">
+                                  <a:latin typeface="Cambria Math" panose="02040503050406030204" pitchFamily="18" charset="0"/>
+                                </a:rPr>
+                                <m:t>F</m:t>
+                              </m:r>
+                            </m:e>
+                            <m:sub>
+                              <m:r>
+                                <m:rPr>
+                                  <m:sty m:val="p"/>
+                                </m:rPr>
+                                <a:rPr lang="en-US" sz="1400" b="0" i="1" smtClean="0">
+                                  <a:latin typeface="Cambria Math" panose="02040503050406030204" pitchFamily="18" charset="0"/>
+                                </a:rPr>
+                                <m:t>r</m:t>
+                              </m:r>
+                            </m:sub>
+                          </m:sSub>
+                        </m:e>
+                      </m:acc>
+                      <m:r>
+                        <a:rPr lang="en-US" sz="1400" b="0" i="1" smtClean="0">
+                          <a:latin typeface="Cambria Math" panose="02040503050406030204" pitchFamily="18" charset="0"/>
+                        </a:rPr>
+                        <m:t> (</m:t>
+                      </m:r>
+                      <m:r>
+                        <m:rPr>
+                          <m:sty m:val="p"/>
+                        </m:rPr>
+                        <a:rPr lang="en-US" sz="1400" b="0" i="1" smtClean="0">
+                          <a:latin typeface="Cambria Math" panose="02040503050406030204" pitchFamily="18" charset="0"/>
+                        </a:rPr>
+                        <m:t>tip</m:t>
+                      </m:r>
+                      <m:r>
+                        <a:rPr lang="en-US" sz="1400" b="0" i="1" smtClean="0">
+                          <a:latin typeface="Cambria Math" panose="02040503050406030204" pitchFamily="18" charset="0"/>
+                        </a:rPr>
+                        <m:t> </m:t>
+                      </m:r>
+                      <m:r>
+                        <m:rPr>
+                          <m:sty m:val="p"/>
+                        </m:rPr>
+                        <a:rPr lang="en-US" sz="1400" b="0" i="1" smtClean="0">
+                          <a:latin typeface="Cambria Math" panose="02040503050406030204" pitchFamily="18" charset="0"/>
+                        </a:rPr>
+                        <m:t>charge</m:t>
+                      </m:r>
+                      <m:r>
+                        <a:rPr lang="en-US" sz="1400" b="0" i="1" smtClean="0">
+                          <a:latin typeface="Cambria Math" panose="02040503050406030204" pitchFamily="18" charset="0"/>
+                        </a:rPr>
+                        <m:t>)</m:t>
+                      </m:r>
+                    </m:oMath>
+                  </m:oMathPara>
+                </a14:m>
+                <a:endParaRPr lang="en-US" sz="1400" dirty="0"/>
+              </a:p>
+            </p:txBody>
+          </p:sp>
+        </mc:Choice>
+        <mc:Fallback>
+          <p:sp>
+            <p:nvSpPr>
+              <p:cNvPr id="14" name="TextBox 13">
+                <a:extLst>
+                  <a:ext uri="{FF2B5EF4-FFF2-40B4-BE49-F238E27FC236}">
+                    <a16:creationId xmlns:a16="http://schemas.microsoft.com/office/drawing/2014/main" id="{10470150-A12B-3C63-07B3-EC07EF172445}"/>
+                  </a:ext>
+                </a:extLst>
+              </p:cNvPr>
+              <p:cNvSpPr txBox="1">
+                <a:spLocks noRot="1" noChangeAspect="1" noMove="1" noResize="1" noEditPoints="1" noAdjustHandles="1" noChangeArrowheads="1" noChangeShapeType="1" noTextEdit="1"/>
+              </p:cNvSpPr>
+              <p:nvPr/>
+            </p:nvSpPr>
+            <p:spPr>
+              <a:xfrm>
+                <a:off x="7124129" y="6279032"/>
+                <a:ext cx="2744213" cy="243015"/>
+              </a:xfrm>
+              <a:prstGeom prst="rect">
+                <a:avLst/>
+              </a:prstGeom>
+              <a:blipFill>
+                <a:blip r:embed="rId7"/>
+                <a:stretch>
+                  <a:fillRect l="-922" r="-1382" b="-35000"/>
+                </a:stretch>
+              </a:blipFill>
+            </p:spPr>
+            <p:txBody>
+              <a:bodyPr/>
+              <a:lstStyle/>
+              <a:p>
+                <a:r>
+                  <a:rPr lang="en-US">
+                    <a:noFill/>
+                  </a:rPr>
+                  <a:t> </a:t>
+                </a:r>
+              </a:p>
+            </p:txBody>
+          </p:sp>
+        </mc:Fallback>
+      </mc:AlternateContent>
+      <mc:AlternateContent xmlns:mc="http://schemas.openxmlformats.org/markup-compatibility/2006">
+        <mc:Choice xmlns:a14="http://schemas.microsoft.com/office/drawing/2010/main" Requires="a14">
+          <p:sp>
+            <p:nvSpPr>
+              <p:cNvPr id="15" name="TextBox 14">
+                <a:extLst>
+                  <a:ext uri="{FF2B5EF4-FFF2-40B4-BE49-F238E27FC236}">
+                    <a16:creationId xmlns:a16="http://schemas.microsoft.com/office/drawing/2014/main" id="{7A2C9ACA-5C17-A788-F6AE-968814F4924B}"/>
+                  </a:ext>
+                </a:extLst>
+              </p:cNvPr>
+              <p:cNvSpPr txBox="1"/>
+              <p:nvPr/>
+            </p:nvSpPr>
+            <p:spPr>
+              <a:xfrm>
+                <a:off x="9482275" y="1402679"/>
+                <a:ext cx="1900392" cy="215444"/>
+              </a:xfrm>
+              <a:prstGeom prst="rect">
+                <a:avLst/>
+              </a:prstGeom>
+              <a:noFill/>
+            </p:spPr>
+            <p:txBody>
+              <a:bodyPr wrap="none" lIns="0" tIns="0" rIns="0" bIns="0" rtlCol="0">
+                <a:spAutoFit/>
+              </a:bodyPr>
+              <a:lstStyle/>
+              <a:p>
+                <a14:m>
+                  <m:oMathPara xmlns:m="http://schemas.openxmlformats.org/officeDocument/2006/math">
+                    <m:oMathParaPr>
+                      <m:jc m:val="centerGroup"/>
+                    </m:oMathParaPr>
+                    <m:oMath xmlns:m="http://schemas.openxmlformats.org/officeDocument/2006/math">
+                      <m:r>
+                        <m:rPr>
+                          <m:sty m:val="p"/>
+                        </m:rPr>
+                        <a:rPr lang="en-US" sz="1400" b="0" i="1" smtClean="0">
+                          <a:latin typeface="Cambria Math" panose="02040503050406030204" pitchFamily="18" charset="0"/>
+                        </a:rPr>
+                        <m:t>N</m:t>
+                      </m:r>
+                      <m:sSub>
+                        <m:sSubPr>
+                          <m:ctrlPr>
+                            <a:rPr lang="en-US" sz="1400" b="0" i="1" smtClean="0">
+                              <a:latin typeface="Cambria Math" panose="02040503050406030204" pitchFamily="18" charset="0"/>
+                            </a:rPr>
+                          </m:ctrlPr>
+                        </m:sSubPr>
+                        <m:e>
+                          <m:r>
+                            <m:rPr>
+                              <m:sty m:val="p"/>
+                            </m:rPr>
+                            <a:rPr lang="en-US" sz="1400" b="0" i="1" smtClean="0">
+                              <a:latin typeface="Cambria Math" panose="02040503050406030204" pitchFamily="18" charset="0"/>
+                            </a:rPr>
+                            <m:t>ρ</m:t>
+                          </m:r>
+                        </m:e>
+                        <m:sub>
+                          <m:r>
+                            <m:rPr>
+                              <m:sty m:val="p"/>
+                            </m:rPr>
+                            <a:rPr lang="en-US" sz="1400" b="0" i="1" smtClean="0">
+                              <a:latin typeface="Cambria Math" panose="02040503050406030204" pitchFamily="18" charset="0"/>
+                            </a:rPr>
+                            <m:t>t</m:t>
+                          </m:r>
+                        </m:sub>
+                      </m:sSub>
+                      <m:r>
+                        <m:rPr>
+                          <m:sty m:val="p"/>
+                        </m:rPr>
+                        <a:rPr lang="en-US" sz="1400" b="0" i="1" smtClean="0">
+                          <a:latin typeface="Cambria Math" panose="02040503050406030204" pitchFamily="18" charset="0"/>
+                        </a:rPr>
+                        <m:t>π</m:t>
+                      </m:r>
+                      <m:sSup>
+                        <m:sSupPr>
+                          <m:ctrlPr>
+                            <a:rPr lang="en-US" sz="1400" b="0" i="1" smtClean="0">
+                              <a:latin typeface="Cambria Math" panose="02040503050406030204" pitchFamily="18" charset="0"/>
+                            </a:rPr>
+                          </m:ctrlPr>
+                        </m:sSupPr>
+                        <m:e>
+                          <m:r>
+                            <m:rPr>
+                              <m:sty m:val="p"/>
+                            </m:rPr>
+                            <a:rPr lang="en-US" sz="1400" b="0" i="1" smtClean="0">
+                              <a:latin typeface="Cambria Math" panose="02040503050406030204" pitchFamily="18" charset="0"/>
+                            </a:rPr>
+                            <m:t>r</m:t>
+                          </m:r>
+                        </m:e>
+                        <m:sup>
+                          <m:r>
+                            <a:rPr lang="en-US" sz="1400" b="0" i="1" smtClean="0">
+                              <a:latin typeface="Cambria Math" panose="02040503050406030204" pitchFamily="18" charset="0"/>
+                            </a:rPr>
+                            <m:t>2</m:t>
+                          </m:r>
+                        </m:sup>
+                      </m:sSup>
+                      <m:r>
+                        <m:rPr>
+                          <m:sty m:val="p"/>
+                        </m:rPr>
+                        <a:rPr lang="en-US" sz="1400" b="0" i="1" smtClean="0">
+                          <a:latin typeface="Cambria Math" panose="02040503050406030204" pitchFamily="18" charset="0"/>
+                        </a:rPr>
+                        <m:t>Lg</m:t>
+                      </m:r>
+                      <m:r>
+                        <a:rPr lang="en-US" sz="1400" b="0" i="1" smtClean="0">
+                          <a:latin typeface="Cambria Math" panose="02040503050406030204" pitchFamily="18" charset="0"/>
+                        </a:rPr>
+                        <m:t> ≈1.7×</m:t>
+                      </m:r>
+                      <m:sSup>
+                        <m:sSupPr>
+                          <m:ctrlPr>
+                            <a:rPr lang="en-US" sz="1400" b="0" i="1" smtClean="0">
+                              <a:latin typeface="Cambria Math" panose="02040503050406030204" pitchFamily="18" charset="0"/>
+                            </a:rPr>
+                          </m:ctrlPr>
+                        </m:sSupPr>
+                        <m:e>
+                          <m:r>
+                            <a:rPr lang="en-US" sz="1400" b="0" i="1" smtClean="0">
+                              <a:latin typeface="Cambria Math" panose="02040503050406030204" pitchFamily="18" charset="0"/>
+                            </a:rPr>
+                            <m:t>10</m:t>
+                          </m:r>
+                        </m:e>
+                        <m:sup>
+                          <m:r>
+                            <a:rPr lang="en-US" sz="1400" b="0" i="1" smtClean="0">
+                              <a:latin typeface="Cambria Math" panose="02040503050406030204" pitchFamily="18" charset="0"/>
+                            </a:rPr>
+                            <m:t>-9</m:t>
+                          </m:r>
+                        </m:sup>
+                      </m:sSup>
+                      <m:r>
+                        <a:rPr lang="en-US" sz="1400" b="0" i="1" smtClean="0">
+                          <a:latin typeface="Cambria Math" panose="02040503050406030204" pitchFamily="18" charset="0"/>
+                        </a:rPr>
+                        <m:t> </m:t>
+                      </m:r>
+                      <m:r>
+                        <m:rPr>
+                          <m:sty m:val="p"/>
+                        </m:rPr>
+                        <a:rPr lang="en-US" sz="1400" b="0" i="1" smtClean="0">
+                          <a:latin typeface="Cambria Math" panose="02040503050406030204" pitchFamily="18" charset="0"/>
+                        </a:rPr>
+                        <m:t>N</m:t>
+                      </m:r>
+                    </m:oMath>
+                  </m:oMathPara>
+                </a14:m>
+                <a:endParaRPr lang="en-US" sz="1400" dirty="0"/>
+              </a:p>
+            </p:txBody>
+          </p:sp>
+        </mc:Choice>
+        <mc:Fallback>
+          <p:sp>
+            <p:nvSpPr>
+              <p:cNvPr id="15" name="TextBox 14">
+                <a:extLst>
+                  <a:ext uri="{FF2B5EF4-FFF2-40B4-BE49-F238E27FC236}">
+                    <a16:creationId xmlns:a16="http://schemas.microsoft.com/office/drawing/2014/main" id="{7A2C9ACA-5C17-A788-F6AE-968814F4924B}"/>
+                  </a:ext>
+                </a:extLst>
+              </p:cNvPr>
+              <p:cNvSpPr txBox="1">
+                <a:spLocks noRot="1" noChangeAspect="1" noMove="1" noResize="1" noEditPoints="1" noAdjustHandles="1" noChangeArrowheads="1" noChangeShapeType="1" noTextEdit="1"/>
+              </p:cNvSpPr>
+              <p:nvPr/>
+            </p:nvSpPr>
+            <p:spPr>
+              <a:xfrm>
+                <a:off x="9482275" y="1402679"/>
+                <a:ext cx="1900392" cy="215444"/>
+              </a:xfrm>
+              <a:prstGeom prst="rect">
+                <a:avLst/>
+              </a:prstGeom>
+              <a:blipFill>
+                <a:blip r:embed="rId8"/>
+                <a:stretch>
+                  <a:fillRect l="-1325" t="-5556" r="-1325" b="-38889"/>
+                </a:stretch>
+              </a:blipFill>
+            </p:spPr>
+            <p:txBody>
+              <a:bodyPr/>
+              <a:lstStyle/>
+              <a:p>
+                <a:r>
+                  <a:rPr lang="en-US">
+                    <a:noFill/>
+                  </a:rPr>
+                  <a:t> </a:t>
+                </a:r>
+              </a:p>
+            </p:txBody>
+          </p:sp>
+        </mc:Fallback>
+      </mc:AlternateContent>
+      <p:sp>
+        <p:nvSpPr>
+          <p:cNvPr id="16" name="TextBox 15">
+            <a:extLst>
+              <a:ext uri="{FF2B5EF4-FFF2-40B4-BE49-F238E27FC236}">
+                <a16:creationId xmlns:a16="http://schemas.microsoft.com/office/drawing/2014/main" id="{29F90F5C-216B-1954-722A-137F792EAAF2}"/>
+              </a:ext>
+            </a:extLst>
+          </p:cNvPr>
+          <p:cNvSpPr txBox="1"/>
+          <p:nvPr/>
+        </p:nvSpPr>
+        <p:spPr>
+          <a:xfrm>
+            <a:off x="9611531" y="1056620"/>
+            <a:ext cx="1671400" cy="307777"/>
+          </a:xfrm>
+          <a:prstGeom prst="rect">
+            <a:avLst/>
+          </a:prstGeom>
+          <a:noFill/>
+        </p:spPr>
+        <p:txBody>
+          <a:bodyPr wrap="square" rtlCol="0">
+            <a:spAutoFit/>
+          </a:bodyPr>
+          <a:lstStyle/>
+          <a:p>
+            <a:r>
+              <a:rPr lang="en-US" sz="1400" dirty="0"/>
+              <a:t>Thread weight</a:t>
+            </a:r>
+          </a:p>
+        </p:txBody>
+      </p:sp>
+      <p:sp>
+        <p:nvSpPr>
+          <p:cNvPr id="17" name="TextBox 16">
+            <a:extLst>
+              <a:ext uri="{FF2B5EF4-FFF2-40B4-BE49-F238E27FC236}">
+                <a16:creationId xmlns:a16="http://schemas.microsoft.com/office/drawing/2014/main" id="{DDE9B377-CA09-891B-2102-C0FAA670753F}"/>
+              </a:ext>
+            </a:extLst>
+          </p:cNvPr>
+          <p:cNvSpPr txBox="1"/>
+          <p:nvPr/>
+        </p:nvSpPr>
+        <p:spPr>
+          <a:xfrm>
+            <a:off x="9456677" y="1694687"/>
+            <a:ext cx="2160376" cy="523220"/>
+          </a:xfrm>
+          <a:prstGeom prst="rect">
+            <a:avLst/>
+          </a:prstGeom>
+          <a:noFill/>
+        </p:spPr>
+        <p:txBody>
+          <a:bodyPr wrap="square" rtlCol="0">
+            <a:spAutoFit/>
+          </a:bodyPr>
+          <a:lstStyle/>
+          <a:p>
+            <a:r>
+              <a:rPr lang="en-US" sz="1400" dirty="0"/>
+              <a:t>neglected here but kept in simulations.</a:t>
+            </a:r>
+          </a:p>
+        </p:txBody>
+      </p:sp>
     </p:spTree>
     <p:extLst>
       <p:ext uri="{BB962C8B-B14F-4D97-AF65-F5344CB8AC3E}">
@@ -17658,6 +18891,1762 @@
           </a:prstGeom>
         </p:spPr>
       </p:pic>
+      <p:sp>
+        <p:nvSpPr>
+          <p:cNvPr id="7" name="TextBox 6">
+            <a:extLst>
+              <a:ext uri="{FF2B5EF4-FFF2-40B4-BE49-F238E27FC236}">
+                <a16:creationId xmlns:a16="http://schemas.microsoft.com/office/drawing/2014/main" id="{4A506484-1792-FAF3-DA8A-76EC27C8456D}"/>
+              </a:ext>
+            </a:extLst>
+          </p:cNvPr>
+          <p:cNvSpPr txBox="1"/>
+          <p:nvPr/>
+        </p:nvSpPr>
+        <p:spPr>
+          <a:xfrm>
+            <a:off x="820894" y="1755732"/>
+            <a:ext cx="4744779" cy="369332"/>
+          </a:xfrm>
+          <a:prstGeom prst="rect">
+            <a:avLst/>
+          </a:prstGeom>
+          <a:noFill/>
+        </p:spPr>
+        <p:txBody>
+          <a:bodyPr wrap="square">
+            <a:spAutoFit/>
+          </a:bodyPr>
+          <a:lstStyle/>
+          <a:p>
+            <a:pPr>
+              <a:buNone/>
+            </a:pPr>
+            <a:r>
+              <a:rPr lang="en-US" dirty="0">
+                <a:effectLst/>
+                <a:latin typeface="Helvetica" pitchFamily="2" charset="0"/>
+              </a:rPr>
+              <a:t>Over flat ground we use Gorham’s profile:</a:t>
+            </a:r>
+          </a:p>
+        </p:txBody>
+      </p:sp>
+      <mc:AlternateContent xmlns:mc="http://schemas.openxmlformats.org/markup-compatibility/2006">
+        <mc:Choice xmlns:a14="http://schemas.microsoft.com/office/drawing/2010/main" Requires="a14">
+          <p:sp>
+            <p:nvSpPr>
+              <p:cNvPr id="9" name="TextBox 8">
+                <a:extLst>
+                  <a:ext uri="{FF2B5EF4-FFF2-40B4-BE49-F238E27FC236}">
+                    <a16:creationId xmlns:a16="http://schemas.microsoft.com/office/drawing/2014/main" id="{5B8428E3-BAFA-C70E-6655-D8944AF8414E}"/>
+                  </a:ext>
+                </a:extLst>
+              </p:cNvPr>
+              <p:cNvSpPr txBox="1"/>
+              <p:nvPr/>
+            </p:nvSpPr>
+            <p:spPr>
+              <a:xfrm>
+                <a:off x="844276" y="2381679"/>
+                <a:ext cx="4454425" cy="276999"/>
+              </a:xfrm>
+              <a:prstGeom prst="rect">
+                <a:avLst/>
+              </a:prstGeom>
+              <a:noFill/>
+            </p:spPr>
+            <p:txBody>
+              <a:bodyPr wrap="none" lIns="0" tIns="0" rIns="0" bIns="0" rtlCol="0">
+                <a:spAutoFit/>
+              </a:bodyPr>
+              <a:lstStyle/>
+              <a:p>
+                <a14:m>
+                  <m:oMathPara xmlns:m="http://schemas.openxmlformats.org/officeDocument/2006/math">
+                    <m:oMathParaPr>
+                      <m:jc m:val="centerGroup"/>
+                    </m:oMathParaPr>
+                    <m:oMath xmlns:m="http://schemas.openxmlformats.org/officeDocument/2006/math">
+                      <m:r>
+                        <m:rPr>
+                          <m:sty m:val="p"/>
+                        </m:rPr>
+                        <a:rPr lang="en-US" b="0" i="1" smtClean="0">
+                          <a:latin typeface="Cambria Math" panose="02040503050406030204" pitchFamily="18" charset="0"/>
+                        </a:rPr>
+                        <m:t>E</m:t>
+                      </m:r>
+                      <m:r>
+                        <a:rPr lang="en-US" b="0" i="1" smtClean="0">
+                          <a:latin typeface="Cambria Math" panose="02040503050406030204" pitchFamily="18" charset="0"/>
+                        </a:rPr>
+                        <m:t>(</m:t>
+                      </m:r>
+                      <m:r>
+                        <m:rPr>
+                          <m:sty m:val="p"/>
+                        </m:rPr>
+                        <a:rPr lang="en-US" b="0" i="1" smtClean="0">
+                          <a:latin typeface="Cambria Math" panose="02040503050406030204" pitchFamily="18" charset="0"/>
+                        </a:rPr>
+                        <m:t>z</m:t>
+                      </m:r>
+                      <m:r>
+                        <a:rPr lang="en-US" b="0" i="1" smtClean="0">
+                          <a:latin typeface="Cambria Math" panose="02040503050406030204" pitchFamily="18" charset="0"/>
+                        </a:rPr>
+                        <m:t>)=</m:t>
+                      </m:r>
+                      <m:sSub>
+                        <m:sSubPr>
+                          <m:ctrlPr>
+                            <a:rPr lang="en-US" b="0" i="1" smtClean="0">
+                              <a:latin typeface="Cambria Math" panose="02040503050406030204" pitchFamily="18" charset="0"/>
+                            </a:rPr>
+                          </m:ctrlPr>
+                        </m:sSubPr>
+                        <m:e>
+                          <m:r>
+                            <m:rPr>
+                              <m:sty m:val="p"/>
+                            </m:rPr>
+                            <a:rPr lang="en-US" b="0" i="1" smtClean="0">
+                              <a:latin typeface="Cambria Math" panose="02040503050406030204" pitchFamily="18" charset="0"/>
+                            </a:rPr>
+                            <m:t>E</m:t>
+                          </m:r>
+                        </m:e>
+                        <m:sub>
+                          <m:r>
+                            <a:rPr lang="en-US" b="0" i="1" smtClean="0">
+                              <a:latin typeface="Cambria Math" panose="02040503050406030204" pitchFamily="18" charset="0"/>
+                            </a:rPr>
+                            <m:t>0</m:t>
+                          </m:r>
+                        </m:sub>
+                      </m:sSub>
+                      <m:sSup>
+                        <m:sSupPr>
+                          <m:ctrlPr>
+                            <a:rPr lang="en-US" b="0" i="1" smtClean="0">
+                              <a:latin typeface="Cambria Math" panose="02040503050406030204" pitchFamily="18" charset="0"/>
+                            </a:rPr>
+                          </m:ctrlPr>
+                        </m:sSupPr>
+                        <m:e>
+                          <m:r>
+                            <m:rPr>
+                              <m:sty m:val="p"/>
+                            </m:rPr>
+                            <a:rPr lang="en-US" b="0" i="1" smtClean="0">
+                              <a:latin typeface="Cambria Math" panose="02040503050406030204" pitchFamily="18" charset="0"/>
+                            </a:rPr>
+                            <m:t>e</m:t>
+                          </m:r>
+                        </m:e>
+                        <m:sup>
+                          <m:r>
+                            <a:rPr lang="en-US" b="0" i="1" smtClean="0">
+                              <a:latin typeface="Cambria Math" panose="02040503050406030204" pitchFamily="18" charset="0"/>
+                            </a:rPr>
+                            <m:t>-</m:t>
+                          </m:r>
+                          <m:r>
+                            <m:rPr>
+                              <m:sty m:val="p"/>
+                            </m:rPr>
+                            <a:rPr lang="en-US" b="0" i="1" smtClean="0">
+                              <a:latin typeface="Cambria Math" panose="02040503050406030204" pitchFamily="18" charset="0"/>
+                            </a:rPr>
+                            <m:t>αz</m:t>
+                          </m:r>
+                        </m:sup>
+                      </m:sSup>
+                      <m:r>
+                        <a:rPr lang="en-US" b="0" i="1" smtClean="0">
+                          <a:latin typeface="Cambria Math" panose="02040503050406030204" pitchFamily="18" charset="0"/>
+                        </a:rPr>
+                        <m:t>,</m:t>
+                      </m:r>
+                      <m:sSub>
+                        <m:sSubPr>
+                          <m:ctrlPr>
+                            <a:rPr lang="en-US" i="1">
+                              <a:latin typeface="Cambria Math" panose="02040503050406030204" pitchFamily="18" charset="0"/>
+                            </a:rPr>
+                          </m:ctrlPr>
+                        </m:sSubPr>
+                        <m:e>
+                          <m:r>
+                            <m:rPr>
+                              <m:sty m:val="p"/>
+                            </m:rPr>
+                            <a:rPr lang="en-US" i="1">
+                              <a:latin typeface="Cambria Math" panose="02040503050406030204" pitchFamily="18" charset="0"/>
+                            </a:rPr>
+                            <m:t>E</m:t>
+                          </m:r>
+                        </m:e>
+                        <m:sub>
+                          <m:r>
+                            <a:rPr lang="en-US" i="1">
+                              <a:latin typeface="Cambria Math" panose="02040503050406030204" pitchFamily="18" charset="0"/>
+                            </a:rPr>
+                            <m:t>0</m:t>
+                          </m:r>
+                        </m:sub>
+                      </m:sSub>
+                      <m:r>
+                        <a:rPr lang="en-US" b="0" i="1" smtClean="0">
+                          <a:latin typeface="Cambria Math" panose="02040503050406030204" pitchFamily="18" charset="0"/>
+                        </a:rPr>
+                        <m:t>=120 </m:t>
+                      </m:r>
+                      <m:r>
+                        <m:rPr>
+                          <m:sty m:val="p"/>
+                        </m:rPr>
+                        <a:rPr lang="en-US" b="0" i="1" smtClean="0">
+                          <a:latin typeface="Cambria Math" panose="02040503050406030204" pitchFamily="18" charset="0"/>
+                        </a:rPr>
+                        <m:t>V</m:t>
+                      </m:r>
+                      <m:r>
+                        <a:rPr lang="en-US" b="0" i="1" smtClean="0">
+                          <a:latin typeface="Cambria Math" panose="02040503050406030204" pitchFamily="18" charset="0"/>
+                        </a:rPr>
+                        <m:t>/</m:t>
+                      </m:r>
+                      <m:r>
+                        <m:rPr>
+                          <m:sty m:val="p"/>
+                        </m:rPr>
+                        <a:rPr lang="en-US" b="0" i="1" smtClean="0">
+                          <a:latin typeface="Cambria Math" panose="02040503050406030204" pitchFamily="18" charset="0"/>
+                        </a:rPr>
+                        <m:t>m</m:t>
+                      </m:r>
+                      <m:r>
+                        <a:rPr lang="en-US" b="0" i="1" smtClean="0">
+                          <a:latin typeface="Cambria Math" panose="02040503050406030204" pitchFamily="18" charset="0"/>
+                        </a:rPr>
+                        <m:t>, </m:t>
+                      </m:r>
+                      <m:r>
+                        <m:rPr>
+                          <m:sty m:val="p"/>
+                        </m:rPr>
+                        <a:rPr lang="en-US" b="0" i="1" smtClean="0">
+                          <a:latin typeface="Cambria Math" panose="02040503050406030204" pitchFamily="18" charset="0"/>
+                        </a:rPr>
+                        <m:t>α</m:t>
+                      </m:r>
+                      <m:r>
+                        <a:rPr lang="en-US" b="0" i="1" smtClean="0">
+                          <a:latin typeface="Cambria Math" panose="02040503050406030204" pitchFamily="18" charset="0"/>
+                        </a:rPr>
+                        <m:t>=3×1</m:t>
+                      </m:r>
+                      <m:sSup>
+                        <m:sSupPr>
+                          <m:ctrlPr>
+                            <a:rPr lang="en-US" b="0" i="1" smtClean="0">
+                              <a:latin typeface="Cambria Math" panose="02040503050406030204" pitchFamily="18" charset="0"/>
+                            </a:rPr>
+                          </m:ctrlPr>
+                        </m:sSupPr>
+                        <m:e>
+                          <m:r>
+                            <a:rPr lang="en-US" b="0" i="1" smtClean="0">
+                              <a:latin typeface="Cambria Math" panose="02040503050406030204" pitchFamily="18" charset="0"/>
+                            </a:rPr>
+                            <m:t>0</m:t>
+                          </m:r>
+                        </m:e>
+                        <m:sup>
+                          <m:r>
+                            <a:rPr lang="en-US" b="0" i="1" smtClean="0">
+                              <a:latin typeface="Cambria Math" panose="02040503050406030204" pitchFamily="18" charset="0"/>
+                            </a:rPr>
+                            <m:t>4</m:t>
+                          </m:r>
+                        </m:sup>
+                      </m:sSup>
+                      <m:sSup>
+                        <m:sSupPr>
+                          <m:ctrlPr>
+                            <a:rPr lang="en-US" b="0" i="1" smtClean="0">
+                              <a:latin typeface="Cambria Math" panose="02040503050406030204" pitchFamily="18" charset="0"/>
+                            </a:rPr>
+                          </m:ctrlPr>
+                        </m:sSupPr>
+                        <m:e>
+                          <m:r>
+                            <m:rPr>
+                              <m:sty m:val="p"/>
+                            </m:rPr>
+                            <a:rPr lang="en-US" b="0" i="1" smtClean="0">
+                              <a:latin typeface="Cambria Math" panose="02040503050406030204" pitchFamily="18" charset="0"/>
+                            </a:rPr>
+                            <m:t>m</m:t>
+                          </m:r>
+                        </m:e>
+                        <m:sup>
+                          <m:r>
+                            <a:rPr lang="en-US" b="0" i="1" smtClean="0">
+                              <a:latin typeface="Cambria Math" panose="02040503050406030204" pitchFamily="18" charset="0"/>
+                            </a:rPr>
+                            <m:t>-1</m:t>
+                          </m:r>
+                        </m:sup>
+                      </m:sSup>
+                    </m:oMath>
+                  </m:oMathPara>
+                </a14:m>
+                <a:endParaRPr lang="en-US" dirty="0"/>
+              </a:p>
+            </p:txBody>
+          </p:sp>
+        </mc:Choice>
+        <mc:Fallback>
+          <p:sp>
+            <p:nvSpPr>
+              <p:cNvPr id="9" name="TextBox 8">
+                <a:extLst>
+                  <a:ext uri="{FF2B5EF4-FFF2-40B4-BE49-F238E27FC236}">
+                    <a16:creationId xmlns:a16="http://schemas.microsoft.com/office/drawing/2014/main" id="{5B8428E3-BAFA-C70E-6655-D8944AF8414E}"/>
+                  </a:ext>
+                </a:extLst>
+              </p:cNvPr>
+              <p:cNvSpPr txBox="1">
+                <a:spLocks noRot="1" noChangeAspect="1" noMove="1" noResize="1" noEditPoints="1" noAdjustHandles="1" noChangeArrowheads="1" noChangeShapeType="1" noTextEdit="1"/>
+              </p:cNvSpPr>
+              <p:nvPr/>
+            </p:nvSpPr>
+            <p:spPr>
+              <a:xfrm>
+                <a:off x="844276" y="2381679"/>
+                <a:ext cx="4454425" cy="276999"/>
+              </a:xfrm>
+              <a:prstGeom prst="rect">
+                <a:avLst/>
+              </a:prstGeom>
+              <a:blipFill>
+                <a:blip r:embed="rId3"/>
+                <a:stretch>
+                  <a:fillRect l="-568" t="-4348" b="-39130"/>
+                </a:stretch>
+              </a:blipFill>
+            </p:spPr>
+            <p:txBody>
+              <a:bodyPr/>
+              <a:lstStyle/>
+              <a:p>
+                <a:r>
+                  <a:rPr lang="en-US">
+                    <a:noFill/>
+                  </a:rPr>
+                  <a:t> </a:t>
+                </a:r>
+              </a:p>
+            </p:txBody>
+          </p:sp>
+        </mc:Fallback>
+      </mc:AlternateContent>
+      <p:grpSp>
+        <p:nvGrpSpPr>
+          <p:cNvPr id="36" name="Group 35">
+            <a:extLst>
+              <a:ext uri="{FF2B5EF4-FFF2-40B4-BE49-F238E27FC236}">
+                <a16:creationId xmlns:a16="http://schemas.microsoft.com/office/drawing/2014/main" id="{59DBFC61-863A-2378-6F1E-BE20A73D0FA9}"/>
+              </a:ext>
+            </a:extLst>
+          </p:cNvPr>
+          <p:cNvGrpSpPr/>
+          <p:nvPr/>
+        </p:nvGrpSpPr>
+        <p:grpSpPr>
+          <a:xfrm>
+            <a:off x="7121369" y="0"/>
+            <a:ext cx="3437752" cy="3668555"/>
+            <a:chOff x="6622093" y="1037292"/>
+            <a:chExt cx="3437752" cy="3668555"/>
+          </a:xfrm>
+        </p:grpSpPr>
+        <p:sp>
+          <p:nvSpPr>
+            <p:cNvPr id="19" name="Arc 18">
+              <a:extLst>
+                <a:ext uri="{FF2B5EF4-FFF2-40B4-BE49-F238E27FC236}">
+                  <a16:creationId xmlns:a16="http://schemas.microsoft.com/office/drawing/2014/main" id="{C99D533C-47F2-0DF1-2C11-E72642AF0B03}"/>
+                </a:ext>
+              </a:extLst>
+            </p:cNvPr>
+            <p:cNvSpPr/>
+            <p:nvPr/>
+          </p:nvSpPr>
+          <p:spPr>
+            <a:xfrm rot="6171526">
+              <a:off x="6506691" y="1152694"/>
+              <a:ext cx="3668555" cy="3437752"/>
+            </a:xfrm>
+            <a:prstGeom prst="arc">
+              <a:avLst/>
+            </a:prstGeom>
+            <a:ln w="15875"/>
+          </p:spPr>
+          <p:style>
+            <a:lnRef idx="2">
+              <a:schemeClr val="dk1"/>
+            </a:lnRef>
+            <a:fillRef idx="0">
+              <a:schemeClr val="dk1"/>
+            </a:fillRef>
+            <a:effectRef idx="1">
+              <a:schemeClr val="dk1"/>
+            </a:effectRef>
+            <a:fontRef idx="minor">
+              <a:schemeClr val="tx1"/>
+            </a:fontRef>
+          </p:style>
+          <p:txBody>
+            <a:bodyPr rtlCol="0" anchor="ctr"/>
+            <a:lstStyle/>
+            <a:p>
+              <a:pPr algn="ctr"/>
+              <a:endParaRPr lang="en-US"/>
+            </a:p>
+          </p:txBody>
+        </p:sp>
+        <p:cxnSp>
+          <p:nvCxnSpPr>
+            <p:cNvPr id="28" name="Straight Arrow Connector 27">
+              <a:extLst>
+                <a:ext uri="{FF2B5EF4-FFF2-40B4-BE49-F238E27FC236}">
+                  <a16:creationId xmlns:a16="http://schemas.microsoft.com/office/drawing/2014/main" id="{160941A8-5409-0EA4-33EF-7B6EC58029C2}"/>
+                </a:ext>
+              </a:extLst>
+            </p:cNvPr>
+            <p:cNvCxnSpPr>
+              <a:cxnSpLocks/>
+            </p:cNvCxnSpPr>
+            <p:nvPr/>
+          </p:nvCxnSpPr>
+          <p:spPr>
+            <a:xfrm flipV="1">
+              <a:off x="9457393" y="3429000"/>
+              <a:ext cx="0" cy="816675"/>
+            </a:xfrm>
+            <a:prstGeom prst="straightConnector1">
+              <a:avLst/>
+            </a:prstGeom>
+            <a:ln>
+              <a:tailEnd type="triangle"/>
+            </a:ln>
+          </p:spPr>
+          <p:style>
+            <a:lnRef idx="2">
+              <a:schemeClr val="accent3"/>
+            </a:lnRef>
+            <a:fillRef idx="0">
+              <a:schemeClr val="accent3"/>
+            </a:fillRef>
+            <a:effectRef idx="1">
+              <a:schemeClr val="accent3"/>
+            </a:effectRef>
+            <a:fontRef idx="minor">
+              <a:schemeClr val="tx1"/>
+            </a:fontRef>
+          </p:style>
+        </p:cxnSp>
+        <mc:AlternateContent xmlns:mc="http://schemas.openxmlformats.org/markup-compatibility/2006">
+          <mc:Choice xmlns:a14="http://schemas.microsoft.com/office/drawing/2010/main" Requires="a14">
+            <p:sp>
+              <p:nvSpPr>
+                <p:cNvPr id="29" name="TextBox 28">
+                  <a:extLst>
+                    <a:ext uri="{FF2B5EF4-FFF2-40B4-BE49-F238E27FC236}">
+                      <a16:creationId xmlns:a16="http://schemas.microsoft.com/office/drawing/2014/main" id="{B35B191B-37BD-38CC-73EC-C675CF8018F1}"/>
+                    </a:ext>
+                  </a:extLst>
+                </p:cNvPr>
+                <p:cNvSpPr txBox="1"/>
+                <p:nvPr/>
+              </p:nvSpPr>
+              <p:spPr>
+                <a:xfrm>
+                  <a:off x="9172099" y="3369635"/>
+                  <a:ext cx="237180" cy="318613"/>
+                </a:xfrm>
+                <a:prstGeom prst="rect">
+                  <a:avLst/>
+                </a:prstGeom>
+                <a:noFill/>
+              </p:spPr>
+              <p:txBody>
+                <a:bodyPr wrap="none" lIns="0" tIns="0" rIns="0" bIns="0" rtlCol="0">
+                  <a:spAutoFit/>
+                </a:bodyPr>
+                <a:lstStyle/>
+                <a:p>
+                  <a14:m>
+                    <m:oMathPara xmlns:m="http://schemas.openxmlformats.org/officeDocument/2006/math">
+                      <m:oMathParaPr>
+                        <m:jc m:val="centerGroup"/>
+                      </m:oMathParaPr>
+                      <m:oMath xmlns:m="http://schemas.openxmlformats.org/officeDocument/2006/math">
+                        <m:acc>
+                          <m:accPr>
+                            <m:chr m:val="⃗"/>
+                            <m:ctrlPr>
+                              <a:rPr lang="en-US" i="1" smtClean="0">
+                                <a:latin typeface="Cambria Math" panose="02040503050406030204" pitchFamily="18" charset="0"/>
+                              </a:rPr>
+                            </m:ctrlPr>
+                          </m:accPr>
+                          <m:e>
+                            <m:sSub>
+                              <m:sSubPr>
+                                <m:ctrlPr>
+                                  <a:rPr lang="en-US" i="1">
+                                    <a:latin typeface="Cambria Math" panose="02040503050406030204" pitchFamily="18" charset="0"/>
+                                  </a:rPr>
+                                </m:ctrlPr>
+                              </m:sSubPr>
+                              <m:e>
+                                <m:r>
+                                  <m:rPr>
+                                    <m:sty m:val="p"/>
+                                  </m:rPr>
+                                  <a:rPr lang="en-US" b="0" i="1" smtClean="0">
+                                    <a:latin typeface="Cambria Math" panose="02040503050406030204" pitchFamily="18" charset="0"/>
+                                  </a:rPr>
+                                  <m:t>f</m:t>
+                                </m:r>
+                              </m:e>
+                              <m:sub>
+                                <m:r>
+                                  <m:rPr>
+                                    <m:sty m:val="p"/>
+                                  </m:rPr>
+                                  <a:rPr lang="en-US" b="0" i="1" smtClean="0">
+                                    <a:latin typeface="Cambria Math" panose="02040503050406030204" pitchFamily="18" charset="0"/>
+                                  </a:rPr>
+                                  <m:t>e</m:t>
+                                </m:r>
+                              </m:sub>
+                            </m:sSub>
+                          </m:e>
+                        </m:acc>
+                      </m:oMath>
+                    </m:oMathPara>
+                  </a14:m>
+                  <a:endParaRPr lang="en-US" dirty="0"/>
+                </a:p>
+              </p:txBody>
+            </p:sp>
+          </mc:Choice>
+          <mc:Fallback>
+            <p:sp>
+              <p:nvSpPr>
+                <p:cNvPr id="29" name="TextBox 28">
+                  <a:extLst>
+                    <a:ext uri="{FF2B5EF4-FFF2-40B4-BE49-F238E27FC236}">
+                      <a16:creationId xmlns:a16="http://schemas.microsoft.com/office/drawing/2014/main" id="{B35B191B-37BD-38CC-73EC-C675CF8018F1}"/>
+                    </a:ext>
+                  </a:extLst>
+                </p:cNvPr>
+                <p:cNvSpPr txBox="1">
+                  <a:spLocks noRot="1" noChangeAspect="1" noMove="1" noResize="1" noEditPoints="1" noAdjustHandles="1" noChangeArrowheads="1" noChangeShapeType="1" noTextEdit="1"/>
+                </p:cNvSpPr>
+                <p:nvPr/>
+              </p:nvSpPr>
+              <p:spPr>
+                <a:xfrm>
+                  <a:off x="9172099" y="3369635"/>
+                  <a:ext cx="237180" cy="318613"/>
+                </a:xfrm>
+                <a:prstGeom prst="rect">
+                  <a:avLst/>
+                </a:prstGeom>
+                <a:blipFill>
+                  <a:blip r:embed="rId4"/>
+                  <a:stretch>
+                    <a:fillRect l="-21053" b="-11538"/>
+                  </a:stretch>
+                </a:blipFill>
+              </p:spPr>
+              <p:txBody>
+                <a:bodyPr/>
+                <a:lstStyle/>
+                <a:p>
+                  <a:r>
+                    <a:rPr lang="en-US">
+                      <a:noFill/>
+                    </a:rPr>
+                    <a:t> </a:t>
+                  </a:r>
+                </a:p>
+              </p:txBody>
+            </p:sp>
+          </mc:Fallback>
+        </mc:AlternateContent>
+        <p:cxnSp>
+          <p:nvCxnSpPr>
+            <p:cNvPr id="33" name="Straight Connector 32">
+              <a:extLst>
+                <a:ext uri="{FF2B5EF4-FFF2-40B4-BE49-F238E27FC236}">
+                  <a16:creationId xmlns:a16="http://schemas.microsoft.com/office/drawing/2014/main" id="{8330F4FF-FF9C-DC0B-8311-8CBA6014EB2D}"/>
+                </a:ext>
+              </a:extLst>
+            </p:cNvPr>
+            <p:cNvCxnSpPr>
+              <a:cxnSpLocks/>
+            </p:cNvCxnSpPr>
+            <p:nvPr/>
+          </p:nvCxnSpPr>
+          <p:spPr>
+            <a:xfrm flipV="1">
+              <a:off x="9409279" y="4188282"/>
+              <a:ext cx="133174" cy="124473"/>
+            </a:xfrm>
+            <a:prstGeom prst="line">
+              <a:avLst/>
+            </a:prstGeom>
+            <a:ln w="38100">
+              <a:solidFill>
+                <a:srgbClr val="00B050"/>
+              </a:solidFill>
+            </a:ln>
+          </p:spPr>
+          <p:style>
+            <a:lnRef idx="1">
+              <a:schemeClr val="accent1"/>
+            </a:lnRef>
+            <a:fillRef idx="0">
+              <a:schemeClr val="accent1"/>
+            </a:fillRef>
+            <a:effectRef idx="0">
+              <a:schemeClr val="accent1"/>
+            </a:effectRef>
+            <a:fontRef idx="minor">
+              <a:schemeClr val="tx1"/>
+            </a:fontRef>
+          </p:style>
+        </p:cxnSp>
+      </p:grpSp>
+      <mc:AlternateContent xmlns:mc="http://schemas.openxmlformats.org/markup-compatibility/2006">
+        <mc:Choice xmlns:a14="http://schemas.microsoft.com/office/drawing/2010/main" Requires="a14">
+          <p:sp>
+            <p:nvSpPr>
+              <p:cNvPr id="35" name="TextBox 34">
+                <a:extLst>
+                  <a:ext uri="{FF2B5EF4-FFF2-40B4-BE49-F238E27FC236}">
+                    <a16:creationId xmlns:a16="http://schemas.microsoft.com/office/drawing/2014/main" id="{A5B9690F-4E69-29C7-D1F7-86F2C2D5C06B}"/>
+                  </a:ext>
+                </a:extLst>
+              </p:cNvPr>
+              <p:cNvSpPr txBox="1"/>
+              <p:nvPr/>
+            </p:nvSpPr>
+            <p:spPr>
+              <a:xfrm>
+                <a:off x="7975538" y="2071422"/>
+                <a:ext cx="1304716" cy="318613"/>
+              </a:xfrm>
+              <a:prstGeom prst="rect">
+                <a:avLst/>
+              </a:prstGeom>
+              <a:noFill/>
+            </p:spPr>
+            <p:txBody>
+              <a:bodyPr wrap="none" lIns="0" tIns="0" rIns="0" bIns="0" rtlCol="0">
+                <a:spAutoFit/>
+              </a:bodyPr>
+              <a:lstStyle/>
+              <a:p>
+                <a14:m>
+                  <m:oMathPara xmlns:m="http://schemas.openxmlformats.org/officeDocument/2006/math">
+                    <m:oMathParaPr>
+                      <m:jc m:val="centerGroup"/>
+                    </m:oMathParaPr>
+                    <m:oMath xmlns:m="http://schemas.openxmlformats.org/officeDocument/2006/math">
+                      <m:acc>
+                        <m:accPr>
+                          <m:chr m:val="⃗"/>
+                          <m:ctrlPr>
+                            <a:rPr lang="en-US" i="1" smtClean="0">
+                              <a:latin typeface="Cambria Math" panose="02040503050406030204" pitchFamily="18" charset="0"/>
+                            </a:rPr>
+                          </m:ctrlPr>
+                        </m:accPr>
+                        <m:e>
+                          <m:sSub>
+                            <m:sSubPr>
+                              <m:ctrlPr>
+                                <a:rPr lang="en-US" i="1" smtClean="0">
+                                  <a:latin typeface="Cambria Math" panose="02040503050406030204" pitchFamily="18" charset="0"/>
+                                </a:rPr>
+                              </m:ctrlPr>
+                            </m:sSubPr>
+                            <m:e>
+                              <m:r>
+                                <m:rPr>
+                                  <m:sty m:val="p"/>
+                                </m:rPr>
+                                <a:rPr lang="en-US" b="0" i="1" smtClean="0">
+                                  <a:latin typeface="Cambria Math" panose="02040503050406030204" pitchFamily="18" charset="0"/>
+                                </a:rPr>
+                                <m:t>f</m:t>
+                              </m:r>
+                            </m:e>
+                            <m:sub>
+                              <m:r>
+                                <m:rPr>
+                                  <m:sty m:val="p"/>
+                                </m:rPr>
+                                <a:rPr lang="en-US" b="0" i="1" smtClean="0">
+                                  <a:latin typeface="Cambria Math" panose="02040503050406030204" pitchFamily="18" charset="0"/>
+                                </a:rPr>
+                                <m:t>e</m:t>
+                              </m:r>
+                            </m:sub>
+                          </m:sSub>
+                        </m:e>
+                      </m:acc>
+                      <m:r>
+                        <a:rPr lang="en-US" b="0" i="1" smtClean="0">
+                          <a:latin typeface="Cambria Math" panose="02040503050406030204" pitchFamily="18" charset="0"/>
+                        </a:rPr>
+                        <m:t>=</m:t>
+                      </m:r>
+                      <m:r>
+                        <m:rPr>
+                          <m:sty m:val="p"/>
+                        </m:rPr>
+                        <a:rPr lang="en-US" b="0" i="1" smtClean="0">
+                          <a:latin typeface="Cambria Math" panose="02040503050406030204" pitchFamily="18" charset="0"/>
+                        </a:rPr>
+                        <m:t>λE</m:t>
+                      </m:r>
+                      <m:r>
+                        <a:rPr lang="en-US" b="0" i="1" smtClean="0">
+                          <a:latin typeface="Cambria Math" panose="02040503050406030204" pitchFamily="18" charset="0"/>
+                        </a:rPr>
+                        <m:t>(</m:t>
+                      </m:r>
+                      <m:r>
+                        <m:rPr>
+                          <m:sty m:val="p"/>
+                        </m:rPr>
+                        <a:rPr lang="en-US" b="0" i="1" smtClean="0">
+                          <a:latin typeface="Cambria Math" panose="02040503050406030204" pitchFamily="18" charset="0"/>
+                        </a:rPr>
+                        <m:t>z</m:t>
+                      </m:r>
+                      <m:r>
+                        <a:rPr lang="en-US" b="0" i="1" smtClean="0">
+                          <a:latin typeface="Cambria Math" panose="02040503050406030204" pitchFamily="18" charset="0"/>
+                        </a:rPr>
+                        <m:t>)</m:t>
+                      </m:r>
+                      <m:acc>
+                        <m:accPr>
+                          <m:chr m:val="⃗"/>
+                          <m:ctrlPr>
+                            <a:rPr lang="en-US" b="0" i="1" smtClean="0">
+                              <a:latin typeface="Cambria Math" panose="02040503050406030204" pitchFamily="18" charset="0"/>
+                            </a:rPr>
+                          </m:ctrlPr>
+                        </m:accPr>
+                        <m:e>
+                          <m:sSub>
+                            <m:sSubPr>
+                              <m:ctrlPr>
+                                <a:rPr lang="en-US" b="0" i="1" smtClean="0">
+                                  <a:latin typeface="Cambria Math" panose="02040503050406030204" pitchFamily="18" charset="0"/>
+                                </a:rPr>
+                              </m:ctrlPr>
+                            </m:sSubPr>
+                            <m:e>
+                              <m:r>
+                                <a:rPr lang="en-US" b="0" i="1" smtClean="0">
+                                  <a:latin typeface="Cambria Math" panose="02040503050406030204" pitchFamily="18" charset="0"/>
+                                </a:rPr>
+                                <m:t>1</m:t>
+                              </m:r>
+                            </m:e>
+                            <m:sub>
+                              <m:r>
+                                <m:rPr>
+                                  <m:sty m:val="p"/>
+                                </m:rPr>
+                                <a:rPr lang="en-US" b="0" i="1" smtClean="0">
+                                  <a:latin typeface="Cambria Math" panose="02040503050406030204" pitchFamily="18" charset="0"/>
+                                </a:rPr>
+                                <m:t>z</m:t>
+                              </m:r>
+                            </m:sub>
+                          </m:sSub>
+                        </m:e>
+                      </m:acc>
+                    </m:oMath>
+                  </m:oMathPara>
+                </a14:m>
+                <a:endParaRPr lang="en-US" dirty="0"/>
+              </a:p>
+            </p:txBody>
+          </p:sp>
+        </mc:Choice>
+        <mc:Fallback>
+          <p:sp>
+            <p:nvSpPr>
+              <p:cNvPr id="35" name="TextBox 34">
+                <a:extLst>
+                  <a:ext uri="{FF2B5EF4-FFF2-40B4-BE49-F238E27FC236}">
+                    <a16:creationId xmlns:a16="http://schemas.microsoft.com/office/drawing/2014/main" id="{A5B9690F-4E69-29C7-D1F7-86F2C2D5C06B}"/>
+                  </a:ext>
+                </a:extLst>
+              </p:cNvPr>
+              <p:cNvSpPr txBox="1">
+                <a:spLocks noRot="1" noChangeAspect="1" noMove="1" noResize="1" noEditPoints="1" noAdjustHandles="1" noChangeArrowheads="1" noChangeShapeType="1" noTextEdit="1"/>
+              </p:cNvSpPr>
+              <p:nvPr/>
+            </p:nvSpPr>
+            <p:spPr>
+              <a:xfrm>
+                <a:off x="7975538" y="2071422"/>
+                <a:ext cx="1304716" cy="318613"/>
+              </a:xfrm>
+              <a:prstGeom prst="rect">
+                <a:avLst/>
+              </a:prstGeom>
+              <a:blipFill>
+                <a:blip r:embed="rId5"/>
+                <a:stretch>
+                  <a:fillRect l="-2885" b="-30769"/>
+                </a:stretch>
+              </a:blipFill>
+            </p:spPr>
+            <p:txBody>
+              <a:bodyPr/>
+              <a:lstStyle/>
+              <a:p>
+                <a:r>
+                  <a:rPr lang="en-US">
+                    <a:noFill/>
+                  </a:rPr>
+                  <a:t> </a:t>
+                </a:r>
+              </a:p>
+            </p:txBody>
+          </p:sp>
+        </mc:Fallback>
+      </mc:AlternateContent>
+      <p:sp>
+        <p:nvSpPr>
+          <p:cNvPr id="37" name="TextBox 36">
+            <a:extLst>
+              <a:ext uri="{FF2B5EF4-FFF2-40B4-BE49-F238E27FC236}">
+                <a16:creationId xmlns:a16="http://schemas.microsoft.com/office/drawing/2014/main" id="{3F88AAC4-C776-7EAE-9701-AEFD236C1528}"/>
+              </a:ext>
+            </a:extLst>
+          </p:cNvPr>
+          <p:cNvSpPr txBox="1"/>
+          <p:nvPr/>
+        </p:nvSpPr>
+        <p:spPr>
+          <a:xfrm>
+            <a:off x="6789953" y="1725358"/>
+            <a:ext cx="2881422" cy="307777"/>
+          </a:xfrm>
+          <a:prstGeom prst="rect">
+            <a:avLst/>
+          </a:prstGeom>
+          <a:noFill/>
+        </p:spPr>
+        <p:txBody>
+          <a:bodyPr wrap="square" rtlCol="0">
+            <a:spAutoFit/>
+          </a:bodyPr>
+          <a:lstStyle/>
+          <a:p>
+            <a:r>
+              <a:rPr lang="en-US" sz="1400" i="1" dirty="0"/>
+              <a:t>Electrostatic force per unit length</a:t>
+            </a:r>
+          </a:p>
+        </p:txBody>
+      </p:sp>
+      <p:sp>
+        <p:nvSpPr>
+          <p:cNvPr id="38" name="TextBox 37">
+            <a:extLst>
+              <a:ext uri="{FF2B5EF4-FFF2-40B4-BE49-F238E27FC236}">
+                <a16:creationId xmlns:a16="http://schemas.microsoft.com/office/drawing/2014/main" id="{B0E18159-8962-6D91-4B13-72C56BF3D218}"/>
+              </a:ext>
+            </a:extLst>
+          </p:cNvPr>
+          <p:cNvSpPr txBox="1"/>
+          <p:nvPr/>
+        </p:nvSpPr>
+        <p:spPr>
+          <a:xfrm>
+            <a:off x="820894" y="2915293"/>
+            <a:ext cx="4869712" cy="646331"/>
+          </a:xfrm>
+          <a:prstGeom prst="rect">
+            <a:avLst/>
+          </a:prstGeom>
+          <a:noFill/>
+        </p:spPr>
+        <p:txBody>
+          <a:bodyPr wrap="square" rtlCol="0">
+            <a:spAutoFit/>
+          </a:bodyPr>
+          <a:lstStyle/>
+          <a:p>
+            <a:r>
+              <a:rPr lang="en-US" dirty="0">
+                <a:latin typeface="Helvetica" pitchFamily="2" charset="0"/>
+              </a:rPr>
+              <a:t>For the experiment of Morley and Gorham, the fit is given by:</a:t>
+            </a:r>
+          </a:p>
+        </p:txBody>
+      </p:sp>
+      <mc:AlternateContent xmlns:mc="http://schemas.openxmlformats.org/markup-compatibility/2006">
+        <mc:Choice xmlns:a14="http://schemas.microsoft.com/office/drawing/2010/main" Requires="a14">
+          <p:sp>
+            <p:nvSpPr>
+              <p:cNvPr id="39" name="TextBox 38">
+                <a:extLst>
+                  <a:ext uri="{FF2B5EF4-FFF2-40B4-BE49-F238E27FC236}">
+                    <a16:creationId xmlns:a16="http://schemas.microsoft.com/office/drawing/2014/main" id="{36363F44-C2D5-D23B-0942-2817D704FB54}"/>
+                  </a:ext>
+                </a:extLst>
+              </p:cNvPr>
+              <p:cNvSpPr txBox="1"/>
+              <p:nvPr/>
+            </p:nvSpPr>
+            <p:spPr>
+              <a:xfrm>
+                <a:off x="1553251" y="3725130"/>
+                <a:ext cx="3280064" cy="287323"/>
+              </a:xfrm>
+              <a:prstGeom prst="rect">
+                <a:avLst/>
+              </a:prstGeom>
+              <a:noFill/>
+            </p:spPr>
+            <p:txBody>
+              <a:bodyPr wrap="none" lIns="0" tIns="0" rIns="0" bIns="0" rtlCol="0">
+                <a:spAutoFit/>
+              </a:bodyPr>
+              <a:lstStyle/>
+              <a:p>
+                <a14:m>
+                  <m:oMathPara xmlns:m="http://schemas.openxmlformats.org/officeDocument/2006/math">
+                    <m:oMathParaPr>
+                      <m:jc m:val="centerGroup"/>
+                    </m:oMathParaPr>
+                    <m:oMath xmlns:m="http://schemas.openxmlformats.org/officeDocument/2006/math">
+                      <m:r>
+                        <m:rPr>
+                          <m:sty m:val="p"/>
+                        </m:rPr>
+                        <a:rPr lang="en-US" b="0" i="1" smtClean="0">
+                          <a:latin typeface="Cambria Math" panose="02040503050406030204" pitchFamily="18" charset="0"/>
+                        </a:rPr>
+                        <m:t>E</m:t>
+                      </m:r>
+                      <m:r>
+                        <a:rPr lang="en-US" b="0" i="1" smtClean="0">
+                          <a:latin typeface="Cambria Math" panose="02040503050406030204" pitchFamily="18" charset="0"/>
+                        </a:rPr>
+                        <m:t>(</m:t>
+                      </m:r>
+                      <m:r>
+                        <m:rPr>
+                          <m:sty m:val="p"/>
+                        </m:rPr>
+                        <a:rPr lang="en-US" b="0" i="1" smtClean="0">
+                          <a:latin typeface="Cambria Math" panose="02040503050406030204" pitchFamily="18" charset="0"/>
+                        </a:rPr>
+                        <m:t>z</m:t>
+                      </m:r>
+                      <m:r>
+                        <a:rPr lang="en-US" b="0" i="1" smtClean="0">
+                          <a:latin typeface="Cambria Math" panose="02040503050406030204" pitchFamily="18" charset="0"/>
+                        </a:rPr>
+                        <m:t>)=</m:t>
+                      </m:r>
+                      <m:sSub>
+                        <m:sSubPr>
+                          <m:ctrlPr>
+                            <a:rPr lang="en-US" b="0" i="1" smtClean="0">
+                              <a:latin typeface="Cambria Math" panose="02040503050406030204" pitchFamily="18" charset="0"/>
+                            </a:rPr>
+                          </m:ctrlPr>
+                        </m:sSubPr>
+                        <m:e>
+                          <m:r>
+                            <m:rPr>
+                              <m:sty m:val="p"/>
+                            </m:rPr>
+                            <a:rPr lang="en-US" b="0" i="1" smtClean="0">
+                              <a:latin typeface="Cambria Math" panose="02040503050406030204" pitchFamily="18" charset="0"/>
+                            </a:rPr>
+                            <m:t>E</m:t>
+                          </m:r>
+                        </m:e>
+                        <m:sub>
+                          <m:r>
+                            <a:rPr lang="en-US" b="0" i="1" smtClean="0">
+                              <a:latin typeface="Cambria Math" panose="02040503050406030204" pitchFamily="18" charset="0"/>
+                            </a:rPr>
+                            <m:t>1</m:t>
+                          </m:r>
+                        </m:sub>
+                      </m:sSub>
+                      <m:sSup>
+                        <m:sSupPr>
+                          <m:ctrlPr>
+                            <a:rPr lang="en-US" b="0" i="1" smtClean="0">
+                              <a:latin typeface="Cambria Math" panose="02040503050406030204" pitchFamily="18" charset="0"/>
+                            </a:rPr>
+                          </m:ctrlPr>
+                        </m:sSupPr>
+                        <m:e>
+                          <m:r>
+                            <m:rPr>
+                              <m:sty m:val="p"/>
+                            </m:rPr>
+                            <a:rPr lang="en-US" b="0" i="1" smtClean="0">
+                              <a:latin typeface="Cambria Math" panose="02040503050406030204" pitchFamily="18" charset="0"/>
+                            </a:rPr>
+                            <m:t>e</m:t>
+                          </m:r>
+                        </m:e>
+                        <m:sup>
+                          <m:r>
+                            <a:rPr lang="en-US" b="0" i="1" smtClean="0">
+                              <a:latin typeface="Cambria Math" panose="02040503050406030204" pitchFamily="18" charset="0"/>
+                            </a:rPr>
+                            <m:t>-</m:t>
+                          </m:r>
+                          <m:r>
+                            <m:rPr>
+                              <m:sty m:val="p"/>
+                            </m:rPr>
+                            <a:rPr lang="en-US" b="0" i="1" smtClean="0">
+                              <a:latin typeface="Cambria Math" panose="02040503050406030204" pitchFamily="18" charset="0"/>
+                            </a:rPr>
+                            <m:t>z</m:t>
+                          </m:r>
+                          <m:r>
+                            <a:rPr lang="en-US" b="0" i="1" smtClean="0">
+                              <a:latin typeface="Cambria Math" panose="02040503050406030204" pitchFamily="18" charset="0"/>
+                            </a:rPr>
+                            <m:t>/</m:t>
+                          </m:r>
+                          <m:sSub>
+                            <m:sSubPr>
+                              <m:ctrlPr>
+                                <a:rPr lang="en-US" b="0" i="1" smtClean="0">
+                                  <a:latin typeface="Cambria Math" panose="02040503050406030204" pitchFamily="18" charset="0"/>
+                                </a:rPr>
+                              </m:ctrlPr>
+                            </m:sSubPr>
+                            <m:e>
+                              <m:r>
+                                <m:rPr>
+                                  <m:sty m:val="p"/>
+                                </m:rPr>
+                                <a:rPr lang="en-US" b="0" i="1" smtClean="0">
+                                  <a:latin typeface="Cambria Math" panose="02040503050406030204" pitchFamily="18" charset="0"/>
+                                </a:rPr>
+                                <m:t>z</m:t>
+                              </m:r>
+                            </m:e>
+                            <m:sub>
+                              <m:r>
+                                <a:rPr lang="en-US" b="0" i="1" smtClean="0">
+                                  <a:latin typeface="Cambria Math" panose="02040503050406030204" pitchFamily="18" charset="0"/>
+                                </a:rPr>
+                                <m:t>1</m:t>
+                              </m:r>
+                            </m:sub>
+                          </m:sSub>
+                        </m:sup>
+                      </m:sSup>
+                      <m:r>
+                        <a:rPr lang="en-US" b="0" i="1" smtClean="0">
+                          <a:latin typeface="Cambria Math" panose="02040503050406030204" pitchFamily="18" charset="0"/>
+                        </a:rPr>
+                        <m:t>+</m:t>
+                      </m:r>
+                      <m:sSub>
+                        <m:sSubPr>
+                          <m:ctrlPr>
+                            <a:rPr lang="en-US" i="1">
+                              <a:latin typeface="Cambria Math" panose="02040503050406030204" pitchFamily="18" charset="0"/>
+                            </a:rPr>
+                          </m:ctrlPr>
+                        </m:sSubPr>
+                        <m:e>
+                          <m:r>
+                            <m:rPr>
+                              <m:sty m:val="p"/>
+                            </m:rPr>
+                            <a:rPr lang="en-US" i="1">
+                              <a:latin typeface="Cambria Math" panose="02040503050406030204" pitchFamily="18" charset="0"/>
+                            </a:rPr>
+                            <m:t>E</m:t>
+                          </m:r>
+                        </m:e>
+                        <m:sub>
+                          <m:r>
+                            <a:rPr lang="en-US" b="0" i="1" smtClean="0">
+                              <a:latin typeface="Cambria Math" panose="02040503050406030204" pitchFamily="18" charset="0"/>
+                            </a:rPr>
+                            <m:t>2</m:t>
+                          </m:r>
+                        </m:sub>
+                      </m:sSub>
+                      <m:sSup>
+                        <m:sSupPr>
+                          <m:ctrlPr>
+                            <a:rPr lang="en-US" i="1">
+                              <a:latin typeface="Cambria Math" panose="02040503050406030204" pitchFamily="18" charset="0"/>
+                            </a:rPr>
+                          </m:ctrlPr>
+                        </m:sSupPr>
+                        <m:e>
+                          <m:r>
+                            <m:rPr>
+                              <m:sty m:val="p"/>
+                            </m:rPr>
+                            <a:rPr lang="en-US" i="1">
+                              <a:latin typeface="Cambria Math" panose="02040503050406030204" pitchFamily="18" charset="0"/>
+                            </a:rPr>
+                            <m:t>e</m:t>
+                          </m:r>
+                        </m:e>
+                        <m:sup>
+                          <m:r>
+                            <a:rPr lang="en-US" i="1">
+                              <a:latin typeface="Cambria Math" panose="02040503050406030204" pitchFamily="18" charset="0"/>
+                            </a:rPr>
+                            <m:t>−</m:t>
+                          </m:r>
+                          <m:r>
+                            <m:rPr>
+                              <m:sty m:val="p"/>
+                            </m:rPr>
+                            <a:rPr lang="en-US" i="1">
+                              <a:latin typeface="Cambria Math" panose="02040503050406030204" pitchFamily="18" charset="0"/>
+                            </a:rPr>
+                            <m:t>z</m:t>
+                          </m:r>
+                          <m:r>
+                            <a:rPr lang="en-US" i="1">
+                              <a:latin typeface="Cambria Math" panose="02040503050406030204" pitchFamily="18" charset="0"/>
+                            </a:rPr>
+                            <m:t>/</m:t>
+                          </m:r>
+                          <m:sSub>
+                            <m:sSubPr>
+                              <m:ctrlPr>
+                                <a:rPr lang="en-US" i="1">
+                                  <a:latin typeface="Cambria Math" panose="02040503050406030204" pitchFamily="18" charset="0"/>
+                                </a:rPr>
+                              </m:ctrlPr>
+                            </m:sSubPr>
+                            <m:e>
+                              <m:r>
+                                <m:rPr>
+                                  <m:sty m:val="p"/>
+                                </m:rPr>
+                                <a:rPr lang="en-US" i="1">
+                                  <a:latin typeface="Cambria Math" panose="02040503050406030204" pitchFamily="18" charset="0"/>
+                                </a:rPr>
+                                <m:t>z</m:t>
+                              </m:r>
+                            </m:e>
+                            <m:sub>
+                              <m:r>
+                                <a:rPr lang="en-US" b="0" i="1" smtClean="0">
+                                  <a:latin typeface="Cambria Math" panose="02040503050406030204" pitchFamily="18" charset="0"/>
+                                </a:rPr>
+                                <m:t>2</m:t>
+                              </m:r>
+                            </m:sub>
+                          </m:sSub>
+                        </m:sup>
+                      </m:sSup>
+                      <m:r>
+                        <a:rPr lang="en-US" b="0" i="1" smtClean="0">
+                          <a:latin typeface="Cambria Math" panose="02040503050406030204" pitchFamily="18" charset="0"/>
+                        </a:rPr>
+                        <m:t>+</m:t>
+                      </m:r>
+                      <m:sSub>
+                        <m:sSubPr>
+                          <m:ctrlPr>
+                            <a:rPr lang="en-US" b="0" i="1" smtClean="0">
+                              <a:latin typeface="Cambria Math" panose="02040503050406030204" pitchFamily="18" charset="0"/>
+                            </a:rPr>
+                          </m:ctrlPr>
+                        </m:sSubPr>
+                        <m:e>
+                          <m:r>
+                            <m:rPr>
+                              <m:sty m:val="p"/>
+                            </m:rPr>
+                            <a:rPr lang="en-US" b="0" i="1" smtClean="0">
+                              <a:latin typeface="Cambria Math" panose="02040503050406030204" pitchFamily="18" charset="0"/>
+                            </a:rPr>
+                            <m:t>E</m:t>
+                          </m:r>
+                        </m:e>
+                        <m:sub>
+                          <m:r>
+                            <a:rPr lang="en-US" i="1">
+                              <a:latin typeface="Cambria Math" panose="02040503050406030204" pitchFamily="18" charset="0"/>
+                              <a:ea typeface="Cambria Math" panose="02040503050406030204" pitchFamily="18" charset="0"/>
+                            </a:rPr>
+                            <m:t>∞</m:t>
+                          </m:r>
+                        </m:sub>
+                      </m:sSub>
+                    </m:oMath>
+                  </m:oMathPara>
+                </a14:m>
+                <a:endParaRPr lang="en-US" dirty="0"/>
+              </a:p>
+            </p:txBody>
+          </p:sp>
+        </mc:Choice>
+        <mc:Fallback>
+          <p:sp>
+            <p:nvSpPr>
+              <p:cNvPr id="39" name="TextBox 38">
+                <a:extLst>
+                  <a:ext uri="{FF2B5EF4-FFF2-40B4-BE49-F238E27FC236}">
+                    <a16:creationId xmlns:a16="http://schemas.microsoft.com/office/drawing/2014/main" id="{36363F44-C2D5-D23B-0942-2817D704FB54}"/>
+                  </a:ext>
+                </a:extLst>
+              </p:cNvPr>
+              <p:cNvSpPr txBox="1">
+                <a:spLocks noRot="1" noChangeAspect="1" noMove="1" noResize="1" noEditPoints="1" noAdjustHandles="1" noChangeArrowheads="1" noChangeShapeType="1" noTextEdit="1"/>
+              </p:cNvSpPr>
+              <p:nvPr/>
+            </p:nvSpPr>
+            <p:spPr>
+              <a:xfrm>
+                <a:off x="1553251" y="3725130"/>
+                <a:ext cx="3280064" cy="287323"/>
+              </a:xfrm>
+              <a:prstGeom prst="rect">
+                <a:avLst/>
+              </a:prstGeom>
+              <a:blipFill>
+                <a:blip r:embed="rId6"/>
+                <a:stretch>
+                  <a:fillRect l="-386" t="-8696" b="-34783"/>
+                </a:stretch>
+              </a:blipFill>
+            </p:spPr>
+            <p:txBody>
+              <a:bodyPr/>
+              <a:lstStyle/>
+              <a:p>
+                <a:r>
+                  <a:rPr lang="en-US">
+                    <a:noFill/>
+                  </a:rPr>
+                  <a:t> </a:t>
+                </a:r>
+              </a:p>
+            </p:txBody>
+          </p:sp>
+        </mc:Fallback>
+      </mc:AlternateContent>
+      <mc:AlternateContent xmlns:mc="http://schemas.openxmlformats.org/markup-compatibility/2006">
+        <mc:Choice xmlns:a14="http://schemas.microsoft.com/office/drawing/2010/main" Requires="a14">
+          <p:sp>
+            <p:nvSpPr>
+              <p:cNvPr id="41" name="TextBox 40">
+                <a:extLst>
+                  <a:ext uri="{FF2B5EF4-FFF2-40B4-BE49-F238E27FC236}">
+                    <a16:creationId xmlns:a16="http://schemas.microsoft.com/office/drawing/2014/main" id="{1C9A2AB6-34FF-C04B-3E4A-D6114B70786B}"/>
+                  </a:ext>
+                </a:extLst>
+              </p:cNvPr>
+              <p:cNvSpPr txBox="1"/>
+              <p:nvPr/>
+            </p:nvSpPr>
+            <p:spPr>
+              <a:xfrm>
+                <a:off x="844276" y="4260094"/>
+                <a:ext cx="7262757" cy="217817"/>
+              </a:xfrm>
+              <a:prstGeom prst="rect">
+                <a:avLst/>
+              </a:prstGeom>
+              <a:noFill/>
+            </p:spPr>
+            <p:txBody>
+              <a:bodyPr wrap="none" lIns="0" tIns="0" rIns="0" bIns="0" rtlCol="0">
+                <a:spAutoFit/>
+              </a:bodyPr>
+              <a:lstStyle/>
+              <a:p>
+                <a14:m>
+                  <m:oMathPara xmlns:m="http://schemas.openxmlformats.org/officeDocument/2006/math">
+                    <m:oMathParaPr>
+                      <m:jc m:val="centerGroup"/>
+                    </m:oMathParaPr>
+                    <m:oMath xmlns:m="http://schemas.openxmlformats.org/officeDocument/2006/math">
+                      <m:sSub>
+                        <m:sSubPr>
+                          <m:ctrlPr>
+                            <a:rPr lang="en-US" sz="1400" i="1">
+                              <a:latin typeface="Cambria Math" panose="02040503050406030204" pitchFamily="18" charset="0"/>
+                            </a:rPr>
+                          </m:ctrlPr>
+                        </m:sSubPr>
+                        <m:e>
+                          <m:r>
+                            <m:rPr>
+                              <m:sty m:val="p"/>
+                            </m:rPr>
+                            <a:rPr lang="en-US" sz="1400" i="1">
+                              <a:latin typeface="Cambria Math" panose="02040503050406030204" pitchFamily="18" charset="0"/>
+                            </a:rPr>
+                            <m:t>E</m:t>
+                          </m:r>
+                        </m:e>
+                        <m:sub>
+                          <m:r>
+                            <a:rPr lang="en-US" sz="1400" i="1">
+                              <a:latin typeface="Cambria Math" panose="02040503050406030204" pitchFamily="18" charset="0"/>
+                            </a:rPr>
+                            <m:t>1</m:t>
+                          </m:r>
+                        </m:sub>
+                      </m:sSub>
+                      <m:r>
+                        <a:rPr lang="en-US" sz="1400" b="0" i="1" smtClean="0">
+                          <a:latin typeface="Cambria Math" panose="02040503050406030204" pitchFamily="18" charset="0"/>
+                        </a:rPr>
+                        <m:t>=2.52×</m:t>
+                      </m:r>
+                      <m:sSup>
+                        <m:sSupPr>
+                          <m:ctrlPr>
+                            <a:rPr lang="en-US" sz="1400" b="0" i="1" smtClean="0">
+                              <a:latin typeface="Cambria Math" panose="02040503050406030204" pitchFamily="18" charset="0"/>
+                            </a:rPr>
+                          </m:ctrlPr>
+                        </m:sSupPr>
+                        <m:e>
+                          <m:r>
+                            <a:rPr lang="en-US" sz="1400" b="0" i="1" smtClean="0">
+                              <a:latin typeface="Cambria Math" panose="02040503050406030204" pitchFamily="18" charset="0"/>
+                            </a:rPr>
+                            <m:t>10</m:t>
+                          </m:r>
+                        </m:e>
+                        <m:sup>
+                          <m:r>
+                            <a:rPr lang="en-US" sz="1400" b="0" i="1" smtClean="0">
+                              <a:latin typeface="Cambria Math" panose="02040503050406030204" pitchFamily="18" charset="0"/>
+                            </a:rPr>
+                            <m:t>5</m:t>
+                          </m:r>
+                        </m:sup>
+                      </m:sSup>
+                      <m:r>
+                        <a:rPr lang="en-US" sz="1400" b="0" i="1" smtClean="0">
+                          <a:latin typeface="Cambria Math" panose="02040503050406030204" pitchFamily="18" charset="0"/>
+                        </a:rPr>
+                        <m:t> </m:t>
+                      </m:r>
+                      <m:r>
+                        <m:rPr>
+                          <m:sty m:val="p"/>
+                        </m:rPr>
+                        <a:rPr lang="en-US" sz="1400" b="0" i="1" smtClean="0">
+                          <a:latin typeface="Cambria Math" panose="02040503050406030204" pitchFamily="18" charset="0"/>
+                        </a:rPr>
+                        <m:t>V</m:t>
+                      </m:r>
+                      <m:r>
+                        <a:rPr lang="en-US" sz="1400" b="0" i="1" smtClean="0">
+                          <a:latin typeface="Cambria Math" panose="02040503050406030204" pitchFamily="18" charset="0"/>
+                        </a:rPr>
+                        <m:t>/</m:t>
+                      </m:r>
+                      <m:r>
+                        <m:rPr>
+                          <m:sty m:val="p"/>
+                        </m:rPr>
+                        <a:rPr lang="en-US" sz="1400" b="0" i="1" smtClean="0">
+                          <a:latin typeface="Cambria Math" panose="02040503050406030204" pitchFamily="18" charset="0"/>
+                        </a:rPr>
+                        <m:t>m</m:t>
+                      </m:r>
+                      <m:r>
+                        <a:rPr lang="en-US" sz="1400" b="0" i="1" smtClean="0">
+                          <a:latin typeface="Cambria Math" panose="02040503050406030204" pitchFamily="18" charset="0"/>
+                        </a:rPr>
+                        <m:t>, </m:t>
+                      </m:r>
+                      <m:sSub>
+                        <m:sSubPr>
+                          <m:ctrlPr>
+                            <a:rPr lang="en-US" sz="1400" i="1">
+                              <a:latin typeface="Cambria Math" panose="02040503050406030204" pitchFamily="18" charset="0"/>
+                            </a:rPr>
+                          </m:ctrlPr>
+                        </m:sSubPr>
+                        <m:e>
+                          <m:r>
+                            <a:rPr lang="en-US" sz="1400" b="0" i="1" smtClean="0">
+                              <a:latin typeface="Cambria Math" panose="02040503050406030204" pitchFamily="18" charset="0"/>
+                            </a:rPr>
+                            <m:t> </m:t>
+                          </m:r>
+                          <m:r>
+                            <m:rPr>
+                              <m:sty m:val="p"/>
+                            </m:rPr>
+                            <a:rPr lang="en-US" sz="1400" b="0" i="1" smtClean="0">
+                              <a:latin typeface="Cambria Math" panose="02040503050406030204" pitchFamily="18" charset="0"/>
+                            </a:rPr>
+                            <m:t>z</m:t>
+                          </m:r>
+                        </m:e>
+                        <m:sub>
+                          <m:r>
+                            <a:rPr lang="en-US" sz="1400" i="1">
+                              <a:latin typeface="Cambria Math" panose="02040503050406030204" pitchFamily="18" charset="0"/>
+                            </a:rPr>
+                            <m:t>1</m:t>
+                          </m:r>
+                        </m:sub>
+                      </m:sSub>
+                      <m:r>
+                        <a:rPr lang="en-US" sz="1400" b="0" i="1" smtClean="0">
+                          <a:latin typeface="Cambria Math" panose="02040503050406030204" pitchFamily="18" charset="0"/>
+                        </a:rPr>
+                        <m:t>= 1.51</m:t>
+                      </m:r>
+                      <m:r>
+                        <m:rPr>
+                          <m:sty m:val="p"/>
+                        </m:rPr>
+                        <a:rPr lang="en-US" sz="1400" b="0" i="1" smtClean="0">
+                          <a:latin typeface="Cambria Math" panose="02040503050406030204" pitchFamily="18" charset="0"/>
+                        </a:rPr>
+                        <m:t>mm</m:t>
+                      </m:r>
+                      <m:r>
+                        <a:rPr lang="en-US" sz="1400" b="0" i="1" smtClean="0">
+                          <a:latin typeface="Cambria Math" panose="02040503050406030204" pitchFamily="18" charset="0"/>
+                        </a:rPr>
+                        <m:t>, </m:t>
+                      </m:r>
+                      <m:sSub>
+                        <m:sSubPr>
+                          <m:ctrlPr>
+                            <a:rPr lang="en-US" sz="1400" i="1">
+                              <a:latin typeface="Cambria Math" panose="02040503050406030204" pitchFamily="18" charset="0"/>
+                            </a:rPr>
+                          </m:ctrlPr>
+                        </m:sSubPr>
+                        <m:e>
+                          <m:r>
+                            <m:rPr>
+                              <m:sty m:val="p"/>
+                            </m:rPr>
+                            <a:rPr lang="en-US" sz="1400" i="1">
+                              <a:latin typeface="Cambria Math" panose="02040503050406030204" pitchFamily="18" charset="0"/>
+                            </a:rPr>
+                            <m:t>E</m:t>
+                          </m:r>
+                        </m:e>
+                        <m:sub>
+                          <m:r>
+                            <a:rPr lang="en-US" sz="1400" b="0" i="1" smtClean="0">
+                              <a:latin typeface="Cambria Math" panose="02040503050406030204" pitchFamily="18" charset="0"/>
+                            </a:rPr>
+                            <m:t>2</m:t>
+                          </m:r>
+                        </m:sub>
+                      </m:sSub>
+                      <m:r>
+                        <a:rPr lang="en-US" sz="1400" b="0" i="1" smtClean="0">
+                          <a:latin typeface="Cambria Math" panose="02040503050406030204" pitchFamily="18" charset="0"/>
+                        </a:rPr>
+                        <m:t>= 5.07×</m:t>
+                      </m:r>
+                      <m:sSup>
+                        <m:sSupPr>
+                          <m:ctrlPr>
+                            <a:rPr lang="en-US" sz="1400" b="0" i="1" smtClean="0">
+                              <a:latin typeface="Cambria Math" panose="02040503050406030204" pitchFamily="18" charset="0"/>
+                            </a:rPr>
+                          </m:ctrlPr>
+                        </m:sSupPr>
+                        <m:e>
+                          <m:r>
+                            <a:rPr lang="en-US" sz="1400" b="0" i="1" smtClean="0">
+                              <a:latin typeface="Cambria Math" panose="02040503050406030204" pitchFamily="18" charset="0"/>
+                            </a:rPr>
+                            <m:t>10</m:t>
+                          </m:r>
+                        </m:e>
+                        <m:sup>
+                          <m:r>
+                            <a:rPr lang="en-US" sz="1400" b="0" i="1" smtClean="0">
+                              <a:latin typeface="Cambria Math" panose="02040503050406030204" pitchFamily="18" charset="0"/>
+                            </a:rPr>
+                            <m:t>4</m:t>
+                          </m:r>
+                        </m:sup>
+                      </m:sSup>
+                      <m:r>
+                        <a:rPr lang="en-US" sz="1400" b="0" i="1" smtClean="0">
+                          <a:latin typeface="Cambria Math" panose="02040503050406030204" pitchFamily="18" charset="0"/>
+                        </a:rPr>
+                        <m:t> </m:t>
+                      </m:r>
+                      <m:r>
+                        <m:rPr>
+                          <m:sty m:val="p"/>
+                        </m:rPr>
+                        <a:rPr lang="en-US" sz="1400" b="0" i="1" smtClean="0">
+                          <a:latin typeface="Cambria Math" panose="02040503050406030204" pitchFamily="18" charset="0"/>
+                        </a:rPr>
+                        <m:t>V</m:t>
+                      </m:r>
+                      <m:r>
+                        <a:rPr lang="en-US" sz="1400" b="0" i="1" smtClean="0">
+                          <a:latin typeface="Cambria Math" panose="02040503050406030204" pitchFamily="18" charset="0"/>
+                        </a:rPr>
+                        <m:t>/</m:t>
+                      </m:r>
+                      <m:r>
+                        <m:rPr>
+                          <m:sty m:val="p"/>
+                        </m:rPr>
+                        <a:rPr lang="en-US" sz="1400" b="0" i="1" smtClean="0">
+                          <a:latin typeface="Cambria Math" panose="02040503050406030204" pitchFamily="18" charset="0"/>
+                        </a:rPr>
+                        <m:t>m</m:t>
+                      </m:r>
+                      <m:r>
+                        <a:rPr lang="en-US" sz="1400" b="0" i="1" smtClean="0">
+                          <a:latin typeface="Cambria Math" panose="02040503050406030204" pitchFamily="18" charset="0"/>
+                        </a:rPr>
+                        <m:t>,</m:t>
+                      </m:r>
+                      <m:sSub>
+                        <m:sSubPr>
+                          <m:ctrlPr>
+                            <a:rPr lang="en-US" sz="1400" i="1">
+                              <a:latin typeface="Cambria Math" panose="02040503050406030204" pitchFamily="18" charset="0"/>
+                            </a:rPr>
+                          </m:ctrlPr>
+                        </m:sSubPr>
+                        <m:e>
+                          <m:r>
+                            <m:rPr>
+                              <m:sty m:val="p"/>
+                            </m:rPr>
+                            <a:rPr lang="en-US" sz="1400" b="0" i="1" smtClean="0">
+                              <a:latin typeface="Cambria Math" panose="02040503050406030204" pitchFamily="18" charset="0"/>
+                            </a:rPr>
+                            <m:t>z</m:t>
+                          </m:r>
+                        </m:e>
+                        <m:sub>
+                          <m:r>
+                            <a:rPr lang="en-US" sz="1400" b="0" i="1" smtClean="0">
+                              <a:latin typeface="Cambria Math" panose="02040503050406030204" pitchFamily="18" charset="0"/>
+                            </a:rPr>
+                            <m:t>2</m:t>
+                          </m:r>
+                        </m:sub>
+                      </m:sSub>
+                      <m:r>
+                        <a:rPr lang="en-US" sz="1400" b="0" i="1" smtClean="0">
+                          <a:latin typeface="Cambria Math" panose="02040503050406030204" pitchFamily="18" charset="0"/>
+                        </a:rPr>
+                        <m:t>= 7.93 </m:t>
+                      </m:r>
+                      <m:r>
+                        <m:rPr>
+                          <m:sty m:val="p"/>
+                        </m:rPr>
+                        <a:rPr lang="en-US" sz="1400" b="0" i="1" smtClean="0">
+                          <a:latin typeface="Cambria Math" panose="02040503050406030204" pitchFamily="18" charset="0"/>
+                        </a:rPr>
+                        <m:t>mm</m:t>
+                      </m:r>
+                      <m:r>
+                        <a:rPr lang="en-US" sz="1400" b="0" i="1" smtClean="0">
+                          <a:latin typeface="Cambria Math" panose="02040503050406030204" pitchFamily="18" charset="0"/>
+                        </a:rPr>
+                        <m:t>, </m:t>
+                      </m:r>
+                      <m:sSub>
+                        <m:sSubPr>
+                          <m:ctrlPr>
+                            <a:rPr lang="en-US" sz="1400" i="1">
+                              <a:latin typeface="Cambria Math" panose="02040503050406030204" pitchFamily="18" charset="0"/>
+                            </a:rPr>
+                          </m:ctrlPr>
+                        </m:sSubPr>
+                        <m:e>
+                          <m:r>
+                            <m:rPr>
+                              <m:sty m:val="p"/>
+                            </m:rPr>
+                            <a:rPr lang="en-US" sz="1400" i="1">
+                              <a:latin typeface="Cambria Math" panose="02040503050406030204" pitchFamily="18" charset="0"/>
+                            </a:rPr>
+                            <m:t>E</m:t>
+                          </m:r>
+                        </m:e>
+                        <m:sub>
+                          <m:r>
+                            <a:rPr lang="en-US" sz="1400" i="1" smtClean="0">
+                              <a:latin typeface="Cambria Math" panose="02040503050406030204" pitchFamily="18" charset="0"/>
+                              <a:ea typeface="Cambria Math" panose="02040503050406030204" pitchFamily="18" charset="0"/>
+                            </a:rPr>
+                            <m:t>∞</m:t>
+                          </m:r>
+                        </m:sub>
+                      </m:sSub>
+                      <m:r>
+                        <a:rPr lang="en-US" sz="1400" b="0" i="1" smtClean="0">
+                          <a:latin typeface="Cambria Math" panose="02040503050406030204" pitchFamily="18" charset="0"/>
+                        </a:rPr>
+                        <m:t>= 7.41×</m:t>
+                      </m:r>
+                      <m:sSup>
+                        <m:sSupPr>
+                          <m:ctrlPr>
+                            <a:rPr lang="en-US" sz="1400" b="0" i="1" smtClean="0">
+                              <a:latin typeface="Cambria Math" panose="02040503050406030204" pitchFamily="18" charset="0"/>
+                            </a:rPr>
+                          </m:ctrlPr>
+                        </m:sSupPr>
+                        <m:e>
+                          <m:r>
+                            <a:rPr lang="en-US" sz="1400" b="0" i="1" smtClean="0">
+                              <a:latin typeface="Cambria Math" panose="02040503050406030204" pitchFamily="18" charset="0"/>
+                            </a:rPr>
+                            <m:t>10</m:t>
+                          </m:r>
+                        </m:e>
+                        <m:sup>
+                          <m:r>
+                            <a:rPr lang="en-US" sz="1400" b="0" i="1" smtClean="0">
+                              <a:latin typeface="Cambria Math" panose="02040503050406030204" pitchFamily="18" charset="0"/>
+                            </a:rPr>
+                            <m:t>3</m:t>
+                          </m:r>
+                        </m:sup>
+                      </m:sSup>
+                      <m:r>
+                        <a:rPr lang="en-US" sz="1400" b="0" i="1" smtClean="0">
+                          <a:latin typeface="Cambria Math" panose="02040503050406030204" pitchFamily="18" charset="0"/>
+                        </a:rPr>
+                        <m:t> </m:t>
+                      </m:r>
+                      <m:r>
+                        <m:rPr>
+                          <m:sty m:val="p"/>
+                        </m:rPr>
+                        <a:rPr lang="en-US" sz="1400" b="0" i="1" smtClean="0">
+                          <a:latin typeface="Cambria Math" panose="02040503050406030204" pitchFamily="18" charset="0"/>
+                        </a:rPr>
+                        <m:t>V</m:t>
+                      </m:r>
+                      <m:r>
+                        <a:rPr lang="en-US" sz="1400" b="0" i="1" smtClean="0">
+                          <a:latin typeface="Cambria Math" panose="02040503050406030204" pitchFamily="18" charset="0"/>
+                        </a:rPr>
+                        <m:t>/</m:t>
+                      </m:r>
+                      <m:r>
+                        <m:rPr>
+                          <m:sty m:val="p"/>
+                        </m:rPr>
+                        <a:rPr lang="en-US" sz="1400" b="0" i="1" smtClean="0">
+                          <a:latin typeface="Cambria Math" panose="02040503050406030204" pitchFamily="18" charset="0"/>
+                        </a:rPr>
+                        <m:t>m</m:t>
+                      </m:r>
+                    </m:oMath>
+                  </m:oMathPara>
+                </a14:m>
+                <a:endParaRPr lang="en-US" sz="1400" dirty="0"/>
+              </a:p>
+            </p:txBody>
+          </p:sp>
+        </mc:Choice>
+        <mc:Fallback>
+          <p:sp>
+            <p:nvSpPr>
+              <p:cNvPr id="41" name="TextBox 40">
+                <a:extLst>
+                  <a:ext uri="{FF2B5EF4-FFF2-40B4-BE49-F238E27FC236}">
+                    <a16:creationId xmlns:a16="http://schemas.microsoft.com/office/drawing/2014/main" id="{1C9A2AB6-34FF-C04B-3E4A-D6114B70786B}"/>
+                  </a:ext>
+                </a:extLst>
+              </p:cNvPr>
+              <p:cNvSpPr txBox="1">
+                <a:spLocks noRot="1" noChangeAspect="1" noMove="1" noResize="1" noEditPoints="1" noAdjustHandles="1" noChangeArrowheads="1" noChangeShapeType="1" noTextEdit="1"/>
+              </p:cNvSpPr>
+              <p:nvPr/>
+            </p:nvSpPr>
+            <p:spPr>
+              <a:xfrm>
+                <a:off x="844276" y="4260094"/>
+                <a:ext cx="7262757" cy="217817"/>
+              </a:xfrm>
+              <a:prstGeom prst="rect">
+                <a:avLst/>
+              </a:prstGeom>
+              <a:blipFill>
+                <a:blip r:embed="rId7"/>
+                <a:stretch>
+                  <a:fillRect b="-38889"/>
+                </a:stretch>
+              </a:blipFill>
+            </p:spPr>
+            <p:txBody>
+              <a:bodyPr/>
+              <a:lstStyle/>
+              <a:p>
+                <a:r>
+                  <a:rPr lang="en-US">
+                    <a:noFill/>
+                  </a:rPr>
+                  <a:t> </a:t>
+                </a:r>
+              </a:p>
+            </p:txBody>
+          </p:sp>
+        </mc:Fallback>
+      </mc:AlternateContent>
     </p:spTree>
     <p:extLst>
       <p:ext uri="{BB962C8B-B14F-4D97-AF65-F5344CB8AC3E}">
@@ -17773,6 +20762,1283 @@
           <a:xfrm>
             <a:off x="10432471" y="6323329"/>
             <a:ext cx="1492133" cy="496892"/>
+          </a:xfrm>
+          <a:prstGeom prst="rect">
+            <a:avLst/>
+          </a:prstGeom>
+        </p:spPr>
+      </p:pic>
+      <p:sp>
+        <p:nvSpPr>
+          <p:cNvPr id="2" name="TextBox 1">
+            <a:extLst>
+              <a:ext uri="{FF2B5EF4-FFF2-40B4-BE49-F238E27FC236}">
+                <a16:creationId xmlns:a16="http://schemas.microsoft.com/office/drawing/2014/main" id="{63840A7C-B266-394F-8E44-FE49E600FCB9}"/>
+              </a:ext>
+            </a:extLst>
+          </p:cNvPr>
+          <p:cNvSpPr txBox="1"/>
+          <p:nvPr/>
+        </p:nvSpPr>
+        <p:spPr>
+          <a:xfrm>
+            <a:off x="1105786" y="1765005"/>
+            <a:ext cx="2466754" cy="369332"/>
+          </a:xfrm>
+          <a:prstGeom prst="rect">
+            <a:avLst/>
+          </a:prstGeom>
+          <a:noFill/>
+        </p:spPr>
+        <p:txBody>
+          <a:bodyPr wrap="square" rtlCol="0">
+            <a:spAutoFit/>
+          </a:bodyPr>
+          <a:lstStyle/>
+          <a:p>
+            <a:r>
+              <a:rPr lang="en-US" dirty="0"/>
+              <a:t>Tip-charged threads</a:t>
+            </a:r>
+          </a:p>
+        </p:txBody>
+      </p:sp>
+      <p:sp>
+        <p:nvSpPr>
+          <p:cNvPr id="3" name="TextBox 2">
+            <a:extLst>
+              <a:ext uri="{FF2B5EF4-FFF2-40B4-BE49-F238E27FC236}">
+                <a16:creationId xmlns:a16="http://schemas.microsoft.com/office/drawing/2014/main" id="{010A5F86-AA61-3AAB-E90B-C5E53D6771EE}"/>
+              </a:ext>
+            </a:extLst>
+          </p:cNvPr>
+          <p:cNvSpPr txBox="1"/>
+          <p:nvPr/>
+        </p:nvSpPr>
+        <p:spPr>
+          <a:xfrm>
+            <a:off x="7159255" y="1765005"/>
+            <a:ext cx="3273216" cy="369332"/>
+          </a:xfrm>
+          <a:prstGeom prst="rect">
+            <a:avLst/>
+          </a:prstGeom>
+          <a:noFill/>
+        </p:spPr>
+        <p:txBody>
+          <a:bodyPr wrap="square" rtlCol="0">
+            <a:spAutoFit/>
+          </a:bodyPr>
+          <a:lstStyle/>
+          <a:p>
+            <a:r>
+              <a:rPr lang="en-US" dirty="0"/>
+              <a:t>Uniformly distributed charges</a:t>
+            </a:r>
+          </a:p>
+        </p:txBody>
+      </p:sp>
+      <mc:AlternateContent xmlns:mc="http://schemas.openxmlformats.org/markup-compatibility/2006">
+        <mc:Choice xmlns:a14="http://schemas.microsoft.com/office/drawing/2010/main" Requires="a14">
+          <p:sp>
+            <p:nvSpPr>
+              <p:cNvPr id="6" name="TextBox 5">
+                <a:extLst>
+                  <a:ext uri="{FF2B5EF4-FFF2-40B4-BE49-F238E27FC236}">
+                    <a16:creationId xmlns:a16="http://schemas.microsoft.com/office/drawing/2014/main" id="{12BBBF84-F22D-2E38-4D45-4B3908865412}"/>
+                  </a:ext>
+                </a:extLst>
+              </p:cNvPr>
+              <p:cNvSpPr txBox="1"/>
+              <p:nvPr/>
+            </p:nvSpPr>
+            <p:spPr>
+              <a:xfrm>
+                <a:off x="1105786" y="2524516"/>
+                <a:ext cx="3591689" cy="693844"/>
+              </a:xfrm>
+              <a:prstGeom prst="rect">
+                <a:avLst/>
+              </a:prstGeom>
+              <a:noFill/>
+            </p:spPr>
+            <p:txBody>
+              <a:bodyPr wrap="none" lIns="0" tIns="0" rIns="0" bIns="0" rtlCol="0">
+                <a:spAutoFit/>
+              </a:bodyPr>
+              <a:lstStyle/>
+              <a:p>
+                <a14:m>
+                  <m:oMathPara xmlns:m="http://schemas.openxmlformats.org/officeDocument/2006/math">
+                    <m:oMathParaPr>
+                      <m:jc m:val="centerGroup"/>
+                    </m:oMathParaPr>
+                    <m:oMath xmlns:m="http://schemas.openxmlformats.org/officeDocument/2006/math">
+                      <m:acc>
+                        <m:accPr>
+                          <m:chr m:val="⃗"/>
+                          <m:ctrlPr>
+                            <a:rPr lang="en-US" b="0" i="1" smtClean="0">
+                              <a:latin typeface="Cambria Math" panose="02040503050406030204" pitchFamily="18" charset="0"/>
+                            </a:rPr>
+                          </m:ctrlPr>
+                        </m:accPr>
+                        <m:e>
+                          <m:sSub>
+                            <m:sSubPr>
+                              <m:ctrlPr>
+                                <a:rPr lang="en-US" b="0" i="1" smtClean="0">
+                                  <a:latin typeface="Cambria Math" panose="02040503050406030204" pitchFamily="18" charset="0"/>
+                                </a:rPr>
+                              </m:ctrlPr>
+                            </m:sSubPr>
+                            <m:e>
+                              <m:r>
+                                <m:rPr>
+                                  <m:sty m:val="p"/>
+                                </m:rPr>
+                                <a:rPr lang="en-US" b="0" i="1" smtClean="0">
+                                  <a:latin typeface="Cambria Math" panose="02040503050406030204" pitchFamily="18" charset="0"/>
+                                </a:rPr>
+                                <m:t>F</m:t>
+                              </m:r>
+                            </m:e>
+                            <m:sub>
+                              <m:r>
+                                <m:rPr>
+                                  <m:sty m:val="p"/>
+                                </m:rPr>
+                                <a:rPr lang="en-US" b="0" i="1" smtClean="0">
+                                  <a:latin typeface="Cambria Math" panose="02040503050406030204" pitchFamily="18" charset="0"/>
+                                </a:rPr>
+                                <m:t>r</m:t>
+                              </m:r>
+                            </m:sub>
+                          </m:sSub>
+                        </m:e>
+                      </m:acc>
+                      <m:r>
+                        <a:rPr lang="en-US" b="0" i="1" smtClean="0">
+                          <a:latin typeface="Cambria Math" panose="02040503050406030204" pitchFamily="18" charset="0"/>
+                        </a:rPr>
+                        <m:t> </m:t>
+                      </m:r>
+                      <m:r>
+                        <m:rPr>
+                          <m:sty m:val="p"/>
+                        </m:rPr>
+                        <a:rPr lang="en-US" b="0" i="1" baseline="-25000" smtClean="0">
+                          <a:latin typeface="Cambria Math" panose="02040503050406030204" pitchFamily="18" charset="0"/>
+                        </a:rPr>
+                        <m:t>tip</m:t>
+                      </m:r>
+                      <m:r>
+                        <a:rPr lang="en-US" b="0" i="1" baseline="-25000" smtClean="0">
+                          <a:latin typeface="Cambria Math" panose="02040503050406030204" pitchFamily="18" charset="0"/>
+                        </a:rPr>
+                        <m:t>,</m:t>
+                      </m:r>
+                      <m:r>
+                        <m:rPr>
+                          <m:sty m:val="p"/>
+                        </m:rPr>
+                        <a:rPr lang="en-US" b="0" i="1" baseline="-25000" smtClean="0">
+                          <a:latin typeface="Cambria Math" panose="02040503050406030204" pitchFamily="18" charset="0"/>
+                        </a:rPr>
+                        <m:t>k</m:t>
+                      </m:r>
+                      <m:r>
+                        <a:rPr lang="en-US" b="0" i="1" smtClean="0">
+                          <a:latin typeface="Cambria Math" panose="02040503050406030204" pitchFamily="18" charset="0"/>
+                        </a:rPr>
+                        <m:t>=</m:t>
+                      </m:r>
+                      <m:f>
+                        <m:fPr>
+                          <m:ctrlPr>
+                            <a:rPr lang="en-US" i="1" smtClean="0">
+                              <a:latin typeface="Cambria Math" panose="02040503050406030204" pitchFamily="18" charset="0"/>
+                            </a:rPr>
+                          </m:ctrlPr>
+                        </m:fPr>
+                        <m:num>
+                          <m:sSup>
+                            <m:sSupPr>
+                              <m:ctrlPr>
+                                <a:rPr lang="en-US" i="1" smtClean="0">
+                                  <a:latin typeface="Cambria Math" panose="02040503050406030204" pitchFamily="18" charset="0"/>
+                                </a:rPr>
+                              </m:ctrlPr>
+                            </m:sSupPr>
+                            <m:e>
+                              <m:r>
+                                <m:rPr>
+                                  <m:sty m:val="p"/>
+                                </m:rPr>
+                                <a:rPr lang="en-US" b="0" i="1" smtClean="0">
+                                  <a:latin typeface="Cambria Math" panose="02040503050406030204" pitchFamily="18" charset="0"/>
+                                </a:rPr>
+                                <m:t>q</m:t>
+                              </m:r>
+                            </m:e>
+                            <m:sup>
+                              <m:r>
+                                <a:rPr lang="en-US" b="0" i="1" smtClean="0">
+                                  <a:latin typeface="Cambria Math" panose="02040503050406030204" pitchFamily="18" charset="0"/>
+                                </a:rPr>
+                                <m:t>2</m:t>
+                              </m:r>
+                            </m:sup>
+                          </m:sSup>
+                        </m:num>
+                        <m:den>
+                          <m:r>
+                            <a:rPr lang="en-US" b="0" i="1" smtClean="0">
+                              <a:latin typeface="Cambria Math" panose="02040503050406030204" pitchFamily="18" charset="0"/>
+                            </a:rPr>
+                            <m:t>4</m:t>
+                          </m:r>
+                          <m:r>
+                            <m:rPr>
+                              <m:sty m:val="p"/>
+                            </m:rPr>
+                            <a:rPr lang="en-US" b="0" i="1" smtClean="0">
+                              <a:latin typeface="Cambria Math" panose="02040503050406030204" pitchFamily="18" charset="0"/>
+                            </a:rPr>
+                            <m:t>π</m:t>
+                          </m:r>
+                          <m:sSub>
+                            <m:sSubPr>
+                              <m:ctrlPr>
+                                <a:rPr lang="en-US" b="0" i="1" smtClean="0">
+                                  <a:latin typeface="Cambria Math" panose="02040503050406030204" pitchFamily="18" charset="0"/>
+                                </a:rPr>
+                              </m:ctrlPr>
+                            </m:sSubPr>
+                            <m:e>
+                              <m:r>
+                                <m:rPr>
+                                  <m:sty m:val="p"/>
+                                </m:rPr>
+                                <a:rPr lang="en-US" b="0" i="1" smtClean="0">
+                                  <a:latin typeface="Cambria Math" panose="02040503050406030204" pitchFamily="18" charset="0"/>
+                                </a:rPr>
+                                <m:t>ϵ</m:t>
+                              </m:r>
+                            </m:e>
+                            <m:sub>
+                              <m:r>
+                                <a:rPr lang="en-US" b="0" i="1" smtClean="0">
+                                  <a:latin typeface="Cambria Math" panose="02040503050406030204" pitchFamily="18" charset="0"/>
+                                </a:rPr>
+                                <m:t>0</m:t>
+                              </m:r>
+                            </m:sub>
+                          </m:sSub>
+                        </m:den>
+                      </m:f>
+                      <m:nary>
+                        <m:naryPr>
+                          <m:chr m:val="∑"/>
+                          <m:supHide m:val="on"/>
+                          <m:ctrlPr>
+                            <a:rPr lang="en-US" i="1" smtClean="0">
+                              <a:latin typeface="Cambria Math" panose="02040503050406030204" pitchFamily="18" charset="0"/>
+                            </a:rPr>
+                          </m:ctrlPr>
+                        </m:naryPr>
+                        <m:sub>
+                          <m:r>
+                            <m:rPr>
+                              <m:sty m:val="p"/>
+                              <m:brk m:alnAt="7"/>
+                            </m:rPr>
+                            <a:rPr lang="en-US" b="0" i="1" smtClean="0">
+                              <a:latin typeface="Cambria Math" panose="02040503050406030204" pitchFamily="18" charset="0"/>
+                            </a:rPr>
+                            <m:t>i</m:t>
+                          </m:r>
+                          <m:r>
+                            <a:rPr lang="en-US" b="0" i="1" smtClean="0">
+                              <a:latin typeface="Cambria Math" panose="02040503050406030204" pitchFamily="18" charset="0"/>
+                              <a:ea typeface="Cambria Math" panose="02040503050406030204" pitchFamily="18" charset="0"/>
+                            </a:rPr>
+                            <m:t>≠</m:t>
+                          </m:r>
+                          <m:r>
+                            <m:rPr>
+                              <m:sty m:val="p"/>
+                            </m:rPr>
+                            <a:rPr lang="en-US" b="0" i="1" smtClean="0">
+                              <a:latin typeface="Cambria Math" panose="02040503050406030204" pitchFamily="18" charset="0"/>
+                              <a:ea typeface="Cambria Math" panose="02040503050406030204" pitchFamily="18" charset="0"/>
+                            </a:rPr>
+                            <m:t>k</m:t>
+                          </m:r>
+                        </m:sub>
+                        <m:sup/>
+                        <m:e>
+                          <m:f>
+                            <m:fPr>
+                              <m:ctrlPr>
+                                <a:rPr lang="en-US" i="1" smtClean="0">
+                                  <a:latin typeface="Cambria Math" panose="02040503050406030204" pitchFamily="18" charset="0"/>
+                                </a:rPr>
+                              </m:ctrlPr>
+                            </m:fPr>
+                            <m:num>
+                              <m:sSub>
+                                <m:sSubPr>
+                                  <m:ctrlPr>
+                                    <a:rPr lang="en-US" i="1" smtClean="0">
+                                      <a:latin typeface="Cambria Math" panose="02040503050406030204" pitchFamily="18" charset="0"/>
+                                    </a:rPr>
+                                  </m:ctrlPr>
+                                </m:sSubPr>
+                                <m:e>
+                                  <m:r>
+                                    <m:rPr>
+                                      <m:sty m:val="p"/>
+                                    </m:rPr>
+                                    <a:rPr lang="en-US" b="0" i="1" smtClean="0">
+                                      <a:latin typeface="Cambria Math" panose="02040503050406030204" pitchFamily="18" charset="0"/>
+                                    </a:rPr>
+                                    <m:t>x</m:t>
+                                  </m:r>
+                                </m:e>
+                                <m:sub>
+                                  <m:r>
+                                    <m:rPr>
+                                      <m:sty m:val="p"/>
+                                    </m:rPr>
+                                    <a:rPr lang="en-US" b="0" i="1" smtClean="0">
+                                      <a:latin typeface="Cambria Math" panose="02040503050406030204" pitchFamily="18" charset="0"/>
+                                    </a:rPr>
+                                    <m:t>k</m:t>
+                                  </m:r>
+                                </m:sub>
+                              </m:sSub>
+                              <m:r>
+                                <a:rPr lang="en-US" b="0" i="1" smtClean="0">
+                                  <a:latin typeface="Cambria Math" panose="02040503050406030204" pitchFamily="18" charset="0"/>
+                                </a:rPr>
+                                <m:t>(</m:t>
+                              </m:r>
+                              <m:r>
+                                <m:rPr>
+                                  <m:sty m:val="p"/>
+                                </m:rPr>
+                                <a:rPr lang="en-US" b="0" i="1" smtClean="0">
+                                  <a:latin typeface="Cambria Math" panose="02040503050406030204" pitchFamily="18" charset="0"/>
+                                </a:rPr>
+                                <m:t>L</m:t>
+                              </m:r>
+                              <m:r>
+                                <a:rPr lang="en-US" b="0" i="1" smtClean="0">
+                                  <a:latin typeface="Cambria Math" panose="02040503050406030204" pitchFamily="18" charset="0"/>
+                                </a:rPr>
+                                <m:t>) -</m:t>
+                              </m:r>
+                              <m:sSub>
+                                <m:sSubPr>
+                                  <m:ctrlPr>
+                                    <a:rPr lang="en-US" i="1">
+                                      <a:latin typeface="Cambria Math" panose="02040503050406030204" pitchFamily="18" charset="0"/>
+                                    </a:rPr>
+                                  </m:ctrlPr>
+                                </m:sSubPr>
+                                <m:e>
+                                  <m:r>
+                                    <a:rPr lang="en-US" b="0" i="1" smtClean="0">
+                                      <a:latin typeface="Cambria Math" panose="02040503050406030204" pitchFamily="18" charset="0"/>
+                                    </a:rPr>
+                                    <m:t> </m:t>
+                                  </m:r>
+                                  <m:r>
+                                    <m:rPr>
+                                      <m:sty m:val="p"/>
+                                    </m:rPr>
+                                    <a:rPr lang="en-US" i="1">
+                                      <a:latin typeface="Cambria Math" panose="02040503050406030204" pitchFamily="18" charset="0"/>
+                                    </a:rPr>
+                                    <m:t>x</m:t>
+                                  </m:r>
+                                </m:e>
+                                <m:sub>
+                                  <m:r>
+                                    <m:rPr>
+                                      <m:sty m:val="p"/>
+                                    </m:rPr>
+                                    <a:rPr lang="en-US" b="0" i="1" smtClean="0">
+                                      <a:latin typeface="Cambria Math" panose="02040503050406030204" pitchFamily="18" charset="0"/>
+                                    </a:rPr>
+                                    <m:t>i</m:t>
+                                  </m:r>
+                                </m:sub>
+                              </m:sSub>
+                              <m:r>
+                                <a:rPr lang="en-US" i="1">
+                                  <a:latin typeface="Cambria Math" panose="02040503050406030204" pitchFamily="18" charset="0"/>
+                                </a:rPr>
+                                <m:t>(</m:t>
+                              </m:r>
+                              <m:r>
+                                <m:rPr>
+                                  <m:sty m:val="p"/>
+                                </m:rPr>
+                                <a:rPr lang="en-US" i="1">
+                                  <a:latin typeface="Cambria Math" panose="02040503050406030204" pitchFamily="18" charset="0"/>
+                                </a:rPr>
+                                <m:t>L</m:t>
+                              </m:r>
+                              <m:r>
+                                <a:rPr lang="en-US" i="1">
+                                  <a:latin typeface="Cambria Math" panose="02040503050406030204" pitchFamily="18" charset="0"/>
+                                </a:rPr>
+                                <m:t>)</m:t>
+                              </m:r>
+                            </m:num>
+                            <m:den>
+                              <m:sSup>
+                                <m:sSupPr>
+                                  <m:ctrlPr>
+                                    <a:rPr lang="en-US" i="1" smtClean="0">
+                                      <a:latin typeface="Cambria Math" panose="02040503050406030204" pitchFamily="18" charset="0"/>
+                                    </a:rPr>
+                                  </m:ctrlPr>
+                                </m:sSupPr>
+                                <m:e>
+                                  <m:d>
+                                    <m:dPr>
+                                      <m:begChr m:val="‖"/>
+                                      <m:endChr m:val="‖"/>
+                                      <m:ctrlPr>
+                                        <a:rPr lang="en-US" i="1" smtClean="0">
+                                          <a:latin typeface="Cambria Math" panose="02040503050406030204" pitchFamily="18" charset="0"/>
+                                        </a:rPr>
+                                      </m:ctrlPr>
+                                    </m:dPr>
+                                    <m:e>
+                                      <m:sSub>
+                                        <m:sSubPr>
+                                          <m:ctrlPr>
+                                            <a:rPr lang="en-US" i="1">
+                                              <a:latin typeface="Cambria Math" panose="02040503050406030204" pitchFamily="18" charset="0"/>
+                                            </a:rPr>
+                                          </m:ctrlPr>
+                                        </m:sSubPr>
+                                        <m:e>
+                                          <m:r>
+                                            <m:rPr>
+                                              <m:sty m:val="p"/>
+                                            </m:rPr>
+                                            <a:rPr lang="en-US" i="1">
+                                              <a:latin typeface="Cambria Math" panose="02040503050406030204" pitchFamily="18" charset="0"/>
+                                            </a:rPr>
+                                            <m:t>x</m:t>
+                                          </m:r>
+                                        </m:e>
+                                        <m:sub>
+                                          <m:r>
+                                            <m:rPr>
+                                              <m:sty m:val="p"/>
+                                            </m:rPr>
+                                            <a:rPr lang="en-US" i="1">
+                                              <a:latin typeface="Cambria Math" panose="02040503050406030204" pitchFamily="18" charset="0"/>
+                                            </a:rPr>
+                                            <m:t>k</m:t>
+                                          </m:r>
+                                        </m:sub>
+                                      </m:sSub>
+                                      <m:r>
+                                        <a:rPr lang="en-US" i="1">
+                                          <a:latin typeface="Cambria Math" panose="02040503050406030204" pitchFamily="18" charset="0"/>
+                                        </a:rPr>
+                                        <m:t>(</m:t>
+                                      </m:r>
+                                      <m:r>
+                                        <m:rPr>
+                                          <m:sty m:val="p"/>
+                                        </m:rPr>
+                                        <a:rPr lang="en-US" i="1">
+                                          <a:latin typeface="Cambria Math" panose="02040503050406030204" pitchFamily="18" charset="0"/>
+                                        </a:rPr>
+                                        <m:t>L</m:t>
+                                      </m:r>
+                                      <m:r>
+                                        <a:rPr lang="en-US" i="1">
+                                          <a:latin typeface="Cambria Math" panose="02040503050406030204" pitchFamily="18" charset="0"/>
+                                        </a:rPr>
+                                        <m:t>) −</m:t>
+                                      </m:r>
+                                      <m:sSub>
+                                        <m:sSubPr>
+                                          <m:ctrlPr>
+                                            <a:rPr lang="en-US" i="1">
+                                              <a:latin typeface="Cambria Math" panose="02040503050406030204" pitchFamily="18" charset="0"/>
+                                            </a:rPr>
+                                          </m:ctrlPr>
+                                        </m:sSubPr>
+                                        <m:e>
+                                          <m:r>
+                                            <a:rPr lang="en-US" i="1">
+                                              <a:latin typeface="Cambria Math" panose="02040503050406030204" pitchFamily="18" charset="0"/>
+                                            </a:rPr>
+                                            <m:t> </m:t>
+                                          </m:r>
+                                          <m:r>
+                                            <m:rPr>
+                                              <m:sty m:val="p"/>
+                                            </m:rPr>
+                                            <a:rPr lang="en-US" i="1">
+                                              <a:latin typeface="Cambria Math" panose="02040503050406030204" pitchFamily="18" charset="0"/>
+                                            </a:rPr>
+                                            <m:t>x</m:t>
+                                          </m:r>
+                                        </m:e>
+                                        <m:sub>
+                                          <m:r>
+                                            <m:rPr>
+                                              <m:sty m:val="p"/>
+                                            </m:rPr>
+                                            <a:rPr lang="en-US" i="1">
+                                              <a:latin typeface="Cambria Math" panose="02040503050406030204" pitchFamily="18" charset="0"/>
+                                            </a:rPr>
+                                            <m:t>i</m:t>
+                                          </m:r>
+                                        </m:sub>
+                                      </m:sSub>
+                                      <m:r>
+                                        <a:rPr lang="en-US" i="1">
+                                          <a:latin typeface="Cambria Math" panose="02040503050406030204" pitchFamily="18" charset="0"/>
+                                        </a:rPr>
+                                        <m:t>(</m:t>
+                                      </m:r>
+                                      <m:r>
+                                        <m:rPr>
+                                          <m:sty m:val="p"/>
+                                        </m:rPr>
+                                        <a:rPr lang="en-US" i="1">
+                                          <a:latin typeface="Cambria Math" panose="02040503050406030204" pitchFamily="18" charset="0"/>
+                                        </a:rPr>
+                                        <m:t>L</m:t>
+                                      </m:r>
+                                      <m:r>
+                                        <a:rPr lang="en-US" i="1">
+                                          <a:latin typeface="Cambria Math" panose="02040503050406030204" pitchFamily="18" charset="0"/>
+                                        </a:rPr>
+                                        <m:t>)</m:t>
+                                      </m:r>
+                                    </m:e>
+                                  </m:d>
+                                </m:e>
+                                <m:sup>
+                                  <m:r>
+                                    <a:rPr lang="en-US" b="0" i="1" smtClean="0">
+                                      <a:latin typeface="Cambria Math" panose="02040503050406030204" pitchFamily="18" charset="0"/>
+                                    </a:rPr>
+                                    <m:t>3</m:t>
+                                  </m:r>
+                                </m:sup>
+                              </m:sSup>
+                            </m:den>
+                          </m:f>
+                        </m:e>
+                      </m:nary>
+                    </m:oMath>
+                  </m:oMathPara>
+                </a14:m>
+                <a:endParaRPr lang="en-US" dirty="0"/>
+              </a:p>
+            </p:txBody>
+          </p:sp>
+        </mc:Choice>
+        <mc:Fallback>
+          <p:sp>
+            <p:nvSpPr>
+              <p:cNvPr id="6" name="TextBox 5">
+                <a:extLst>
+                  <a:ext uri="{FF2B5EF4-FFF2-40B4-BE49-F238E27FC236}">
+                    <a16:creationId xmlns:a16="http://schemas.microsoft.com/office/drawing/2014/main" id="{12BBBF84-F22D-2E38-4D45-4B3908865412}"/>
+                  </a:ext>
+                </a:extLst>
+              </p:cNvPr>
+              <p:cNvSpPr txBox="1">
+                <a:spLocks noRot="1" noChangeAspect="1" noMove="1" noResize="1" noEditPoints="1" noAdjustHandles="1" noChangeArrowheads="1" noChangeShapeType="1" noTextEdit="1"/>
+              </p:cNvSpPr>
+              <p:nvPr/>
+            </p:nvSpPr>
+            <p:spPr>
+              <a:xfrm>
+                <a:off x="1105786" y="2524516"/>
+                <a:ext cx="3591689" cy="693844"/>
+              </a:xfrm>
+              <a:prstGeom prst="rect">
+                <a:avLst/>
+              </a:prstGeom>
+              <a:blipFill>
+                <a:blip r:embed="rId3"/>
+                <a:stretch>
+                  <a:fillRect l="-702" t="-135714" b="-191071"/>
+                </a:stretch>
+              </a:blipFill>
+            </p:spPr>
+            <p:txBody>
+              <a:bodyPr/>
+              <a:lstStyle/>
+              <a:p>
+                <a:r>
+                  <a:rPr lang="en-US">
+                    <a:noFill/>
+                  </a:rPr>
+                  <a:t> </a:t>
+                </a:r>
+              </a:p>
+            </p:txBody>
+          </p:sp>
+        </mc:Fallback>
+      </mc:AlternateContent>
+      <mc:AlternateContent xmlns:mc="http://schemas.openxmlformats.org/markup-compatibility/2006">
+        <mc:Choice xmlns:a14="http://schemas.microsoft.com/office/drawing/2010/main" Requires="a14">
+          <p:sp>
+            <p:nvSpPr>
+              <p:cNvPr id="7" name="TextBox 6">
+                <a:extLst>
+                  <a:ext uri="{FF2B5EF4-FFF2-40B4-BE49-F238E27FC236}">
+                    <a16:creationId xmlns:a16="http://schemas.microsoft.com/office/drawing/2014/main" id="{91C1BE7D-379A-B7BC-4B78-511D9CD231C8}"/>
+                  </a:ext>
+                </a:extLst>
+              </p:cNvPr>
+              <p:cNvSpPr txBox="1"/>
+              <p:nvPr/>
+            </p:nvSpPr>
+            <p:spPr>
+              <a:xfrm>
+                <a:off x="7159255" y="2524516"/>
+                <a:ext cx="4005519" cy="721351"/>
+              </a:xfrm>
+              <a:prstGeom prst="rect">
+                <a:avLst/>
+              </a:prstGeom>
+              <a:noFill/>
+            </p:spPr>
+            <p:txBody>
+              <a:bodyPr wrap="none" lIns="0" tIns="0" rIns="0" bIns="0" rtlCol="0">
+                <a:spAutoFit/>
+              </a:bodyPr>
+              <a:lstStyle/>
+              <a:p>
+                <a14:m>
+                  <m:oMathPara xmlns:m="http://schemas.openxmlformats.org/officeDocument/2006/math">
+                    <m:oMathParaPr>
+                      <m:jc m:val="centerGroup"/>
+                    </m:oMathParaPr>
+                    <m:oMath xmlns:m="http://schemas.openxmlformats.org/officeDocument/2006/math">
+                      <m:acc>
+                        <m:accPr>
+                          <m:chr m:val="⃗"/>
+                          <m:ctrlPr>
+                            <a:rPr lang="en-US" b="0" i="1" smtClean="0">
+                              <a:latin typeface="Cambria Math" panose="02040503050406030204" pitchFamily="18" charset="0"/>
+                            </a:rPr>
+                          </m:ctrlPr>
+                        </m:accPr>
+                        <m:e>
+                          <m:sSub>
+                            <m:sSubPr>
+                              <m:ctrlPr>
+                                <a:rPr lang="en-US" b="0" i="1" smtClean="0">
+                                  <a:latin typeface="Cambria Math" panose="02040503050406030204" pitchFamily="18" charset="0"/>
+                                </a:rPr>
+                              </m:ctrlPr>
+                            </m:sSubPr>
+                            <m:e>
+                              <m:r>
+                                <m:rPr>
+                                  <m:sty m:val="p"/>
+                                </m:rPr>
+                                <a:rPr lang="en-US" b="0" i="1" smtClean="0">
+                                  <a:latin typeface="Cambria Math" panose="02040503050406030204" pitchFamily="18" charset="0"/>
+                                </a:rPr>
+                                <m:t>f</m:t>
+                              </m:r>
+                            </m:e>
+                            <m:sub>
+                              <m:r>
+                                <m:rPr>
+                                  <m:sty m:val="p"/>
+                                </m:rPr>
+                                <a:rPr lang="en-US" b="0" i="1" smtClean="0">
+                                  <a:latin typeface="Cambria Math" panose="02040503050406030204" pitchFamily="18" charset="0"/>
+                                </a:rPr>
+                                <m:t>r</m:t>
+                              </m:r>
+                            </m:sub>
+                          </m:sSub>
+                        </m:e>
+                      </m:acc>
+                      <m:r>
+                        <a:rPr lang="en-US" b="0" i="1" smtClean="0">
+                          <a:latin typeface="Cambria Math" panose="02040503050406030204" pitchFamily="18" charset="0"/>
+                        </a:rPr>
+                        <m:t> </m:t>
+                      </m:r>
+                      <m:r>
+                        <a:rPr lang="en-US" b="0" i="1" baseline="-25000" smtClean="0">
+                          <a:latin typeface="Cambria Math" panose="02040503050406030204" pitchFamily="18" charset="0"/>
+                        </a:rPr>
+                        <m:t>,</m:t>
+                      </m:r>
+                      <m:r>
+                        <m:rPr>
+                          <m:sty m:val="p"/>
+                        </m:rPr>
+                        <a:rPr lang="en-US" b="0" i="1" baseline="-25000" smtClean="0">
+                          <a:latin typeface="Cambria Math" panose="02040503050406030204" pitchFamily="18" charset="0"/>
+                        </a:rPr>
+                        <m:t>k</m:t>
+                      </m:r>
+                      <m:r>
+                        <a:rPr lang="en-US" b="0" i="1" smtClean="0">
+                          <a:latin typeface="Cambria Math" panose="02040503050406030204" pitchFamily="18" charset="0"/>
+                        </a:rPr>
+                        <m:t>=</m:t>
+                      </m:r>
+                      <m:f>
+                        <m:fPr>
+                          <m:ctrlPr>
+                            <a:rPr lang="en-US" i="1" smtClean="0">
+                              <a:latin typeface="Cambria Math" panose="02040503050406030204" pitchFamily="18" charset="0"/>
+                            </a:rPr>
+                          </m:ctrlPr>
+                        </m:fPr>
+                        <m:num>
+                          <m:sSup>
+                            <m:sSupPr>
+                              <m:ctrlPr>
+                                <a:rPr lang="en-US" i="1" smtClean="0">
+                                  <a:latin typeface="Cambria Math" panose="02040503050406030204" pitchFamily="18" charset="0"/>
+                                </a:rPr>
+                              </m:ctrlPr>
+                            </m:sSupPr>
+                            <m:e>
+                              <m:r>
+                                <m:rPr>
+                                  <m:sty m:val="p"/>
+                                </m:rPr>
+                                <a:rPr lang="en-US" b="0" i="1" smtClean="0">
+                                  <a:latin typeface="Cambria Math" panose="02040503050406030204" pitchFamily="18" charset="0"/>
+                                </a:rPr>
+                                <m:t>λ</m:t>
+                              </m:r>
+                            </m:e>
+                            <m:sup>
+                              <m:r>
+                                <a:rPr lang="en-US" b="0" i="1" smtClean="0">
+                                  <a:latin typeface="Cambria Math" panose="02040503050406030204" pitchFamily="18" charset="0"/>
+                                </a:rPr>
+                                <m:t>2</m:t>
+                              </m:r>
+                            </m:sup>
+                          </m:sSup>
+                        </m:num>
+                        <m:den>
+                          <m:r>
+                            <a:rPr lang="en-US" b="0" i="1" smtClean="0">
+                              <a:latin typeface="Cambria Math" panose="02040503050406030204" pitchFamily="18" charset="0"/>
+                            </a:rPr>
+                            <m:t>4</m:t>
+                          </m:r>
+                          <m:r>
+                            <m:rPr>
+                              <m:sty m:val="p"/>
+                            </m:rPr>
+                            <a:rPr lang="en-US" b="0" i="1" smtClean="0">
+                              <a:latin typeface="Cambria Math" panose="02040503050406030204" pitchFamily="18" charset="0"/>
+                            </a:rPr>
+                            <m:t>π</m:t>
+                          </m:r>
+                          <m:sSub>
+                            <m:sSubPr>
+                              <m:ctrlPr>
+                                <a:rPr lang="en-US" b="0" i="1" smtClean="0">
+                                  <a:latin typeface="Cambria Math" panose="02040503050406030204" pitchFamily="18" charset="0"/>
+                                </a:rPr>
+                              </m:ctrlPr>
+                            </m:sSubPr>
+                            <m:e>
+                              <m:r>
+                                <m:rPr>
+                                  <m:sty m:val="p"/>
+                                </m:rPr>
+                                <a:rPr lang="en-US" b="0" i="1" smtClean="0">
+                                  <a:latin typeface="Cambria Math" panose="02040503050406030204" pitchFamily="18" charset="0"/>
+                                </a:rPr>
+                                <m:t>ϵ</m:t>
+                              </m:r>
+                            </m:e>
+                            <m:sub>
+                              <m:r>
+                                <a:rPr lang="en-US" b="0" i="1" smtClean="0">
+                                  <a:latin typeface="Cambria Math" panose="02040503050406030204" pitchFamily="18" charset="0"/>
+                                </a:rPr>
+                                <m:t>0</m:t>
+                              </m:r>
+                            </m:sub>
+                          </m:sSub>
+                        </m:den>
+                      </m:f>
+                      <m:nary>
+                        <m:naryPr>
+                          <m:chr m:val="∑"/>
+                          <m:supHide m:val="on"/>
+                          <m:ctrlPr>
+                            <a:rPr lang="en-US" i="1" smtClean="0">
+                              <a:latin typeface="Cambria Math" panose="02040503050406030204" pitchFamily="18" charset="0"/>
+                            </a:rPr>
+                          </m:ctrlPr>
+                        </m:naryPr>
+                        <m:sub>
+                          <m:r>
+                            <m:rPr>
+                              <m:sty m:val="p"/>
+                              <m:brk m:alnAt="7"/>
+                            </m:rPr>
+                            <a:rPr lang="en-US" b="0" i="1" smtClean="0">
+                              <a:latin typeface="Cambria Math" panose="02040503050406030204" pitchFamily="18" charset="0"/>
+                            </a:rPr>
+                            <m:t>i</m:t>
+                          </m:r>
+                          <m:r>
+                            <a:rPr lang="en-US" b="0" i="1" smtClean="0">
+                              <a:latin typeface="Cambria Math" panose="02040503050406030204" pitchFamily="18" charset="0"/>
+                              <a:ea typeface="Cambria Math" panose="02040503050406030204" pitchFamily="18" charset="0"/>
+                            </a:rPr>
+                            <m:t>≠</m:t>
+                          </m:r>
+                          <m:r>
+                            <m:rPr>
+                              <m:sty m:val="p"/>
+                            </m:rPr>
+                            <a:rPr lang="en-US" b="0" i="1" smtClean="0">
+                              <a:latin typeface="Cambria Math" panose="02040503050406030204" pitchFamily="18" charset="0"/>
+                              <a:ea typeface="Cambria Math" panose="02040503050406030204" pitchFamily="18" charset="0"/>
+                            </a:rPr>
+                            <m:t>k</m:t>
+                          </m:r>
+                        </m:sub>
+                        <m:sup/>
+                        <m:e>
+                          <m:nary>
+                            <m:naryPr>
+                              <m:ctrlPr>
+                                <a:rPr lang="en-US" i="1" smtClean="0">
+                                  <a:latin typeface="Cambria Math" panose="02040503050406030204" pitchFamily="18" charset="0"/>
+                                </a:rPr>
+                              </m:ctrlPr>
+                            </m:naryPr>
+                            <m:sub>
+                              <m:r>
+                                <m:rPr>
+                                  <m:brk m:alnAt="23"/>
+                                </m:rPr>
+                                <a:rPr lang="en-US" b="0" i="1" smtClean="0">
+                                  <a:latin typeface="Cambria Math" panose="02040503050406030204" pitchFamily="18" charset="0"/>
+                                </a:rPr>
+                                <m:t>0</m:t>
+                              </m:r>
+                            </m:sub>
+                            <m:sup>
+                              <m:r>
+                                <m:rPr>
+                                  <m:sty m:val="p"/>
+                                </m:rPr>
+                                <a:rPr lang="en-US" b="0" i="1" smtClean="0">
+                                  <a:latin typeface="Cambria Math" panose="02040503050406030204" pitchFamily="18" charset="0"/>
+                                </a:rPr>
+                                <m:t>L</m:t>
+                              </m:r>
+                            </m:sup>
+                            <m:e>
+                              <m:f>
+                                <m:fPr>
+                                  <m:ctrlPr>
+                                    <a:rPr lang="en-US" i="1">
+                                      <a:latin typeface="Cambria Math" panose="02040503050406030204" pitchFamily="18" charset="0"/>
+                                    </a:rPr>
+                                  </m:ctrlPr>
+                                </m:fPr>
+                                <m:num>
+                                  <m:sSub>
+                                    <m:sSubPr>
+                                      <m:ctrlPr>
+                                        <a:rPr lang="en-US" i="1">
+                                          <a:latin typeface="Cambria Math" panose="02040503050406030204" pitchFamily="18" charset="0"/>
+                                        </a:rPr>
+                                      </m:ctrlPr>
+                                    </m:sSubPr>
+                                    <m:e>
+                                      <m:r>
+                                        <m:rPr>
+                                          <m:sty m:val="p"/>
+                                        </m:rPr>
+                                        <a:rPr lang="en-US" i="1">
+                                          <a:latin typeface="Cambria Math" panose="02040503050406030204" pitchFamily="18" charset="0"/>
+                                        </a:rPr>
+                                        <m:t>x</m:t>
+                                      </m:r>
+                                    </m:e>
+                                    <m:sub>
+                                      <m:r>
+                                        <m:rPr>
+                                          <m:sty m:val="p"/>
+                                        </m:rPr>
+                                        <a:rPr lang="en-US" i="1">
+                                          <a:latin typeface="Cambria Math" panose="02040503050406030204" pitchFamily="18" charset="0"/>
+                                        </a:rPr>
+                                        <m:t>k</m:t>
+                                      </m:r>
+                                    </m:sub>
+                                  </m:sSub>
+                                  <m:r>
+                                    <a:rPr lang="en-US" i="1">
+                                      <a:latin typeface="Cambria Math" panose="02040503050406030204" pitchFamily="18" charset="0"/>
+                                    </a:rPr>
+                                    <m:t>(</m:t>
+                                  </m:r>
+                                  <m:r>
+                                    <m:rPr>
+                                      <m:sty m:val="p"/>
+                                    </m:rPr>
+                                    <a:rPr lang="en-US" b="0" i="1" smtClean="0">
+                                      <a:latin typeface="Cambria Math" panose="02040503050406030204" pitchFamily="18" charset="0"/>
+                                    </a:rPr>
+                                    <m:t>s</m:t>
+                                  </m:r>
+                                  <m:r>
+                                    <a:rPr lang="en-US" i="1">
+                                      <a:latin typeface="Cambria Math" panose="02040503050406030204" pitchFamily="18" charset="0"/>
+                                    </a:rPr>
+                                    <m:t>) −</m:t>
+                                  </m:r>
+                                  <m:sSub>
+                                    <m:sSubPr>
+                                      <m:ctrlPr>
+                                        <a:rPr lang="en-US" i="1">
+                                          <a:latin typeface="Cambria Math" panose="02040503050406030204" pitchFamily="18" charset="0"/>
+                                        </a:rPr>
+                                      </m:ctrlPr>
+                                    </m:sSubPr>
+                                    <m:e>
+                                      <m:r>
+                                        <a:rPr lang="en-US" i="1">
+                                          <a:latin typeface="Cambria Math" panose="02040503050406030204" pitchFamily="18" charset="0"/>
+                                        </a:rPr>
+                                        <m:t> </m:t>
+                                      </m:r>
+                                      <m:r>
+                                        <m:rPr>
+                                          <m:sty m:val="p"/>
+                                        </m:rPr>
+                                        <a:rPr lang="en-US" i="1">
+                                          <a:latin typeface="Cambria Math" panose="02040503050406030204" pitchFamily="18" charset="0"/>
+                                        </a:rPr>
+                                        <m:t>x</m:t>
+                                      </m:r>
+                                    </m:e>
+                                    <m:sub>
+                                      <m:r>
+                                        <m:rPr>
+                                          <m:sty m:val="p"/>
+                                        </m:rPr>
+                                        <a:rPr lang="en-US" i="1">
+                                          <a:latin typeface="Cambria Math" panose="02040503050406030204" pitchFamily="18" charset="0"/>
+                                        </a:rPr>
+                                        <m:t>i</m:t>
+                                      </m:r>
+                                    </m:sub>
+                                  </m:sSub>
+                                  <m:r>
+                                    <a:rPr lang="en-US" i="1">
+                                      <a:latin typeface="Cambria Math" panose="02040503050406030204" pitchFamily="18" charset="0"/>
+                                    </a:rPr>
+                                    <m:t>(</m:t>
+                                  </m:r>
+                                  <m:r>
+                                    <m:rPr>
+                                      <m:sty m:val="p"/>
+                                    </m:rPr>
+                                    <a:rPr lang="en-US" b="0" i="1" smtClean="0">
+                                      <a:latin typeface="Cambria Math" panose="02040503050406030204" pitchFamily="18" charset="0"/>
+                                    </a:rPr>
+                                    <m:t>s</m:t>
+                                  </m:r>
+                                  <m:r>
+                                    <a:rPr lang="en-US" b="0" i="1" smtClean="0">
+                                      <a:latin typeface="Cambria Math" panose="02040503050406030204" pitchFamily="18" charset="0"/>
+                                    </a:rPr>
+                                    <m:t>’)</m:t>
+                                  </m:r>
+                                </m:num>
+                                <m:den>
+                                  <m:sSup>
+                                    <m:sSupPr>
+                                      <m:ctrlPr>
+                                        <a:rPr lang="en-US" i="1">
+                                          <a:latin typeface="Cambria Math" panose="02040503050406030204" pitchFamily="18" charset="0"/>
+                                        </a:rPr>
+                                      </m:ctrlPr>
+                                    </m:sSupPr>
+                                    <m:e>
+                                      <m:d>
+                                        <m:dPr>
+                                          <m:begChr m:val="‖"/>
+                                          <m:endChr m:val="‖"/>
+                                          <m:ctrlPr>
+                                            <a:rPr lang="en-US" i="1">
+                                              <a:latin typeface="Cambria Math" panose="02040503050406030204" pitchFamily="18" charset="0"/>
+                                            </a:rPr>
+                                          </m:ctrlPr>
+                                        </m:dPr>
+                                        <m:e>
+                                          <m:sSub>
+                                            <m:sSubPr>
+                                              <m:ctrlPr>
+                                                <a:rPr lang="en-US" i="1">
+                                                  <a:latin typeface="Cambria Math" panose="02040503050406030204" pitchFamily="18" charset="0"/>
+                                                </a:rPr>
+                                              </m:ctrlPr>
+                                            </m:sSubPr>
+                                            <m:e>
+                                              <m:r>
+                                                <m:rPr>
+                                                  <m:sty m:val="p"/>
+                                                </m:rPr>
+                                                <a:rPr lang="en-US" i="1">
+                                                  <a:latin typeface="Cambria Math" panose="02040503050406030204" pitchFamily="18" charset="0"/>
+                                                </a:rPr>
+                                                <m:t>x</m:t>
+                                              </m:r>
+                                            </m:e>
+                                            <m:sub>
+                                              <m:r>
+                                                <m:rPr>
+                                                  <m:sty m:val="p"/>
+                                                </m:rPr>
+                                                <a:rPr lang="en-US" i="1">
+                                                  <a:latin typeface="Cambria Math" panose="02040503050406030204" pitchFamily="18" charset="0"/>
+                                                </a:rPr>
+                                                <m:t>k</m:t>
+                                              </m:r>
+                                            </m:sub>
+                                          </m:sSub>
+                                          <m:r>
+                                            <a:rPr lang="en-US" i="1">
+                                              <a:latin typeface="Cambria Math" panose="02040503050406030204" pitchFamily="18" charset="0"/>
+                                            </a:rPr>
+                                            <m:t>(</m:t>
+                                          </m:r>
+                                          <m:r>
+                                            <m:rPr>
+                                              <m:sty m:val="p"/>
+                                            </m:rPr>
+                                            <a:rPr lang="en-US" b="0" i="1" smtClean="0">
+                                              <a:latin typeface="Cambria Math" panose="02040503050406030204" pitchFamily="18" charset="0"/>
+                                            </a:rPr>
+                                            <m:t>s</m:t>
+                                          </m:r>
+                                          <m:r>
+                                            <a:rPr lang="en-US" i="1">
+                                              <a:latin typeface="Cambria Math" panose="02040503050406030204" pitchFamily="18" charset="0"/>
+                                            </a:rPr>
+                                            <m:t>) −</m:t>
+                                          </m:r>
+                                          <m:sSub>
+                                            <m:sSubPr>
+                                              <m:ctrlPr>
+                                                <a:rPr lang="en-US" i="1">
+                                                  <a:latin typeface="Cambria Math" panose="02040503050406030204" pitchFamily="18" charset="0"/>
+                                                </a:rPr>
+                                              </m:ctrlPr>
+                                            </m:sSubPr>
+                                            <m:e>
+                                              <m:r>
+                                                <a:rPr lang="en-US" i="1">
+                                                  <a:latin typeface="Cambria Math" panose="02040503050406030204" pitchFamily="18" charset="0"/>
+                                                </a:rPr>
+                                                <m:t> </m:t>
+                                              </m:r>
+                                              <m:r>
+                                                <m:rPr>
+                                                  <m:sty m:val="p"/>
+                                                </m:rPr>
+                                                <a:rPr lang="en-US" i="1">
+                                                  <a:latin typeface="Cambria Math" panose="02040503050406030204" pitchFamily="18" charset="0"/>
+                                                </a:rPr>
+                                                <m:t>x</m:t>
+                                              </m:r>
+                                            </m:e>
+                                            <m:sub>
+                                              <m:r>
+                                                <m:rPr>
+                                                  <m:sty m:val="p"/>
+                                                </m:rPr>
+                                                <a:rPr lang="en-US" i="1">
+                                                  <a:latin typeface="Cambria Math" panose="02040503050406030204" pitchFamily="18" charset="0"/>
+                                                </a:rPr>
+                                                <m:t>i</m:t>
+                                              </m:r>
+                                            </m:sub>
+                                          </m:sSub>
+                                          <m:r>
+                                            <a:rPr lang="en-US" i="1">
+                                              <a:latin typeface="Cambria Math" panose="02040503050406030204" pitchFamily="18" charset="0"/>
+                                            </a:rPr>
+                                            <m:t>(</m:t>
+                                          </m:r>
+                                          <m:r>
+                                            <m:rPr>
+                                              <m:sty m:val="p"/>
+                                            </m:rPr>
+                                            <a:rPr lang="en-US" b="0" i="1" smtClean="0">
+                                              <a:latin typeface="Cambria Math" panose="02040503050406030204" pitchFamily="18" charset="0"/>
+                                            </a:rPr>
+                                            <m:t>s</m:t>
+                                          </m:r>
+                                          <m:r>
+                                            <a:rPr lang="en-US" b="0" i="1" smtClean="0">
+                                              <a:latin typeface="Cambria Math" panose="02040503050406030204" pitchFamily="18" charset="0"/>
+                                            </a:rPr>
+                                            <m:t>’)</m:t>
+                                          </m:r>
+                                        </m:e>
+                                      </m:d>
+                                    </m:e>
+                                    <m:sup>
+                                      <m:r>
+                                        <a:rPr lang="en-US" i="1">
+                                          <a:latin typeface="Cambria Math" panose="02040503050406030204" pitchFamily="18" charset="0"/>
+                                        </a:rPr>
+                                        <m:t>3</m:t>
+                                      </m:r>
+                                    </m:sup>
+                                  </m:sSup>
+                                </m:den>
+                              </m:f>
+                              <m:r>
+                                <m:rPr>
+                                  <m:sty m:val="p"/>
+                                </m:rPr>
+                                <a:rPr lang="en-US" b="0" i="1" smtClean="0">
+                                  <a:latin typeface="Cambria Math" panose="02040503050406030204" pitchFamily="18" charset="0"/>
+                                </a:rPr>
+                                <m:t>ds</m:t>
+                              </m:r>
+                              <m:r>
+                                <a:rPr lang="en-US" b="0" i="1" smtClean="0">
+                                  <a:latin typeface="Cambria Math" panose="02040503050406030204" pitchFamily="18" charset="0"/>
+                                </a:rPr>
+                                <m:t>’</m:t>
+                              </m:r>
+                            </m:e>
+                          </m:nary>
+                        </m:e>
+                      </m:nary>
+                    </m:oMath>
+                  </m:oMathPara>
+                </a14:m>
+                <a:endParaRPr lang="en-US" dirty="0"/>
+              </a:p>
+            </p:txBody>
+          </p:sp>
+        </mc:Choice>
+        <mc:Fallback>
+          <p:sp>
+            <p:nvSpPr>
+              <p:cNvPr id="7" name="TextBox 6">
+                <a:extLst>
+                  <a:ext uri="{FF2B5EF4-FFF2-40B4-BE49-F238E27FC236}">
+                    <a16:creationId xmlns:a16="http://schemas.microsoft.com/office/drawing/2014/main" id="{91C1BE7D-379A-B7BC-4B78-511D9CD231C8}"/>
+                  </a:ext>
+                </a:extLst>
+              </p:cNvPr>
+              <p:cNvSpPr txBox="1">
+                <a:spLocks noRot="1" noChangeAspect="1" noMove="1" noResize="1" noEditPoints="1" noAdjustHandles="1" noChangeArrowheads="1" noChangeShapeType="1" noTextEdit="1"/>
+              </p:cNvSpPr>
+              <p:nvPr/>
+            </p:nvSpPr>
+            <p:spPr>
+              <a:xfrm>
+                <a:off x="7159255" y="2524516"/>
+                <a:ext cx="4005519" cy="721351"/>
+              </a:xfrm>
+              <a:prstGeom prst="rect">
+                <a:avLst/>
+              </a:prstGeom>
+              <a:blipFill>
+                <a:blip r:embed="rId4"/>
+                <a:stretch>
+                  <a:fillRect l="-633" t="-153448" r="-949" b="-220690"/>
+                </a:stretch>
+              </a:blipFill>
+            </p:spPr>
+            <p:txBody>
+              <a:bodyPr/>
+              <a:lstStyle/>
+              <a:p>
+                <a:r>
+                  <a:rPr lang="en-US">
+                    <a:noFill/>
+                  </a:rPr>
+                  <a:t> </a:t>
+                </a:r>
+              </a:p>
+            </p:txBody>
+          </p:sp>
+        </mc:Fallback>
+      </mc:AlternateContent>
+      <p:pic>
+        <p:nvPicPr>
+          <p:cNvPr id="8" name="Picture 7" descr="Coulomb repulsion between equal charges concentrated at two filament tips."/>
+          <p:cNvPicPr>
+            <a:picLocks noChangeAspect="1"/>
+          </p:cNvPicPr>
+          <p:nvPr/>
+        </p:nvPicPr>
+        <p:blipFill>
+          <a:blip r:embed="rId5"/>
+          <a:stretch>
+            <a:fillRect/>
+          </a:stretch>
+        </p:blipFill>
+        <p:spPr>
+          <a:xfrm>
+            <a:off x="1122129" y="3584448"/>
+            <a:ext cx="4165684" cy="2468880"/>
+          </a:xfrm>
+          <a:prstGeom prst="rect">
+            <a:avLst/>
+          </a:prstGeom>
+        </p:spPr>
+      </p:pic>
+      <p:pic>
+        <p:nvPicPr>
+          <p:cNvPr id="9" name="Picture 8" descr="Coulomb repulsion between charge elements uniformly distributed along two filaments."/>
+          <p:cNvPicPr>
+            <a:picLocks noChangeAspect="1"/>
+          </p:cNvPicPr>
+          <p:nvPr/>
+        </p:nvPicPr>
+        <p:blipFill>
+          <a:blip r:embed="rId6"/>
+          <a:stretch>
+            <a:fillRect/>
+          </a:stretch>
+        </p:blipFill>
+        <p:spPr>
+          <a:xfrm>
+            <a:off x="7704391" y="3584448"/>
+            <a:ext cx="2870073" cy="2468880"/>
           </a:xfrm>
           <a:prstGeom prst="rect">
             <a:avLst/>

--- a/Tema 1/paper/Tema1.pptx
+++ b/Tema 1/paper/Tema1.pptx
@@ -5,10 +5,10 @@
     <p:sldMasterId id="2147483660" r:id="rId1"/>
   </p:sldMasterIdLst>
   <p:notesMasterIdLst>
-    <p:notesMasterId r:id="rId13"/>
+    <p:notesMasterId r:id="rId17"/>
   </p:notesMasterIdLst>
   <p:handoutMasterIdLst>
-    <p:handoutMasterId r:id="rId14"/>
+    <p:handoutMasterId r:id="rId18"/>
   </p:handoutMasterIdLst>
   <p:sldIdLst>
     <p:sldId id="256" r:id="rId2"/>
@@ -22,6 +22,10 @@
     <p:sldId id="342" r:id="rId10"/>
     <p:sldId id="331" r:id="rId11"/>
     <p:sldId id="343" r:id="rId12"/>
+    <p:sldId id="346" r:id="rId13"/>
+    <p:sldId id="345" r:id="rId14"/>
+    <p:sldId id="347" r:id="rId15"/>
+    <p:sldId id="344" r:id="rId16"/>
   </p:sldIdLst>
   <p:sldSz cx="12192000" cy="6858000"/>
   <p:notesSz cx="6858000" cy="9144000"/>
@@ -353,7 +357,7 @@
     </p:spTree>
     <p:extLst>
       <p:ext uri="{BB962C8B-B14F-4D97-AF65-F5344CB8AC3E}">
-        <p14:creationId xmlns:p14="http://schemas.microsoft.com/office/powerpoint/2010/main" val="4096425265"/>
+        <p14:creationId xmlns:p14="http://schemas.microsoft.com/office/powerpoint/2010/main" val="2764200060"/>
       </p:ext>
     </p:extLst>
   </p:cSld>
@@ -572,6 +576,236 @@
         </p:txBody>
       </p:sp>
     </p:spTree>
+  </p:cSld>
+  <p:clrMapOvr>
+    <a:masterClrMapping/>
+  </p:clrMapOvr>
+</p:notes>
+</file>
+
+<file path=ppt/notesSlides/notesSlide2.xml><?xml version="1.0" encoding="utf-8"?>
+<p:notes xmlns:a="http://schemas.openxmlformats.org/drawingml/2006/main" xmlns:r="http://schemas.openxmlformats.org/officeDocument/2006/relationships" xmlns:p="http://schemas.openxmlformats.org/presentationml/2006/main">
+  <p:cSld>
+    <p:spTree>
+      <p:nvGrpSpPr>
+        <p:cNvPr id="1" name=""/>
+        <p:cNvGrpSpPr/>
+        <p:nvPr/>
+      </p:nvGrpSpPr>
+      <p:grpSpPr>
+        <a:xfrm>
+          <a:off x="0" y="0"/>
+          <a:ext cx="0" cy="0"/>
+          <a:chOff x="0" y="0"/>
+          <a:chExt cx="0" cy="0"/>
+        </a:xfrm>
+      </p:grpSpPr>
+      <p:sp>
+        <p:nvSpPr>
+          <p:cNvPr id="99" name="Notes"/>
+          <p:cNvSpPr>
+            <a:spLocks noGrp="1"/>
+          </p:cNvSpPr>
+          <p:nvPr>
+            <p:ph type="body" idx="4294967295"/>
+          </p:nvPr>
+        </p:nvSpPr>
+        <p:spPr/>
+        <p:txBody>
+          <a:bodyPr/>
+          <a:lstStyle/>
+          <a:p>
+            <a:endParaRPr/>
+          </a:p>
+          <a:p>
+            <a:r>
+              <a:t>Visual: AI-generated conceptual illustration requested by the user. Streamline colors are illustrative, not a calibrated velocity scale. Fixed and translating frames illustrate r prime = r - U_h t e_x. Existing equations unchanged.</a:t>
+            </a:r>
+          </a:p>
+        </p:txBody>
+      </p:sp>
+    </p:spTree>
+  </p:cSld>
+  <p:clrMapOvr>
+    <a:masterClrMapping/>
+  </p:clrMapOvr>
+</p:notes>
+</file>
+
+<file path=ppt/notesSlides/notesSlide3.xml><?xml version="1.0" encoding="utf-8"?>
+<p:notes xmlns:a="http://schemas.openxmlformats.org/drawingml/2006/main" xmlns:r="http://schemas.openxmlformats.org/officeDocument/2006/relationships" xmlns:p="http://schemas.openxmlformats.org/presentationml/2006/main">
+  <p:cSld>
+    <p:spTree>
+      <p:nvGrpSpPr>
+        <p:cNvPr id="1" name="">
+          <a:extLst>
+            <a:ext uri="{FF2B5EF4-FFF2-40B4-BE49-F238E27FC236}">
+              <a16:creationId xmlns:a16="http://schemas.microsoft.com/office/drawing/2014/main" id="{01DC8A00-C98F-B889-DA68-4459E0483AB2}"/>
+            </a:ext>
+          </a:extLst>
+        </p:cNvPr>
+        <p:cNvGrpSpPr/>
+        <p:nvPr/>
+      </p:nvGrpSpPr>
+      <p:grpSpPr>
+        <a:xfrm>
+          <a:off x="0" y="0"/>
+          <a:ext cx="0" cy="0"/>
+          <a:chOff x="0" y="0"/>
+          <a:chExt cx="0" cy="0"/>
+        </a:xfrm>
+      </p:grpSpPr>
+      <p:sp>
+        <p:nvSpPr>
+          <p:cNvPr id="99" name="Notes">
+            <a:extLst>
+              <a:ext uri="{FF2B5EF4-FFF2-40B4-BE49-F238E27FC236}">
+                <a16:creationId xmlns:a16="http://schemas.microsoft.com/office/drawing/2014/main" id="{744996C4-E93C-3FD3-B804-60A614BBB12D}"/>
+              </a:ext>
+            </a:extLst>
+          </p:cNvPr>
+          <p:cNvSpPr>
+            <a:spLocks noGrp="1"/>
+          </p:cNvSpPr>
+          <p:nvPr>
+            <p:ph type="body" idx="4294967295"/>
+          </p:nvPr>
+        </p:nvSpPr>
+        <p:spPr/>
+        <p:txBody>
+          <a:bodyPr/>
+          <a:lstStyle/>
+          <a:p>
+            <a:endParaRPr/>
+          </a:p>
+          <a:p>
+            <a:r>
+              <a:t>Visual: AI-generated conceptual illustration requested by the user. Streamline colors are illustrative, not a calibrated velocity scale. Fixed and translating frames illustrate r prime = r - U_h t e_x. Existing equations unchanged.</a:t>
+            </a:r>
+          </a:p>
+        </p:txBody>
+      </p:sp>
+    </p:spTree>
+    <p:extLst>
+      <p:ext uri="{BB962C8B-B14F-4D97-AF65-F5344CB8AC3E}">
+        <p14:creationId xmlns:p14="http://schemas.microsoft.com/office/powerpoint/2010/main" val="327079443"/>
+      </p:ext>
+    </p:extLst>
+  </p:cSld>
+  <p:clrMapOvr>
+    <a:masterClrMapping/>
+  </p:clrMapOvr>
+</p:notes>
+</file>
+
+<file path=ppt/notesSlides/notesSlide4.xml><?xml version="1.0" encoding="utf-8"?>
+<p:notes xmlns:a="http://schemas.openxmlformats.org/drawingml/2006/main" xmlns:r="http://schemas.openxmlformats.org/officeDocument/2006/relationships" xmlns:p="http://schemas.openxmlformats.org/presentationml/2006/main">
+  <p:cSld>
+    <p:spTree>
+      <p:nvGrpSpPr>
+        <p:cNvPr id="1" name=""/>
+        <p:cNvGrpSpPr/>
+        <p:nvPr/>
+      </p:nvGrpSpPr>
+      <p:grpSpPr>
+        <a:xfrm>
+          <a:off x="0" y="0"/>
+          <a:ext cx="0" cy="0"/>
+          <a:chOff x="0" y="0"/>
+          <a:chExt cx="0" cy="0"/>
+        </a:xfrm>
+      </p:grpSpPr>
+      <p:sp>
+        <p:nvSpPr>
+          <p:cNvPr id="99" name="Notes"/>
+          <p:cNvSpPr>
+            <a:spLocks noGrp="1"/>
+          </p:cNvSpPr>
+          <p:nvPr>
+            <p:ph type="body" idx="1"/>
+          </p:nvPr>
+        </p:nvSpPr>
+        <p:spPr/>
+        <p:txBody>
+          <a:bodyPr/>
+          <a:lstStyle/>
+          <a:p>
+            <a:endParaRPr/>
+          </a:p>
+          <a:p>
+            <a:r>
+              <a:t>AI-generated conceptual infographic based on user-supplied content. Paths are illustrative. P(z) is the probability of reaching h before zero, with absorbing boundary values P(0)=0 and P(h)=1. The Gaussian inset depicts local free increments over a short time, not the boundary-conditioned transition density. The backward equation uses constant drift U_0 and diffusivity K.</a:t>
+            </a:r>
+          </a:p>
+        </p:txBody>
+      </p:sp>
+    </p:spTree>
+  </p:cSld>
+  <p:clrMapOvr>
+    <a:masterClrMapping/>
+  </p:clrMapOvr>
+</p:notes>
+</file>
+
+<file path=ppt/notesSlides/notesSlide5.xml><?xml version="1.0" encoding="utf-8"?>
+<p:notes xmlns:a="http://schemas.openxmlformats.org/drawingml/2006/main" xmlns:r="http://schemas.openxmlformats.org/officeDocument/2006/relationships" xmlns:p="http://schemas.openxmlformats.org/presentationml/2006/main">
+  <p:cSld>
+    <p:spTree>
+      <p:nvGrpSpPr>
+        <p:cNvPr id="1" name="">
+          <a:extLst>
+            <a:ext uri="{FF2B5EF4-FFF2-40B4-BE49-F238E27FC236}">
+              <a16:creationId xmlns:a16="http://schemas.microsoft.com/office/drawing/2014/main" id="{AD8D86D0-657D-BA3F-8C84-F05AE6C4473B}"/>
+            </a:ext>
+          </a:extLst>
+        </p:cNvPr>
+        <p:cNvGrpSpPr/>
+        <p:nvPr/>
+      </p:nvGrpSpPr>
+      <p:grpSpPr>
+        <a:xfrm>
+          <a:off x="0" y="0"/>
+          <a:ext cx="0" cy="0"/>
+          <a:chOff x="0" y="0"/>
+          <a:chExt cx="0" cy="0"/>
+        </a:xfrm>
+      </p:grpSpPr>
+      <p:sp>
+        <p:nvSpPr>
+          <p:cNvPr id="99" name="Notes">
+            <a:extLst>
+              <a:ext uri="{FF2B5EF4-FFF2-40B4-BE49-F238E27FC236}">
+                <a16:creationId xmlns:a16="http://schemas.microsoft.com/office/drawing/2014/main" id="{732B9335-74CC-4BD1-6B61-78EA6D4F919E}"/>
+              </a:ext>
+            </a:extLst>
+          </p:cNvPr>
+          <p:cNvSpPr>
+            <a:spLocks noGrp="1"/>
+          </p:cNvSpPr>
+          <p:nvPr>
+            <p:ph type="body" idx="1"/>
+          </p:nvPr>
+        </p:nvSpPr>
+        <p:spPr/>
+        <p:txBody>
+          <a:bodyPr/>
+          <a:lstStyle/>
+          <a:p>
+            <a:endParaRPr/>
+          </a:p>
+          <a:p>
+            <a:r>
+              <a:t>AI-generated conceptual infographic based on user-supplied content. Paths are illustrative. P(z) is the probability of reaching h before zero, with absorbing boundary values P(0)=0 and P(h)=1. The Gaussian inset depicts local free increments over a short time, not the boundary-conditioned transition density. The backward equation uses constant drift U_0 and diffusivity K.</a:t>
+            </a:r>
+          </a:p>
+        </p:txBody>
+      </p:sp>
+    </p:spTree>
+    <p:extLst>
+      <p:ext uri="{BB962C8B-B14F-4D97-AF65-F5344CB8AC3E}">
+        <p14:creationId xmlns:p14="http://schemas.microsoft.com/office/powerpoint/2010/main" val="45374930"/>
+      </p:ext>
+    </p:extLst>
   </p:cSld>
   <p:clrMapOvr>
     <a:masterClrMapping/>
@@ -11539,6 +11773,4986 @@
           <p:nvPr/>
         </p:nvPicPr>
         <p:blipFill>
+          <a:blip r:embed="rId3">
+            <a:clrChange>
+              <a:clrFrom>
+                <a:srgbClr val="000000"/>
+              </a:clrFrom>
+              <a:clrTo>
+                <a:srgbClr val="000000">
+                  <a:alpha val="0"/>
+                </a:srgbClr>
+              </a:clrTo>
+            </a:clrChange>
+            <a:extLst>
+              <a:ext uri="{28A0092B-C50C-407E-A947-70E740481C1C}">
+                <a14:useLocalDpi xmlns:a14="http://schemas.microsoft.com/office/drawing/2010/main" val="0"/>
+              </a:ext>
+            </a:extLst>
+          </a:blip>
+          <a:stretch>
+            <a:fillRect/>
+          </a:stretch>
+        </p:blipFill>
+        <p:spPr>
+          <a:xfrm>
+            <a:off x="10432471" y="6323329"/>
+            <a:ext cx="1492133" cy="496892"/>
+          </a:xfrm>
+          <a:prstGeom prst="rect">
+            <a:avLst/>
+          </a:prstGeom>
+        </p:spPr>
+      </p:pic>
+      <mc:AlternateContent xmlns:mc="http://schemas.openxmlformats.org/markup-compatibility/2006">
+        <mc:Choice xmlns:a14="http://schemas.microsoft.com/office/drawing/2010/main" Requires="a14">
+          <p:sp>
+            <p:nvSpPr>
+              <p:cNvPr id="2" name="TextBox 1">
+                <a:extLst>
+                  <a:ext uri="{FF2B5EF4-FFF2-40B4-BE49-F238E27FC236}">
+                    <a16:creationId xmlns:a16="http://schemas.microsoft.com/office/drawing/2014/main" id="{FE6340BF-4338-2F97-A9F1-4B25A80AC924}"/>
+                  </a:ext>
+                </a:extLst>
+              </p:cNvPr>
+              <p:cNvSpPr txBox="1"/>
+              <p:nvPr/>
+            </p:nvSpPr>
+            <p:spPr>
+              <a:xfrm>
+                <a:off x="914399" y="1445951"/>
+                <a:ext cx="6853864" cy="778868"/>
+              </a:xfrm>
+              <a:prstGeom prst="rect">
+                <a:avLst/>
+              </a:prstGeom>
+              <a:noFill/>
+            </p:spPr>
+            <p:txBody>
+              <a:bodyPr wrap="none" lIns="0" tIns="0" rIns="0" bIns="0" rtlCol="0">
+                <a:spAutoFit/>
+              </a:bodyPr>
+              <a:lstStyle/>
+              <a:p>
+                <a14:m>
+                  <m:oMathPara xmlns:m="http://schemas.openxmlformats.org/officeDocument/2006/math">
+                    <m:oMathParaPr>
+                      <m:jc m:val="centerGroup"/>
+                    </m:oMathParaPr>
+                    <m:oMath xmlns:m="http://schemas.openxmlformats.org/officeDocument/2006/math">
+                      <m:acc>
+                        <m:accPr>
+                          <m:chr m:val="⃗"/>
+                          <m:ctrlPr>
+                            <a:rPr lang="en-US" i="1" smtClean="0">
+                              <a:latin typeface="Cambria Math" panose="02040503050406030204" pitchFamily="18" charset="0"/>
+                            </a:rPr>
+                          </m:ctrlPr>
+                        </m:accPr>
+                        <m:e>
+                          <m:r>
+                            <a:rPr lang="en-US" i="1">
+                              <a:latin typeface="Cambria Math" panose="02040503050406030204" pitchFamily="18" charset="0"/>
+                            </a:rPr>
+                            <m:t>𝑢</m:t>
+                          </m:r>
+                        </m:e>
+                      </m:acc>
+                      <m:d>
+                        <m:dPr>
+                          <m:ctrlPr>
+                            <a:rPr lang="en-US" i="1">
+                              <a:latin typeface="Cambria Math" panose="02040503050406030204" pitchFamily="18" charset="0"/>
+                            </a:rPr>
+                          </m:ctrlPr>
+                        </m:dPr>
+                        <m:e>
+                          <m:acc>
+                            <m:accPr>
+                              <m:chr m:val="⃗"/>
+                              <m:ctrlPr>
+                                <a:rPr lang="en-US" i="1">
+                                  <a:latin typeface="Cambria Math" panose="02040503050406030204" pitchFamily="18" charset="0"/>
+                                </a:rPr>
+                              </m:ctrlPr>
+                            </m:accPr>
+                            <m:e>
+                              <m:r>
+                                <a:rPr lang="en-US" i="1">
+                                  <a:latin typeface="Cambria Math" panose="02040503050406030204" pitchFamily="18" charset="0"/>
+                                </a:rPr>
+                                <m:t>𝑟</m:t>
+                              </m:r>
+                            </m:e>
+                          </m:acc>
+                          <m:r>
+                            <a:rPr lang="en-US" i="1">
+                              <a:latin typeface="Cambria Math" panose="02040503050406030204" pitchFamily="18" charset="0"/>
+                            </a:rPr>
+                            <m:t>,</m:t>
+                          </m:r>
+                          <m:r>
+                            <a:rPr lang="en-US" i="1">
+                              <a:latin typeface="Cambria Math" panose="02040503050406030204" pitchFamily="18" charset="0"/>
+                            </a:rPr>
+                            <m:t>𝑡</m:t>
+                          </m:r>
+                        </m:e>
+                      </m:d>
+                      <m:r>
+                        <a:rPr lang="en-US" i="1">
+                          <a:latin typeface="Cambria Math" panose="02040503050406030204" pitchFamily="18" charset="0"/>
+                        </a:rPr>
+                        <m:t>=</m:t>
+                      </m:r>
+                      <m:sSub>
+                        <m:sSubPr>
+                          <m:ctrlPr>
+                            <a:rPr lang="en-US" i="1">
+                              <a:latin typeface="Cambria Math" panose="02040503050406030204" pitchFamily="18" charset="0"/>
+                            </a:rPr>
+                          </m:ctrlPr>
+                        </m:sSubPr>
+                        <m:e>
+                          <m:r>
+                            <a:rPr lang="en-US" i="1">
+                              <a:latin typeface="Cambria Math" panose="02040503050406030204" pitchFamily="18" charset="0"/>
+                            </a:rPr>
+                            <m:t>𝑈</m:t>
+                          </m:r>
+                        </m:e>
+                        <m:sub>
+                          <m:r>
+                            <a:rPr lang="en-US" i="1">
+                              <a:latin typeface="Cambria Math" panose="02040503050406030204" pitchFamily="18" charset="0"/>
+                            </a:rPr>
+                            <m:t>h</m:t>
+                          </m:r>
+                        </m:sub>
+                      </m:sSub>
+                      <m:acc>
+                        <m:accPr>
+                          <m:chr m:val="⃗"/>
+                          <m:ctrlPr>
+                            <a:rPr lang="en-US" i="1" smtClean="0">
+                              <a:latin typeface="Cambria Math" panose="02040503050406030204" pitchFamily="18" charset="0"/>
+                            </a:rPr>
+                          </m:ctrlPr>
+                        </m:accPr>
+                        <m:e>
+                          <m:sSub>
+                            <m:sSubPr>
+                              <m:ctrlPr>
+                                <a:rPr lang="en-US" i="1" smtClean="0">
+                                  <a:latin typeface="Cambria Math" panose="02040503050406030204" pitchFamily="18" charset="0"/>
+                                </a:rPr>
+                              </m:ctrlPr>
+                            </m:sSubPr>
+                            <m:e>
+                              <m:r>
+                                <a:rPr lang="en-US" b="0" i="1" smtClean="0">
+                                  <a:latin typeface="Cambria Math" panose="02040503050406030204" pitchFamily="18" charset="0"/>
+                                </a:rPr>
+                                <m:t>1</m:t>
+                              </m:r>
+                            </m:e>
+                            <m:sub>
+                              <m:r>
+                                <m:rPr>
+                                  <m:sty m:val="p"/>
+                                </m:rPr>
+                                <a:rPr lang="en-US" b="0" i="1" smtClean="0">
+                                  <a:latin typeface="Cambria Math" panose="02040503050406030204" pitchFamily="18" charset="0"/>
+                                </a:rPr>
+                                <m:t>x</m:t>
+                              </m:r>
+                            </m:sub>
+                          </m:sSub>
+                        </m:e>
+                      </m:acc>
+                      <m:r>
+                        <a:rPr lang="en-US" i="1">
+                          <a:latin typeface="Cambria Math" panose="02040503050406030204" pitchFamily="18" charset="0"/>
+                        </a:rPr>
+                        <m:t>+</m:t>
+                      </m:r>
+                      <m:nary>
+                        <m:naryPr>
+                          <m:chr m:val="∑"/>
+                          <m:ctrlPr>
+                            <a:rPr lang="en-US" i="1">
+                              <a:latin typeface="Cambria Math" panose="02040503050406030204" pitchFamily="18" charset="0"/>
+                            </a:rPr>
+                          </m:ctrlPr>
+                        </m:naryPr>
+                        <m:sub>
+                          <m:r>
+                            <a:rPr lang="en-US" i="1">
+                              <a:latin typeface="Cambria Math" panose="02040503050406030204" pitchFamily="18" charset="0"/>
+                            </a:rPr>
+                            <m:t>𝑛</m:t>
+                          </m:r>
+                          <m:r>
+                            <a:rPr lang="en-US" i="1">
+                              <a:latin typeface="Cambria Math" panose="02040503050406030204" pitchFamily="18" charset="0"/>
+                            </a:rPr>
+                            <m:t>=1</m:t>
+                          </m:r>
+                        </m:sub>
+                        <m:sup>
+                          <m:sSub>
+                            <m:sSubPr>
+                              <m:ctrlPr>
+                                <a:rPr lang="en-US" i="1">
+                                  <a:latin typeface="Cambria Math" panose="02040503050406030204" pitchFamily="18" charset="0"/>
+                                </a:rPr>
+                              </m:ctrlPr>
+                            </m:sSubPr>
+                            <m:e>
+                              <m:r>
+                                <a:rPr lang="en-US" i="1">
+                                  <a:latin typeface="Cambria Math" panose="02040503050406030204" pitchFamily="18" charset="0"/>
+                                </a:rPr>
+                                <m:t>𝑁</m:t>
+                              </m:r>
+                            </m:e>
+                            <m:sub>
+                              <m:r>
+                                <a:rPr lang="en-US" i="1">
+                                  <a:latin typeface="Cambria Math" panose="02040503050406030204" pitchFamily="18" charset="0"/>
+                                </a:rPr>
+                                <m:t>𝑘</m:t>
+                              </m:r>
+                            </m:sub>
+                          </m:sSub>
+                        </m:sup>
+                        <m:e>
+                          <m:d>
+                            <m:dPr>
+                              <m:begChr m:val="["/>
+                              <m:endChr m:val="]"/>
+                              <m:ctrlPr>
+                                <a:rPr lang="en-US" i="1">
+                                  <a:latin typeface="Cambria Math" panose="02040503050406030204" pitchFamily="18" charset="0"/>
+                                </a:rPr>
+                              </m:ctrlPr>
+                            </m:dPr>
+                            <m:e>
+                              <m:acc>
+                                <m:accPr>
+                                  <m:chr m:val="⃗"/>
+                                  <m:ctrlPr>
+                                    <a:rPr lang="en-US" i="1">
+                                      <a:latin typeface="Cambria Math" panose="02040503050406030204" pitchFamily="18" charset="0"/>
+                                    </a:rPr>
+                                  </m:ctrlPr>
+                                </m:accPr>
+                                <m:e>
+                                  <m:sSub>
+                                    <m:sSubPr>
+                                      <m:ctrlPr>
+                                        <a:rPr lang="en-US" i="1">
+                                          <a:latin typeface="Cambria Math" panose="02040503050406030204" pitchFamily="18" charset="0"/>
+                                        </a:rPr>
+                                      </m:ctrlPr>
+                                    </m:sSubPr>
+                                    <m:e>
+                                      <m:r>
+                                        <a:rPr lang="en-US" i="1">
+                                          <a:latin typeface="Cambria Math" panose="02040503050406030204" pitchFamily="18" charset="0"/>
+                                        </a:rPr>
+                                        <m:t>𝑎</m:t>
+                                      </m:r>
+                                    </m:e>
+                                    <m:sub>
+                                      <m:r>
+                                        <a:rPr lang="en-US" i="1">
+                                          <a:latin typeface="Cambria Math" panose="02040503050406030204" pitchFamily="18" charset="0"/>
+                                        </a:rPr>
+                                        <m:t>𝑛</m:t>
+                                      </m:r>
+                                    </m:sub>
+                                  </m:sSub>
+                                </m:e>
+                              </m:acc>
+                              <m:func>
+                                <m:funcPr>
+                                  <m:ctrlPr>
+                                    <a:rPr lang="en-US" i="0">
+                                      <a:latin typeface="Cambria Math" panose="02040503050406030204" pitchFamily="18" charset="0"/>
+                                    </a:rPr>
+                                  </m:ctrlPr>
+                                </m:funcPr>
+                                <m:fName>
+                                  <m:r>
+                                    <m:rPr>
+                                      <m:sty m:val="p"/>
+                                    </m:rPr>
+                                    <a:rPr lang="en-US" i="0">
+                                      <a:latin typeface="Cambria Math" panose="02040503050406030204" pitchFamily="18" charset="0"/>
+                                    </a:rPr>
+                                    <m:t>cos</m:t>
+                                  </m:r>
+                                </m:fName>
+                                <m:e>
+                                  <m:d>
+                                    <m:dPr>
+                                      <m:ctrlPr>
+                                        <a:rPr lang="en-US" i="1">
+                                          <a:latin typeface="Cambria Math" panose="02040503050406030204" pitchFamily="18" charset="0"/>
+                                        </a:rPr>
+                                      </m:ctrlPr>
+                                    </m:dPr>
+                                    <m:e>
+                                      <m:acc>
+                                        <m:accPr>
+                                          <m:chr m:val="⃗"/>
+                                          <m:ctrlPr>
+                                            <a:rPr lang="en-US" i="1">
+                                              <a:latin typeface="Cambria Math" panose="02040503050406030204" pitchFamily="18" charset="0"/>
+                                            </a:rPr>
+                                          </m:ctrlPr>
+                                        </m:accPr>
+                                        <m:e>
+                                          <m:sSub>
+                                            <m:sSubPr>
+                                              <m:ctrlPr>
+                                                <a:rPr lang="en-US" i="1">
+                                                  <a:latin typeface="Cambria Math" panose="02040503050406030204" pitchFamily="18" charset="0"/>
+                                                </a:rPr>
+                                              </m:ctrlPr>
+                                            </m:sSubPr>
+                                            <m:e>
+                                              <m:r>
+                                                <a:rPr lang="en-US" i="1">
+                                                  <a:latin typeface="Cambria Math" panose="02040503050406030204" pitchFamily="18" charset="0"/>
+                                                </a:rPr>
+                                                <m:t>𝑘</m:t>
+                                              </m:r>
+                                            </m:e>
+                                            <m:sub>
+                                              <m:r>
+                                                <a:rPr lang="en-US" i="1">
+                                                  <a:latin typeface="Cambria Math" panose="02040503050406030204" pitchFamily="18" charset="0"/>
+                                                </a:rPr>
+                                                <m:t>𝑛</m:t>
+                                              </m:r>
+                                            </m:sub>
+                                          </m:sSub>
+                                        </m:e>
+                                      </m:acc>
+                                      <m:r>
+                                        <a:rPr lang="en-US" i="1">
+                                          <a:latin typeface="Cambria Math" panose="02040503050406030204" pitchFamily="18" charset="0"/>
+                                        </a:rPr>
+                                        <m:t>⋅</m:t>
+                                      </m:r>
+                                      <m:acc>
+                                        <m:accPr>
+                                          <m:chr m:val="⃗"/>
+                                          <m:ctrlPr>
+                                            <a:rPr lang="en-US" i="1">
+                                              <a:latin typeface="Cambria Math" panose="02040503050406030204" pitchFamily="18" charset="0"/>
+                                            </a:rPr>
+                                          </m:ctrlPr>
+                                        </m:accPr>
+                                        <m:e>
+                                          <m:r>
+                                            <a:rPr lang="en-US" i="1">
+                                              <a:latin typeface="Cambria Math" panose="02040503050406030204" pitchFamily="18" charset="0"/>
+                                            </a:rPr>
+                                            <m:t>𝑟</m:t>
+                                          </m:r>
+                                        </m:e>
+                                      </m:acc>
+                                      <m:sSup>
+                                        <m:sSupPr>
+                                          <m:ctrlPr>
+                                            <a:rPr lang="en-US" i="1">
+                                              <a:latin typeface="Cambria Math" panose="02040503050406030204" pitchFamily="18" charset="0"/>
+                                            </a:rPr>
+                                          </m:ctrlPr>
+                                        </m:sSupPr>
+                                        <m:e>
+                                          <m:r>
+                                            <a:rPr lang="en-US" i="1">
+                                              <a:latin typeface="Cambria Math" panose="02040503050406030204" pitchFamily="18" charset="0"/>
+                                            </a:rPr>
+                                            <m:t> </m:t>
+                                          </m:r>
+                                        </m:e>
+                                        <m:sup>
+                                          <m:r>
+                                            <a:rPr lang="en-US" i="1">
+                                              <a:latin typeface="Cambria Math" panose="02040503050406030204" pitchFamily="18" charset="0"/>
+                                            </a:rPr>
+                                            <m:t>′</m:t>
+                                          </m:r>
+                                        </m:sup>
+                                      </m:sSup>
+                                      <m:r>
+                                        <a:rPr lang="en-US" i="1">
+                                          <a:latin typeface="Cambria Math" panose="02040503050406030204" pitchFamily="18" charset="0"/>
+                                        </a:rPr>
+                                        <m:t>+</m:t>
+                                      </m:r>
+                                      <m:sSub>
+                                        <m:sSubPr>
+                                          <m:ctrlPr>
+                                            <a:rPr lang="en-US" i="1">
+                                              <a:latin typeface="Cambria Math" panose="02040503050406030204" pitchFamily="18" charset="0"/>
+                                            </a:rPr>
+                                          </m:ctrlPr>
+                                        </m:sSubPr>
+                                        <m:e>
+                                          <m:r>
+                                            <a:rPr lang="en-US" i="1">
+                                              <a:latin typeface="Cambria Math" panose="02040503050406030204" pitchFamily="18" charset="0"/>
+                                            </a:rPr>
+                                            <m:t>𝜔</m:t>
+                                          </m:r>
+                                        </m:e>
+                                        <m:sub>
+                                          <m:r>
+                                            <a:rPr lang="en-US" i="1">
+                                              <a:latin typeface="Cambria Math" panose="02040503050406030204" pitchFamily="18" charset="0"/>
+                                            </a:rPr>
+                                            <m:t>𝑛</m:t>
+                                          </m:r>
+                                        </m:sub>
+                                      </m:sSub>
+                                      <m:r>
+                                        <a:rPr lang="en-US" i="1">
+                                          <a:latin typeface="Cambria Math" panose="02040503050406030204" pitchFamily="18" charset="0"/>
+                                        </a:rPr>
+                                        <m:t>𝑡</m:t>
+                                      </m:r>
+                                    </m:e>
+                                  </m:d>
+                                </m:e>
+                              </m:func>
+                              <m:r>
+                                <a:rPr lang="en-US" i="1">
+                                  <a:latin typeface="Cambria Math" panose="02040503050406030204" pitchFamily="18" charset="0"/>
+                                </a:rPr>
+                                <m:t>+</m:t>
+                              </m:r>
+                              <m:acc>
+                                <m:accPr>
+                                  <m:chr m:val="⃗"/>
+                                  <m:ctrlPr>
+                                    <a:rPr lang="en-US" i="1">
+                                      <a:latin typeface="Cambria Math" panose="02040503050406030204" pitchFamily="18" charset="0"/>
+                                    </a:rPr>
+                                  </m:ctrlPr>
+                                </m:accPr>
+                                <m:e>
+                                  <m:sSub>
+                                    <m:sSubPr>
+                                      <m:ctrlPr>
+                                        <a:rPr lang="en-US" i="1">
+                                          <a:latin typeface="Cambria Math" panose="02040503050406030204" pitchFamily="18" charset="0"/>
+                                        </a:rPr>
+                                      </m:ctrlPr>
+                                    </m:sSubPr>
+                                    <m:e>
+                                      <m:r>
+                                        <a:rPr lang="en-US" i="1">
+                                          <a:latin typeface="Cambria Math" panose="02040503050406030204" pitchFamily="18" charset="0"/>
+                                        </a:rPr>
+                                        <m:t>𝑏</m:t>
+                                      </m:r>
+                                    </m:e>
+                                    <m:sub>
+                                      <m:r>
+                                        <a:rPr lang="en-US" i="1">
+                                          <a:latin typeface="Cambria Math" panose="02040503050406030204" pitchFamily="18" charset="0"/>
+                                        </a:rPr>
+                                        <m:t>𝑛</m:t>
+                                      </m:r>
+                                    </m:sub>
+                                  </m:sSub>
+                                </m:e>
+                              </m:acc>
+                              <m:func>
+                                <m:funcPr>
+                                  <m:ctrlPr>
+                                    <a:rPr lang="en-US" i="0">
+                                      <a:latin typeface="Cambria Math" panose="02040503050406030204" pitchFamily="18" charset="0"/>
+                                    </a:rPr>
+                                  </m:ctrlPr>
+                                </m:funcPr>
+                                <m:fName>
+                                  <m:r>
+                                    <m:rPr>
+                                      <m:sty m:val="p"/>
+                                    </m:rPr>
+                                    <a:rPr lang="en-US" i="0">
+                                      <a:latin typeface="Cambria Math" panose="02040503050406030204" pitchFamily="18" charset="0"/>
+                                    </a:rPr>
+                                    <m:t>sin</m:t>
+                                  </m:r>
+                                </m:fName>
+                                <m:e>
+                                  <m:d>
+                                    <m:dPr>
+                                      <m:ctrlPr>
+                                        <a:rPr lang="en-US" i="1">
+                                          <a:latin typeface="Cambria Math" panose="02040503050406030204" pitchFamily="18" charset="0"/>
+                                        </a:rPr>
+                                      </m:ctrlPr>
+                                    </m:dPr>
+                                    <m:e>
+                                      <m:acc>
+                                        <m:accPr>
+                                          <m:chr m:val="⃗"/>
+                                          <m:ctrlPr>
+                                            <a:rPr lang="en-US" i="1">
+                                              <a:latin typeface="Cambria Math" panose="02040503050406030204" pitchFamily="18" charset="0"/>
+                                            </a:rPr>
+                                          </m:ctrlPr>
+                                        </m:accPr>
+                                        <m:e>
+                                          <m:sSub>
+                                            <m:sSubPr>
+                                              <m:ctrlPr>
+                                                <a:rPr lang="en-US" i="1">
+                                                  <a:latin typeface="Cambria Math" panose="02040503050406030204" pitchFamily="18" charset="0"/>
+                                                </a:rPr>
+                                              </m:ctrlPr>
+                                            </m:sSubPr>
+                                            <m:e>
+                                              <m:r>
+                                                <a:rPr lang="en-US" i="1">
+                                                  <a:latin typeface="Cambria Math" panose="02040503050406030204" pitchFamily="18" charset="0"/>
+                                                </a:rPr>
+                                                <m:t>𝑘</m:t>
+                                              </m:r>
+                                            </m:e>
+                                            <m:sub>
+                                              <m:r>
+                                                <a:rPr lang="en-US" i="1">
+                                                  <a:latin typeface="Cambria Math" panose="02040503050406030204" pitchFamily="18" charset="0"/>
+                                                </a:rPr>
+                                                <m:t>𝑛</m:t>
+                                              </m:r>
+                                            </m:sub>
+                                          </m:sSub>
+                                        </m:e>
+                                      </m:acc>
+                                      <m:r>
+                                        <a:rPr lang="en-US" i="1">
+                                          <a:latin typeface="Cambria Math" panose="02040503050406030204" pitchFamily="18" charset="0"/>
+                                        </a:rPr>
+                                        <m:t>⋅</m:t>
+                                      </m:r>
+                                      <m:acc>
+                                        <m:accPr>
+                                          <m:chr m:val="⃗"/>
+                                          <m:ctrlPr>
+                                            <a:rPr lang="en-US" i="1">
+                                              <a:latin typeface="Cambria Math" panose="02040503050406030204" pitchFamily="18" charset="0"/>
+                                            </a:rPr>
+                                          </m:ctrlPr>
+                                        </m:accPr>
+                                        <m:e>
+                                          <m:r>
+                                            <a:rPr lang="en-US" i="1">
+                                              <a:latin typeface="Cambria Math" panose="02040503050406030204" pitchFamily="18" charset="0"/>
+                                            </a:rPr>
+                                            <m:t>𝑟</m:t>
+                                          </m:r>
+                                        </m:e>
+                                      </m:acc>
+                                      <m:sSup>
+                                        <m:sSupPr>
+                                          <m:ctrlPr>
+                                            <a:rPr lang="en-US" i="1">
+                                              <a:latin typeface="Cambria Math" panose="02040503050406030204" pitchFamily="18" charset="0"/>
+                                            </a:rPr>
+                                          </m:ctrlPr>
+                                        </m:sSupPr>
+                                        <m:e>
+                                          <m:r>
+                                            <a:rPr lang="en-US" i="1">
+                                              <a:latin typeface="Cambria Math" panose="02040503050406030204" pitchFamily="18" charset="0"/>
+                                            </a:rPr>
+                                            <m:t> </m:t>
+                                          </m:r>
+                                        </m:e>
+                                        <m:sup>
+                                          <m:r>
+                                            <a:rPr lang="en-US" i="1">
+                                              <a:latin typeface="Cambria Math" panose="02040503050406030204" pitchFamily="18" charset="0"/>
+                                            </a:rPr>
+                                            <m:t>′</m:t>
+                                          </m:r>
+                                        </m:sup>
+                                      </m:sSup>
+                                      <m:r>
+                                        <a:rPr lang="en-US" i="1">
+                                          <a:latin typeface="Cambria Math" panose="02040503050406030204" pitchFamily="18" charset="0"/>
+                                        </a:rPr>
+                                        <m:t>+</m:t>
+                                      </m:r>
+                                      <m:sSub>
+                                        <m:sSubPr>
+                                          <m:ctrlPr>
+                                            <a:rPr lang="en-US" i="1">
+                                              <a:latin typeface="Cambria Math" panose="02040503050406030204" pitchFamily="18" charset="0"/>
+                                            </a:rPr>
+                                          </m:ctrlPr>
+                                        </m:sSubPr>
+                                        <m:e>
+                                          <m:r>
+                                            <a:rPr lang="en-US" i="1">
+                                              <a:latin typeface="Cambria Math" panose="02040503050406030204" pitchFamily="18" charset="0"/>
+                                            </a:rPr>
+                                            <m:t>𝜔</m:t>
+                                          </m:r>
+                                        </m:e>
+                                        <m:sub>
+                                          <m:r>
+                                            <a:rPr lang="en-US" i="1">
+                                              <a:latin typeface="Cambria Math" panose="02040503050406030204" pitchFamily="18" charset="0"/>
+                                            </a:rPr>
+                                            <m:t>𝑛</m:t>
+                                          </m:r>
+                                        </m:sub>
+                                      </m:sSub>
+                                      <m:r>
+                                        <a:rPr lang="en-US" i="1">
+                                          <a:latin typeface="Cambria Math" panose="02040503050406030204" pitchFamily="18" charset="0"/>
+                                        </a:rPr>
+                                        <m:t>𝑡</m:t>
+                                      </m:r>
+                                    </m:e>
+                                  </m:d>
+                                </m:e>
+                              </m:func>
+                            </m:e>
+                          </m:d>
+                        </m:e>
+                      </m:nary>
+                    </m:oMath>
+                  </m:oMathPara>
+                </a14:m>
+                <a:endParaRPr lang="en-US" dirty="0"/>
+              </a:p>
+            </p:txBody>
+          </p:sp>
+        </mc:Choice>
+        <mc:Fallback>
+          <p:sp>
+            <p:nvSpPr>
+              <p:cNvPr id="2" name="TextBox 1">
+                <a:extLst>
+                  <a:ext uri="{FF2B5EF4-FFF2-40B4-BE49-F238E27FC236}">
+                    <a16:creationId xmlns:a16="http://schemas.microsoft.com/office/drawing/2014/main" id="{FE6340BF-4338-2F97-A9F1-4B25A80AC924}"/>
+                  </a:ext>
+                </a:extLst>
+              </p:cNvPr>
+              <p:cNvSpPr txBox="1">
+                <a:spLocks noRot="1" noChangeAspect="1" noMove="1" noResize="1" noEditPoints="1" noAdjustHandles="1" noChangeArrowheads="1" noChangeShapeType="1" noTextEdit="1"/>
+              </p:cNvSpPr>
+              <p:nvPr/>
+            </p:nvSpPr>
+            <p:spPr>
+              <a:xfrm>
+                <a:off x="914399" y="1445951"/>
+                <a:ext cx="6853864" cy="778868"/>
+              </a:xfrm>
+              <a:prstGeom prst="rect">
+                <a:avLst/>
+              </a:prstGeom>
+              <a:blipFill>
+                <a:blip r:embed="rId4"/>
+                <a:stretch>
+                  <a:fillRect t="-109524" b="-171429"/>
+                </a:stretch>
+              </a:blipFill>
+            </p:spPr>
+            <p:txBody>
+              <a:bodyPr/>
+              <a:lstStyle/>
+              <a:p>
+                <a:r>
+                  <a:rPr lang="en-US">
+                    <a:noFill/>
+                  </a:rPr>
+                  <a:t> </a:t>
+                </a:r>
+              </a:p>
+            </p:txBody>
+          </p:sp>
+        </mc:Fallback>
+      </mc:AlternateContent>
+      <mc:AlternateContent xmlns:mc="http://schemas.openxmlformats.org/markup-compatibility/2006">
+        <mc:Choice xmlns:a14="http://schemas.microsoft.com/office/drawing/2010/main" Requires="a14">
+          <p:sp>
+            <p:nvSpPr>
+              <p:cNvPr id="7" name="TextBox 6">
+                <a:extLst>
+                  <a:ext uri="{FF2B5EF4-FFF2-40B4-BE49-F238E27FC236}">
+                    <a16:creationId xmlns:a16="http://schemas.microsoft.com/office/drawing/2014/main" id="{638B5350-A506-F944-D150-1022680DCD1C}"/>
+                  </a:ext>
+                </a:extLst>
+              </p:cNvPr>
+              <p:cNvSpPr txBox="1"/>
+              <p:nvPr/>
+            </p:nvSpPr>
+            <p:spPr>
+              <a:xfrm>
+                <a:off x="9465825" y="1688472"/>
+                <a:ext cx="2458779" cy="404791"/>
+              </a:xfrm>
+              <a:prstGeom prst="rect">
+                <a:avLst/>
+              </a:prstGeom>
+              <a:noFill/>
+            </p:spPr>
+            <p:txBody>
+              <a:bodyPr wrap="square">
+                <a:spAutoFit/>
+              </a:bodyPr>
+              <a:lstStyle/>
+              <a:p>
+                <a:pPr/>
+                <a14:m>
+                  <m:oMathPara xmlns:m="http://schemas.openxmlformats.org/officeDocument/2006/math">
+                    <m:oMathParaPr>
+                      <m:jc m:val="centerGroup"/>
+                    </m:oMathParaPr>
+                    <m:oMath xmlns:m="http://schemas.openxmlformats.org/officeDocument/2006/math">
+                      <m:acc>
+                        <m:accPr>
+                          <m:chr m:val="⃗"/>
+                          <m:ctrlPr>
+                            <a:rPr lang="en-US" i="1" smtClean="0">
+                              <a:latin typeface="Cambria Math" panose="02040503050406030204" pitchFamily="18" charset="0"/>
+                            </a:rPr>
+                          </m:ctrlPr>
+                        </m:accPr>
+                        <m:e>
+                          <m:r>
+                            <a:rPr lang="en-US" i="1">
+                              <a:latin typeface="Cambria Math" panose="02040503050406030204" pitchFamily="18" charset="0"/>
+                            </a:rPr>
+                            <m:t>𝑟</m:t>
+                          </m:r>
+                        </m:e>
+                      </m:acc>
+                      <m:sSup>
+                        <m:sSupPr>
+                          <m:ctrlPr>
+                            <a:rPr lang="en-US" i="1">
+                              <a:latin typeface="Cambria Math" panose="02040503050406030204" pitchFamily="18" charset="0"/>
+                            </a:rPr>
+                          </m:ctrlPr>
+                        </m:sSupPr>
+                        <m:e>
+                          <m:r>
+                            <a:rPr lang="en-US" i="1">
+                              <a:latin typeface="Cambria Math" panose="02040503050406030204" pitchFamily="18" charset="0"/>
+                            </a:rPr>
+                            <m:t> </m:t>
+                          </m:r>
+                        </m:e>
+                        <m:sup>
+                          <m:r>
+                            <a:rPr lang="en-US" i="1">
+                              <a:latin typeface="Cambria Math" panose="02040503050406030204" pitchFamily="18" charset="0"/>
+                            </a:rPr>
+                            <m:t>′</m:t>
+                          </m:r>
+                        </m:sup>
+                      </m:sSup>
+                      <m:r>
+                        <a:rPr lang="en-US" i="1">
+                          <a:latin typeface="Cambria Math" panose="02040503050406030204" pitchFamily="18" charset="0"/>
+                        </a:rPr>
+                        <m:t>=</m:t>
+                      </m:r>
+                      <m:acc>
+                        <m:accPr>
+                          <m:chr m:val="⃗"/>
+                          <m:ctrlPr>
+                            <a:rPr lang="en-US" i="1">
+                              <a:latin typeface="Cambria Math" panose="02040503050406030204" pitchFamily="18" charset="0"/>
+                            </a:rPr>
+                          </m:ctrlPr>
+                        </m:accPr>
+                        <m:e>
+                          <m:r>
+                            <a:rPr lang="en-US" i="1">
+                              <a:latin typeface="Cambria Math" panose="02040503050406030204" pitchFamily="18" charset="0"/>
+                            </a:rPr>
+                            <m:t>𝑟</m:t>
+                          </m:r>
+                        </m:e>
+                      </m:acc>
+                      <m:r>
+                        <a:rPr lang="en-US" i="1">
+                          <a:latin typeface="Cambria Math" panose="02040503050406030204" pitchFamily="18" charset="0"/>
+                        </a:rPr>
+                        <m:t>−</m:t>
+                      </m:r>
+                      <m:sSub>
+                        <m:sSubPr>
+                          <m:ctrlPr>
+                            <a:rPr lang="en-US" i="1">
+                              <a:latin typeface="Cambria Math" panose="02040503050406030204" pitchFamily="18" charset="0"/>
+                            </a:rPr>
+                          </m:ctrlPr>
+                        </m:sSubPr>
+                        <m:e>
+                          <m:r>
+                            <a:rPr lang="en-US" i="1">
+                              <a:latin typeface="Cambria Math" panose="02040503050406030204" pitchFamily="18" charset="0"/>
+                            </a:rPr>
+                            <m:t>𝑈</m:t>
+                          </m:r>
+                        </m:e>
+                        <m:sub>
+                          <m:r>
+                            <a:rPr lang="en-US" i="1">
+                              <a:latin typeface="Cambria Math" panose="02040503050406030204" pitchFamily="18" charset="0"/>
+                            </a:rPr>
+                            <m:t>h</m:t>
+                          </m:r>
+                        </m:sub>
+                      </m:sSub>
+                      <m:r>
+                        <a:rPr lang="en-US" i="1">
+                          <a:latin typeface="Cambria Math" panose="02040503050406030204" pitchFamily="18" charset="0"/>
+                        </a:rPr>
+                        <m:t>𝑡</m:t>
+                      </m:r>
+                      <m:r>
+                        <a:rPr lang="en-US" i="1">
+                          <a:latin typeface="Cambria Math" panose="02040503050406030204" pitchFamily="18" charset="0"/>
+                        </a:rPr>
+                        <m:t> </m:t>
+                      </m:r>
+                      <m:acc>
+                        <m:accPr>
+                          <m:chr m:val="⃗"/>
+                          <m:ctrlPr>
+                            <a:rPr lang="en-US" i="1">
+                              <a:latin typeface="Cambria Math" panose="02040503050406030204" pitchFamily="18" charset="0"/>
+                            </a:rPr>
+                          </m:ctrlPr>
+                        </m:accPr>
+                        <m:e>
+                          <m:sSub>
+                            <m:sSubPr>
+                              <m:ctrlPr>
+                                <a:rPr lang="en-US" i="1">
+                                  <a:latin typeface="Cambria Math" panose="02040503050406030204" pitchFamily="18" charset="0"/>
+                                </a:rPr>
+                              </m:ctrlPr>
+                            </m:sSubPr>
+                            <m:e>
+                              <m:r>
+                                <a:rPr lang="en-US" i="1">
+                                  <a:latin typeface="Cambria Math" panose="02040503050406030204" pitchFamily="18" charset="0"/>
+                                </a:rPr>
+                                <m:t>1</m:t>
+                              </m:r>
+                            </m:e>
+                            <m:sub>
+                              <m:r>
+                                <m:rPr>
+                                  <m:sty m:val="p"/>
+                                </m:rPr>
+                                <a:rPr lang="en-US" i="1">
+                                  <a:latin typeface="Cambria Math" panose="02040503050406030204" pitchFamily="18" charset="0"/>
+                                </a:rPr>
+                                <m:t>x</m:t>
+                              </m:r>
+                            </m:sub>
+                          </m:sSub>
+                        </m:e>
+                      </m:acc>
+                    </m:oMath>
+                  </m:oMathPara>
+                </a14:m>
+                <a:endParaRPr lang="en-US" dirty="0"/>
+              </a:p>
+            </p:txBody>
+          </p:sp>
+        </mc:Choice>
+        <mc:Fallback>
+          <p:sp>
+            <p:nvSpPr>
+              <p:cNvPr id="7" name="TextBox 6">
+                <a:extLst>
+                  <a:ext uri="{FF2B5EF4-FFF2-40B4-BE49-F238E27FC236}">
+                    <a16:creationId xmlns:a16="http://schemas.microsoft.com/office/drawing/2014/main" id="{638B5350-A506-F944-D150-1022680DCD1C}"/>
+                  </a:ext>
+                </a:extLst>
+              </p:cNvPr>
+              <p:cNvSpPr txBox="1">
+                <a:spLocks noRot="1" noChangeAspect="1" noMove="1" noResize="1" noEditPoints="1" noAdjustHandles="1" noChangeArrowheads="1" noChangeShapeType="1" noTextEdit="1"/>
+              </p:cNvSpPr>
+              <p:nvPr/>
+            </p:nvSpPr>
+            <p:spPr>
+              <a:xfrm>
+                <a:off x="9465825" y="1688472"/>
+                <a:ext cx="2458779" cy="404791"/>
+              </a:xfrm>
+              <a:prstGeom prst="rect">
+                <a:avLst/>
+              </a:prstGeom>
+              <a:blipFill>
+                <a:blip r:embed="rId5"/>
+                <a:stretch>
+                  <a:fillRect b="-15152"/>
+                </a:stretch>
+              </a:blipFill>
+            </p:spPr>
+            <p:txBody>
+              <a:bodyPr/>
+              <a:lstStyle/>
+              <a:p>
+                <a:r>
+                  <a:rPr lang="en-US">
+                    <a:noFill/>
+                  </a:rPr>
+                  <a:t> </a:t>
+                </a:r>
+              </a:p>
+            </p:txBody>
+          </p:sp>
+        </mc:Fallback>
+      </mc:AlternateContent>
+      <p:pic>
+        <p:nvPicPr>
+          <p:cNvPr id="8" name="Picture 7" descr="Conceptual visualization of turbulent wind advection. A fixed and translating Cartesian frame share a test point, with position vectors r and r prime and displacement U_h t."/>
+          <p:cNvPicPr>
+            <a:picLocks noChangeAspect="1"/>
+          </p:cNvPicPr>
+          <p:nvPr/>
+        </p:nvPicPr>
+        <p:blipFill>
+          <a:blip r:embed="rId6"/>
+          <a:stretch>
+            <a:fillRect/>
+          </a:stretch>
+        </p:blipFill>
+        <p:spPr>
+          <a:xfrm>
+            <a:off x="6456963" y="2480080"/>
+            <a:ext cx="5467641" cy="3456432"/>
+          </a:xfrm>
+          <a:prstGeom prst="rect">
+            <a:avLst/>
+          </a:prstGeom>
+        </p:spPr>
+      </p:pic>
+      <p:pic>
+        <p:nvPicPr>
+          <p:cNvPr id="11" name="Picture 10" descr="AI-generated conceptual turbulence-scale schematic, not to scale. User-specified k_min approximately 0.1/l and k_min = 2 pi/L_domain. Colors illustrative rather than calibrated.">
+            <a:extLst>
+              <a:ext uri="{FF2B5EF4-FFF2-40B4-BE49-F238E27FC236}">
+                <a16:creationId xmlns:a16="http://schemas.microsoft.com/office/drawing/2014/main" id="{DC67EED3-D0A8-A679-1ACB-B37924657B72}"/>
+              </a:ext>
+            </a:extLst>
+          </p:cNvPr>
+          <p:cNvPicPr>
+            <a:picLocks noChangeAspect="1"/>
+          </p:cNvPicPr>
+          <p:nvPr/>
+        </p:nvPicPr>
+        <p:blipFill>
+          <a:blip r:embed="rId7"/>
+          <a:stretch>
+            <a:fillRect/>
+          </a:stretch>
+        </p:blipFill>
+        <p:spPr>
+          <a:xfrm>
+            <a:off x="1467292" y="2894642"/>
+            <a:ext cx="3636336" cy="2424224"/>
+          </a:xfrm>
+          <a:prstGeom prst="rect">
+            <a:avLst/>
+          </a:prstGeom>
+        </p:spPr>
+      </p:pic>
+      <mc:AlternateContent xmlns:mc="http://schemas.openxmlformats.org/markup-compatibility/2006">
+        <mc:Choice xmlns:a14="http://schemas.microsoft.com/office/drawing/2010/main" Requires="a14">
+          <p:sp>
+            <p:nvSpPr>
+              <p:cNvPr id="13" name="TextBox 12">
+                <a:extLst>
+                  <a:ext uri="{FF2B5EF4-FFF2-40B4-BE49-F238E27FC236}">
+                    <a16:creationId xmlns:a16="http://schemas.microsoft.com/office/drawing/2014/main" id="{38E205F9-A67E-DF10-7ECD-4D6C99B10152}"/>
+                  </a:ext>
+                </a:extLst>
+              </p:cNvPr>
+              <p:cNvSpPr txBox="1"/>
+              <p:nvPr/>
+            </p:nvSpPr>
+            <p:spPr>
+              <a:xfrm>
+                <a:off x="460290" y="5528451"/>
+                <a:ext cx="6097772" cy="816121"/>
+              </a:xfrm>
+              <a:prstGeom prst="rect">
+                <a:avLst/>
+              </a:prstGeom>
+              <a:noFill/>
+            </p:spPr>
+            <p:txBody>
+              <a:bodyPr wrap="square">
+                <a:spAutoFit/>
+              </a:bodyPr>
+              <a:lstStyle/>
+              <a:p>
+                <a:pPr/>
+                <a14:m>
+                  <m:oMathPara xmlns:m="http://schemas.openxmlformats.org/officeDocument/2006/math">
+                    <m:oMathParaPr>
+                      <m:jc m:val="centerGroup"/>
+                    </m:oMathParaPr>
+                    <m:oMath xmlns:m="http://schemas.openxmlformats.org/officeDocument/2006/math">
+                      <m:sSub>
+                        <m:sSubPr>
+                          <m:ctrlPr>
+                            <a:rPr lang="en-US" i="1" smtClean="0">
+                              <a:latin typeface="Cambria Math" panose="02040503050406030204" pitchFamily="18" charset="0"/>
+                            </a:rPr>
+                          </m:ctrlPr>
+                        </m:sSubPr>
+                        <m:e>
+                          <m:r>
+                            <a:rPr lang="en-US" i="1">
+                              <a:latin typeface="Cambria Math" panose="02040503050406030204" pitchFamily="18" charset="0"/>
+                            </a:rPr>
+                            <m:t>𝑘</m:t>
+                          </m:r>
+                        </m:e>
+                        <m:sub>
+                          <m:r>
+                            <a:rPr lang="en-US" i="1">
+                              <a:latin typeface="Cambria Math" panose="02040503050406030204" pitchFamily="18" charset="0"/>
+                            </a:rPr>
+                            <m:t>𝑛</m:t>
+                          </m:r>
+                        </m:sub>
+                      </m:sSub>
+                      <m:r>
+                        <a:rPr lang="en-US" i="1">
+                          <a:latin typeface="Cambria Math" panose="02040503050406030204" pitchFamily="18" charset="0"/>
+                        </a:rPr>
+                        <m:t>=</m:t>
+                      </m:r>
+                      <m:sSub>
+                        <m:sSubPr>
+                          <m:ctrlPr>
+                            <a:rPr lang="en-US" i="1">
+                              <a:latin typeface="Cambria Math" panose="02040503050406030204" pitchFamily="18" charset="0"/>
+                            </a:rPr>
+                          </m:ctrlPr>
+                        </m:sSubPr>
+                        <m:e>
+                          <m:r>
+                            <a:rPr lang="en-US" i="1">
+                              <a:latin typeface="Cambria Math" panose="02040503050406030204" pitchFamily="18" charset="0"/>
+                            </a:rPr>
+                            <m:t>𝑘</m:t>
+                          </m:r>
+                        </m:e>
+                        <m:sub>
+                          <m:r>
+                            <m:rPr>
+                              <m:sty m:val="p"/>
+                            </m:rPr>
+                            <a:rPr lang="en-US" i="1">
+                              <a:latin typeface="Cambria Math" panose="02040503050406030204" pitchFamily="18" charset="0"/>
+                            </a:rPr>
+                            <m:t>min</m:t>
+                          </m:r>
+                        </m:sub>
+                      </m:sSub>
+                      <m:r>
+                        <a:rPr lang="en-US" i="1">
+                          <a:latin typeface="Cambria Math" panose="02040503050406030204" pitchFamily="18" charset="0"/>
+                        </a:rPr>
+                        <m:t>⋅</m:t>
+                      </m:r>
+                      <m:sSup>
+                        <m:sSupPr>
+                          <m:ctrlPr>
+                            <a:rPr lang="en-US" i="1">
+                              <a:latin typeface="Cambria Math" panose="02040503050406030204" pitchFamily="18" charset="0"/>
+                            </a:rPr>
+                          </m:ctrlPr>
+                        </m:sSupPr>
+                        <m:e>
+                          <m:r>
+                            <a:rPr lang="en-US" i="1">
+                              <a:latin typeface="Cambria Math" panose="02040503050406030204" pitchFamily="18" charset="0"/>
+                            </a:rPr>
+                            <m:t>𝑟</m:t>
+                          </m:r>
+                        </m:e>
+                        <m:sup>
+                          <m:r>
+                            <a:rPr lang="en-US" i="1">
+                              <a:latin typeface="Cambria Math" panose="02040503050406030204" pitchFamily="18" charset="0"/>
+                            </a:rPr>
+                            <m:t>𝑛</m:t>
+                          </m:r>
+                          <m:r>
+                            <a:rPr lang="en-US" i="1">
+                              <a:latin typeface="Cambria Math" panose="02040503050406030204" pitchFamily="18" charset="0"/>
+                            </a:rPr>
+                            <m:t>−1</m:t>
+                          </m:r>
+                        </m:sup>
+                      </m:sSup>
+                      <m:r>
+                        <a:rPr lang="en-US" i="1">
+                          <a:latin typeface="Cambria Math" panose="02040503050406030204" pitchFamily="18" charset="0"/>
+                        </a:rPr>
+                        <m:t>, </m:t>
+                      </m:r>
+                      <m:r>
+                        <m:rPr>
+                          <m:nor/>
+                        </m:rPr>
+                        <a:rPr lang="en-US" b="0" i="0" smtClean="0">
+                          <a:latin typeface="Cambria Math" panose="02040503050406030204" pitchFamily="18" charset="0"/>
+                        </a:rPr>
+                        <m:t>where</m:t>
+                      </m:r>
+                      <m:r>
+                        <m:rPr>
+                          <m:nor/>
+                        </m:rPr>
+                        <a:rPr lang="en-US" i="0">
+                          <a:latin typeface="Cambria Math" panose="02040503050406030204" pitchFamily="18" charset="0"/>
+                        </a:rPr>
+                        <m:t> </m:t>
+                      </m:r>
+                      <m:r>
+                        <a:rPr lang="en-US" i="1">
+                          <a:latin typeface="Cambria Math" panose="02040503050406030204" pitchFamily="18" charset="0"/>
+                        </a:rPr>
+                        <m:t>𝑟</m:t>
+                      </m:r>
+                      <m:r>
+                        <a:rPr lang="en-US" i="1">
+                          <a:latin typeface="Cambria Math" panose="02040503050406030204" pitchFamily="18" charset="0"/>
+                        </a:rPr>
+                        <m:t>=</m:t>
+                      </m:r>
+                      <m:sSup>
+                        <m:sSupPr>
+                          <m:ctrlPr>
+                            <a:rPr lang="en-US" i="1">
+                              <a:latin typeface="Cambria Math" panose="02040503050406030204" pitchFamily="18" charset="0"/>
+                            </a:rPr>
+                          </m:ctrlPr>
+                        </m:sSupPr>
+                        <m:e>
+                          <m:d>
+                            <m:dPr>
+                              <m:ctrlPr>
+                                <a:rPr lang="en-US" i="1">
+                                  <a:latin typeface="Cambria Math" panose="02040503050406030204" pitchFamily="18" charset="0"/>
+                                </a:rPr>
+                              </m:ctrlPr>
+                            </m:dPr>
+                            <m:e>
+                              <m:f>
+                                <m:fPr>
+                                  <m:ctrlPr>
+                                    <a:rPr lang="en-US" i="1">
+                                      <a:latin typeface="Cambria Math" panose="02040503050406030204" pitchFamily="18" charset="0"/>
+                                    </a:rPr>
+                                  </m:ctrlPr>
+                                </m:fPr>
+                                <m:num>
+                                  <m:sSub>
+                                    <m:sSubPr>
+                                      <m:ctrlPr>
+                                        <a:rPr lang="en-US" i="1">
+                                          <a:latin typeface="Cambria Math" panose="02040503050406030204" pitchFamily="18" charset="0"/>
+                                        </a:rPr>
+                                      </m:ctrlPr>
+                                    </m:sSubPr>
+                                    <m:e>
+                                      <m:r>
+                                        <a:rPr lang="en-US" i="1">
+                                          <a:latin typeface="Cambria Math" panose="02040503050406030204" pitchFamily="18" charset="0"/>
+                                        </a:rPr>
+                                        <m:t>𝑘</m:t>
+                                      </m:r>
+                                    </m:e>
+                                    <m:sub>
+                                      <m:r>
+                                        <m:rPr>
+                                          <m:sty m:val="p"/>
+                                        </m:rPr>
+                                        <a:rPr lang="en-US" i="1">
+                                          <a:latin typeface="Cambria Math" panose="02040503050406030204" pitchFamily="18" charset="0"/>
+                                        </a:rPr>
+                                        <m:t>max</m:t>
+                                      </m:r>
+                                    </m:sub>
+                                  </m:sSub>
+                                </m:num>
+                                <m:den>
+                                  <m:sSub>
+                                    <m:sSubPr>
+                                      <m:ctrlPr>
+                                        <a:rPr lang="en-US" i="1">
+                                          <a:latin typeface="Cambria Math" panose="02040503050406030204" pitchFamily="18" charset="0"/>
+                                        </a:rPr>
+                                      </m:ctrlPr>
+                                    </m:sSubPr>
+                                    <m:e>
+                                      <m:r>
+                                        <a:rPr lang="en-US" i="1">
+                                          <a:latin typeface="Cambria Math" panose="02040503050406030204" pitchFamily="18" charset="0"/>
+                                        </a:rPr>
+                                        <m:t>𝑘</m:t>
+                                      </m:r>
+                                    </m:e>
+                                    <m:sub>
+                                      <m:r>
+                                        <m:rPr>
+                                          <m:sty m:val="p"/>
+                                        </m:rPr>
+                                        <a:rPr lang="en-US" i="1">
+                                          <a:latin typeface="Cambria Math" panose="02040503050406030204" pitchFamily="18" charset="0"/>
+                                        </a:rPr>
+                                        <m:t>min</m:t>
+                                      </m:r>
+                                    </m:sub>
+                                  </m:sSub>
+                                </m:den>
+                              </m:f>
+                            </m:e>
+                          </m:d>
+                        </m:e>
+                        <m:sup>
+                          <m:f>
+                            <m:fPr>
+                              <m:ctrlPr>
+                                <a:rPr lang="en-US" i="1">
+                                  <a:latin typeface="Cambria Math" panose="02040503050406030204" pitchFamily="18" charset="0"/>
+                                </a:rPr>
+                              </m:ctrlPr>
+                            </m:fPr>
+                            <m:num>
+                              <m:r>
+                                <a:rPr lang="en-US" i="1">
+                                  <a:latin typeface="Cambria Math" panose="02040503050406030204" pitchFamily="18" charset="0"/>
+                                </a:rPr>
+                                <m:t>1</m:t>
+                              </m:r>
+                            </m:num>
+                            <m:den>
+                              <m:sSub>
+                                <m:sSubPr>
+                                  <m:ctrlPr>
+                                    <a:rPr lang="en-US" i="1">
+                                      <a:latin typeface="Cambria Math" panose="02040503050406030204" pitchFamily="18" charset="0"/>
+                                    </a:rPr>
+                                  </m:ctrlPr>
+                                </m:sSubPr>
+                                <m:e>
+                                  <m:r>
+                                    <a:rPr lang="en-US" i="1">
+                                      <a:latin typeface="Cambria Math" panose="02040503050406030204" pitchFamily="18" charset="0"/>
+                                    </a:rPr>
+                                    <m:t>𝑁</m:t>
+                                  </m:r>
+                                </m:e>
+                                <m:sub>
+                                  <m:r>
+                                    <a:rPr lang="en-US" i="1">
+                                      <a:latin typeface="Cambria Math" panose="02040503050406030204" pitchFamily="18" charset="0"/>
+                                    </a:rPr>
+                                    <m:t>𝑘</m:t>
+                                  </m:r>
+                                </m:sub>
+                              </m:sSub>
+                              <m:r>
+                                <a:rPr lang="en-US" i="1">
+                                  <a:latin typeface="Cambria Math" panose="02040503050406030204" pitchFamily="18" charset="0"/>
+                                </a:rPr>
+                                <m:t>−1</m:t>
+                              </m:r>
+                            </m:den>
+                          </m:f>
+                        </m:sup>
+                      </m:sSup>
+                    </m:oMath>
+                  </m:oMathPara>
+                </a14:m>
+                <a:endParaRPr lang="en-US" dirty="0"/>
+              </a:p>
+            </p:txBody>
+          </p:sp>
+        </mc:Choice>
+        <mc:Fallback>
+          <p:sp>
+            <p:nvSpPr>
+              <p:cNvPr id="13" name="TextBox 12">
+                <a:extLst>
+                  <a:ext uri="{FF2B5EF4-FFF2-40B4-BE49-F238E27FC236}">
+                    <a16:creationId xmlns:a16="http://schemas.microsoft.com/office/drawing/2014/main" id="{38E205F9-A67E-DF10-7ECD-4D6C99B10152}"/>
+                  </a:ext>
+                </a:extLst>
+              </p:cNvPr>
+              <p:cNvSpPr txBox="1">
+                <a:spLocks noRot="1" noChangeAspect="1" noMove="1" noResize="1" noEditPoints="1" noAdjustHandles="1" noChangeArrowheads="1" noChangeShapeType="1" noTextEdit="1"/>
+              </p:cNvSpPr>
+              <p:nvPr/>
+            </p:nvSpPr>
+            <p:spPr>
+              <a:xfrm>
+                <a:off x="460290" y="5528451"/>
+                <a:ext cx="6097772" cy="816121"/>
+              </a:xfrm>
+              <a:prstGeom prst="rect">
+                <a:avLst/>
+              </a:prstGeom>
+              <a:blipFill>
+                <a:blip r:embed="rId8"/>
+                <a:stretch>
+                  <a:fillRect b="-1538"/>
+                </a:stretch>
+              </a:blipFill>
+            </p:spPr>
+            <p:txBody>
+              <a:bodyPr/>
+              <a:lstStyle/>
+              <a:p>
+                <a:r>
+                  <a:rPr lang="en-US">
+                    <a:noFill/>
+                  </a:rPr>
+                  <a:t> </a:t>
+                </a:r>
+              </a:p>
+            </p:txBody>
+          </p:sp>
+        </mc:Fallback>
+      </mc:AlternateContent>
+    </p:spTree>
+    <p:extLst>
+      <p:ext uri="{BB962C8B-B14F-4D97-AF65-F5344CB8AC3E}">
+        <p14:creationId xmlns:p14="http://schemas.microsoft.com/office/powerpoint/2010/main" val="3396241649"/>
+      </p:ext>
+    </p:extLst>
+  </p:cSld>
+  <p:clrMapOvr>
+    <a:masterClrMapping/>
+  </p:clrMapOvr>
+</p:sld>
+</file>
+
+<file path=ppt/slides/slide12.xml><?xml version="1.0" encoding="utf-8"?>
+<p:sld xmlns:a="http://schemas.openxmlformats.org/drawingml/2006/main" xmlns:r="http://schemas.openxmlformats.org/officeDocument/2006/relationships" xmlns:p="http://schemas.openxmlformats.org/presentationml/2006/main">
+  <p:cSld>
+    <p:spTree>
+      <p:nvGrpSpPr>
+        <p:cNvPr id="1" name="">
+          <a:extLst>
+            <a:ext uri="{FF2B5EF4-FFF2-40B4-BE49-F238E27FC236}">
+              <a16:creationId xmlns:a16="http://schemas.microsoft.com/office/drawing/2014/main" id="{2093B52A-57A2-8316-F0A0-9DC91921F90B}"/>
+            </a:ext>
+          </a:extLst>
+        </p:cNvPr>
+        <p:cNvGrpSpPr/>
+        <p:nvPr/>
+      </p:nvGrpSpPr>
+      <p:grpSpPr>
+        <a:xfrm>
+          <a:off x="0" y="0"/>
+          <a:ext cx="0" cy="0"/>
+          <a:chOff x="0" y="0"/>
+          <a:chExt cx="0" cy="0"/>
+        </a:xfrm>
+      </p:grpSpPr>
+      <p:sp>
+        <p:nvSpPr>
+          <p:cNvPr id="4" name="Title 3">
+            <a:extLst>
+              <a:ext uri="{FF2B5EF4-FFF2-40B4-BE49-F238E27FC236}">
+                <a16:creationId xmlns:a16="http://schemas.microsoft.com/office/drawing/2014/main" id="{4B1D856A-7CF2-9734-AF1D-41A07F8B3464}"/>
+              </a:ext>
+            </a:extLst>
+          </p:cNvPr>
+          <p:cNvSpPr>
+            <a:spLocks noGrp="1"/>
+          </p:cNvSpPr>
+          <p:nvPr>
+            <p:ph type="title"/>
+          </p:nvPr>
+        </p:nvSpPr>
+        <p:spPr/>
+        <p:txBody>
+          <a:bodyPr>
+            <a:normAutofit fontScale="90000"/>
+          </a:bodyPr>
+          <a:lstStyle/>
+          <a:p>
+            <a:r>
+              <a:rPr lang="en-US" dirty="0">
+                <a:solidFill>
+                  <a:schemeClr val="bg1"/>
+                </a:solidFill>
+              </a:rPr>
+              <a:t>Air Flow</a:t>
+            </a:r>
+            <a:endParaRPr lang="ro-RO" dirty="0">
+              <a:solidFill>
+                <a:schemeClr val="bg1"/>
+              </a:solidFill>
+            </a:endParaRPr>
+          </a:p>
+        </p:txBody>
+      </p:sp>
+      <p:pic>
+        <p:nvPicPr>
+          <p:cNvPr id="5" name="Picture 4">
+            <a:extLst>
+              <a:ext uri="{FF2B5EF4-FFF2-40B4-BE49-F238E27FC236}">
+                <a16:creationId xmlns:a16="http://schemas.microsoft.com/office/drawing/2014/main" id="{C2D28A31-74D5-A467-A47B-879E7F72BD37}"/>
+              </a:ext>
+            </a:extLst>
+          </p:cNvPr>
+          <p:cNvPicPr>
+            <a:picLocks noChangeAspect="1"/>
+          </p:cNvPicPr>
+          <p:nvPr/>
+        </p:nvPicPr>
+        <p:blipFill>
+          <a:blip r:embed="rId3">
+            <a:clrChange>
+              <a:clrFrom>
+                <a:srgbClr val="000000"/>
+              </a:clrFrom>
+              <a:clrTo>
+                <a:srgbClr val="000000">
+                  <a:alpha val="0"/>
+                </a:srgbClr>
+              </a:clrTo>
+            </a:clrChange>
+            <a:extLst>
+              <a:ext uri="{28A0092B-C50C-407E-A947-70E740481C1C}">
+                <a14:useLocalDpi xmlns:a14="http://schemas.microsoft.com/office/drawing/2010/main" val="0"/>
+              </a:ext>
+            </a:extLst>
+          </a:blip>
+          <a:stretch>
+            <a:fillRect/>
+          </a:stretch>
+        </p:blipFill>
+        <p:spPr>
+          <a:xfrm>
+            <a:off x="10432471" y="6323329"/>
+            <a:ext cx="1492133" cy="496892"/>
+          </a:xfrm>
+          <a:prstGeom prst="rect">
+            <a:avLst/>
+          </a:prstGeom>
+        </p:spPr>
+      </p:pic>
+      <p:pic>
+        <p:nvPicPr>
+          <p:cNvPr id="6" name="Picture 5">
+            <a:extLst>
+              <a:ext uri="{FF2B5EF4-FFF2-40B4-BE49-F238E27FC236}">
+                <a16:creationId xmlns:a16="http://schemas.microsoft.com/office/drawing/2014/main" id="{925E483D-CE8B-C986-B947-1F752EE89146}"/>
+              </a:ext>
+            </a:extLst>
+          </p:cNvPr>
+          <p:cNvPicPr>
+            <a:picLocks noChangeAspect="1"/>
+          </p:cNvPicPr>
+          <p:nvPr/>
+        </p:nvPicPr>
+        <p:blipFill>
+          <a:blip r:embed="rId4"/>
+          <a:stretch>
+            <a:fillRect/>
+          </a:stretch>
+        </p:blipFill>
+        <p:spPr>
+          <a:xfrm>
+            <a:off x="758799" y="1446122"/>
+            <a:ext cx="7772400" cy="2341902"/>
+          </a:xfrm>
+          <a:prstGeom prst="rect">
+            <a:avLst/>
+          </a:prstGeom>
+        </p:spPr>
+      </p:pic>
+      <mc:AlternateContent xmlns:mc="http://schemas.openxmlformats.org/markup-compatibility/2006">
+        <mc:Choice xmlns:a14="http://schemas.microsoft.com/office/drawing/2010/main" Requires="a14">
+          <p:sp>
+            <p:nvSpPr>
+              <p:cNvPr id="9" name="TextBox 8">
+                <a:extLst>
+                  <a:ext uri="{FF2B5EF4-FFF2-40B4-BE49-F238E27FC236}">
+                    <a16:creationId xmlns:a16="http://schemas.microsoft.com/office/drawing/2014/main" id="{C2341DF7-D99A-62B7-7E6A-3D8590AE9D80}"/>
+                  </a:ext>
+                </a:extLst>
+              </p:cNvPr>
+              <p:cNvSpPr txBox="1"/>
+              <p:nvPr/>
+            </p:nvSpPr>
+            <p:spPr>
+              <a:xfrm>
+                <a:off x="850891" y="4206242"/>
+                <a:ext cx="2549288" cy="318036"/>
+              </a:xfrm>
+              <a:prstGeom prst="rect">
+                <a:avLst/>
+              </a:prstGeom>
+              <a:noFill/>
+            </p:spPr>
+            <p:txBody>
+              <a:bodyPr wrap="none" lIns="0" tIns="0" rIns="0" bIns="0" rtlCol="0">
+                <a:spAutoFit/>
+              </a:bodyPr>
+              <a:lstStyle/>
+              <a:p>
+                <a14:m>
+                  <m:oMathPara xmlns:m="http://schemas.openxmlformats.org/officeDocument/2006/math">
+                    <m:oMathParaPr>
+                      <m:jc m:val="centerGroup"/>
+                    </m:oMathParaPr>
+                    <m:oMath xmlns:m="http://schemas.openxmlformats.org/officeDocument/2006/math">
+                      <m:r>
+                        <m:rPr>
+                          <m:sty m:val="p"/>
+                        </m:rPr>
+                        <a:rPr lang="en-US" b="0" i="1" smtClean="0">
+                          <a:latin typeface="Cambria Math" panose="02040503050406030204" pitchFamily="18" charset="0"/>
+                        </a:rPr>
+                        <m:t>∇</m:t>
+                      </m:r>
+                      <m:r>
+                        <a:rPr lang="en-US" b="0" i="1" smtClean="0">
+                          <a:latin typeface="Cambria Math" panose="02040503050406030204" pitchFamily="18" charset="0"/>
+                        </a:rPr>
+                        <m:t>⋅</m:t>
+                      </m:r>
+                      <m:acc>
+                        <m:accPr>
+                          <m:chr m:val="⃗"/>
+                          <m:ctrlPr>
+                            <a:rPr lang="en-US" b="0" i="1" smtClean="0">
+                              <a:latin typeface="Cambria Math" panose="02040503050406030204" pitchFamily="18" charset="0"/>
+                            </a:rPr>
+                          </m:ctrlPr>
+                        </m:accPr>
+                        <m:e>
+                          <m:r>
+                            <m:rPr>
+                              <m:sty m:val="p"/>
+                            </m:rPr>
+                            <a:rPr lang="en-US" b="0" i="1" smtClean="0">
+                              <a:latin typeface="Cambria Math" panose="02040503050406030204" pitchFamily="18" charset="0"/>
+                            </a:rPr>
+                            <m:t>u</m:t>
+                          </m:r>
+                        </m:e>
+                      </m:acc>
+                      <m:r>
+                        <a:rPr lang="en-US" b="0" i="1" smtClean="0">
+                          <a:latin typeface="Cambria Math" panose="02040503050406030204" pitchFamily="18" charset="0"/>
+                        </a:rPr>
+                        <m:t>=0 </m:t>
+                      </m:r>
+                      <m:r>
+                        <a:rPr lang="en-US" b="0" i="1" smtClean="0">
+                          <a:latin typeface="Cambria Math" panose="02040503050406030204" pitchFamily="18" charset="0"/>
+                          <a:ea typeface="Cambria Math" panose="02040503050406030204" pitchFamily="18" charset="0"/>
+                        </a:rPr>
+                        <m:t>⇒ </m:t>
+                      </m:r>
+                      <m:acc>
+                        <m:accPr>
+                          <m:chr m:val="⃗"/>
+                          <m:ctrlPr>
+                            <a:rPr lang="en-US" b="0" i="1" smtClean="0">
+                              <a:latin typeface="Cambria Math" panose="02040503050406030204" pitchFamily="18" charset="0"/>
+                              <a:ea typeface="Cambria Math" panose="02040503050406030204" pitchFamily="18" charset="0"/>
+                            </a:rPr>
+                          </m:ctrlPr>
+                        </m:accPr>
+                        <m:e>
+                          <m:sSub>
+                            <m:sSubPr>
+                              <m:ctrlPr>
+                                <a:rPr lang="en-US" b="0" i="1" smtClean="0">
+                                  <a:latin typeface="Cambria Math" panose="02040503050406030204" pitchFamily="18" charset="0"/>
+                                  <a:ea typeface="Cambria Math" panose="02040503050406030204" pitchFamily="18" charset="0"/>
+                                </a:rPr>
+                              </m:ctrlPr>
+                            </m:sSubPr>
+                            <m:e>
+                              <m:r>
+                                <m:rPr>
+                                  <m:sty m:val="p"/>
+                                </m:rPr>
+                                <a:rPr lang="en-US" b="0" i="1" smtClean="0">
+                                  <a:latin typeface="Cambria Math" panose="02040503050406030204" pitchFamily="18" charset="0"/>
+                                  <a:ea typeface="Cambria Math" panose="02040503050406030204" pitchFamily="18" charset="0"/>
+                                </a:rPr>
+                                <m:t>a</m:t>
+                              </m:r>
+                            </m:e>
+                            <m:sub>
+                              <m:r>
+                                <m:rPr>
+                                  <m:sty m:val="p"/>
+                                </m:rPr>
+                                <a:rPr lang="en-US" b="0" i="1" smtClean="0">
+                                  <a:latin typeface="Cambria Math" panose="02040503050406030204" pitchFamily="18" charset="0"/>
+                                  <a:ea typeface="Cambria Math" panose="02040503050406030204" pitchFamily="18" charset="0"/>
+                                </a:rPr>
+                                <m:t>n</m:t>
+                              </m:r>
+                            </m:sub>
+                          </m:sSub>
+                        </m:e>
+                      </m:acc>
+                      <m:r>
+                        <a:rPr lang="en-US" b="0" i="1" smtClean="0">
+                          <a:latin typeface="Cambria Math" panose="02040503050406030204" pitchFamily="18" charset="0"/>
+                        </a:rPr>
+                        <m:t>,</m:t>
+                      </m:r>
+                      <m:acc>
+                        <m:accPr>
+                          <m:chr m:val="⃗"/>
+                          <m:ctrlPr>
+                            <a:rPr lang="en-US" i="1">
+                              <a:latin typeface="Cambria Math" panose="02040503050406030204" pitchFamily="18" charset="0"/>
+                              <a:ea typeface="Cambria Math" panose="02040503050406030204" pitchFamily="18" charset="0"/>
+                            </a:rPr>
+                          </m:ctrlPr>
+                        </m:accPr>
+                        <m:e>
+                          <m:sSub>
+                            <m:sSubPr>
+                              <m:ctrlPr>
+                                <a:rPr lang="en-US" i="1">
+                                  <a:latin typeface="Cambria Math" panose="02040503050406030204" pitchFamily="18" charset="0"/>
+                                  <a:ea typeface="Cambria Math" panose="02040503050406030204" pitchFamily="18" charset="0"/>
+                                </a:rPr>
+                              </m:ctrlPr>
+                            </m:sSubPr>
+                            <m:e>
+                              <m:r>
+                                <m:rPr>
+                                  <m:sty m:val="p"/>
+                                </m:rPr>
+                                <a:rPr lang="en-US" b="0" i="1" smtClean="0">
+                                  <a:latin typeface="Cambria Math" panose="02040503050406030204" pitchFamily="18" charset="0"/>
+                                  <a:ea typeface="Cambria Math" panose="02040503050406030204" pitchFamily="18" charset="0"/>
+                                </a:rPr>
+                                <m:t>b</m:t>
+                              </m:r>
+                            </m:e>
+                            <m:sub>
+                              <m:r>
+                                <m:rPr>
+                                  <m:sty m:val="p"/>
+                                </m:rPr>
+                                <a:rPr lang="en-US" i="1">
+                                  <a:latin typeface="Cambria Math" panose="02040503050406030204" pitchFamily="18" charset="0"/>
+                                  <a:ea typeface="Cambria Math" panose="02040503050406030204" pitchFamily="18" charset="0"/>
+                                </a:rPr>
+                                <m:t>n</m:t>
+                              </m:r>
+                            </m:sub>
+                          </m:sSub>
+                          <m:r>
+                            <a:rPr lang="en-US" b="0" i="1" smtClean="0">
+                              <a:latin typeface="Cambria Math" panose="02040503050406030204" pitchFamily="18" charset="0"/>
+                              <a:ea typeface="Cambria Math" panose="02040503050406030204" pitchFamily="18" charset="0"/>
+                            </a:rPr>
+                            <m:t> </m:t>
+                          </m:r>
+                        </m:e>
+                      </m:acc>
+                      <m:r>
+                        <a:rPr lang="en-US" b="0" i="1" smtClean="0">
+                          <a:latin typeface="Cambria Math" panose="02040503050406030204" pitchFamily="18" charset="0"/>
+                          <a:ea typeface="Cambria Math" panose="02040503050406030204" pitchFamily="18" charset="0"/>
+                        </a:rPr>
+                        <m:t> ⊥</m:t>
+                      </m:r>
+                      <m:acc>
+                        <m:accPr>
+                          <m:chr m:val="⃗"/>
+                          <m:ctrlPr>
+                            <a:rPr lang="en-US" i="1">
+                              <a:latin typeface="Cambria Math" panose="02040503050406030204" pitchFamily="18" charset="0"/>
+                              <a:ea typeface="Cambria Math" panose="02040503050406030204" pitchFamily="18" charset="0"/>
+                            </a:rPr>
+                          </m:ctrlPr>
+                        </m:accPr>
+                        <m:e>
+                          <m:sSub>
+                            <m:sSubPr>
+                              <m:ctrlPr>
+                                <a:rPr lang="en-US" i="1">
+                                  <a:latin typeface="Cambria Math" panose="02040503050406030204" pitchFamily="18" charset="0"/>
+                                  <a:ea typeface="Cambria Math" panose="02040503050406030204" pitchFamily="18" charset="0"/>
+                                </a:rPr>
+                              </m:ctrlPr>
+                            </m:sSubPr>
+                            <m:e>
+                              <m:r>
+                                <m:rPr>
+                                  <m:sty m:val="p"/>
+                                </m:rPr>
+                                <a:rPr lang="en-US" b="0" i="1" smtClean="0">
+                                  <a:latin typeface="Cambria Math" panose="02040503050406030204" pitchFamily="18" charset="0"/>
+                                  <a:ea typeface="Cambria Math" panose="02040503050406030204" pitchFamily="18" charset="0"/>
+                                </a:rPr>
+                                <m:t>k</m:t>
+                              </m:r>
+                            </m:e>
+                            <m:sub>
+                              <m:r>
+                                <m:rPr>
+                                  <m:sty m:val="p"/>
+                                </m:rPr>
+                                <a:rPr lang="en-US" i="1">
+                                  <a:latin typeface="Cambria Math" panose="02040503050406030204" pitchFamily="18" charset="0"/>
+                                  <a:ea typeface="Cambria Math" panose="02040503050406030204" pitchFamily="18" charset="0"/>
+                                </a:rPr>
+                                <m:t>n</m:t>
+                              </m:r>
+                            </m:sub>
+                          </m:sSub>
+                        </m:e>
+                      </m:acc>
+                    </m:oMath>
+                  </m:oMathPara>
+                </a14:m>
+                <a:endParaRPr lang="en-US" dirty="0"/>
+              </a:p>
+            </p:txBody>
+          </p:sp>
+        </mc:Choice>
+        <mc:Fallback>
+          <p:sp>
+            <p:nvSpPr>
+              <p:cNvPr id="9" name="TextBox 8">
+                <a:extLst>
+                  <a:ext uri="{FF2B5EF4-FFF2-40B4-BE49-F238E27FC236}">
+                    <a16:creationId xmlns:a16="http://schemas.microsoft.com/office/drawing/2014/main" id="{C2341DF7-D99A-62B7-7E6A-3D8590AE9D80}"/>
+                  </a:ext>
+                </a:extLst>
+              </p:cNvPr>
+              <p:cNvSpPr txBox="1">
+                <a:spLocks noRot="1" noChangeAspect="1" noMove="1" noResize="1" noEditPoints="1" noAdjustHandles="1" noChangeArrowheads="1" noChangeShapeType="1" noTextEdit="1"/>
+              </p:cNvSpPr>
+              <p:nvPr/>
+            </p:nvSpPr>
+            <p:spPr>
+              <a:xfrm>
+                <a:off x="850891" y="4206242"/>
+                <a:ext cx="2549288" cy="318036"/>
+              </a:xfrm>
+              <a:prstGeom prst="rect">
+                <a:avLst/>
+              </a:prstGeom>
+              <a:blipFill>
+                <a:blip r:embed="rId5"/>
+                <a:stretch>
+                  <a:fillRect l="-1493" b="-34615"/>
+                </a:stretch>
+              </a:blipFill>
+            </p:spPr>
+            <p:txBody>
+              <a:bodyPr/>
+              <a:lstStyle/>
+              <a:p>
+                <a:r>
+                  <a:rPr lang="en-US">
+                    <a:noFill/>
+                  </a:rPr>
+                  <a:t> </a:t>
+                </a:r>
+              </a:p>
+            </p:txBody>
+          </p:sp>
+        </mc:Fallback>
+      </mc:AlternateContent>
+      <p:sp>
+        <p:nvSpPr>
+          <p:cNvPr id="11" name="TextBox 10">
+            <a:extLst>
+              <a:ext uri="{FF2B5EF4-FFF2-40B4-BE49-F238E27FC236}">
+                <a16:creationId xmlns:a16="http://schemas.microsoft.com/office/drawing/2014/main" id="{C2417124-34F5-FBCD-AE0F-C1D01FB97BF4}"/>
+              </a:ext>
+            </a:extLst>
+          </p:cNvPr>
+          <p:cNvSpPr txBox="1"/>
+          <p:nvPr/>
+        </p:nvSpPr>
+        <p:spPr>
+          <a:xfrm>
+            <a:off x="8304027" y="2617073"/>
+            <a:ext cx="1988288" cy="369332"/>
+          </a:xfrm>
+          <a:prstGeom prst="rect">
+            <a:avLst/>
+          </a:prstGeom>
+          <a:noFill/>
+        </p:spPr>
+        <p:txBody>
+          <a:bodyPr wrap="square" rtlCol="0">
+            <a:spAutoFit/>
+          </a:bodyPr>
+          <a:lstStyle/>
+          <a:p>
+            <a:r>
+              <a:rPr lang="en-US" dirty="0"/>
+              <a:t>Horizontal wind</a:t>
+            </a:r>
+          </a:p>
+        </p:txBody>
+      </p:sp>
+    </p:spTree>
+    <p:extLst>
+      <p:ext uri="{BB962C8B-B14F-4D97-AF65-F5344CB8AC3E}">
+        <p14:creationId xmlns:p14="http://schemas.microsoft.com/office/powerpoint/2010/main" val="4118296954"/>
+      </p:ext>
+    </p:extLst>
+  </p:cSld>
+  <p:clrMapOvr>
+    <a:masterClrMapping/>
+  </p:clrMapOvr>
+</p:sld>
+</file>
+
+<file path=ppt/slides/slide13.xml><?xml version="1.0" encoding="utf-8"?>
+<p:sld xmlns:a="http://schemas.openxmlformats.org/drawingml/2006/main" xmlns:r="http://schemas.openxmlformats.org/officeDocument/2006/relationships" xmlns:p="http://schemas.openxmlformats.org/presentationml/2006/main">
+  <p:cSld>
+    <p:spTree>
+      <p:nvGrpSpPr>
+        <p:cNvPr id="1" name="">
+          <a:extLst>
+            <a:ext uri="{FF2B5EF4-FFF2-40B4-BE49-F238E27FC236}">
+              <a16:creationId xmlns:a16="http://schemas.microsoft.com/office/drawing/2014/main" id="{0DC39366-231C-176F-08EE-2AAE719189DC}"/>
+            </a:ext>
+          </a:extLst>
+        </p:cNvPr>
+        <p:cNvGrpSpPr/>
+        <p:nvPr/>
+      </p:nvGrpSpPr>
+      <p:grpSpPr>
+        <a:xfrm>
+          <a:off x="0" y="0"/>
+          <a:ext cx="0" cy="0"/>
+          <a:chOff x="0" y="0"/>
+          <a:chExt cx="0" cy="0"/>
+        </a:xfrm>
+      </p:grpSpPr>
+      <p:sp>
+        <p:nvSpPr>
+          <p:cNvPr id="4" name="Title 3">
+            <a:extLst>
+              <a:ext uri="{FF2B5EF4-FFF2-40B4-BE49-F238E27FC236}">
+                <a16:creationId xmlns:a16="http://schemas.microsoft.com/office/drawing/2014/main" id="{BDC8001B-9DF2-623A-B94F-B886407B62C2}"/>
+              </a:ext>
+            </a:extLst>
+          </p:cNvPr>
+          <p:cNvSpPr>
+            <a:spLocks noGrp="1"/>
+          </p:cNvSpPr>
+          <p:nvPr>
+            <p:ph type="title"/>
+          </p:nvPr>
+        </p:nvSpPr>
+        <p:spPr/>
+        <p:txBody>
+          <a:bodyPr>
+            <a:normAutofit fontScale="90000"/>
+          </a:bodyPr>
+          <a:lstStyle/>
+          <a:p>
+            <a:r>
+              <a:rPr lang="en-US" dirty="0">
+                <a:solidFill>
+                  <a:schemeClr val="bg1"/>
+                </a:solidFill>
+              </a:rPr>
+              <a:t>Take-off Probability</a:t>
+            </a:r>
+            <a:endParaRPr lang="ro-RO" dirty="0">
+              <a:solidFill>
+                <a:schemeClr val="bg1"/>
+              </a:solidFill>
+            </a:endParaRPr>
+          </a:p>
+        </p:txBody>
+      </p:sp>
+      <p:pic>
+        <p:nvPicPr>
+          <p:cNvPr id="5" name="Picture 4">
+            <a:extLst>
+              <a:ext uri="{FF2B5EF4-FFF2-40B4-BE49-F238E27FC236}">
+                <a16:creationId xmlns:a16="http://schemas.microsoft.com/office/drawing/2014/main" id="{E69E1577-7F10-BF94-65AF-7DC86D8E7C15}"/>
+              </a:ext>
+            </a:extLst>
+          </p:cNvPr>
+          <p:cNvPicPr>
+            <a:picLocks noChangeAspect="1"/>
+          </p:cNvPicPr>
+          <p:nvPr/>
+        </p:nvPicPr>
+        <p:blipFill>
+          <a:blip r:embed="rId3">
+            <a:clrChange>
+              <a:clrFrom>
+                <a:srgbClr val="000000"/>
+              </a:clrFrom>
+              <a:clrTo>
+                <a:srgbClr val="000000">
+                  <a:alpha val="0"/>
+                </a:srgbClr>
+              </a:clrTo>
+            </a:clrChange>
+            <a:extLst>
+              <a:ext uri="{28A0092B-C50C-407E-A947-70E740481C1C}">
+                <a14:useLocalDpi xmlns:a14="http://schemas.microsoft.com/office/drawing/2010/main" val="0"/>
+              </a:ext>
+            </a:extLst>
+          </a:blip>
+          <a:stretch>
+            <a:fillRect/>
+          </a:stretch>
+        </p:blipFill>
+        <p:spPr>
+          <a:xfrm>
+            <a:off x="10432471" y="6323329"/>
+            <a:ext cx="1492133" cy="496892"/>
+          </a:xfrm>
+          <a:prstGeom prst="rect">
+            <a:avLst/>
+          </a:prstGeom>
+        </p:spPr>
+      </p:pic>
+      <p:pic>
+        <p:nvPicPr>
+          <p:cNvPr id="3" name="Picture 2">
+            <a:extLst>
+              <a:ext uri="{FF2B5EF4-FFF2-40B4-BE49-F238E27FC236}">
+                <a16:creationId xmlns:a16="http://schemas.microsoft.com/office/drawing/2014/main" id="{4C55214F-7667-C882-BFAB-1124F57F2240}"/>
+              </a:ext>
+            </a:extLst>
+          </p:cNvPr>
+          <p:cNvPicPr>
+            <a:picLocks noChangeAspect="1"/>
+          </p:cNvPicPr>
+          <p:nvPr/>
+        </p:nvPicPr>
+        <p:blipFill>
+          <a:blip r:embed="rId4"/>
+          <a:stretch>
+            <a:fillRect/>
+          </a:stretch>
+        </p:blipFill>
+        <p:spPr>
+          <a:xfrm>
+            <a:off x="820894" y="1354174"/>
+            <a:ext cx="4913423" cy="3665874"/>
+          </a:xfrm>
+          <a:prstGeom prst="rect">
+            <a:avLst/>
+          </a:prstGeom>
+        </p:spPr>
+      </p:pic>
+      <mc:AlternateContent xmlns:mc="http://schemas.openxmlformats.org/markup-compatibility/2006">
+        <mc:Choice xmlns:a14="http://schemas.microsoft.com/office/drawing/2010/main" Requires="a14">
+          <p:sp>
+            <p:nvSpPr>
+              <p:cNvPr id="8" name="TextBox 7">
+                <a:extLst>
+                  <a:ext uri="{FF2B5EF4-FFF2-40B4-BE49-F238E27FC236}">
+                    <a16:creationId xmlns:a16="http://schemas.microsoft.com/office/drawing/2014/main" id="{A078911C-AE2F-7A22-7AFF-A934761E71ED}"/>
+                  </a:ext>
+                </a:extLst>
+              </p:cNvPr>
+              <p:cNvSpPr txBox="1"/>
+              <p:nvPr/>
+            </p:nvSpPr>
+            <p:spPr>
+              <a:xfrm>
+                <a:off x="6626327" y="1496750"/>
+                <a:ext cx="4744779" cy="610936"/>
+              </a:xfrm>
+              <a:prstGeom prst="rect">
+                <a:avLst/>
+              </a:prstGeom>
+              <a:noFill/>
+            </p:spPr>
+            <p:txBody>
+              <a:bodyPr wrap="square">
+                <a:spAutoFit/>
+              </a:bodyPr>
+              <a:lstStyle/>
+              <a:p>
+                <a:pPr/>
+                <a14:m>
+                  <m:oMathPara xmlns:m="http://schemas.openxmlformats.org/officeDocument/2006/math">
+                    <m:oMathParaPr>
+                      <m:jc m:val="centerGroup"/>
+                    </m:oMathParaPr>
+                    <m:oMath xmlns:m="http://schemas.openxmlformats.org/officeDocument/2006/math">
+                      <m:r>
+                        <a:rPr lang="en-US" i="1" smtClean="0">
+                          <a:latin typeface="Cambria Math" panose="02040503050406030204" pitchFamily="18" charset="0"/>
+                        </a:rPr>
+                        <m:t>𝑃</m:t>
+                      </m:r>
+                      <m:d>
+                        <m:dPr>
+                          <m:ctrlPr>
+                            <a:rPr lang="en-US" i="1">
+                              <a:latin typeface="Cambria Math" panose="02040503050406030204" pitchFamily="18" charset="0"/>
+                            </a:rPr>
+                          </m:ctrlPr>
+                        </m:dPr>
+                        <m:e>
+                          <m:r>
+                            <a:rPr lang="en-US" i="1">
+                              <a:latin typeface="Cambria Math" panose="02040503050406030204" pitchFamily="18" charset="0"/>
+                            </a:rPr>
+                            <m:t>𝑧</m:t>
+                          </m:r>
+                          <m:r>
+                            <a:rPr lang="en-US" i="1">
+                              <a:latin typeface="Cambria Math" panose="02040503050406030204" pitchFamily="18" charset="0"/>
+                            </a:rPr>
+                            <m:t>+</m:t>
+                          </m:r>
+                          <m:r>
+                            <m:rPr>
+                              <m:sty m:val="p"/>
+                            </m:rPr>
+                            <a:rPr lang="en-US" i="0">
+                              <a:latin typeface="Cambria Math" panose="02040503050406030204" pitchFamily="18" charset="0"/>
+                            </a:rPr>
+                            <m:t>Δ</m:t>
+                          </m:r>
+                          <m:r>
+                            <a:rPr lang="en-US" i="1">
+                              <a:latin typeface="Cambria Math" panose="02040503050406030204" pitchFamily="18" charset="0"/>
+                            </a:rPr>
+                            <m:t>𝑧</m:t>
+                          </m:r>
+                        </m:e>
+                      </m:d>
+                      <m:r>
+                        <a:rPr lang="en-US" i="1">
+                          <a:latin typeface="Cambria Math" panose="02040503050406030204" pitchFamily="18" charset="0"/>
+                        </a:rPr>
+                        <m:t>≈</m:t>
+                      </m:r>
+                      <m:r>
+                        <a:rPr lang="en-US" i="1">
+                          <a:latin typeface="Cambria Math" panose="02040503050406030204" pitchFamily="18" charset="0"/>
+                        </a:rPr>
+                        <m:t>𝑃</m:t>
+                      </m:r>
+                      <m:d>
+                        <m:dPr>
+                          <m:ctrlPr>
+                            <a:rPr lang="en-US" i="1">
+                              <a:latin typeface="Cambria Math" panose="02040503050406030204" pitchFamily="18" charset="0"/>
+                            </a:rPr>
+                          </m:ctrlPr>
+                        </m:dPr>
+                        <m:e>
+                          <m:r>
+                            <a:rPr lang="en-US" i="1">
+                              <a:latin typeface="Cambria Math" panose="02040503050406030204" pitchFamily="18" charset="0"/>
+                            </a:rPr>
+                            <m:t>𝑧</m:t>
+                          </m:r>
+                        </m:e>
+                      </m:d>
+                      <m:r>
+                        <a:rPr lang="en-US" i="1">
+                          <a:latin typeface="Cambria Math" panose="02040503050406030204" pitchFamily="18" charset="0"/>
+                        </a:rPr>
+                        <m:t>+</m:t>
+                      </m:r>
+                      <m:sSup>
+                        <m:sSupPr>
+                          <m:ctrlPr>
+                            <a:rPr lang="en-US" i="1">
+                              <a:latin typeface="Cambria Math" panose="02040503050406030204" pitchFamily="18" charset="0"/>
+                            </a:rPr>
+                          </m:ctrlPr>
+                        </m:sSupPr>
+                        <m:e>
+                          <m:r>
+                            <a:rPr lang="en-US" i="1">
+                              <a:latin typeface="Cambria Math" panose="02040503050406030204" pitchFamily="18" charset="0"/>
+                            </a:rPr>
+                            <m:t>𝑃</m:t>
+                          </m:r>
+                        </m:e>
+                        <m:sup>
+                          <m:r>
+                            <a:rPr lang="en-US" i="1">
+                              <a:latin typeface="Cambria Math" panose="02040503050406030204" pitchFamily="18" charset="0"/>
+                            </a:rPr>
+                            <m:t>′</m:t>
+                          </m:r>
+                        </m:sup>
+                      </m:sSup>
+                      <m:d>
+                        <m:dPr>
+                          <m:ctrlPr>
+                            <a:rPr lang="en-US" i="1">
+                              <a:latin typeface="Cambria Math" panose="02040503050406030204" pitchFamily="18" charset="0"/>
+                            </a:rPr>
+                          </m:ctrlPr>
+                        </m:dPr>
+                        <m:e>
+                          <m:r>
+                            <a:rPr lang="en-US" i="1">
+                              <a:latin typeface="Cambria Math" panose="02040503050406030204" pitchFamily="18" charset="0"/>
+                            </a:rPr>
+                            <m:t>𝑧</m:t>
+                          </m:r>
+                        </m:e>
+                      </m:d>
+                      <m:r>
+                        <m:rPr>
+                          <m:sty m:val="p"/>
+                        </m:rPr>
+                        <a:rPr lang="en-US" i="0">
+                          <a:latin typeface="Cambria Math" panose="02040503050406030204" pitchFamily="18" charset="0"/>
+                        </a:rPr>
+                        <m:t>Δ</m:t>
+                      </m:r>
+                      <m:r>
+                        <a:rPr lang="en-US" i="1">
+                          <a:latin typeface="Cambria Math" panose="02040503050406030204" pitchFamily="18" charset="0"/>
+                        </a:rPr>
+                        <m:t>𝑧</m:t>
+                      </m:r>
+                      <m:r>
+                        <a:rPr lang="en-US" i="1">
+                          <a:latin typeface="Cambria Math" panose="02040503050406030204" pitchFamily="18" charset="0"/>
+                        </a:rPr>
+                        <m:t>+</m:t>
+                      </m:r>
+                      <m:f>
+                        <m:fPr>
+                          <m:ctrlPr>
+                            <a:rPr lang="en-US" i="1">
+                              <a:latin typeface="Cambria Math" panose="02040503050406030204" pitchFamily="18" charset="0"/>
+                            </a:rPr>
+                          </m:ctrlPr>
+                        </m:fPr>
+                        <m:num>
+                          <m:r>
+                            <a:rPr lang="en-US" i="1">
+                              <a:latin typeface="Cambria Math" panose="02040503050406030204" pitchFamily="18" charset="0"/>
+                            </a:rPr>
+                            <m:t>1</m:t>
+                          </m:r>
+                        </m:num>
+                        <m:den>
+                          <m:r>
+                            <a:rPr lang="en-US" i="1">
+                              <a:latin typeface="Cambria Math" panose="02040503050406030204" pitchFamily="18" charset="0"/>
+                            </a:rPr>
+                            <m:t>2</m:t>
+                          </m:r>
+                        </m:den>
+                      </m:f>
+                      <m:sSup>
+                        <m:sSupPr>
+                          <m:ctrlPr>
+                            <a:rPr lang="en-US" i="1">
+                              <a:latin typeface="Cambria Math" panose="02040503050406030204" pitchFamily="18" charset="0"/>
+                            </a:rPr>
+                          </m:ctrlPr>
+                        </m:sSupPr>
+                        <m:e>
+                          <m:r>
+                            <a:rPr lang="en-US" i="1">
+                              <a:latin typeface="Cambria Math" panose="02040503050406030204" pitchFamily="18" charset="0"/>
+                            </a:rPr>
+                            <m:t>𝑃</m:t>
+                          </m:r>
+                        </m:e>
+                        <m:sup>
+                          <m:r>
+                            <a:rPr lang="en-US" i="1">
+                              <a:latin typeface="Cambria Math" panose="02040503050406030204" pitchFamily="18" charset="0"/>
+                            </a:rPr>
+                            <m:t>′′</m:t>
+                          </m:r>
+                        </m:sup>
+                      </m:sSup>
+                      <m:d>
+                        <m:dPr>
+                          <m:ctrlPr>
+                            <a:rPr lang="en-US" i="1">
+                              <a:latin typeface="Cambria Math" panose="02040503050406030204" pitchFamily="18" charset="0"/>
+                            </a:rPr>
+                          </m:ctrlPr>
+                        </m:dPr>
+                        <m:e>
+                          <m:r>
+                            <a:rPr lang="en-US" i="1">
+                              <a:latin typeface="Cambria Math" panose="02040503050406030204" pitchFamily="18" charset="0"/>
+                            </a:rPr>
+                            <m:t>𝑧</m:t>
+                          </m:r>
+                        </m:e>
+                      </m:d>
+                      <m:sSup>
+                        <m:sSupPr>
+                          <m:ctrlPr>
+                            <a:rPr lang="en-US" i="1">
+                              <a:latin typeface="Cambria Math" panose="02040503050406030204" pitchFamily="18" charset="0"/>
+                            </a:rPr>
+                          </m:ctrlPr>
+                        </m:sSupPr>
+                        <m:e>
+                          <m:d>
+                            <m:dPr>
+                              <m:ctrlPr>
+                                <a:rPr lang="en-US" i="1">
+                                  <a:latin typeface="Cambria Math" panose="02040503050406030204" pitchFamily="18" charset="0"/>
+                                </a:rPr>
+                              </m:ctrlPr>
+                            </m:dPr>
+                            <m:e>
+                              <m:r>
+                                <m:rPr>
+                                  <m:sty m:val="p"/>
+                                </m:rPr>
+                                <a:rPr lang="en-US" i="0">
+                                  <a:latin typeface="Cambria Math" panose="02040503050406030204" pitchFamily="18" charset="0"/>
+                                </a:rPr>
+                                <m:t>Δ</m:t>
+                              </m:r>
+                              <m:r>
+                                <a:rPr lang="en-US" i="1">
+                                  <a:latin typeface="Cambria Math" panose="02040503050406030204" pitchFamily="18" charset="0"/>
+                                </a:rPr>
+                                <m:t>𝑧</m:t>
+                              </m:r>
+                            </m:e>
+                          </m:d>
+                        </m:e>
+                        <m:sup>
+                          <m:r>
+                            <a:rPr lang="en-US" i="1">
+                              <a:latin typeface="Cambria Math" panose="02040503050406030204" pitchFamily="18" charset="0"/>
+                            </a:rPr>
+                            <m:t>2</m:t>
+                          </m:r>
+                        </m:sup>
+                      </m:sSup>
+                    </m:oMath>
+                  </m:oMathPara>
+                </a14:m>
+                <a:endParaRPr lang="en-US" dirty="0"/>
+              </a:p>
+            </p:txBody>
+          </p:sp>
+        </mc:Choice>
+        <mc:Fallback>
+          <p:sp>
+            <p:nvSpPr>
+              <p:cNvPr id="8" name="TextBox 7">
+                <a:extLst>
+                  <a:ext uri="{FF2B5EF4-FFF2-40B4-BE49-F238E27FC236}">
+                    <a16:creationId xmlns:a16="http://schemas.microsoft.com/office/drawing/2014/main" id="{A078911C-AE2F-7A22-7AFF-A934761E71ED}"/>
+                  </a:ext>
+                </a:extLst>
+              </p:cNvPr>
+              <p:cNvSpPr txBox="1">
+                <a:spLocks noRot="1" noChangeAspect="1" noMove="1" noResize="1" noEditPoints="1" noAdjustHandles="1" noChangeArrowheads="1" noChangeShapeType="1" noTextEdit="1"/>
+              </p:cNvSpPr>
+              <p:nvPr/>
+            </p:nvSpPr>
+            <p:spPr>
+              <a:xfrm>
+                <a:off x="6626327" y="1496750"/>
+                <a:ext cx="4744779" cy="610936"/>
+              </a:xfrm>
+              <a:prstGeom prst="rect">
+                <a:avLst/>
+              </a:prstGeom>
+              <a:blipFill>
+                <a:blip r:embed="rId5"/>
+                <a:stretch>
+                  <a:fillRect b="-2041"/>
+                </a:stretch>
+              </a:blipFill>
+            </p:spPr>
+            <p:txBody>
+              <a:bodyPr/>
+              <a:lstStyle/>
+              <a:p>
+                <a:r>
+                  <a:rPr lang="en-US">
+                    <a:noFill/>
+                  </a:rPr>
+                  <a:t> </a:t>
+                </a:r>
+              </a:p>
+            </p:txBody>
+          </p:sp>
+        </mc:Fallback>
+      </mc:AlternateContent>
+      <mc:AlternateContent xmlns:mc="http://schemas.openxmlformats.org/markup-compatibility/2006">
+        <mc:Choice xmlns:a14="http://schemas.microsoft.com/office/drawing/2010/main" Requires="a14">
+          <p:sp>
+            <p:nvSpPr>
+              <p:cNvPr id="10" name="TextBox 9">
+                <a:extLst>
+                  <a:ext uri="{FF2B5EF4-FFF2-40B4-BE49-F238E27FC236}">
+                    <a16:creationId xmlns:a16="http://schemas.microsoft.com/office/drawing/2014/main" id="{6DD03A71-5E88-648E-14F6-B7BD903BF1BB}"/>
+                  </a:ext>
+                </a:extLst>
+              </p:cNvPr>
+              <p:cNvSpPr txBox="1"/>
+              <p:nvPr/>
+            </p:nvSpPr>
+            <p:spPr>
+              <a:xfrm>
+                <a:off x="820894" y="5123000"/>
+                <a:ext cx="2836706" cy="1169551"/>
+              </a:xfrm>
+              <a:prstGeom prst="rect">
+                <a:avLst/>
+              </a:prstGeom>
+              <a:noFill/>
+            </p:spPr>
+            <p:txBody>
+              <a:bodyPr wrap="square">
+                <a:spAutoFit/>
+              </a:bodyPr>
+              <a:lstStyle/>
+              <a:p>
+                <a:r>
+                  <a:rPr lang="en-US" sz="1400" dirty="0"/>
+                  <a:t>By the law of total probability, the take-off probability from position </a:t>
+                </a:r>
+                <a14:m>
+                  <m:oMath xmlns:m="http://schemas.openxmlformats.org/officeDocument/2006/math">
+                    <m:r>
+                      <m:rPr>
+                        <m:sty m:val="p"/>
+                      </m:rPr>
+                      <a:rPr lang="en-US" sz="1400" i="1">
+                        <a:latin typeface="Cambria Math" panose="02040503050406030204" pitchFamily="18" charset="0"/>
+                      </a:rPr>
+                      <m:t>z</m:t>
+                    </m:r>
+                  </m:oMath>
+                </a14:m>
+                <a:r>
+                  <a:rPr lang="en-US" sz="1400" dirty="0"/>
+                  <a:t> is the average of the probabilities from the reachable states </a:t>
+                </a:r>
+                <a14:m>
+                  <m:oMath xmlns:m="http://schemas.openxmlformats.org/officeDocument/2006/math">
+                    <m:r>
+                      <m:rPr>
+                        <m:sty m:val="p"/>
+                      </m:rPr>
+                      <a:rPr lang="en-US" sz="1400" b="0" i="1" smtClean="0">
+                        <a:latin typeface="Cambria Math" panose="02040503050406030204" pitchFamily="18" charset="0"/>
+                      </a:rPr>
+                      <m:t>z</m:t>
+                    </m:r>
+                    <m:r>
+                      <a:rPr lang="en-US" sz="1400" b="0" i="1" smtClean="0">
+                        <a:latin typeface="Cambria Math" panose="02040503050406030204" pitchFamily="18" charset="0"/>
+                      </a:rPr>
+                      <m:t>+∆</m:t>
+                    </m:r>
+                    <m:r>
+                      <m:rPr>
+                        <m:sty m:val="p"/>
+                      </m:rPr>
+                      <a:rPr lang="en-US" sz="1400" b="0" i="1" smtClean="0">
+                        <a:latin typeface="Cambria Math" panose="02040503050406030204" pitchFamily="18" charset="0"/>
+                        <a:ea typeface="Cambria Math" panose="02040503050406030204" pitchFamily="18" charset="0"/>
+                      </a:rPr>
+                      <m:t>z</m:t>
+                    </m:r>
+                  </m:oMath>
+                </a14:m>
+                <a:r>
+                  <a:rPr lang="en-US" sz="1400" dirty="0"/>
+                  <a:t>:  </a:t>
+                </a:r>
+                <a14:m>
+                  <m:oMath xmlns:m="http://schemas.openxmlformats.org/officeDocument/2006/math">
+                    <m:r>
+                      <a:rPr lang="en-US" sz="1400" i="1" smtClean="0">
+                        <a:latin typeface="Cambria Math" panose="02040503050406030204" pitchFamily="18" charset="0"/>
+                      </a:rPr>
+                      <m:t>𝑃</m:t>
+                    </m:r>
+                    <m:d>
+                      <m:dPr>
+                        <m:ctrlPr>
+                          <a:rPr lang="en-US" sz="1400" i="1" smtClean="0">
+                            <a:latin typeface="Cambria Math" panose="02040503050406030204" pitchFamily="18" charset="0"/>
+                          </a:rPr>
+                        </m:ctrlPr>
+                      </m:dPr>
+                      <m:e>
+                        <m:r>
+                          <a:rPr lang="en-US" sz="1400" i="1" smtClean="0">
+                            <a:latin typeface="Cambria Math" panose="02040503050406030204" pitchFamily="18" charset="0"/>
+                          </a:rPr>
+                          <m:t>𝑧</m:t>
+                        </m:r>
+                      </m:e>
+                    </m:d>
+                    <m:r>
+                      <a:rPr lang="en-US" sz="1400" i="1" smtClean="0">
+                        <a:latin typeface="Cambria Math" panose="02040503050406030204" pitchFamily="18" charset="0"/>
+                      </a:rPr>
+                      <m:t>=</m:t>
+                    </m:r>
+                    <m:d>
+                      <m:dPr>
+                        <m:begChr m:val="⟨"/>
+                        <m:endChr m:val="⟩"/>
+                        <m:ctrlPr>
+                          <a:rPr lang="en-US" sz="1400" i="1" smtClean="0">
+                            <a:latin typeface="Cambria Math" panose="02040503050406030204" pitchFamily="18" charset="0"/>
+                          </a:rPr>
+                        </m:ctrlPr>
+                      </m:dPr>
+                      <m:e>
+                        <m:r>
+                          <a:rPr lang="en-US" sz="1400" i="1" smtClean="0">
+                            <a:latin typeface="Cambria Math" panose="02040503050406030204" pitchFamily="18" charset="0"/>
+                          </a:rPr>
+                          <m:t>𝑃</m:t>
+                        </m:r>
+                        <m:d>
+                          <m:dPr>
+                            <m:ctrlPr>
+                              <a:rPr lang="en-US" sz="1400" i="1" smtClean="0">
+                                <a:latin typeface="Cambria Math" panose="02040503050406030204" pitchFamily="18" charset="0"/>
+                              </a:rPr>
+                            </m:ctrlPr>
+                          </m:dPr>
+                          <m:e>
+                            <m:r>
+                              <a:rPr lang="en-US" sz="1400" i="1" smtClean="0">
+                                <a:latin typeface="Cambria Math" panose="02040503050406030204" pitchFamily="18" charset="0"/>
+                              </a:rPr>
+                              <m:t>𝑧</m:t>
+                            </m:r>
+                            <m:r>
+                              <a:rPr lang="en-US" sz="1400" i="1" smtClean="0">
+                                <a:latin typeface="Cambria Math" panose="02040503050406030204" pitchFamily="18" charset="0"/>
+                              </a:rPr>
+                              <m:t>+</m:t>
+                            </m:r>
+                            <m:r>
+                              <m:rPr>
+                                <m:sty m:val="p"/>
+                              </m:rPr>
+                              <a:rPr lang="en-US" sz="1400" i="0" smtClean="0">
+                                <a:latin typeface="Cambria Math" panose="02040503050406030204" pitchFamily="18" charset="0"/>
+                              </a:rPr>
+                              <m:t>Δ</m:t>
+                            </m:r>
+                            <m:r>
+                              <a:rPr lang="en-US" sz="1400" i="1" smtClean="0">
+                                <a:latin typeface="Cambria Math" panose="02040503050406030204" pitchFamily="18" charset="0"/>
+                              </a:rPr>
+                              <m:t>𝑧</m:t>
+                            </m:r>
+                          </m:e>
+                        </m:d>
+                      </m:e>
+                    </m:d>
+                  </m:oMath>
+                </a14:m>
+                <a:endParaRPr lang="en-US" sz="1400" dirty="0"/>
+              </a:p>
+            </p:txBody>
+          </p:sp>
+        </mc:Choice>
+        <mc:Fallback>
+          <p:sp>
+            <p:nvSpPr>
+              <p:cNvPr id="10" name="TextBox 9">
+                <a:extLst>
+                  <a:ext uri="{FF2B5EF4-FFF2-40B4-BE49-F238E27FC236}">
+                    <a16:creationId xmlns:a16="http://schemas.microsoft.com/office/drawing/2014/main" id="{6DD03A71-5E88-648E-14F6-B7BD903BF1BB}"/>
+                  </a:ext>
+                </a:extLst>
+              </p:cNvPr>
+              <p:cNvSpPr txBox="1">
+                <a:spLocks noRot="1" noChangeAspect="1" noMove="1" noResize="1" noEditPoints="1" noAdjustHandles="1" noChangeArrowheads="1" noChangeShapeType="1" noTextEdit="1"/>
+              </p:cNvSpPr>
+              <p:nvPr/>
+            </p:nvSpPr>
+            <p:spPr>
+              <a:xfrm>
+                <a:off x="820894" y="5123000"/>
+                <a:ext cx="2836706" cy="1169551"/>
+              </a:xfrm>
+              <a:prstGeom prst="rect">
+                <a:avLst/>
+              </a:prstGeom>
+              <a:blipFill>
+                <a:blip r:embed="rId6"/>
+                <a:stretch>
+                  <a:fillRect l="-893" t="-1075" r="-1786"/>
+                </a:stretch>
+              </a:blipFill>
+            </p:spPr>
+            <p:txBody>
+              <a:bodyPr/>
+              <a:lstStyle/>
+              <a:p>
+                <a:r>
+                  <a:rPr lang="en-US">
+                    <a:noFill/>
+                  </a:rPr>
+                  <a:t> </a:t>
+                </a:r>
+              </a:p>
+            </p:txBody>
+          </p:sp>
+        </mc:Fallback>
+      </mc:AlternateContent>
+      <mc:AlternateContent xmlns:mc="http://schemas.openxmlformats.org/markup-compatibility/2006">
+        <mc:Choice xmlns:a14="http://schemas.microsoft.com/office/drawing/2010/main" Requires="a14">
+          <p:sp>
+            <p:nvSpPr>
+              <p:cNvPr id="12" name="TextBox 11">
+                <a:extLst>
+                  <a:ext uri="{FF2B5EF4-FFF2-40B4-BE49-F238E27FC236}">
+                    <a16:creationId xmlns:a16="http://schemas.microsoft.com/office/drawing/2014/main" id="{C29F329E-AFAC-0C10-12D3-6D9F2F4273F0}"/>
+                  </a:ext>
+                </a:extLst>
+              </p:cNvPr>
+              <p:cNvSpPr txBox="1"/>
+              <p:nvPr/>
+            </p:nvSpPr>
+            <p:spPr>
+              <a:xfrm>
+                <a:off x="6591129" y="3042132"/>
+                <a:ext cx="1850979" cy="369332"/>
+              </a:xfrm>
+              <a:prstGeom prst="rect">
+                <a:avLst/>
+              </a:prstGeom>
+              <a:noFill/>
+            </p:spPr>
+            <p:txBody>
+              <a:bodyPr wrap="square">
+                <a:spAutoFit/>
+              </a:bodyPr>
+              <a:lstStyle/>
+              <a:p>
+                <a14:m>
+                  <m:oMathPara xmlns:m="http://schemas.openxmlformats.org/officeDocument/2006/math">
+                    <m:oMathParaPr>
+                      <m:jc m:val="centerGroup"/>
+                    </m:oMathParaPr>
+                    <m:oMath xmlns:m="http://schemas.openxmlformats.org/officeDocument/2006/math">
+                      <m:d>
+                        <m:dPr>
+                          <m:begChr m:val="⟨"/>
+                          <m:endChr m:val="⟩"/>
+                          <m:ctrlPr>
+                            <a:rPr lang="en-US" i="1" smtClean="0">
+                              <a:latin typeface="Cambria Math" panose="02040503050406030204" pitchFamily="18" charset="0"/>
+                            </a:rPr>
+                          </m:ctrlPr>
+                        </m:dPr>
+                        <m:e>
+                          <m:sSup>
+                            <m:sSupPr>
+                              <m:ctrlPr>
+                                <a:rPr lang="en-US" i="1" smtClean="0">
+                                  <a:latin typeface="Cambria Math" panose="02040503050406030204" pitchFamily="18" charset="0"/>
+                                </a:rPr>
+                              </m:ctrlPr>
+                            </m:sSupPr>
+                            <m:e>
+                              <m:d>
+                                <m:dPr>
+                                  <m:ctrlPr>
+                                    <a:rPr lang="en-US" i="1" smtClean="0">
+                                      <a:latin typeface="Cambria Math" panose="02040503050406030204" pitchFamily="18" charset="0"/>
+                                    </a:rPr>
+                                  </m:ctrlPr>
+                                </m:dPr>
+                                <m:e>
+                                  <m:r>
+                                    <m:rPr>
+                                      <m:sty m:val="p"/>
+                                    </m:rPr>
+                                    <a:rPr lang="en-US" i="0" smtClean="0">
+                                      <a:latin typeface="Cambria Math" panose="02040503050406030204" pitchFamily="18" charset="0"/>
+                                    </a:rPr>
+                                    <m:t>Δ</m:t>
+                                  </m:r>
+                                  <m:r>
+                                    <a:rPr lang="en-US" i="1" smtClean="0">
+                                      <a:latin typeface="Cambria Math" panose="02040503050406030204" pitchFamily="18" charset="0"/>
+                                    </a:rPr>
+                                    <m:t>𝑧</m:t>
+                                  </m:r>
+                                </m:e>
+                              </m:d>
+                            </m:e>
+                            <m:sup>
+                              <m:r>
+                                <a:rPr lang="en-US" i="1" smtClean="0">
+                                  <a:latin typeface="Cambria Math" panose="02040503050406030204" pitchFamily="18" charset="0"/>
+                                </a:rPr>
+                                <m:t>2</m:t>
+                              </m:r>
+                            </m:sup>
+                          </m:sSup>
+                        </m:e>
+                      </m:d>
+                      <m:r>
+                        <a:rPr lang="en-US" i="1" smtClean="0">
+                          <a:latin typeface="Cambria Math" panose="02040503050406030204" pitchFamily="18" charset="0"/>
+                        </a:rPr>
+                        <m:t>=2</m:t>
+                      </m:r>
+                      <m:r>
+                        <a:rPr lang="en-US" i="1" smtClean="0">
+                          <a:latin typeface="Cambria Math" panose="02040503050406030204" pitchFamily="18" charset="0"/>
+                        </a:rPr>
+                        <m:t>𝐾</m:t>
+                      </m:r>
+                      <m:r>
+                        <m:rPr>
+                          <m:sty m:val="p"/>
+                        </m:rPr>
+                        <a:rPr lang="en-US" i="0" smtClean="0">
+                          <a:latin typeface="Cambria Math" panose="02040503050406030204" pitchFamily="18" charset="0"/>
+                        </a:rPr>
+                        <m:t>Δ</m:t>
+                      </m:r>
+                      <m:r>
+                        <a:rPr lang="en-US" i="1" smtClean="0">
+                          <a:latin typeface="Cambria Math" panose="02040503050406030204" pitchFamily="18" charset="0"/>
+                        </a:rPr>
+                        <m:t>𝑡</m:t>
+                      </m:r>
+                    </m:oMath>
+                  </m:oMathPara>
+                </a14:m>
+                <a:endParaRPr lang="en-US" dirty="0"/>
+              </a:p>
+            </p:txBody>
+          </p:sp>
+        </mc:Choice>
+        <mc:Fallback>
+          <p:sp>
+            <p:nvSpPr>
+              <p:cNvPr id="12" name="TextBox 11">
+                <a:extLst>
+                  <a:ext uri="{FF2B5EF4-FFF2-40B4-BE49-F238E27FC236}">
+                    <a16:creationId xmlns:a16="http://schemas.microsoft.com/office/drawing/2014/main" id="{C29F329E-AFAC-0C10-12D3-6D9F2F4273F0}"/>
+                  </a:ext>
+                </a:extLst>
+              </p:cNvPr>
+              <p:cNvSpPr txBox="1">
+                <a:spLocks noRot="1" noChangeAspect="1" noMove="1" noResize="1" noEditPoints="1" noAdjustHandles="1" noChangeArrowheads="1" noChangeShapeType="1" noTextEdit="1"/>
+              </p:cNvSpPr>
+              <p:nvPr/>
+            </p:nvSpPr>
+            <p:spPr>
+              <a:xfrm>
+                <a:off x="6591129" y="3042132"/>
+                <a:ext cx="1850979" cy="369332"/>
+              </a:xfrm>
+              <a:prstGeom prst="rect">
+                <a:avLst/>
+              </a:prstGeom>
+              <a:blipFill>
+                <a:blip r:embed="rId7"/>
+                <a:stretch>
+                  <a:fillRect/>
+                </a:stretch>
+              </a:blipFill>
+            </p:spPr>
+            <p:txBody>
+              <a:bodyPr/>
+              <a:lstStyle/>
+              <a:p>
+                <a:r>
+                  <a:rPr lang="en-US">
+                    <a:noFill/>
+                  </a:rPr>
+                  <a:t> </a:t>
+                </a:r>
+              </a:p>
+            </p:txBody>
+          </p:sp>
+        </mc:Fallback>
+      </mc:AlternateContent>
+      <mc:AlternateContent xmlns:mc="http://schemas.openxmlformats.org/markup-compatibility/2006">
+        <mc:Choice xmlns:a14="http://schemas.microsoft.com/office/drawing/2010/main" Requires="a14">
+          <p:sp>
+            <p:nvSpPr>
+              <p:cNvPr id="13" name="TextBox 12">
+                <a:extLst>
+                  <a:ext uri="{FF2B5EF4-FFF2-40B4-BE49-F238E27FC236}">
+                    <a16:creationId xmlns:a16="http://schemas.microsoft.com/office/drawing/2014/main" id="{58C41921-3B57-1471-80AE-F1789A670866}"/>
+                  </a:ext>
+                </a:extLst>
+              </p:cNvPr>
+              <p:cNvSpPr txBox="1"/>
+              <p:nvPr/>
+            </p:nvSpPr>
+            <p:spPr>
+              <a:xfrm>
+                <a:off x="6693198" y="2576532"/>
+                <a:ext cx="1272271" cy="276999"/>
+              </a:xfrm>
+              <a:prstGeom prst="rect">
+                <a:avLst/>
+              </a:prstGeom>
+              <a:noFill/>
+            </p:spPr>
+            <p:txBody>
+              <a:bodyPr wrap="none" lIns="0" tIns="0" rIns="0" bIns="0" rtlCol="0">
+                <a:spAutoFit/>
+              </a:bodyPr>
+              <a:lstStyle/>
+              <a:p>
+                <a14:m>
+                  <m:oMathPara xmlns:m="http://schemas.openxmlformats.org/officeDocument/2006/math">
+                    <m:oMathParaPr>
+                      <m:jc m:val="centerGroup"/>
+                    </m:oMathParaPr>
+                    <m:oMath xmlns:m="http://schemas.openxmlformats.org/officeDocument/2006/math">
+                      <m:d>
+                        <m:dPr>
+                          <m:begChr m:val="⟨"/>
+                          <m:endChr m:val="⟩"/>
+                          <m:ctrlPr>
+                            <a:rPr lang="en-US" i="1" smtClean="0">
+                              <a:latin typeface="Cambria Math" panose="02040503050406030204" pitchFamily="18" charset="0"/>
+                            </a:rPr>
+                          </m:ctrlPr>
+                        </m:dPr>
+                        <m:e>
+                          <m:r>
+                            <m:rPr>
+                              <m:sty m:val="p"/>
+                            </m:rPr>
+                            <a:rPr lang="en-US" i="0" smtClean="0">
+                              <a:latin typeface="Cambria Math" panose="02040503050406030204" pitchFamily="18" charset="0"/>
+                            </a:rPr>
+                            <m:t>Δ</m:t>
+                          </m:r>
+                          <m:r>
+                            <a:rPr lang="en-US" i="1" smtClean="0">
+                              <a:latin typeface="Cambria Math" panose="02040503050406030204" pitchFamily="18" charset="0"/>
+                            </a:rPr>
+                            <m:t>𝑧</m:t>
+                          </m:r>
+                        </m:e>
+                      </m:d>
+                      <m:r>
+                        <a:rPr lang="en-US" i="1" smtClean="0">
+                          <a:latin typeface="Cambria Math" panose="02040503050406030204" pitchFamily="18" charset="0"/>
+                        </a:rPr>
+                        <m:t>=</m:t>
+                      </m:r>
+                      <m:sSub>
+                        <m:sSubPr>
+                          <m:ctrlPr>
+                            <a:rPr lang="en-US" i="1" smtClean="0">
+                              <a:latin typeface="Cambria Math" panose="02040503050406030204" pitchFamily="18" charset="0"/>
+                            </a:rPr>
+                          </m:ctrlPr>
+                        </m:sSubPr>
+                        <m:e>
+                          <m:r>
+                            <a:rPr lang="en-US" i="1" smtClean="0">
+                              <a:latin typeface="Cambria Math" panose="02040503050406030204" pitchFamily="18" charset="0"/>
+                            </a:rPr>
+                            <m:t>𝑈</m:t>
+                          </m:r>
+                        </m:e>
+                        <m:sub>
+                          <m:r>
+                            <a:rPr lang="en-US" i="1" smtClean="0">
+                              <a:latin typeface="Cambria Math" panose="02040503050406030204" pitchFamily="18" charset="0"/>
+                            </a:rPr>
+                            <m:t>0</m:t>
+                          </m:r>
+                        </m:sub>
+                      </m:sSub>
+                      <m:r>
+                        <m:rPr>
+                          <m:sty m:val="p"/>
+                        </m:rPr>
+                        <a:rPr lang="en-US" i="0" smtClean="0">
+                          <a:latin typeface="Cambria Math" panose="02040503050406030204" pitchFamily="18" charset="0"/>
+                        </a:rPr>
+                        <m:t>Δ</m:t>
+                      </m:r>
+                      <m:r>
+                        <a:rPr lang="en-US" i="1" smtClean="0">
+                          <a:latin typeface="Cambria Math" panose="02040503050406030204" pitchFamily="18" charset="0"/>
+                        </a:rPr>
+                        <m:t>𝑡</m:t>
+                      </m:r>
+                    </m:oMath>
+                  </m:oMathPara>
+                </a14:m>
+                <a:endParaRPr lang="en-US" dirty="0"/>
+              </a:p>
+            </p:txBody>
+          </p:sp>
+        </mc:Choice>
+        <mc:Fallback>
+          <p:sp>
+            <p:nvSpPr>
+              <p:cNvPr id="13" name="TextBox 12">
+                <a:extLst>
+                  <a:ext uri="{FF2B5EF4-FFF2-40B4-BE49-F238E27FC236}">
+                    <a16:creationId xmlns:a16="http://schemas.microsoft.com/office/drawing/2014/main" id="{58C41921-3B57-1471-80AE-F1789A670866}"/>
+                  </a:ext>
+                </a:extLst>
+              </p:cNvPr>
+              <p:cNvSpPr txBox="1">
+                <a:spLocks noRot="1" noChangeAspect="1" noMove="1" noResize="1" noEditPoints="1" noAdjustHandles="1" noChangeArrowheads="1" noChangeShapeType="1" noTextEdit="1"/>
+              </p:cNvSpPr>
+              <p:nvPr/>
+            </p:nvSpPr>
+            <p:spPr>
+              <a:xfrm>
+                <a:off x="6693198" y="2576532"/>
+                <a:ext cx="1272271" cy="276999"/>
+              </a:xfrm>
+              <a:prstGeom prst="rect">
+                <a:avLst/>
+              </a:prstGeom>
+              <a:blipFill>
+                <a:blip r:embed="rId8"/>
+                <a:stretch>
+                  <a:fillRect r="-1980" b="-18182"/>
+                </a:stretch>
+              </a:blipFill>
+            </p:spPr>
+            <p:txBody>
+              <a:bodyPr/>
+              <a:lstStyle/>
+              <a:p>
+                <a:r>
+                  <a:rPr lang="en-US">
+                    <a:noFill/>
+                  </a:rPr>
+                  <a:t> </a:t>
+                </a:r>
+              </a:p>
+            </p:txBody>
+          </p:sp>
+        </mc:Fallback>
+      </mc:AlternateContent>
+      <p:sp>
+        <p:nvSpPr>
+          <p:cNvPr id="14" name="Right Brace 13">
+            <a:extLst>
+              <a:ext uri="{FF2B5EF4-FFF2-40B4-BE49-F238E27FC236}">
+                <a16:creationId xmlns:a16="http://schemas.microsoft.com/office/drawing/2014/main" id="{4D74FA11-229E-8D0B-DF8B-A2A7CBE3CC7C}"/>
+              </a:ext>
+            </a:extLst>
+          </p:cNvPr>
+          <p:cNvSpPr/>
+          <p:nvPr/>
+        </p:nvSpPr>
+        <p:spPr>
+          <a:xfrm>
+            <a:off x="8357191" y="2576532"/>
+            <a:ext cx="233916" cy="834932"/>
+          </a:xfrm>
+          <a:prstGeom prst="rightBrace">
+            <a:avLst/>
+          </a:prstGeom>
+        </p:spPr>
+        <p:style>
+          <a:lnRef idx="1">
+            <a:schemeClr val="accent1"/>
+          </a:lnRef>
+          <a:fillRef idx="0">
+            <a:schemeClr val="accent1"/>
+          </a:fillRef>
+          <a:effectRef idx="0">
+            <a:schemeClr val="accent1"/>
+          </a:effectRef>
+          <a:fontRef idx="minor">
+            <a:schemeClr val="tx1"/>
+          </a:fontRef>
+        </p:style>
+        <p:txBody>
+          <a:bodyPr rtlCol="0" anchor="ctr"/>
+          <a:lstStyle/>
+          <a:p>
+            <a:pPr algn="ctr"/>
+            <a:endParaRPr lang="en-US"/>
+          </a:p>
+        </p:txBody>
+      </p:sp>
+      <mc:AlternateContent xmlns:mc="http://schemas.openxmlformats.org/markup-compatibility/2006">
+        <mc:Choice xmlns:a14="http://schemas.microsoft.com/office/drawing/2010/main" Requires="a14">
+          <p:sp>
+            <p:nvSpPr>
+              <p:cNvPr id="16" name="TextBox 15">
+                <a:extLst>
+                  <a:ext uri="{FF2B5EF4-FFF2-40B4-BE49-F238E27FC236}">
+                    <a16:creationId xmlns:a16="http://schemas.microsoft.com/office/drawing/2014/main" id="{90761097-01A7-4157-451A-5B85E1FAFD8C}"/>
+                  </a:ext>
+                </a:extLst>
+              </p:cNvPr>
+              <p:cNvSpPr txBox="1"/>
+              <p:nvPr/>
+            </p:nvSpPr>
+            <p:spPr>
+              <a:xfrm>
+                <a:off x="8833830" y="2809332"/>
+                <a:ext cx="2161067" cy="369332"/>
+              </a:xfrm>
+              <a:prstGeom prst="rect">
+                <a:avLst/>
+              </a:prstGeom>
+              <a:noFill/>
+            </p:spPr>
+            <p:txBody>
+              <a:bodyPr wrap="square">
+                <a:spAutoFit/>
+              </a:bodyPr>
+              <a:lstStyle/>
+              <a:p>
+                <a:pPr/>
+                <a14:m>
+                  <m:oMathPara xmlns:m="http://schemas.openxmlformats.org/officeDocument/2006/math">
+                    <m:oMathParaPr>
+                      <m:jc m:val="centerGroup"/>
+                    </m:oMathParaPr>
+                    <m:oMath xmlns:m="http://schemas.openxmlformats.org/officeDocument/2006/math">
+                      <m:sSub>
+                        <m:sSubPr>
+                          <m:ctrlPr>
+                            <a:rPr lang="en-US" i="1" smtClean="0">
+                              <a:latin typeface="Cambria Math" panose="02040503050406030204" pitchFamily="18" charset="0"/>
+                            </a:rPr>
+                          </m:ctrlPr>
+                        </m:sSubPr>
+                        <m:e>
+                          <m:r>
+                            <a:rPr lang="en-US" i="1" smtClean="0">
+                              <a:latin typeface="Cambria Math" panose="02040503050406030204" pitchFamily="18" charset="0"/>
+                              <a:ea typeface="Cambria Math" panose="02040503050406030204" pitchFamily="18" charset="0"/>
+                            </a:rPr>
+                            <m:t>⇒</m:t>
+                          </m:r>
+                          <m:r>
+                            <a:rPr lang="en-US" i="1">
+                              <a:latin typeface="Cambria Math" panose="02040503050406030204" pitchFamily="18" charset="0"/>
+                            </a:rPr>
+                            <m:t>𝑈</m:t>
+                          </m:r>
+                        </m:e>
+                        <m:sub>
+                          <m:r>
+                            <a:rPr lang="en-US" i="1">
+                              <a:latin typeface="Cambria Math" panose="02040503050406030204" pitchFamily="18" charset="0"/>
+                            </a:rPr>
+                            <m:t>0</m:t>
+                          </m:r>
+                        </m:sub>
+                      </m:sSub>
+                      <m:sSup>
+                        <m:sSupPr>
+                          <m:ctrlPr>
+                            <a:rPr lang="en-US" i="1">
+                              <a:latin typeface="Cambria Math" panose="02040503050406030204" pitchFamily="18" charset="0"/>
+                            </a:rPr>
+                          </m:ctrlPr>
+                        </m:sSupPr>
+                        <m:e>
+                          <m:r>
+                            <a:rPr lang="en-US" i="1">
+                              <a:latin typeface="Cambria Math" panose="02040503050406030204" pitchFamily="18" charset="0"/>
+                            </a:rPr>
+                            <m:t>𝑃</m:t>
+                          </m:r>
+                        </m:e>
+                        <m:sup>
+                          <m:r>
+                            <a:rPr lang="en-US" i="1">
+                              <a:latin typeface="Cambria Math" panose="02040503050406030204" pitchFamily="18" charset="0"/>
+                            </a:rPr>
+                            <m:t>′</m:t>
+                          </m:r>
+                        </m:sup>
+                      </m:sSup>
+                      <m:r>
+                        <a:rPr lang="en-US" i="1">
+                          <a:latin typeface="Cambria Math" panose="02040503050406030204" pitchFamily="18" charset="0"/>
+                        </a:rPr>
+                        <m:t>+</m:t>
+                      </m:r>
+                      <m:r>
+                        <a:rPr lang="en-US" i="1">
+                          <a:latin typeface="Cambria Math" panose="02040503050406030204" pitchFamily="18" charset="0"/>
+                        </a:rPr>
+                        <m:t>𝐾</m:t>
+                      </m:r>
+                      <m:sSup>
+                        <m:sSupPr>
+                          <m:ctrlPr>
+                            <a:rPr lang="en-US" i="1">
+                              <a:latin typeface="Cambria Math" panose="02040503050406030204" pitchFamily="18" charset="0"/>
+                            </a:rPr>
+                          </m:ctrlPr>
+                        </m:sSupPr>
+                        <m:e>
+                          <m:r>
+                            <a:rPr lang="en-US" i="1">
+                              <a:latin typeface="Cambria Math" panose="02040503050406030204" pitchFamily="18" charset="0"/>
+                            </a:rPr>
+                            <m:t>𝑃</m:t>
+                          </m:r>
+                        </m:e>
+                        <m:sup>
+                          <m:r>
+                            <a:rPr lang="en-US" i="1">
+                              <a:latin typeface="Cambria Math" panose="02040503050406030204" pitchFamily="18" charset="0"/>
+                            </a:rPr>
+                            <m:t>′′</m:t>
+                          </m:r>
+                        </m:sup>
+                      </m:sSup>
+                      <m:r>
+                        <a:rPr lang="en-US" i="1">
+                          <a:latin typeface="Cambria Math" panose="02040503050406030204" pitchFamily="18" charset="0"/>
+                        </a:rPr>
+                        <m:t>=0</m:t>
+                      </m:r>
+                    </m:oMath>
+                  </m:oMathPara>
+                </a14:m>
+                <a:endParaRPr lang="en-US" dirty="0"/>
+              </a:p>
+            </p:txBody>
+          </p:sp>
+        </mc:Choice>
+        <mc:Fallback>
+          <p:sp>
+            <p:nvSpPr>
+              <p:cNvPr id="16" name="TextBox 15">
+                <a:extLst>
+                  <a:ext uri="{FF2B5EF4-FFF2-40B4-BE49-F238E27FC236}">
+                    <a16:creationId xmlns:a16="http://schemas.microsoft.com/office/drawing/2014/main" id="{90761097-01A7-4157-451A-5B85E1FAFD8C}"/>
+                  </a:ext>
+                </a:extLst>
+              </p:cNvPr>
+              <p:cNvSpPr txBox="1">
+                <a:spLocks noRot="1" noChangeAspect="1" noMove="1" noResize="1" noEditPoints="1" noAdjustHandles="1" noChangeArrowheads="1" noChangeShapeType="1" noTextEdit="1"/>
+              </p:cNvSpPr>
+              <p:nvPr/>
+            </p:nvSpPr>
+            <p:spPr>
+              <a:xfrm>
+                <a:off x="8833830" y="2809332"/>
+                <a:ext cx="2161067" cy="369332"/>
+              </a:xfrm>
+              <a:prstGeom prst="rect">
+                <a:avLst/>
+              </a:prstGeom>
+              <a:blipFill>
+                <a:blip r:embed="rId9"/>
+                <a:stretch>
+                  <a:fillRect/>
+                </a:stretch>
+              </a:blipFill>
+            </p:spPr>
+            <p:txBody>
+              <a:bodyPr/>
+              <a:lstStyle/>
+              <a:p>
+                <a:r>
+                  <a:rPr lang="en-US">
+                    <a:noFill/>
+                  </a:rPr>
+                  <a:t> </a:t>
+                </a:r>
+              </a:p>
+            </p:txBody>
+          </p:sp>
+        </mc:Fallback>
+      </mc:AlternateContent>
+      <mc:AlternateContent xmlns:mc="http://schemas.openxmlformats.org/markup-compatibility/2006">
+        <mc:Choice xmlns:a14="http://schemas.microsoft.com/office/drawing/2010/main" Requires="a14">
+          <p:sp>
+            <p:nvSpPr>
+              <p:cNvPr id="20" name="TextBox 19">
+                <a:extLst>
+                  <a:ext uri="{FF2B5EF4-FFF2-40B4-BE49-F238E27FC236}">
+                    <a16:creationId xmlns:a16="http://schemas.microsoft.com/office/drawing/2014/main" id="{93D3D456-A0BC-A654-06A9-B3EB29C2D948}"/>
+                  </a:ext>
+                </a:extLst>
+              </p:cNvPr>
+              <p:cNvSpPr txBox="1"/>
+              <p:nvPr/>
+            </p:nvSpPr>
+            <p:spPr>
+              <a:xfrm>
+                <a:off x="6626326" y="4401781"/>
+                <a:ext cx="1575529" cy="369332"/>
+              </a:xfrm>
+              <a:prstGeom prst="rect">
+                <a:avLst/>
+              </a:prstGeom>
+              <a:noFill/>
+            </p:spPr>
+            <p:txBody>
+              <a:bodyPr wrap="square">
+                <a:spAutoFit/>
+              </a:bodyPr>
+              <a:lstStyle/>
+              <a:p>
+                <a:pPr/>
+                <a14:m>
+                  <m:oMathPara xmlns:m="http://schemas.openxmlformats.org/officeDocument/2006/math">
+                    <m:oMathParaPr>
+                      <m:jc m:val="centerGroup"/>
+                    </m:oMathParaPr>
+                    <m:oMath xmlns:m="http://schemas.openxmlformats.org/officeDocument/2006/math">
+                      <m:r>
+                        <a:rPr lang="en-US" i="1" smtClean="0">
+                          <a:latin typeface="Cambria Math" panose="02040503050406030204" pitchFamily="18" charset="0"/>
+                        </a:rPr>
+                        <m:t>𝑃</m:t>
+                      </m:r>
+                      <m:d>
+                        <m:dPr>
+                          <m:ctrlPr>
+                            <a:rPr lang="en-US" i="1">
+                              <a:latin typeface="Cambria Math" panose="02040503050406030204" pitchFamily="18" charset="0"/>
+                            </a:rPr>
+                          </m:ctrlPr>
+                        </m:dPr>
+                        <m:e>
+                          <m:r>
+                            <a:rPr lang="en-US" b="0" i="1" smtClean="0">
+                              <a:latin typeface="Cambria Math" panose="02040503050406030204" pitchFamily="18" charset="0"/>
+                            </a:rPr>
+                            <m:t>0</m:t>
+                          </m:r>
+                        </m:e>
+                      </m:d>
+                      <m:r>
+                        <a:rPr lang="en-US" b="0" i="1" smtClean="0">
+                          <a:latin typeface="Cambria Math" panose="02040503050406030204" pitchFamily="18" charset="0"/>
+                        </a:rPr>
+                        <m:t>=0</m:t>
+                      </m:r>
+                    </m:oMath>
+                  </m:oMathPara>
+                </a14:m>
+                <a:endParaRPr lang="en-US" dirty="0"/>
+              </a:p>
+            </p:txBody>
+          </p:sp>
+        </mc:Choice>
+        <mc:Fallback>
+          <p:sp>
+            <p:nvSpPr>
+              <p:cNvPr id="20" name="TextBox 19">
+                <a:extLst>
+                  <a:ext uri="{FF2B5EF4-FFF2-40B4-BE49-F238E27FC236}">
+                    <a16:creationId xmlns:a16="http://schemas.microsoft.com/office/drawing/2014/main" id="{93D3D456-A0BC-A654-06A9-B3EB29C2D948}"/>
+                  </a:ext>
+                </a:extLst>
+              </p:cNvPr>
+              <p:cNvSpPr txBox="1">
+                <a:spLocks noRot="1" noChangeAspect="1" noMove="1" noResize="1" noEditPoints="1" noAdjustHandles="1" noChangeArrowheads="1" noChangeShapeType="1" noTextEdit="1"/>
+              </p:cNvSpPr>
+              <p:nvPr/>
+            </p:nvSpPr>
+            <p:spPr>
+              <a:xfrm>
+                <a:off x="6626326" y="4401781"/>
+                <a:ext cx="1575529" cy="369332"/>
+              </a:xfrm>
+              <a:prstGeom prst="rect">
+                <a:avLst/>
+              </a:prstGeom>
+              <a:blipFill>
+                <a:blip r:embed="rId10"/>
+                <a:stretch>
+                  <a:fillRect/>
+                </a:stretch>
+              </a:blipFill>
+            </p:spPr>
+            <p:txBody>
+              <a:bodyPr/>
+              <a:lstStyle/>
+              <a:p>
+                <a:r>
+                  <a:rPr lang="en-US">
+                    <a:noFill/>
+                  </a:rPr>
+                  <a:t> </a:t>
+                </a:r>
+              </a:p>
+            </p:txBody>
+          </p:sp>
+        </mc:Fallback>
+      </mc:AlternateContent>
+      <mc:AlternateContent xmlns:mc="http://schemas.openxmlformats.org/markup-compatibility/2006">
+        <mc:Choice xmlns:a14="http://schemas.microsoft.com/office/drawing/2010/main" Requires="a14">
+          <p:sp>
+            <p:nvSpPr>
+              <p:cNvPr id="21" name="TextBox 20">
+                <a:extLst>
+                  <a:ext uri="{FF2B5EF4-FFF2-40B4-BE49-F238E27FC236}">
+                    <a16:creationId xmlns:a16="http://schemas.microsoft.com/office/drawing/2014/main" id="{4068756B-89AB-7E7D-E4FA-4A73E348838A}"/>
+                  </a:ext>
+                </a:extLst>
+              </p:cNvPr>
+              <p:cNvSpPr txBox="1"/>
+              <p:nvPr/>
+            </p:nvSpPr>
+            <p:spPr>
+              <a:xfrm>
+                <a:off x="6626327" y="4822347"/>
+                <a:ext cx="1575529" cy="369332"/>
+              </a:xfrm>
+              <a:prstGeom prst="rect">
+                <a:avLst/>
+              </a:prstGeom>
+              <a:noFill/>
+            </p:spPr>
+            <p:txBody>
+              <a:bodyPr wrap="square">
+                <a:spAutoFit/>
+              </a:bodyPr>
+              <a:lstStyle/>
+              <a:p>
+                <a:pPr/>
+                <a14:m>
+                  <m:oMathPara xmlns:m="http://schemas.openxmlformats.org/officeDocument/2006/math">
+                    <m:oMathParaPr>
+                      <m:jc m:val="centerGroup"/>
+                    </m:oMathParaPr>
+                    <m:oMath xmlns:m="http://schemas.openxmlformats.org/officeDocument/2006/math">
+                      <m:r>
+                        <a:rPr lang="en-US" i="1" smtClean="0">
+                          <a:latin typeface="Cambria Math" panose="02040503050406030204" pitchFamily="18" charset="0"/>
+                        </a:rPr>
+                        <m:t>𝑃</m:t>
+                      </m:r>
+                      <m:d>
+                        <m:dPr>
+                          <m:ctrlPr>
+                            <a:rPr lang="en-US" i="1">
+                              <a:latin typeface="Cambria Math" panose="02040503050406030204" pitchFamily="18" charset="0"/>
+                            </a:rPr>
+                          </m:ctrlPr>
+                        </m:dPr>
+                        <m:e>
+                          <m:r>
+                            <m:rPr>
+                              <m:sty m:val="p"/>
+                            </m:rPr>
+                            <a:rPr lang="en-US" b="0" i="1" smtClean="0">
+                              <a:latin typeface="Cambria Math" panose="02040503050406030204" pitchFamily="18" charset="0"/>
+                            </a:rPr>
+                            <m:t>h</m:t>
+                          </m:r>
+                        </m:e>
+                      </m:d>
+                      <m:r>
+                        <a:rPr lang="en-US" b="0" i="1" smtClean="0">
+                          <a:latin typeface="Cambria Math" panose="02040503050406030204" pitchFamily="18" charset="0"/>
+                        </a:rPr>
+                        <m:t>=1</m:t>
+                      </m:r>
+                    </m:oMath>
+                  </m:oMathPara>
+                </a14:m>
+                <a:endParaRPr lang="en-US" dirty="0"/>
+              </a:p>
+            </p:txBody>
+          </p:sp>
+        </mc:Choice>
+        <mc:Fallback>
+          <p:sp>
+            <p:nvSpPr>
+              <p:cNvPr id="21" name="TextBox 20">
+                <a:extLst>
+                  <a:ext uri="{FF2B5EF4-FFF2-40B4-BE49-F238E27FC236}">
+                    <a16:creationId xmlns:a16="http://schemas.microsoft.com/office/drawing/2014/main" id="{4068756B-89AB-7E7D-E4FA-4A73E348838A}"/>
+                  </a:ext>
+                </a:extLst>
+              </p:cNvPr>
+              <p:cNvSpPr txBox="1">
+                <a:spLocks noRot="1" noChangeAspect="1" noMove="1" noResize="1" noEditPoints="1" noAdjustHandles="1" noChangeArrowheads="1" noChangeShapeType="1" noTextEdit="1"/>
+              </p:cNvSpPr>
+              <p:nvPr/>
+            </p:nvSpPr>
+            <p:spPr>
+              <a:xfrm>
+                <a:off x="6626327" y="4822347"/>
+                <a:ext cx="1575529" cy="369332"/>
+              </a:xfrm>
+              <a:prstGeom prst="rect">
+                <a:avLst/>
+              </a:prstGeom>
+              <a:blipFill>
+                <a:blip r:embed="rId11"/>
+                <a:stretch>
+                  <a:fillRect/>
+                </a:stretch>
+              </a:blipFill>
+            </p:spPr>
+            <p:txBody>
+              <a:bodyPr/>
+              <a:lstStyle/>
+              <a:p>
+                <a:r>
+                  <a:rPr lang="en-US">
+                    <a:noFill/>
+                  </a:rPr>
+                  <a:t> </a:t>
+                </a:r>
+              </a:p>
+            </p:txBody>
+          </p:sp>
+        </mc:Fallback>
+      </mc:AlternateContent>
+      <p:sp>
+        <p:nvSpPr>
+          <p:cNvPr id="22" name="Right Brace 21">
+            <a:extLst>
+              <a:ext uri="{FF2B5EF4-FFF2-40B4-BE49-F238E27FC236}">
+                <a16:creationId xmlns:a16="http://schemas.microsoft.com/office/drawing/2014/main" id="{6C712D2B-D001-A524-17B3-CB3D116E15F3}"/>
+              </a:ext>
+            </a:extLst>
+          </p:cNvPr>
+          <p:cNvSpPr/>
+          <p:nvPr/>
+        </p:nvSpPr>
+        <p:spPr>
+          <a:xfrm>
+            <a:off x="8170959" y="4374129"/>
+            <a:ext cx="233916" cy="834932"/>
+          </a:xfrm>
+          <a:prstGeom prst="rightBrace">
+            <a:avLst/>
+          </a:prstGeom>
+        </p:spPr>
+        <p:style>
+          <a:lnRef idx="1">
+            <a:schemeClr val="accent1"/>
+          </a:lnRef>
+          <a:fillRef idx="0">
+            <a:schemeClr val="accent1"/>
+          </a:fillRef>
+          <a:effectRef idx="0">
+            <a:schemeClr val="accent1"/>
+          </a:effectRef>
+          <a:fontRef idx="minor">
+            <a:schemeClr val="tx1"/>
+          </a:fontRef>
+        </p:style>
+        <p:txBody>
+          <a:bodyPr rtlCol="0" anchor="ctr"/>
+          <a:lstStyle/>
+          <a:p>
+            <a:pPr algn="ctr"/>
+            <a:endParaRPr lang="en-US"/>
+          </a:p>
+        </p:txBody>
+      </p:sp>
+      <p:sp>
+        <p:nvSpPr>
+          <p:cNvPr id="23" name="TextBox 22">
+            <a:extLst>
+              <a:ext uri="{FF2B5EF4-FFF2-40B4-BE49-F238E27FC236}">
+                <a16:creationId xmlns:a16="http://schemas.microsoft.com/office/drawing/2014/main" id="{FD0D300A-467A-0E8F-6DD0-D19A2B39191F}"/>
+              </a:ext>
+            </a:extLst>
+          </p:cNvPr>
+          <p:cNvSpPr txBox="1"/>
+          <p:nvPr/>
+        </p:nvSpPr>
+        <p:spPr>
+          <a:xfrm>
+            <a:off x="6626328" y="3933106"/>
+            <a:ext cx="1730864" cy="338554"/>
+          </a:xfrm>
+          <a:prstGeom prst="rect">
+            <a:avLst/>
+          </a:prstGeom>
+          <a:noFill/>
+        </p:spPr>
+        <p:txBody>
+          <a:bodyPr wrap="square" rtlCol="0">
+            <a:spAutoFit/>
+          </a:bodyPr>
+          <a:lstStyle/>
+          <a:p>
+            <a:r>
+              <a:rPr lang="en-US" sz="1600" i="1" dirty="0"/>
+              <a:t>Limit conditions:</a:t>
+            </a:r>
+          </a:p>
+        </p:txBody>
+      </p:sp>
+      <p:grpSp>
+        <p:nvGrpSpPr>
+          <p:cNvPr id="30" name="Group 29">
+            <a:extLst>
+              <a:ext uri="{FF2B5EF4-FFF2-40B4-BE49-F238E27FC236}">
+                <a16:creationId xmlns:a16="http://schemas.microsoft.com/office/drawing/2014/main" id="{4D5D245C-B689-50B1-1E9E-E56C819D2D9D}"/>
+              </a:ext>
+            </a:extLst>
+          </p:cNvPr>
+          <p:cNvGrpSpPr/>
+          <p:nvPr/>
+        </p:nvGrpSpPr>
+        <p:grpSpPr>
+          <a:xfrm>
+            <a:off x="8469104" y="3178664"/>
+            <a:ext cx="3301138" cy="1643683"/>
+            <a:chOff x="8469104" y="3178664"/>
+            <a:chExt cx="3301138" cy="1643683"/>
+          </a:xfrm>
+        </p:grpSpPr>
+        <p:sp>
+          <p:nvSpPr>
+            <p:cNvPr id="24" name="Rounded Rectangle 23">
+              <a:extLst>
+                <a:ext uri="{FF2B5EF4-FFF2-40B4-BE49-F238E27FC236}">
+                  <a16:creationId xmlns:a16="http://schemas.microsoft.com/office/drawing/2014/main" id="{CD45B86D-2E42-1799-A94F-8E0C4E936625}"/>
+                </a:ext>
+              </a:extLst>
+            </p:cNvPr>
+            <p:cNvSpPr/>
+            <p:nvPr/>
+          </p:nvSpPr>
+          <p:spPr>
+            <a:xfrm>
+              <a:off x="9154633" y="3795823"/>
+              <a:ext cx="2615609" cy="975290"/>
+            </a:xfrm>
+            <a:prstGeom prst="roundRect">
+              <a:avLst/>
+            </a:prstGeom>
+          </p:spPr>
+          <p:style>
+            <a:lnRef idx="1">
+              <a:schemeClr val="accent3"/>
+            </a:lnRef>
+            <a:fillRef idx="2">
+              <a:schemeClr val="accent3"/>
+            </a:fillRef>
+            <a:effectRef idx="1">
+              <a:schemeClr val="accent3"/>
+            </a:effectRef>
+            <a:fontRef idx="minor">
+              <a:schemeClr val="dk1"/>
+            </a:fontRef>
+          </p:style>
+          <p:txBody>
+            <a:bodyPr rtlCol="0" anchor="ctr"/>
+            <a:lstStyle/>
+            <a:p>
+              <a:pPr algn="ctr"/>
+              <a:endParaRPr lang="en-US"/>
+            </a:p>
+          </p:txBody>
+        </p:sp>
+        <mc:AlternateContent xmlns:mc="http://schemas.openxmlformats.org/markup-compatibility/2006">
+          <mc:Choice xmlns:a14="http://schemas.microsoft.com/office/drawing/2010/main" Requires="a14">
+            <p:sp>
+              <p:nvSpPr>
+                <p:cNvPr id="18" name="TextBox 17">
+                  <a:extLst>
+                    <a:ext uri="{FF2B5EF4-FFF2-40B4-BE49-F238E27FC236}">
+                      <a16:creationId xmlns:a16="http://schemas.microsoft.com/office/drawing/2014/main" id="{F5E39278-CDBF-20E4-E8CE-5C9E2886E45B}"/>
+                    </a:ext>
+                  </a:extLst>
+                </p:cNvPr>
+                <p:cNvSpPr txBox="1"/>
+                <p:nvPr/>
+              </p:nvSpPr>
+              <p:spPr>
+                <a:xfrm>
+                  <a:off x="9249203" y="3923637"/>
+                  <a:ext cx="2288658" cy="662810"/>
+                </a:xfrm>
+                <a:prstGeom prst="rect">
+                  <a:avLst/>
+                </a:prstGeom>
+                <a:noFill/>
+              </p:spPr>
+              <p:txBody>
+                <a:bodyPr wrap="square">
+                  <a:spAutoFit/>
+                </a:bodyPr>
+                <a:lstStyle/>
+                <a:p>
+                  <a:pPr/>
+                  <a14:m>
+                    <m:oMathPara xmlns:m="http://schemas.openxmlformats.org/officeDocument/2006/math">
+                      <m:oMathParaPr>
+                        <m:jc m:val="centerGroup"/>
+                      </m:oMathParaPr>
+                      <m:oMath xmlns:m="http://schemas.openxmlformats.org/officeDocument/2006/math">
+                        <m:r>
+                          <a:rPr lang="en-US" i="1" smtClean="0">
+                            <a:latin typeface="Cambria Math" panose="02040503050406030204" pitchFamily="18" charset="0"/>
+                          </a:rPr>
+                          <m:t>𝑃</m:t>
+                        </m:r>
+                        <m:d>
+                          <m:dPr>
+                            <m:ctrlPr>
+                              <a:rPr lang="en-US" i="1">
+                                <a:latin typeface="Cambria Math" panose="02040503050406030204" pitchFamily="18" charset="0"/>
+                              </a:rPr>
+                            </m:ctrlPr>
+                          </m:dPr>
+                          <m:e>
+                            <m:sSub>
+                              <m:sSubPr>
+                                <m:ctrlPr>
+                                  <a:rPr lang="en-US" i="1">
+                                    <a:latin typeface="Cambria Math" panose="02040503050406030204" pitchFamily="18" charset="0"/>
+                                  </a:rPr>
+                                </m:ctrlPr>
+                              </m:sSubPr>
+                              <m:e>
+                                <m:r>
+                                  <a:rPr lang="en-US" i="1">
+                                    <a:latin typeface="Cambria Math" panose="02040503050406030204" pitchFamily="18" charset="0"/>
+                                  </a:rPr>
+                                  <m:t>𝑧</m:t>
+                                </m:r>
+                              </m:e>
+                              <m:sub>
+                                <m:r>
+                                  <a:rPr lang="en-US" i="1">
+                                    <a:latin typeface="Cambria Math" panose="02040503050406030204" pitchFamily="18" charset="0"/>
+                                  </a:rPr>
+                                  <m:t>0</m:t>
+                                </m:r>
+                              </m:sub>
+                            </m:sSub>
+                          </m:e>
+                        </m:d>
+                        <m:r>
+                          <a:rPr lang="en-US" i="1">
+                            <a:latin typeface="Cambria Math" panose="02040503050406030204" pitchFamily="18" charset="0"/>
+                          </a:rPr>
+                          <m:t>=</m:t>
+                        </m:r>
+                        <m:f>
+                          <m:fPr>
+                            <m:ctrlPr>
+                              <a:rPr lang="en-US" i="1">
+                                <a:latin typeface="Cambria Math" panose="02040503050406030204" pitchFamily="18" charset="0"/>
+                              </a:rPr>
+                            </m:ctrlPr>
+                          </m:fPr>
+                          <m:num>
+                            <m:r>
+                              <a:rPr lang="en-US" i="1">
+                                <a:latin typeface="Cambria Math" panose="02040503050406030204" pitchFamily="18" charset="0"/>
+                              </a:rPr>
+                              <m:t>1−</m:t>
+                            </m:r>
+                            <m:sSup>
+                              <m:sSupPr>
+                                <m:ctrlPr>
+                                  <a:rPr lang="en-US" i="1">
+                                    <a:latin typeface="Cambria Math" panose="02040503050406030204" pitchFamily="18" charset="0"/>
+                                  </a:rPr>
+                                </m:ctrlPr>
+                              </m:sSupPr>
+                              <m:e>
+                                <m:r>
+                                  <a:rPr lang="en-US" i="1">
+                                    <a:latin typeface="Cambria Math" panose="02040503050406030204" pitchFamily="18" charset="0"/>
+                                  </a:rPr>
+                                  <m:t>𝑒</m:t>
+                                </m:r>
+                              </m:e>
+                              <m:sup>
+                                <m:r>
+                                  <a:rPr lang="en-US" i="1">
+                                    <a:latin typeface="Cambria Math" panose="02040503050406030204" pitchFamily="18" charset="0"/>
+                                  </a:rPr>
+                                  <m:t>−</m:t>
+                                </m:r>
+                                <m:sSub>
+                                  <m:sSubPr>
+                                    <m:ctrlPr>
+                                      <a:rPr lang="en-US" i="1">
+                                        <a:latin typeface="Cambria Math" panose="02040503050406030204" pitchFamily="18" charset="0"/>
+                                      </a:rPr>
+                                    </m:ctrlPr>
+                                  </m:sSubPr>
+                                  <m:e>
+                                    <m:r>
+                                      <a:rPr lang="en-US" i="1">
+                                        <a:latin typeface="Cambria Math" panose="02040503050406030204" pitchFamily="18" charset="0"/>
+                                      </a:rPr>
+                                      <m:t>𝑈</m:t>
+                                    </m:r>
+                                  </m:e>
+                                  <m:sub>
+                                    <m:r>
+                                      <a:rPr lang="en-US" i="1">
+                                        <a:latin typeface="Cambria Math" panose="02040503050406030204" pitchFamily="18" charset="0"/>
+                                      </a:rPr>
+                                      <m:t>0</m:t>
+                                    </m:r>
+                                  </m:sub>
+                                </m:sSub>
+                                <m:sSub>
+                                  <m:sSubPr>
+                                    <m:ctrlPr>
+                                      <a:rPr lang="en-US" i="1">
+                                        <a:latin typeface="Cambria Math" panose="02040503050406030204" pitchFamily="18" charset="0"/>
+                                      </a:rPr>
+                                    </m:ctrlPr>
+                                  </m:sSubPr>
+                                  <m:e>
+                                    <m:r>
+                                      <a:rPr lang="en-US" i="1">
+                                        <a:latin typeface="Cambria Math" panose="02040503050406030204" pitchFamily="18" charset="0"/>
+                                      </a:rPr>
+                                      <m:t>𝑧</m:t>
+                                    </m:r>
+                                  </m:e>
+                                  <m:sub>
+                                    <m:r>
+                                      <a:rPr lang="en-US" i="1">
+                                        <a:latin typeface="Cambria Math" panose="02040503050406030204" pitchFamily="18" charset="0"/>
+                                      </a:rPr>
+                                      <m:t>0</m:t>
+                                    </m:r>
+                                  </m:sub>
+                                </m:sSub>
+                                <m:r>
+                                  <m:rPr>
+                                    <m:lit/>
+                                  </m:rPr>
+                                  <a:rPr lang="en-US" i="1">
+                                    <a:latin typeface="Cambria Math" panose="02040503050406030204" pitchFamily="18" charset="0"/>
+                                  </a:rPr>
+                                  <m:t>/</m:t>
+                                </m:r>
+                                <m:r>
+                                  <a:rPr lang="en-US" i="1">
+                                    <a:latin typeface="Cambria Math" panose="02040503050406030204" pitchFamily="18" charset="0"/>
+                                  </a:rPr>
+                                  <m:t>𝐾</m:t>
+                                </m:r>
+                              </m:sup>
+                            </m:sSup>
+                          </m:num>
+                          <m:den>
+                            <m:r>
+                              <a:rPr lang="en-US" i="1">
+                                <a:latin typeface="Cambria Math" panose="02040503050406030204" pitchFamily="18" charset="0"/>
+                              </a:rPr>
+                              <m:t>1−</m:t>
+                            </m:r>
+                            <m:sSup>
+                              <m:sSupPr>
+                                <m:ctrlPr>
+                                  <a:rPr lang="en-US" i="1">
+                                    <a:latin typeface="Cambria Math" panose="02040503050406030204" pitchFamily="18" charset="0"/>
+                                  </a:rPr>
+                                </m:ctrlPr>
+                              </m:sSupPr>
+                              <m:e>
+                                <m:r>
+                                  <a:rPr lang="en-US" i="1">
+                                    <a:latin typeface="Cambria Math" panose="02040503050406030204" pitchFamily="18" charset="0"/>
+                                  </a:rPr>
+                                  <m:t>𝑒</m:t>
+                                </m:r>
+                              </m:e>
+                              <m:sup>
+                                <m:r>
+                                  <a:rPr lang="en-US" i="1">
+                                    <a:latin typeface="Cambria Math" panose="02040503050406030204" pitchFamily="18" charset="0"/>
+                                  </a:rPr>
+                                  <m:t>−</m:t>
+                                </m:r>
+                                <m:sSub>
+                                  <m:sSubPr>
+                                    <m:ctrlPr>
+                                      <a:rPr lang="en-US" i="1">
+                                        <a:latin typeface="Cambria Math" panose="02040503050406030204" pitchFamily="18" charset="0"/>
+                                      </a:rPr>
+                                    </m:ctrlPr>
+                                  </m:sSubPr>
+                                  <m:e>
+                                    <m:r>
+                                      <a:rPr lang="en-US" i="1">
+                                        <a:latin typeface="Cambria Math" panose="02040503050406030204" pitchFamily="18" charset="0"/>
+                                      </a:rPr>
+                                      <m:t>𝑈</m:t>
+                                    </m:r>
+                                  </m:e>
+                                  <m:sub>
+                                    <m:r>
+                                      <a:rPr lang="en-US" i="1">
+                                        <a:latin typeface="Cambria Math" panose="02040503050406030204" pitchFamily="18" charset="0"/>
+                                      </a:rPr>
+                                      <m:t>0</m:t>
+                                    </m:r>
+                                  </m:sub>
+                                </m:sSub>
+                                <m:r>
+                                  <a:rPr lang="en-US" i="1">
+                                    <a:latin typeface="Cambria Math" panose="02040503050406030204" pitchFamily="18" charset="0"/>
+                                  </a:rPr>
+                                  <m:t>h</m:t>
+                                </m:r>
+                                <m:r>
+                                  <m:rPr>
+                                    <m:lit/>
+                                  </m:rPr>
+                                  <a:rPr lang="en-US" i="1">
+                                    <a:latin typeface="Cambria Math" panose="02040503050406030204" pitchFamily="18" charset="0"/>
+                                  </a:rPr>
+                                  <m:t>/</m:t>
+                                </m:r>
+                                <m:r>
+                                  <a:rPr lang="en-US" i="1">
+                                    <a:latin typeface="Cambria Math" panose="02040503050406030204" pitchFamily="18" charset="0"/>
+                                  </a:rPr>
+                                  <m:t>𝐾</m:t>
+                                </m:r>
+                              </m:sup>
+                            </m:sSup>
+                          </m:den>
+                        </m:f>
+                      </m:oMath>
+                    </m:oMathPara>
+                  </a14:m>
+                  <a:endParaRPr lang="en-US" dirty="0"/>
+                </a:p>
+              </p:txBody>
+            </p:sp>
+          </mc:Choice>
+          <mc:Fallback>
+            <p:sp>
+              <p:nvSpPr>
+                <p:cNvPr id="18" name="TextBox 17">
+                  <a:extLst>
+                    <a:ext uri="{FF2B5EF4-FFF2-40B4-BE49-F238E27FC236}">
+                      <a16:creationId xmlns:a16="http://schemas.microsoft.com/office/drawing/2014/main" id="{F5E39278-CDBF-20E4-E8CE-5C9E2886E45B}"/>
+                    </a:ext>
+                  </a:extLst>
+                </p:cNvPr>
+                <p:cNvSpPr txBox="1">
+                  <a:spLocks noRot="1" noChangeAspect="1" noMove="1" noResize="1" noEditPoints="1" noAdjustHandles="1" noChangeArrowheads="1" noChangeShapeType="1" noTextEdit="1"/>
+                </p:cNvSpPr>
+                <p:nvPr/>
+              </p:nvSpPr>
+              <p:spPr>
+                <a:xfrm>
+                  <a:off x="9249203" y="3923637"/>
+                  <a:ext cx="2288658" cy="662810"/>
+                </a:xfrm>
+                <a:prstGeom prst="rect">
+                  <a:avLst/>
+                </a:prstGeom>
+                <a:blipFill>
+                  <a:blip r:embed="rId12"/>
+                  <a:stretch>
+                    <a:fillRect b="-3846"/>
+                  </a:stretch>
+                </a:blipFill>
+              </p:spPr>
+              <p:txBody>
+                <a:bodyPr/>
+                <a:lstStyle/>
+                <a:p>
+                  <a:r>
+                    <a:rPr lang="en-US">
+                      <a:noFill/>
+                    </a:rPr>
+                    <a:t> </a:t>
+                  </a:r>
+                </a:p>
+              </p:txBody>
+            </p:sp>
+          </mc:Fallback>
+        </mc:AlternateContent>
+        <p:cxnSp>
+          <p:nvCxnSpPr>
+            <p:cNvPr id="26" name="Straight Arrow Connector 25">
+              <a:extLst>
+                <a:ext uri="{FF2B5EF4-FFF2-40B4-BE49-F238E27FC236}">
+                  <a16:creationId xmlns:a16="http://schemas.microsoft.com/office/drawing/2014/main" id="{0488F22E-26A7-DEB2-6685-A5A822119BB1}"/>
+                </a:ext>
+              </a:extLst>
+            </p:cNvPr>
+            <p:cNvCxnSpPr>
+              <a:stCxn id="16" idx="2"/>
+              <a:endCxn id="24" idx="0"/>
+            </p:cNvCxnSpPr>
+            <p:nvPr/>
+          </p:nvCxnSpPr>
+          <p:spPr>
+            <a:xfrm>
+              <a:off x="9914364" y="3178664"/>
+              <a:ext cx="548074" cy="617159"/>
+            </a:xfrm>
+            <a:prstGeom prst="straightConnector1">
+              <a:avLst/>
+            </a:prstGeom>
+            <a:ln>
+              <a:tailEnd type="triangle"/>
+            </a:ln>
+          </p:spPr>
+          <p:style>
+            <a:lnRef idx="2">
+              <a:schemeClr val="accent5"/>
+            </a:lnRef>
+            <a:fillRef idx="0">
+              <a:schemeClr val="accent5"/>
+            </a:fillRef>
+            <a:effectRef idx="1">
+              <a:schemeClr val="accent5"/>
+            </a:effectRef>
+            <a:fontRef idx="minor">
+              <a:schemeClr val="tx1"/>
+            </a:fontRef>
+          </p:style>
+        </p:cxnSp>
+        <p:cxnSp>
+          <p:nvCxnSpPr>
+            <p:cNvPr id="27" name="Straight Arrow Connector 26">
+              <a:extLst>
+                <a:ext uri="{FF2B5EF4-FFF2-40B4-BE49-F238E27FC236}">
+                  <a16:creationId xmlns:a16="http://schemas.microsoft.com/office/drawing/2014/main" id="{D4DDADA6-F787-8F47-19D1-DC73E1FC72C1}"/>
+                </a:ext>
+              </a:extLst>
+            </p:cNvPr>
+            <p:cNvCxnSpPr>
+              <a:cxnSpLocks/>
+              <a:endCxn id="24" idx="1"/>
+            </p:cNvCxnSpPr>
+            <p:nvPr/>
+          </p:nvCxnSpPr>
+          <p:spPr>
+            <a:xfrm flipV="1">
+              <a:off x="8469104" y="4283468"/>
+              <a:ext cx="685529" cy="538879"/>
+            </a:xfrm>
+            <a:prstGeom prst="straightConnector1">
+              <a:avLst/>
+            </a:prstGeom>
+            <a:ln>
+              <a:tailEnd type="triangle"/>
+            </a:ln>
+          </p:spPr>
+          <p:style>
+            <a:lnRef idx="2">
+              <a:schemeClr val="accent5"/>
+            </a:lnRef>
+            <a:fillRef idx="0">
+              <a:schemeClr val="accent5"/>
+            </a:fillRef>
+            <a:effectRef idx="1">
+              <a:schemeClr val="accent5"/>
+            </a:effectRef>
+            <a:fontRef idx="minor">
+              <a:schemeClr val="tx1"/>
+            </a:fontRef>
+          </p:style>
+        </p:cxnSp>
+      </p:grpSp>
+    </p:spTree>
+    <p:extLst>
+      <p:ext uri="{BB962C8B-B14F-4D97-AF65-F5344CB8AC3E}">
+        <p14:creationId xmlns:p14="http://schemas.microsoft.com/office/powerpoint/2010/main" val="3969917629"/>
+      </p:ext>
+    </p:extLst>
+  </p:cSld>
+  <p:clrMapOvr>
+    <a:masterClrMapping/>
+  </p:clrMapOvr>
+  <p:timing>
+    <p:tnLst>
+      <p:par>
+        <p:cTn id="1" dur="indefinite" restart="never" nodeType="tmRoot">
+          <p:childTnLst>
+            <p:seq concurrent="1" nextAc="seek">
+              <p:cTn id="2" dur="indefinite" nodeType="mainSeq">
+                <p:childTnLst>
+                  <p:par>
+                    <p:cTn id="3" fill="hold">
+                      <p:stCondLst>
+                        <p:cond delay="indefinite"/>
+                      </p:stCondLst>
+                      <p:childTnLst>
+                        <p:par>
+                          <p:cTn id="4" fill="hold">
+                            <p:stCondLst>
+                              <p:cond delay="0"/>
+                            </p:stCondLst>
+                            <p:childTnLst>
+                              <p:par>
+                                <p:cTn id="5" presetID="1" presetClass="entr" presetSubtype="0" fill="hold" grpId="0" nodeType="clickEffect">
+                                  <p:stCondLst>
+                                    <p:cond delay="0"/>
+                                  </p:stCondLst>
+                                  <p:childTnLst>
+                                    <p:set>
+                                      <p:cBhvr>
+                                        <p:cTn id="6" dur="1" fill="hold">
+                                          <p:stCondLst>
+                                            <p:cond delay="0"/>
+                                          </p:stCondLst>
+                                        </p:cTn>
+                                        <p:tgtEl>
+                                          <p:spTgt spid="8"/>
+                                        </p:tgtEl>
+                                        <p:attrNameLst>
+                                          <p:attrName>style.visibility</p:attrName>
+                                        </p:attrNameLst>
+                                      </p:cBhvr>
+                                      <p:to>
+                                        <p:strVal val="visible"/>
+                                      </p:to>
+                                    </p:set>
+                                  </p:childTnLst>
+                                </p:cTn>
+                              </p:par>
+                            </p:childTnLst>
+                          </p:cTn>
+                        </p:par>
+                      </p:childTnLst>
+                    </p:cTn>
+                  </p:par>
+                  <p:par>
+                    <p:cTn id="7" fill="hold">
+                      <p:stCondLst>
+                        <p:cond delay="indefinite"/>
+                      </p:stCondLst>
+                      <p:childTnLst>
+                        <p:par>
+                          <p:cTn id="8" fill="hold">
+                            <p:stCondLst>
+                              <p:cond delay="0"/>
+                            </p:stCondLst>
+                            <p:childTnLst>
+                              <p:par>
+                                <p:cTn id="9" presetID="1" presetClass="entr" presetSubtype="0" fill="hold" grpId="0" nodeType="clickEffect">
+                                  <p:stCondLst>
+                                    <p:cond delay="0"/>
+                                  </p:stCondLst>
+                                  <p:childTnLst>
+                                    <p:set>
+                                      <p:cBhvr>
+                                        <p:cTn id="10" dur="1" fill="hold">
+                                          <p:stCondLst>
+                                            <p:cond delay="0"/>
+                                          </p:stCondLst>
+                                        </p:cTn>
+                                        <p:tgtEl>
+                                          <p:spTgt spid="13"/>
+                                        </p:tgtEl>
+                                        <p:attrNameLst>
+                                          <p:attrName>style.visibility</p:attrName>
+                                        </p:attrNameLst>
+                                      </p:cBhvr>
+                                      <p:to>
+                                        <p:strVal val="visible"/>
+                                      </p:to>
+                                    </p:set>
+                                  </p:childTnLst>
+                                </p:cTn>
+                              </p:par>
+                              <p:par>
+                                <p:cTn id="11" presetID="1" presetClass="entr" presetSubtype="0" fill="hold" grpId="0" nodeType="withEffect">
+                                  <p:stCondLst>
+                                    <p:cond delay="0"/>
+                                  </p:stCondLst>
+                                  <p:childTnLst>
+                                    <p:set>
+                                      <p:cBhvr>
+                                        <p:cTn id="12" dur="1" fill="hold">
+                                          <p:stCondLst>
+                                            <p:cond delay="0"/>
+                                          </p:stCondLst>
+                                        </p:cTn>
+                                        <p:tgtEl>
+                                          <p:spTgt spid="12"/>
+                                        </p:tgtEl>
+                                        <p:attrNameLst>
+                                          <p:attrName>style.visibility</p:attrName>
+                                        </p:attrNameLst>
+                                      </p:cBhvr>
+                                      <p:to>
+                                        <p:strVal val="visible"/>
+                                      </p:to>
+                                    </p:set>
+                                  </p:childTnLst>
+                                </p:cTn>
+                              </p:par>
+                              <p:par>
+                                <p:cTn id="13" presetID="1" presetClass="entr" presetSubtype="0" fill="hold" grpId="0" nodeType="withEffect">
+                                  <p:stCondLst>
+                                    <p:cond delay="0"/>
+                                  </p:stCondLst>
+                                  <p:childTnLst>
+                                    <p:set>
+                                      <p:cBhvr>
+                                        <p:cTn id="14" dur="1" fill="hold">
+                                          <p:stCondLst>
+                                            <p:cond delay="0"/>
+                                          </p:stCondLst>
+                                        </p:cTn>
+                                        <p:tgtEl>
+                                          <p:spTgt spid="14"/>
+                                        </p:tgtEl>
+                                        <p:attrNameLst>
+                                          <p:attrName>style.visibility</p:attrName>
+                                        </p:attrNameLst>
+                                      </p:cBhvr>
+                                      <p:to>
+                                        <p:strVal val="visible"/>
+                                      </p:to>
+                                    </p:set>
+                                  </p:childTnLst>
+                                </p:cTn>
+                              </p:par>
+                              <p:par>
+                                <p:cTn id="15" presetID="1" presetClass="entr" presetSubtype="0" fill="hold" grpId="0" nodeType="withEffect">
+                                  <p:stCondLst>
+                                    <p:cond delay="0"/>
+                                  </p:stCondLst>
+                                  <p:childTnLst>
+                                    <p:set>
+                                      <p:cBhvr>
+                                        <p:cTn id="16" dur="1" fill="hold">
+                                          <p:stCondLst>
+                                            <p:cond delay="0"/>
+                                          </p:stCondLst>
+                                        </p:cTn>
+                                        <p:tgtEl>
+                                          <p:spTgt spid="16"/>
+                                        </p:tgtEl>
+                                        <p:attrNameLst>
+                                          <p:attrName>style.visibility</p:attrName>
+                                        </p:attrNameLst>
+                                      </p:cBhvr>
+                                      <p:to>
+                                        <p:strVal val="visible"/>
+                                      </p:to>
+                                    </p:set>
+                                  </p:childTnLst>
+                                </p:cTn>
+                              </p:par>
+                            </p:childTnLst>
+                          </p:cTn>
+                        </p:par>
+                      </p:childTnLst>
+                    </p:cTn>
+                  </p:par>
+                  <p:par>
+                    <p:cTn id="17" fill="hold">
+                      <p:stCondLst>
+                        <p:cond delay="indefinite"/>
+                      </p:stCondLst>
+                      <p:childTnLst>
+                        <p:par>
+                          <p:cTn id="18" fill="hold">
+                            <p:stCondLst>
+                              <p:cond delay="0"/>
+                            </p:stCondLst>
+                            <p:childTnLst>
+                              <p:par>
+                                <p:cTn id="19" presetID="1" presetClass="entr" presetSubtype="0" fill="hold" grpId="0" nodeType="clickEffect">
+                                  <p:stCondLst>
+                                    <p:cond delay="0"/>
+                                  </p:stCondLst>
+                                  <p:childTnLst>
+                                    <p:set>
+                                      <p:cBhvr>
+                                        <p:cTn id="20" dur="1" fill="hold">
+                                          <p:stCondLst>
+                                            <p:cond delay="0"/>
+                                          </p:stCondLst>
+                                        </p:cTn>
+                                        <p:tgtEl>
+                                          <p:spTgt spid="23"/>
+                                        </p:tgtEl>
+                                        <p:attrNameLst>
+                                          <p:attrName>style.visibility</p:attrName>
+                                        </p:attrNameLst>
+                                      </p:cBhvr>
+                                      <p:to>
+                                        <p:strVal val="visible"/>
+                                      </p:to>
+                                    </p:set>
+                                  </p:childTnLst>
+                                </p:cTn>
+                              </p:par>
+                              <p:par>
+                                <p:cTn id="21" presetID="1" presetClass="entr" presetSubtype="0" fill="hold" grpId="0" nodeType="withEffect">
+                                  <p:stCondLst>
+                                    <p:cond delay="0"/>
+                                  </p:stCondLst>
+                                  <p:childTnLst>
+                                    <p:set>
+                                      <p:cBhvr>
+                                        <p:cTn id="22" dur="1" fill="hold">
+                                          <p:stCondLst>
+                                            <p:cond delay="0"/>
+                                          </p:stCondLst>
+                                        </p:cTn>
+                                        <p:tgtEl>
+                                          <p:spTgt spid="20"/>
+                                        </p:tgtEl>
+                                        <p:attrNameLst>
+                                          <p:attrName>style.visibility</p:attrName>
+                                        </p:attrNameLst>
+                                      </p:cBhvr>
+                                      <p:to>
+                                        <p:strVal val="visible"/>
+                                      </p:to>
+                                    </p:set>
+                                  </p:childTnLst>
+                                </p:cTn>
+                              </p:par>
+                              <p:par>
+                                <p:cTn id="23" presetID="1" presetClass="entr" presetSubtype="0" fill="hold" grpId="0" nodeType="withEffect">
+                                  <p:stCondLst>
+                                    <p:cond delay="0"/>
+                                  </p:stCondLst>
+                                  <p:childTnLst>
+                                    <p:set>
+                                      <p:cBhvr>
+                                        <p:cTn id="24" dur="1" fill="hold">
+                                          <p:stCondLst>
+                                            <p:cond delay="0"/>
+                                          </p:stCondLst>
+                                        </p:cTn>
+                                        <p:tgtEl>
+                                          <p:spTgt spid="21"/>
+                                        </p:tgtEl>
+                                        <p:attrNameLst>
+                                          <p:attrName>style.visibility</p:attrName>
+                                        </p:attrNameLst>
+                                      </p:cBhvr>
+                                      <p:to>
+                                        <p:strVal val="visible"/>
+                                      </p:to>
+                                    </p:set>
+                                  </p:childTnLst>
+                                </p:cTn>
+                              </p:par>
+                            </p:childTnLst>
+                          </p:cTn>
+                        </p:par>
+                      </p:childTnLst>
+                    </p:cTn>
+                  </p:par>
+                  <p:par>
+                    <p:cTn id="25" fill="hold">
+                      <p:stCondLst>
+                        <p:cond delay="indefinite"/>
+                      </p:stCondLst>
+                      <p:childTnLst>
+                        <p:par>
+                          <p:cTn id="26" fill="hold">
+                            <p:stCondLst>
+                              <p:cond delay="0"/>
+                            </p:stCondLst>
+                            <p:childTnLst>
+                              <p:par>
+                                <p:cTn id="27" presetID="1" presetClass="entr" presetSubtype="0" fill="hold" grpId="0" nodeType="clickEffect">
+                                  <p:stCondLst>
+                                    <p:cond delay="0"/>
+                                  </p:stCondLst>
+                                  <p:childTnLst>
+                                    <p:set>
+                                      <p:cBhvr>
+                                        <p:cTn id="28" dur="1" fill="hold">
+                                          <p:stCondLst>
+                                            <p:cond delay="0"/>
+                                          </p:stCondLst>
+                                        </p:cTn>
+                                        <p:tgtEl>
+                                          <p:spTgt spid="22"/>
+                                        </p:tgtEl>
+                                        <p:attrNameLst>
+                                          <p:attrName>style.visibility</p:attrName>
+                                        </p:attrNameLst>
+                                      </p:cBhvr>
+                                      <p:to>
+                                        <p:strVal val="visible"/>
+                                      </p:to>
+                                    </p:set>
+                                  </p:childTnLst>
+                                </p:cTn>
+                              </p:par>
+                              <p:par>
+                                <p:cTn id="29" presetID="1" presetClass="entr" presetSubtype="0" fill="hold" nodeType="withEffect">
+                                  <p:stCondLst>
+                                    <p:cond delay="0"/>
+                                  </p:stCondLst>
+                                  <p:childTnLst>
+                                    <p:set>
+                                      <p:cBhvr>
+                                        <p:cTn id="30" dur="1" fill="hold">
+                                          <p:stCondLst>
+                                            <p:cond delay="0"/>
+                                          </p:stCondLst>
+                                        </p:cTn>
+                                        <p:tgtEl>
+                                          <p:spTgt spid="30"/>
+                                        </p:tgtEl>
+                                        <p:attrNameLst>
+                                          <p:attrName>style.visibility</p:attrName>
+                                        </p:attrNameLst>
+                                      </p:cBhvr>
+                                      <p:to>
+                                        <p:strVal val="visible"/>
+                                      </p:to>
+                                    </p:set>
+                                  </p:childTnLst>
+                                </p:cTn>
+                              </p:par>
+                            </p:childTnLst>
+                          </p:cTn>
+                        </p:par>
+                      </p:childTnLst>
+                    </p:cTn>
+                  </p:par>
+                </p:childTnLst>
+              </p:cTn>
+              <p:prevCondLst>
+                <p:cond evt="onPrev" delay="0">
+                  <p:tgtEl>
+                    <p:sldTgt/>
+                  </p:tgtEl>
+                </p:cond>
+              </p:prevCondLst>
+              <p:nextCondLst>
+                <p:cond evt="onNext" delay="0">
+                  <p:tgtEl>
+                    <p:sldTgt/>
+                  </p:tgtEl>
+                </p:cond>
+              </p:nextCondLst>
+            </p:seq>
+          </p:childTnLst>
+        </p:cTn>
+      </p:par>
+    </p:tnLst>
+    <p:bldLst>
+      <p:bldP spid="8" grpId="0"/>
+      <p:bldP spid="12" grpId="0"/>
+      <p:bldP spid="13" grpId="0"/>
+      <p:bldP spid="14" grpId="0" animBg="1"/>
+      <p:bldP spid="16" grpId="0"/>
+      <p:bldP spid="20" grpId="0"/>
+      <p:bldP spid="21" grpId="0"/>
+      <p:bldP spid="22" grpId="0" animBg="1"/>
+      <p:bldP spid="23" grpId="0"/>
+    </p:bldLst>
+  </p:timing>
+</p:sld>
+</file>
+
+<file path=ppt/slides/slide14.xml><?xml version="1.0" encoding="utf-8"?>
+<p:sld xmlns:a="http://schemas.openxmlformats.org/drawingml/2006/main" xmlns:r="http://schemas.openxmlformats.org/officeDocument/2006/relationships" xmlns:p="http://schemas.openxmlformats.org/presentationml/2006/main">
+  <p:cSld>
+    <p:spTree>
+      <p:nvGrpSpPr>
+        <p:cNvPr id="1" name="">
+          <a:extLst>
+            <a:ext uri="{FF2B5EF4-FFF2-40B4-BE49-F238E27FC236}">
+              <a16:creationId xmlns:a16="http://schemas.microsoft.com/office/drawing/2014/main" id="{98133DFD-F2E0-E492-5FCF-D1733C502769}"/>
+            </a:ext>
+          </a:extLst>
+        </p:cNvPr>
+        <p:cNvGrpSpPr/>
+        <p:nvPr/>
+      </p:nvGrpSpPr>
+      <p:grpSpPr>
+        <a:xfrm>
+          <a:off x="0" y="0"/>
+          <a:ext cx="0" cy="0"/>
+          <a:chOff x="0" y="0"/>
+          <a:chExt cx="0" cy="0"/>
+        </a:xfrm>
+      </p:grpSpPr>
+      <p:sp>
+        <p:nvSpPr>
+          <p:cNvPr id="4" name="Title 3">
+            <a:extLst>
+              <a:ext uri="{FF2B5EF4-FFF2-40B4-BE49-F238E27FC236}">
+                <a16:creationId xmlns:a16="http://schemas.microsoft.com/office/drawing/2014/main" id="{9706FA13-A3EF-81DA-422B-839CDA7BBB24}"/>
+              </a:ext>
+            </a:extLst>
+          </p:cNvPr>
+          <p:cNvSpPr>
+            <a:spLocks noGrp="1"/>
+          </p:cNvSpPr>
+          <p:nvPr>
+            <p:ph type="title"/>
+          </p:nvPr>
+        </p:nvSpPr>
+        <p:spPr/>
+        <p:txBody>
+          <a:bodyPr>
+            <a:normAutofit/>
+          </a:bodyPr>
+          <a:lstStyle/>
+          <a:p>
+            <a:r>
+              <a:rPr lang="en-US" sz="3200" dirty="0">
+                <a:solidFill>
+                  <a:schemeClr val="bg1"/>
+                </a:solidFill>
+              </a:rPr>
+              <a:t>Connecting Airflow to Take-off Probability</a:t>
+            </a:r>
+            <a:endParaRPr lang="ro-RO" sz="3200" dirty="0">
+              <a:solidFill>
+                <a:schemeClr val="bg1"/>
+              </a:solidFill>
+            </a:endParaRPr>
+          </a:p>
+        </p:txBody>
+      </p:sp>
+      <p:pic>
+        <p:nvPicPr>
+          <p:cNvPr id="5" name="Picture 4">
+            <a:extLst>
+              <a:ext uri="{FF2B5EF4-FFF2-40B4-BE49-F238E27FC236}">
+                <a16:creationId xmlns:a16="http://schemas.microsoft.com/office/drawing/2014/main" id="{2832477D-E51A-F94D-15C2-7AD963E2CA35}"/>
+              </a:ext>
+            </a:extLst>
+          </p:cNvPr>
+          <p:cNvPicPr>
+            <a:picLocks noChangeAspect="1"/>
+          </p:cNvPicPr>
+          <p:nvPr/>
+        </p:nvPicPr>
+        <p:blipFill>
+          <a:blip r:embed="rId3">
+            <a:clrChange>
+              <a:clrFrom>
+                <a:srgbClr val="000000"/>
+              </a:clrFrom>
+              <a:clrTo>
+                <a:srgbClr val="000000">
+                  <a:alpha val="0"/>
+                </a:srgbClr>
+              </a:clrTo>
+            </a:clrChange>
+            <a:extLst>
+              <a:ext uri="{28A0092B-C50C-407E-A947-70E740481C1C}">
+                <a14:useLocalDpi xmlns:a14="http://schemas.microsoft.com/office/drawing/2010/main" val="0"/>
+              </a:ext>
+            </a:extLst>
+          </a:blip>
+          <a:stretch>
+            <a:fillRect/>
+          </a:stretch>
+        </p:blipFill>
+        <p:spPr>
+          <a:xfrm>
+            <a:off x="10432471" y="6323329"/>
+            <a:ext cx="1492133" cy="496892"/>
+          </a:xfrm>
+          <a:prstGeom prst="rect">
+            <a:avLst/>
+          </a:prstGeom>
+        </p:spPr>
+      </p:pic>
+      <mc:AlternateContent xmlns:mc="http://schemas.openxmlformats.org/markup-compatibility/2006">
+        <mc:Choice xmlns:a14="http://schemas.microsoft.com/office/drawing/2010/main" Requires="a14">
+          <p:sp>
+            <p:nvSpPr>
+              <p:cNvPr id="6" name="TextBox 5">
+                <a:extLst>
+                  <a:ext uri="{FF2B5EF4-FFF2-40B4-BE49-F238E27FC236}">
+                    <a16:creationId xmlns:a16="http://schemas.microsoft.com/office/drawing/2014/main" id="{4617A085-87D3-6D84-86AB-9E8E846FD5DC}"/>
+                  </a:ext>
+                </a:extLst>
+              </p:cNvPr>
+              <p:cNvSpPr txBox="1"/>
+              <p:nvPr/>
+            </p:nvSpPr>
+            <p:spPr>
+              <a:xfrm>
+                <a:off x="699091" y="1803477"/>
+                <a:ext cx="3047114" cy="763029"/>
+              </a:xfrm>
+              <a:prstGeom prst="rect">
+                <a:avLst/>
+              </a:prstGeom>
+              <a:noFill/>
+            </p:spPr>
+            <p:txBody>
+              <a:bodyPr wrap="square">
+                <a:spAutoFit/>
+              </a:bodyPr>
+              <a:lstStyle/>
+              <a:p>
+                <a:pPr/>
+                <a14:m>
+                  <m:oMathPara xmlns:m="http://schemas.openxmlformats.org/officeDocument/2006/math">
+                    <m:oMathParaPr>
+                      <m:jc m:val="centerGroup"/>
+                    </m:oMathParaPr>
+                    <m:oMath xmlns:m="http://schemas.openxmlformats.org/officeDocument/2006/math">
+                      <m:sSubSup>
+                        <m:sSubSupPr>
+                          <m:ctrlPr>
+                            <a:rPr lang="en-US" i="1" smtClean="0">
+                              <a:latin typeface="Cambria Math" panose="02040503050406030204" pitchFamily="18" charset="0"/>
+                            </a:rPr>
+                          </m:ctrlPr>
+                        </m:sSubSupPr>
+                        <m:e>
+                          <m:r>
+                            <a:rPr lang="en-US" i="1">
+                              <a:latin typeface="Cambria Math" panose="02040503050406030204" pitchFamily="18" charset="0"/>
+                            </a:rPr>
+                            <m:t>𝜎</m:t>
+                          </m:r>
+                        </m:e>
+                        <m:sub>
+                          <m:r>
+                            <a:rPr lang="en-US" i="1">
+                              <a:latin typeface="Cambria Math" panose="02040503050406030204" pitchFamily="18" charset="0"/>
+                            </a:rPr>
+                            <m:t>𝑤</m:t>
+                          </m:r>
+                        </m:sub>
+                        <m:sup>
+                          <m:r>
+                            <a:rPr lang="en-US" i="1">
+                              <a:latin typeface="Cambria Math" panose="02040503050406030204" pitchFamily="18" charset="0"/>
+                            </a:rPr>
+                            <m:t>2</m:t>
+                          </m:r>
+                        </m:sup>
+                      </m:sSubSup>
+                      <m:r>
+                        <a:rPr lang="en-US" i="1">
+                          <a:latin typeface="Cambria Math" panose="02040503050406030204" pitchFamily="18" charset="0"/>
+                        </a:rPr>
+                        <m:t>=</m:t>
+                      </m:r>
+                      <m:f>
+                        <m:fPr>
+                          <m:ctrlPr>
+                            <a:rPr lang="en-US" i="1">
+                              <a:latin typeface="Cambria Math" panose="02040503050406030204" pitchFamily="18" charset="0"/>
+                            </a:rPr>
+                          </m:ctrlPr>
+                        </m:fPr>
+                        <m:num>
+                          <m:r>
+                            <a:rPr lang="en-US" i="1">
+                              <a:latin typeface="Cambria Math" panose="02040503050406030204" pitchFamily="18" charset="0"/>
+                            </a:rPr>
+                            <m:t>1</m:t>
+                          </m:r>
+                        </m:num>
+                        <m:den>
+                          <m:r>
+                            <a:rPr lang="en-US" i="1">
+                              <a:latin typeface="Cambria Math" panose="02040503050406030204" pitchFamily="18" charset="0"/>
+                            </a:rPr>
+                            <m:t>4</m:t>
+                          </m:r>
+                        </m:den>
+                      </m:f>
+                      <m:nary>
+                        <m:naryPr>
+                          <m:chr m:val="∑"/>
+                          <m:subHide m:val="on"/>
+                          <m:supHide m:val="on"/>
+                          <m:ctrlPr>
+                            <a:rPr lang="en-US" i="1">
+                              <a:latin typeface="Cambria Math" panose="02040503050406030204" pitchFamily="18" charset="0"/>
+                            </a:rPr>
+                          </m:ctrlPr>
+                        </m:naryPr>
+                        <m:sub/>
+                        <m:sup/>
+                        <m:e>
+                          <m:d>
+                            <m:dPr>
+                              <m:ctrlPr>
+                                <a:rPr lang="en-US" i="1">
+                                  <a:latin typeface="Cambria Math" panose="02040503050406030204" pitchFamily="18" charset="0"/>
+                                </a:rPr>
+                              </m:ctrlPr>
+                            </m:dPr>
+                            <m:e>
+                              <m:sSubSup>
+                                <m:sSubSupPr>
+                                  <m:ctrlPr>
+                                    <a:rPr lang="en-US" i="1">
+                                      <a:latin typeface="Cambria Math" panose="02040503050406030204" pitchFamily="18" charset="0"/>
+                                    </a:rPr>
+                                  </m:ctrlPr>
+                                </m:sSubSupPr>
+                                <m:e>
+                                  <m:r>
+                                    <a:rPr lang="en-US" i="1">
+                                      <a:latin typeface="Cambria Math" panose="02040503050406030204" pitchFamily="18" charset="0"/>
+                                    </a:rPr>
+                                    <m:t>𝑎</m:t>
+                                  </m:r>
+                                </m:e>
+                                <m:sub>
+                                  <m:r>
+                                    <a:rPr lang="en-US" i="1">
+                                      <a:latin typeface="Cambria Math" panose="02040503050406030204" pitchFamily="18" charset="0"/>
+                                    </a:rPr>
+                                    <m:t>𝑛</m:t>
+                                  </m:r>
+                                  <m:r>
+                                    <a:rPr lang="en-US" i="1">
+                                      <a:latin typeface="Cambria Math" panose="02040503050406030204" pitchFamily="18" charset="0"/>
+                                    </a:rPr>
+                                    <m:t>,</m:t>
+                                  </m:r>
+                                  <m:r>
+                                    <a:rPr lang="en-US" i="1">
+                                      <a:latin typeface="Cambria Math" panose="02040503050406030204" pitchFamily="18" charset="0"/>
+                                    </a:rPr>
+                                    <m:t>𝑧</m:t>
+                                  </m:r>
+                                </m:sub>
+                                <m:sup>
+                                  <m:r>
+                                    <a:rPr lang="en-US" i="1">
+                                      <a:latin typeface="Cambria Math" panose="02040503050406030204" pitchFamily="18" charset="0"/>
+                                    </a:rPr>
+                                    <m:t>2</m:t>
+                                  </m:r>
+                                </m:sup>
+                              </m:sSubSup>
+                              <m:r>
+                                <a:rPr lang="en-US" i="1">
+                                  <a:latin typeface="Cambria Math" panose="02040503050406030204" pitchFamily="18" charset="0"/>
+                                </a:rPr>
+                                <m:t>+</m:t>
+                              </m:r>
+                              <m:sSubSup>
+                                <m:sSubSupPr>
+                                  <m:ctrlPr>
+                                    <a:rPr lang="en-US" i="1">
+                                      <a:latin typeface="Cambria Math" panose="02040503050406030204" pitchFamily="18" charset="0"/>
+                                    </a:rPr>
+                                  </m:ctrlPr>
+                                </m:sSubSupPr>
+                                <m:e>
+                                  <m:r>
+                                    <a:rPr lang="en-US" i="1">
+                                      <a:latin typeface="Cambria Math" panose="02040503050406030204" pitchFamily="18" charset="0"/>
+                                    </a:rPr>
+                                    <m:t>𝑏</m:t>
+                                  </m:r>
+                                </m:e>
+                                <m:sub>
+                                  <m:r>
+                                    <a:rPr lang="en-US" i="1">
+                                      <a:latin typeface="Cambria Math" panose="02040503050406030204" pitchFamily="18" charset="0"/>
+                                    </a:rPr>
+                                    <m:t>𝑛</m:t>
+                                  </m:r>
+                                  <m:r>
+                                    <a:rPr lang="en-US" i="1">
+                                      <a:latin typeface="Cambria Math" panose="02040503050406030204" pitchFamily="18" charset="0"/>
+                                    </a:rPr>
+                                    <m:t>,</m:t>
+                                  </m:r>
+                                  <m:r>
+                                    <a:rPr lang="en-US" i="1">
+                                      <a:latin typeface="Cambria Math" panose="02040503050406030204" pitchFamily="18" charset="0"/>
+                                    </a:rPr>
+                                    <m:t>𝑧</m:t>
+                                  </m:r>
+                                </m:sub>
+                                <m:sup>
+                                  <m:r>
+                                    <a:rPr lang="en-US" i="1">
+                                      <a:latin typeface="Cambria Math" panose="02040503050406030204" pitchFamily="18" charset="0"/>
+                                    </a:rPr>
+                                    <m:t>2</m:t>
+                                  </m:r>
+                                </m:sup>
+                              </m:sSubSup>
+                            </m:e>
+                          </m:d>
+                        </m:e>
+                      </m:nary>
+                    </m:oMath>
+                  </m:oMathPara>
+                </a14:m>
+                <a:endParaRPr lang="en-US" dirty="0"/>
+              </a:p>
+            </p:txBody>
+          </p:sp>
+        </mc:Choice>
+        <mc:Fallback>
+          <p:sp>
+            <p:nvSpPr>
+              <p:cNvPr id="6" name="TextBox 5">
+                <a:extLst>
+                  <a:ext uri="{FF2B5EF4-FFF2-40B4-BE49-F238E27FC236}">
+                    <a16:creationId xmlns:a16="http://schemas.microsoft.com/office/drawing/2014/main" id="{4617A085-87D3-6D84-86AB-9E8E846FD5DC}"/>
+                  </a:ext>
+                </a:extLst>
+              </p:cNvPr>
+              <p:cNvSpPr txBox="1">
+                <a:spLocks noRot="1" noChangeAspect="1" noMove="1" noResize="1" noEditPoints="1" noAdjustHandles="1" noChangeArrowheads="1" noChangeShapeType="1" noTextEdit="1"/>
+              </p:cNvSpPr>
+              <p:nvPr/>
+            </p:nvSpPr>
+            <p:spPr>
+              <a:xfrm>
+                <a:off x="699091" y="1803477"/>
+                <a:ext cx="3047114" cy="763029"/>
+              </a:xfrm>
+              <a:prstGeom prst="rect">
+                <a:avLst/>
+              </a:prstGeom>
+              <a:blipFill>
+                <a:blip r:embed="rId4"/>
+                <a:stretch>
+                  <a:fillRect t="-122951" b="-168852"/>
+                </a:stretch>
+              </a:blipFill>
+            </p:spPr>
+            <p:txBody>
+              <a:bodyPr/>
+              <a:lstStyle/>
+              <a:p>
+                <a:r>
+                  <a:rPr lang="en-US">
+                    <a:noFill/>
+                  </a:rPr>
+                  <a:t> </a:t>
+                </a:r>
+              </a:p>
+            </p:txBody>
+          </p:sp>
+        </mc:Fallback>
+      </mc:AlternateContent>
+      <mc:AlternateContent xmlns:mc="http://schemas.openxmlformats.org/markup-compatibility/2006">
+        <mc:Choice xmlns:a14="http://schemas.microsoft.com/office/drawing/2010/main" Requires="a14">
+          <p:sp>
+            <p:nvSpPr>
+              <p:cNvPr id="9" name="TextBox 8">
+                <a:extLst>
+                  <a:ext uri="{FF2B5EF4-FFF2-40B4-BE49-F238E27FC236}">
+                    <a16:creationId xmlns:a16="http://schemas.microsoft.com/office/drawing/2014/main" id="{A6B6EA45-B127-1A31-3ABB-BC4A7DD48A73}"/>
+                  </a:ext>
+                </a:extLst>
+              </p:cNvPr>
+              <p:cNvSpPr txBox="1"/>
+              <p:nvPr/>
+            </p:nvSpPr>
+            <p:spPr>
+              <a:xfrm>
+                <a:off x="3559249" y="2000325"/>
+                <a:ext cx="1661337" cy="369332"/>
+              </a:xfrm>
+              <a:prstGeom prst="rect">
+                <a:avLst/>
+              </a:prstGeom>
+              <a:noFill/>
+            </p:spPr>
+            <p:txBody>
+              <a:bodyPr wrap="square">
+                <a:spAutoFit/>
+              </a:bodyPr>
+              <a:lstStyle/>
+              <a:p>
+                <a:pPr/>
+                <a14:m>
+                  <m:oMathPara xmlns:m="http://schemas.openxmlformats.org/officeDocument/2006/math">
+                    <m:oMathParaPr>
+                      <m:jc m:val="centerGroup"/>
+                    </m:oMathParaPr>
+                    <m:oMath xmlns:m="http://schemas.openxmlformats.org/officeDocument/2006/math">
+                      <m:r>
+                        <a:rPr lang="en-US" i="1" smtClean="0">
+                          <a:latin typeface="Cambria Math" panose="02040503050406030204" pitchFamily="18" charset="0"/>
+                        </a:rPr>
+                        <m:t>𝐾</m:t>
+                      </m:r>
+                      <m:r>
+                        <a:rPr lang="en-US" i="1">
+                          <a:latin typeface="Cambria Math" panose="02040503050406030204" pitchFamily="18" charset="0"/>
+                        </a:rPr>
+                        <m:t>∼</m:t>
+                      </m:r>
+                      <m:sSub>
+                        <m:sSubPr>
+                          <m:ctrlPr>
+                            <a:rPr lang="en-US" i="1">
+                              <a:latin typeface="Cambria Math" panose="02040503050406030204" pitchFamily="18" charset="0"/>
+                            </a:rPr>
+                          </m:ctrlPr>
+                        </m:sSubPr>
+                        <m:e>
+                          <m:r>
+                            <a:rPr lang="en-US" i="1">
+                              <a:latin typeface="Cambria Math" panose="02040503050406030204" pitchFamily="18" charset="0"/>
+                            </a:rPr>
+                            <m:t>𝜎</m:t>
+                          </m:r>
+                        </m:e>
+                        <m:sub>
+                          <m:r>
+                            <a:rPr lang="en-US" i="1">
+                              <a:latin typeface="Cambria Math" panose="02040503050406030204" pitchFamily="18" charset="0"/>
+                            </a:rPr>
+                            <m:t>𝑤</m:t>
+                          </m:r>
+                        </m:sub>
+                      </m:sSub>
+                      <m:r>
+                        <a:rPr lang="en-US" i="1">
+                          <a:latin typeface="Cambria Math" panose="02040503050406030204" pitchFamily="18" charset="0"/>
+                        </a:rPr>
+                        <m:t>ℓ</m:t>
+                      </m:r>
+                    </m:oMath>
+                  </m:oMathPara>
+                </a14:m>
+                <a:endParaRPr lang="en-US" dirty="0"/>
+              </a:p>
+            </p:txBody>
+          </p:sp>
+        </mc:Choice>
+        <mc:Fallback>
+          <p:sp>
+            <p:nvSpPr>
+              <p:cNvPr id="9" name="TextBox 8">
+                <a:extLst>
+                  <a:ext uri="{FF2B5EF4-FFF2-40B4-BE49-F238E27FC236}">
+                    <a16:creationId xmlns:a16="http://schemas.microsoft.com/office/drawing/2014/main" id="{A6B6EA45-B127-1A31-3ABB-BC4A7DD48A73}"/>
+                  </a:ext>
+                </a:extLst>
+              </p:cNvPr>
+              <p:cNvSpPr txBox="1">
+                <a:spLocks noRot="1" noChangeAspect="1" noMove="1" noResize="1" noEditPoints="1" noAdjustHandles="1" noChangeArrowheads="1" noChangeShapeType="1" noTextEdit="1"/>
+              </p:cNvSpPr>
+              <p:nvPr/>
+            </p:nvSpPr>
+            <p:spPr>
+              <a:xfrm>
+                <a:off x="3559249" y="2000325"/>
+                <a:ext cx="1661337" cy="369332"/>
+              </a:xfrm>
+              <a:prstGeom prst="rect">
+                <a:avLst/>
+              </a:prstGeom>
+              <a:blipFill>
+                <a:blip r:embed="rId5"/>
+                <a:stretch>
+                  <a:fillRect/>
+                </a:stretch>
+              </a:blipFill>
+            </p:spPr>
+            <p:txBody>
+              <a:bodyPr/>
+              <a:lstStyle/>
+              <a:p>
+                <a:r>
+                  <a:rPr lang="en-US">
+                    <a:noFill/>
+                  </a:rPr>
+                  <a:t> </a:t>
+                </a:r>
+              </a:p>
+            </p:txBody>
+          </p:sp>
+        </mc:Fallback>
+      </mc:AlternateContent>
+    </p:spTree>
+    <p:extLst>
+      <p:ext uri="{BB962C8B-B14F-4D97-AF65-F5344CB8AC3E}">
+        <p14:creationId xmlns:p14="http://schemas.microsoft.com/office/powerpoint/2010/main" val="1760069667"/>
+      </p:ext>
+    </p:extLst>
+  </p:cSld>
+  <p:clrMapOvr>
+    <a:masterClrMapping/>
+  </p:clrMapOvr>
+</p:sld>
+</file>
+
+<file path=ppt/slides/slide15.xml><?xml version="1.0" encoding="utf-8"?>
+<p:sld xmlns:a="http://schemas.openxmlformats.org/drawingml/2006/main" xmlns:r="http://schemas.openxmlformats.org/officeDocument/2006/relationships" xmlns:p="http://schemas.openxmlformats.org/presentationml/2006/main">
+  <p:cSld>
+    <p:spTree>
+      <p:nvGrpSpPr>
+        <p:cNvPr id="1" name="">
+          <a:extLst>
+            <a:ext uri="{FF2B5EF4-FFF2-40B4-BE49-F238E27FC236}">
+              <a16:creationId xmlns:a16="http://schemas.microsoft.com/office/drawing/2014/main" id="{698075C0-3D55-D7FA-A006-79F3BA52D119}"/>
+            </a:ext>
+          </a:extLst>
+        </p:cNvPr>
+        <p:cNvGrpSpPr/>
+        <p:nvPr/>
+      </p:nvGrpSpPr>
+      <p:grpSpPr>
+        <a:xfrm>
+          <a:off x="0" y="0"/>
+          <a:ext cx="0" cy="0"/>
+          <a:chOff x="0" y="0"/>
+          <a:chExt cx="0" cy="0"/>
+        </a:xfrm>
+      </p:grpSpPr>
+      <p:sp>
+        <p:nvSpPr>
+          <p:cNvPr id="4" name="Title 3">
+            <a:extLst>
+              <a:ext uri="{FF2B5EF4-FFF2-40B4-BE49-F238E27FC236}">
+                <a16:creationId xmlns:a16="http://schemas.microsoft.com/office/drawing/2014/main" id="{66403CE1-4626-DBC2-39A1-E6D9D5101492}"/>
+              </a:ext>
+            </a:extLst>
+          </p:cNvPr>
+          <p:cNvSpPr>
+            <a:spLocks noGrp="1"/>
+          </p:cNvSpPr>
+          <p:nvPr>
+            <p:ph type="title"/>
+          </p:nvPr>
+        </p:nvSpPr>
+        <p:spPr/>
+        <p:txBody>
+          <a:bodyPr>
+            <a:normAutofit fontScale="90000"/>
+          </a:bodyPr>
+          <a:lstStyle/>
+          <a:p>
+            <a:r>
+              <a:rPr lang="en-US" dirty="0">
+                <a:solidFill>
+                  <a:schemeClr val="bg1"/>
+                </a:solidFill>
+              </a:rPr>
+              <a:t>Ballooning of Spiders</a:t>
+            </a:r>
+            <a:endParaRPr lang="ro-RO" dirty="0">
+              <a:solidFill>
+                <a:schemeClr val="bg1"/>
+              </a:solidFill>
+            </a:endParaRPr>
+          </a:p>
+        </p:txBody>
+      </p:sp>
+      <p:sp>
+        <p:nvSpPr>
+          <p:cNvPr id="6" name="TextBox 5">
+            <a:extLst>
+              <a:ext uri="{FF2B5EF4-FFF2-40B4-BE49-F238E27FC236}">
+                <a16:creationId xmlns:a16="http://schemas.microsoft.com/office/drawing/2014/main" id="{A9C9C9C7-952A-9214-D7B4-319AFCA5B217}"/>
+              </a:ext>
+            </a:extLst>
+          </p:cNvPr>
+          <p:cNvSpPr txBox="1"/>
+          <p:nvPr/>
+        </p:nvSpPr>
+        <p:spPr>
+          <a:xfrm>
+            <a:off x="3455274" y="2630483"/>
+            <a:ext cx="5281451" cy="646331"/>
+          </a:xfrm>
+          <a:prstGeom prst="rect">
+            <a:avLst/>
+          </a:prstGeom>
+          <a:noFill/>
+        </p:spPr>
+        <p:txBody>
+          <a:bodyPr wrap="square" rtlCol="0">
+            <a:spAutoFit/>
+          </a:bodyPr>
+          <a:lstStyle/>
+          <a:p>
+            <a:r>
+              <a:rPr lang="en-US" sz="3600" b="1" dirty="0"/>
+              <a:t>Numerical Simulations</a:t>
+            </a:r>
+          </a:p>
+        </p:txBody>
+      </p:sp>
+      <p:pic>
+        <p:nvPicPr>
+          <p:cNvPr id="2" name="Picture 1">
+            <a:extLst>
+              <a:ext uri="{FF2B5EF4-FFF2-40B4-BE49-F238E27FC236}">
+                <a16:creationId xmlns:a16="http://schemas.microsoft.com/office/drawing/2014/main" id="{A87369B4-AD04-E6B5-532D-2F09974CF476}"/>
+              </a:ext>
+            </a:extLst>
+          </p:cNvPr>
+          <p:cNvPicPr>
+            <a:picLocks noChangeAspect="1"/>
+          </p:cNvPicPr>
+          <p:nvPr/>
+        </p:nvPicPr>
+        <p:blipFill>
           <a:blip r:embed="rId2">
             <a:clrChange>
               <a:clrFrom>
@@ -11570,10 +16784,63 @@
           </a:prstGeom>
         </p:spPr>
       </p:pic>
+      <p:sp>
+        <p:nvSpPr>
+          <p:cNvPr id="5" name="TextBox 4">
+            <a:extLst>
+              <a:ext uri="{FF2B5EF4-FFF2-40B4-BE49-F238E27FC236}">
+                <a16:creationId xmlns:a16="http://schemas.microsoft.com/office/drawing/2014/main" id="{11F96930-9A77-12FC-B019-13917E46987A}"/>
+              </a:ext>
+            </a:extLst>
+          </p:cNvPr>
+          <p:cNvSpPr txBox="1"/>
+          <p:nvPr/>
+        </p:nvSpPr>
+        <p:spPr>
+          <a:xfrm>
+            <a:off x="3564836" y="3370544"/>
+            <a:ext cx="4904268" cy="338554"/>
+          </a:xfrm>
+          <a:prstGeom prst="rect">
+            <a:avLst/>
+          </a:prstGeom>
+          <a:noFill/>
+        </p:spPr>
+        <p:txBody>
+          <a:bodyPr wrap="square">
+            <a:spAutoFit/>
+          </a:bodyPr>
+          <a:lstStyle/>
+          <a:p>
+            <a:pPr>
+              <a:spcAft>
+                <a:spcPts val="0"/>
+              </a:spcAft>
+              <a:defRPr sz="3600" b="0">
+                <a:solidFill>
+                  <a:srgbClr val="852C86"/>
+                </a:solidFill>
+                <a:latin typeface="Arial"/>
+              </a:defRPr>
+            </a:pPr>
+            <a:r>
+              <a:rPr lang="en-US" sz="1600" dirty="0">
+                <a:solidFill>
+                  <a:schemeClr val="tx1">
+                    <a:lumMod val="95000"/>
+                    <a:lumOff val="5000"/>
+                  </a:schemeClr>
+                </a:solidFill>
+              </a:rPr>
+              <a:t>…</a:t>
+            </a:r>
+          </a:p>
+        </p:txBody>
+      </p:sp>
     </p:spTree>
     <p:extLst>
       <p:ext uri="{BB962C8B-B14F-4D97-AF65-F5344CB8AC3E}">
-        <p14:creationId xmlns:p14="http://schemas.microsoft.com/office/powerpoint/2010/main" val="3396241649"/>
+        <p14:creationId xmlns:p14="http://schemas.microsoft.com/office/powerpoint/2010/main" val="4145781364"/>
       </p:ext>
     </p:extLst>
   </p:cSld>
